--- a/docs/plots/carbo/jx_carbo_linsubhr_ratio_hosp_immune_other.pptx
+++ b/docs/plots/carbo/jx_carbo_linsubhr_ratio_hosp_immune_other.pptx
@@ -3003,548 +3003,563 @@
           <p:spPr>
             <a:xfrm>
               <a:off x="817517" y="1896563"/>
-              <a:ext cx="7370972" cy="3574536"/>
+              <a:ext cx="7370972" cy="3547410"/>
             </a:xfrm>
             <a:custGeom>
               <a:avLst/>
               <a:pathLst>
-                <a:path w="7370972" h="3574536">
+                <a:path w="7370972" h="3547410">
                   <a:moveTo>
-                    <a:pt x="1013528" y="0"/>
+                    <a:pt x="678696" y="0"/>
                   </a:moveTo>
                   <a:lnTo>
-                    <a:pt x="1082615" y="149850"/>
-                  </a:lnTo>
-                  <a:lnTo>
-                    <a:pt x="1160249" y="310517"/>
-                  </a:lnTo>
-                  <a:lnTo>
-                    <a:pt x="1237883" y="463815"/>
-                  </a:lnTo>
-                  <a:lnTo>
-                    <a:pt x="1315517" y="610081"/>
-                  </a:lnTo>
-                  <a:lnTo>
-                    <a:pt x="1393151" y="749638"/>
-                  </a:lnTo>
-                  <a:lnTo>
-                    <a:pt x="1470785" y="882793"/>
-                  </a:lnTo>
-                  <a:lnTo>
-                    <a:pt x="1548419" y="1009841"/>
-                  </a:lnTo>
-                  <a:lnTo>
-                    <a:pt x="1626053" y="1131062"/>
-                  </a:lnTo>
-                  <a:lnTo>
-                    <a:pt x="1703687" y="1246723"/>
-                  </a:lnTo>
-                  <a:lnTo>
-                    <a:pt x="1781321" y="1357078"/>
-                  </a:lnTo>
-                  <a:lnTo>
-                    <a:pt x="1858955" y="1462371"/>
-                  </a:lnTo>
-                  <a:lnTo>
-                    <a:pt x="1936589" y="1562835"/>
-                  </a:lnTo>
-                  <a:lnTo>
-                    <a:pt x="2014223" y="1658691"/>
-                  </a:lnTo>
-                  <a:lnTo>
-                    <a:pt x="2091857" y="1750150"/>
-                  </a:lnTo>
-                  <a:lnTo>
-                    <a:pt x="2169491" y="1837414"/>
-                  </a:lnTo>
-                  <a:lnTo>
-                    <a:pt x="2247125" y="1920676"/>
-                  </a:lnTo>
-                  <a:lnTo>
-                    <a:pt x="2324759" y="2000118"/>
-                  </a:lnTo>
-                  <a:lnTo>
-                    <a:pt x="2402393" y="2075916"/>
-                  </a:lnTo>
-                  <a:lnTo>
-                    <a:pt x="2480027" y="2148238"/>
-                  </a:lnTo>
-                  <a:lnTo>
-                    <a:pt x="2557661" y="2217242"/>
-                  </a:lnTo>
-                  <a:lnTo>
-                    <a:pt x="2635295" y="2283082"/>
-                  </a:lnTo>
-                  <a:lnTo>
-                    <a:pt x="2712930" y="2345901"/>
-                  </a:lnTo>
-                  <a:lnTo>
-                    <a:pt x="2790564" y="2405839"/>
-                  </a:lnTo>
-                  <a:lnTo>
-                    <a:pt x="2868198" y="2463028"/>
-                  </a:lnTo>
-                  <a:lnTo>
-                    <a:pt x="2945832" y="2517593"/>
-                  </a:lnTo>
-                  <a:lnTo>
-                    <a:pt x="3023466" y="2569656"/>
-                  </a:lnTo>
-                  <a:lnTo>
-                    <a:pt x="3101100" y="2619331"/>
-                  </a:lnTo>
-                  <a:lnTo>
-                    <a:pt x="3178734" y="2666727"/>
-                  </a:lnTo>
-                  <a:lnTo>
-                    <a:pt x="3256368" y="2711949"/>
-                  </a:lnTo>
-                  <a:lnTo>
-                    <a:pt x="3334002" y="2755097"/>
-                  </a:lnTo>
-                  <a:lnTo>
-                    <a:pt x="3411636" y="2777844"/>
-                  </a:lnTo>
-                  <a:lnTo>
-                    <a:pt x="3489270" y="2762053"/>
-                  </a:lnTo>
-                  <a:lnTo>
-                    <a:pt x="3566904" y="2745976"/>
-                  </a:lnTo>
-                  <a:lnTo>
-                    <a:pt x="3644538" y="2729610"/>
-                  </a:lnTo>
-                  <a:lnTo>
-                    <a:pt x="3722172" y="2712948"/>
-                  </a:lnTo>
-                  <a:lnTo>
-                    <a:pt x="3799806" y="2695985"/>
-                  </a:lnTo>
-                  <a:lnTo>
-                    <a:pt x="3877440" y="2678716"/>
-                  </a:lnTo>
-                  <a:lnTo>
-                    <a:pt x="3955074" y="2661135"/>
-                  </a:lnTo>
-                  <a:lnTo>
-                    <a:pt x="4032708" y="2643236"/>
-                  </a:lnTo>
-                  <a:lnTo>
-                    <a:pt x="4110342" y="2625015"/>
-                  </a:lnTo>
-                  <a:lnTo>
-                    <a:pt x="4187976" y="2606465"/>
-                  </a:lnTo>
-                  <a:lnTo>
-                    <a:pt x="4265610" y="2587580"/>
-                  </a:lnTo>
-                  <a:lnTo>
-                    <a:pt x="4343244" y="2568354"/>
-                  </a:lnTo>
-                  <a:lnTo>
-                    <a:pt x="4420879" y="2548781"/>
-                  </a:lnTo>
-                  <a:lnTo>
-                    <a:pt x="4498513" y="2528854"/>
-                  </a:lnTo>
-                  <a:lnTo>
-                    <a:pt x="4576147" y="2508568"/>
-                  </a:lnTo>
-                  <a:lnTo>
-                    <a:pt x="4653781" y="2487916"/>
-                  </a:lnTo>
-                  <a:lnTo>
-                    <a:pt x="4731415" y="2466891"/>
-                  </a:lnTo>
-                  <a:lnTo>
-                    <a:pt x="4809049" y="2445486"/>
-                  </a:lnTo>
-                  <a:lnTo>
-                    <a:pt x="4886683" y="2423695"/>
-                  </a:lnTo>
-                  <a:lnTo>
-                    <a:pt x="4964317" y="2401511"/>
-                  </a:lnTo>
-                  <a:lnTo>
-                    <a:pt x="5041951" y="2378926"/>
-                  </a:lnTo>
-                  <a:lnTo>
-                    <a:pt x="5119585" y="2355934"/>
-                  </a:lnTo>
-                  <a:lnTo>
-                    <a:pt x="5197219" y="2332526"/>
-                  </a:lnTo>
-                  <a:lnTo>
-                    <a:pt x="5274853" y="2308696"/>
-                  </a:lnTo>
-                  <a:lnTo>
-                    <a:pt x="5352487" y="2284436"/>
-                  </a:lnTo>
-                  <a:lnTo>
-                    <a:pt x="5430121" y="2259737"/>
-                  </a:lnTo>
-                  <a:lnTo>
-                    <a:pt x="5507755" y="2234593"/>
-                  </a:lnTo>
-                  <a:lnTo>
-                    <a:pt x="5585389" y="2208995"/>
-                  </a:lnTo>
-                  <a:lnTo>
-                    <a:pt x="5663023" y="2182935"/>
-                  </a:lnTo>
-                  <a:lnTo>
-                    <a:pt x="5740657" y="2156405"/>
-                  </a:lnTo>
-                  <a:lnTo>
-                    <a:pt x="5818291" y="2129395"/>
-                  </a:lnTo>
-                  <a:lnTo>
-                    <a:pt x="5895925" y="2101899"/>
-                  </a:lnTo>
-                  <a:lnTo>
-                    <a:pt x="5973559" y="2073905"/>
-                  </a:lnTo>
-                  <a:lnTo>
-                    <a:pt x="6051193" y="2045407"/>
-                  </a:lnTo>
-                  <a:lnTo>
-                    <a:pt x="6128827" y="2016394"/>
-                  </a:lnTo>
-                  <a:lnTo>
-                    <a:pt x="6206462" y="1986857"/>
-                  </a:lnTo>
-                  <a:lnTo>
-                    <a:pt x="6284096" y="1956787"/>
-                  </a:lnTo>
-                  <a:lnTo>
-                    <a:pt x="6361730" y="1926174"/>
-                  </a:lnTo>
-                  <a:lnTo>
-                    <a:pt x="6439364" y="1895009"/>
-                  </a:lnTo>
-                  <a:lnTo>
-                    <a:pt x="6516998" y="1863281"/>
-                  </a:lnTo>
-                  <a:lnTo>
-                    <a:pt x="6594632" y="1830980"/>
-                  </a:lnTo>
-                  <a:lnTo>
-                    <a:pt x="6672266" y="1798096"/>
-                  </a:lnTo>
-                  <a:lnTo>
-                    <a:pt x="6749900" y="1764619"/>
-                  </a:lnTo>
-                  <a:lnTo>
-                    <a:pt x="6827534" y="1730537"/>
-                  </a:lnTo>
-                  <a:lnTo>
-                    <a:pt x="6905168" y="1695840"/>
-                  </a:lnTo>
-                  <a:lnTo>
-                    <a:pt x="6982802" y="1660517"/>
-                  </a:lnTo>
-                  <a:lnTo>
-                    <a:pt x="7060436" y="1624556"/>
-                  </a:lnTo>
-                  <a:lnTo>
-                    <a:pt x="7138070" y="1587946"/>
-                  </a:lnTo>
-                  <a:lnTo>
-                    <a:pt x="7215704" y="1550675"/>
-                  </a:lnTo>
-                  <a:lnTo>
-                    <a:pt x="7293338" y="1512731"/>
-                  </a:lnTo>
-                  <a:lnTo>
-                    <a:pt x="7370972" y="1474103"/>
-                  </a:lnTo>
-                  <a:lnTo>
-                    <a:pt x="7370972" y="3574536"/>
-                  </a:lnTo>
-                  <a:lnTo>
-                    <a:pt x="7293338" y="3570781"/>
-                  </a:lnTo>
-                  <a:lnTo>
-                    <a:pt x="7215704" y="3566846"/>
-                  </a:lnTo>
-                  <a:lnTo>
-                    <a:pt x="7138070" y="3562721"/>
-                  </a:lnTo>
-                  <a:lnTo>
-                    <a:pt x="7060436" y="3558398"/>
-                  </a:lnTo>
-                  <a:lnTo>
-                    <a:pt x="6982802" y="3553868"/>
-                  </a:lnTo>
-                  <a:lnTo>
-                    <a:pt x="6905168" y="3549119"/>
-                  </a:lnTo>
-                  <a:lnTo>
-                    <a:pt x="6827534" y="3544143"/>
-                  </a:lnTo>
-                  <a:lnTo>
-                    <a:pt x="6749900" y="3538927"/>
-                  </a:lnTo>
-                  <a:lnTo>
-                    <a:pt x="6672266" y="3533460"/>
-                  </a:lnTo>
-                  <a:lnTo>
-                    <a:pt x="6594632" y="3527730"/>
-                  </a:lnTo>
-                  <a:lnTo>
-                    <a:pt x="6516998" y="3521725"/>
-                  </a:lnTo>
-                  <a:lnTo>
-                    <a:pt x="6439364" y="3515432"/>
-                  </a:lnTo>
-                  <a:lnTo>
-                    <a:pt x="6361730" y="3508835"/>
-                  </a:lnTo>
-                  <a:lnTo>
-                    <a:pt x="6284096" y="3501922"/>
-                  </a:lnTo>
-                  <a:lnTo>
-                    <a:pt x="6206462" y="3494677"/>
-                  </a:lnTo>
-                  <a:lnTo>
-                    <a:pt x="6128827" y="3487083"/>
-                  </a:lnTo>
-                  <a:lnTo>
-                    <a:pt x="6051193" y="3479123"/>
-                  </a:lnTo>
-                  <a:lnTo>
-                    <a:pt x="5973559" y="3470782"/>
-                  </a:lnTo>
-                  <a:lnTo>
-                    <a:pt x="5895925" y="3462039"/>
-                  </a:lnTo>
-                  <a:lnTo>
-                    <a:pt x="5818291" y="3452876"/>
-                  </a:lnTo>
-                  <a:lnTo>
-                    <a:pt x="5740657" y="3443273"/>
-                  </a:lnTo>
-                  <a:lnTo>
-                    <a:pt x="5663023" y="3433208"/>
-                  </a:lnTo>
-                  <a:lnTo>
-                    <a:pt x="5585389" y="3422659"/>
-                  </a:lnTo>
-                  <a:lnTo>
-                    <a:pt x="5507755" y="3411602"/>
-                  </a:lnTo>
-                  <a:lnTo>
-                    <a:pt x="5430121" y="3400015"/>
-                  </a:lnTo>
-                  <a:lnTo>
-                    <a:pt x="5352487" y="3387870"/>
-                  </a:lnTo>
-                  <a:lnTo>
-                    <a:pt x="5274853" y="3375142"/>
-                  </a:lnTo>
-                  <a:lnTo>
-                    <a:pt x="5197219" y="3361801"/>
-                  </a:lnTo>
-                  <a:lnTo>
-                    <a:pt x="5119585" y="3347820"/>
-                  </a:lnTo>
-                  <a:lnTo>
-                    <a:pt x="5041951" y="3333166"/>
-                  </a:lnTo>
-                  <a:lnTo>
-                    <a:pt x="4964317" y="3317807"/>
-                  </a:lnTo>
-                  <a:lnTo>
-                    <a:pt x="4886683" y="3301711"/>
-                  </a:lnTo>
-                  <a:lnTo>
-                    <a:pt x="4809049" y="3284840"/>
-                  </a:lnTo>
-                  <a:lnTo>
-                    <a:pt x="4731415" y="3267159"/>
-                  </a:lnTo>
-                  <a:lnTo>
-                    <a:pt x="4653781" y="3248627"/>
-                  </a:lnTo>
-                  <a:lnTo>
-                    <a:pt x="4576147" y="3229205"/>
-                  </a:lnTo>
-                  <a:lnTo>
-                    <a:pt x="4498513" y="3208849"/>
-                  </a:lnTo>
-                  <a:lnTo>
-                    <a:pt x="4420879" y="3187514"/>
-                  </a:lnTo>
-                  <a:lnTo>
-                    <a:pt x="4343244" y="3165154"/>
-                  </a:lnTo>
-                  <a:lnTo>
-                    <a:pt x="4265610" y="3141719"/>
-                  </a:lnTo>
-                  <a:lnTo>
-                    <a:pt x="4187976" y="3117157"/>
-                  </a:lnTo>
-                  <a:lnTo>
-                    <a:pt x="4110342" y="3091414"/>
-                  </a:lnTo>
-                  <a:lnTo>
-                    <a:pt x="4032708" y="3064434"/>
-                  </a:lnTo>
-                  <a:lnTo>
-                    <a:pt x="3955074" y="3036157"/>
-                  </a:lnTo>
-                  <a:lnTo>
-                    <a:pt x="3877440" y="3006520"/>
-                  </a:lnTo>
-                  <a:lnTo>
-                    <a:pt x="3799806" y="2975459"/>
-                  </a:lnTo>
-                  <a:lnTo>
-                    <a:pt x="3722172" y="2942905"/>
-                  </a:lnTo>
-                  <a:lnTo>
-                    <a:pt x="3644538" y="2908785"/>
-                  </a:lnTo>
-                  <a:lnTo>
-                    <a:pt x="3566904" y="2873025"/>
-                  </a:lnTo>
-                  <a:lnTo>
-                    <a:pt x="3489270" y="2835547"/>
-                  </a:lnTo>
-                  <a:lnTo>
-                    <a:pt x="3411636" y="2796266"/>
-                  </a:lnTo>
-                  <a:lnTo>
-                    <a:pt x="3334002" y="2793356"/>
-                  </a:lnTo>
-                  <a:lnTo>
-                    <a:pt x="3256368" y="2808592"/>
-                  </a:lnTo>
-                  <a:lnTo>
-                    <a:pt x="3178734" y="2823558"/>
-                  </a:lnTo>
-                  <a:lnTo>
-                    <a:pt x="3101100" y="2838259"/>
-                  </a:lnTo>
-                  <a:lnTo>
-                    <a:pt x="3023466" y="2852700"/>
-                  </a:lnTo>
-                  <a:lnTo>
-                    <a:pt x="2945832" y="2866884"/>
-                  </a:lnTo>
-                  <a:lnTo>
-                    <a:pt x="2868198" y="2880816"/>
-                  </a:lnTo>
-                  <a:lnTo>
-                    <a:pt x="2790564" y="2894502"/>
-                  </a:lnTo>
-                  <a:lnTo>
-                    <a:pt x="2712930" y="2907945"/>
-                  </a:lnTo>
-                  <a:lnTo>
-                    <a:pt x="2635295" y="2921149"/>
-                  </a:lnTo>
-                  <a:lnTo>
-                    <a:pt x="2557661" y="2934120"/>
-                  </a:lnTo>
-                  <a:lnTo>
-                    <a:pt x="2480027" y="2946860"/>
-                  </a:lnTo>
-                  <a:lnTo>
-                    <a:pt x="2402393" y="2959375"/>
-                  </a:lnTo>
-                  <a:lnTo>
-                    <a:pt x="2324759" y="2971667"/>
-                  </a:lnTo>
-                  <a:lnTo>
-                    <a:pt x="2247125" y="2983742"/>
-                  </a:lnTo>
-                  <a:lnTo>
-                    <a:pt x="2169491" y="2995603"/>
-                  </a:lnTo>
-                  <a:lnTo>
-                    <a:pt x="2091857" y="3007253"/>
-                  </a:lnTo>
-                  <a:lnTo>
-                    <a:pt x="2014223" y="3018697"/>
-                  </a:lnTo>
-                  <a:lnTo>
-                    <a:pt x="1936589" y="3029937"/>
-                  </a:lnTo>
-                  <a:lnTo>
-                    <a:pt x="1858955" y="3040979"/>
-                  </a:lnTo>
-                  <a:lnTo>
-                    <a:pt x="1781321" y="3051825"/>
-                  </a:lnTo>
-                  <a:lnTo>
-                    <a:pt x="1703687" y="3062478"/>
-                  </a:lnTo>
-                  <a:lnTo>
-                    <a:pt x="1626053" y="3072942"/>
-                  </a:lnTo>
-                  <a:lnTo>
-                    <a:pt x="1548419" y="3083221"/>
-                  </a:lnTo>
-                  <a:lnTo>
-                    <a:pt x="1470785" y="3093318"/>
-                  </a:lnTo>
-                  <a:lnTo>
-                    <a:pt x="1393151" y="3103236"/>
-                  </a:lnTo>
-                  <a:lnTo>
-                    <a:pt x="1315517" y="3112978"/>
-                  </a:lnTo>
-                  <a:lnTo>
-                    <a:pt x="1237883" y="3122547"/>
-                  </a:lnTo>
-                  <a:lnTo>
-                    <a:pt x="1160249" y="3131946"/>
-                  </a:lnTo>
-                  <a:lnTo>
-                    <a:pt x="1082615" y="3141179"/>
-                  </a:lnTo>
-                  <a:lnTo>
-                    <a:pt x="1004981" y="3150248"/>
-                  </a:lnTo>
-                  <a:lnTo>
-                    <a:pt x="927346" y="3159156"/>
-                  </a:lnTo>
-                  <a:lnTo>
-                    <a:pt x="849712" y="3167906"/>
-                  </a:lnTo>
-                  <a:lnTo>
-                    <a:pt x="772078" y="3176501"/>
-                  </a:lnTo>
-                  <a:lnTo>
-                    <a:pt x="694444" y="3184944"/>
-                  </a:lnTo>
-                  <a:lnTo>
-                    <a:pt x="616810" y="3193237"/>
-                  </a:lnTo>
-                  <a:lnTo>
-                    <a:pt x="539176" y="3201383"/>
-                  </a:lnTo>
-                  <a:lnTo>
-                    <a:pt x="461542" y="3209384"/>
-                  </a:lnTo>
-                  <a:lnTo>
-                    <a:pt x="383908" y="3217244"/>
-                  </a:lnTo>
-                  <a:lnTo>
-                    <a:pt x="306274" y="3224964"/>
-                  </a:lnTo>
-                  <a:lnTo>
-                    <a:pt x="228640" y="3232547"/>
-                  </a:lnTo>
-                  <a:lnTo>
-                    <a:pt x="151006" y="3239996"/>
-                  </a:lnTo>
-                  <a:lnTo>
-                    <a:pt x="73372" y="3247313"/>
-                  </a:lnTo>
-                  <a:lnTo>
-                    <a:pt x="0" y="3254106"/>
+                    <a:pt x="694444" y="30860"/>
+                  </a:lnTo>
+                  <a:lnTo>
+                    <a:pt x="772078" y="176857"/>
+                  </a:lnTo>
+                  <a:lnTo>
+                    <a:pt x="849712" y="316969"/>
+                  </a:lnTo>
+                  <a:lnTo>
+                    <a:pt x="927346" y="451433"/>
+                  </a:lnTo>
+                  <a:lnTo>
+                    <a:pt x="1004981" y="580476"/>
+                  </a:lnTo>
+                  <a:lnTo>
+                    <a:pt x="1082615" y="704318"/>
+                  </a:lnTo>
+                  <a:lnTo>
+                    <a:pt x="1160249" y="823168"/>
+                  </a:lnTo>
+                  <a:lnTo>
+                    <a:pt x="1237883" y="937226"/>
+                  </a:lnTo>
+                  <a:lnTo>
+                    <a:pt x="1315517" y="1046687"/>
+                  </a:lnTo>
+                  <a:lnTo>
+                    <a:pt x="1393151" y="1151735"/>
+                  </a:lnTo>
+                  <a:lnTo>
+                    <a:pt x="1470785" y="1252549"/>
+                  </a:lnTo>
+                  <a:lnTo>
+                    <a:pt x="1548419" y="1349299"/>
+                  </a:lnTo>
+                  <a:lnTo>
+                    <a:pt x="1626053" y="1442149"/>
+                  </a:lnTo>
+                  <a:lnTo>
+                    <a:pt x="1703687" y="1531255"/>
+                  </a:lnTo>
+                  <a:lnTo>
+                    <a:pt x="1781321" y="1616770"/>
+                  </a:lnTo>
+                  <a:lnTo>
+                    <a:pt x="1858955" y="1698838"/>
+                  </a:lnTo>
+                  <a:lnTo>
+                    <a:pt x="1936589" y="1777598"/>
+                  </a:lnTo>
+                  <a:lnTo>
+                    <a:pt x="2014223" y="1853182"/>
+                  </a:lnTo>
+                  <a:lnTo>
+                    <a:pt x="2091857" y="1925720"/>
+                  </a:lnTo>
+                  <a:lnTo>
+                    <a:pt x="2169491" y="1995334"/>
+                  </a:lnTo>
+                  <a:lnTo>
+                    <a:pt x="2247125" y="2062142"/>
+                  </a:lnTo>
+                  <a:lnTo>
+                    <a:pt x="2324759" y="2126256"/>
+                  </a:lnTo>
+                  <a:lnTo>
+                    <a:pt x="2402393" y="2187786"/>
+                  </a:lnTo>
+                  <a:lnTo>
+                    <a:pt x="2480027" y="2246836"/>
+                  </a:lnTo>
+                  <a:lnTo>
+                    <a:pt x="2557661" y="2303505"/>
+                  </a:lnTo>
+                  <a:lnTo>
+                    <a:pt x="2635295" y="2357890"/>
+                  </a:lnTo>
+                  <a:lnTo>
+                    <a:pt x="2712930" y="2410082"/>
+                  </a:lnTo>
+                  <a:lnTo>
+                    <a:pt x="2790564" y="2460171"/>
+                  </a:lnTo>
+                  <a:lnTo>
+                    <a:pt x="2868198" y="2508241"/>
+                  </a:lnTo>
+                  <a:lnTo>
+                    <a:pt x="2945832" y="2554373"/>
+                  </a:lnTo>
+                  <a:lnTo>
+                    <a:pt x="3023466" y="2598645"/>
+                  </a:lnTo>
+                  <a:lnTo>
+                    <a:pt x="3101100" y="2641132"/>
+                  </a:lnTo>
+                  <a:lnTo>
+                    <a:pt x="3178734" y="2681907"/>
+                  </a:lnTo>
+                  <a:lnTo>
+                    <a:pt x="3256368" y="2721038"/>
+                  </a:lnTo>
+                  <a:lnTo>
+                    <a:pt x="3334002" y="2758592"/>
+                  </a:lnTo>
+                  <a:lnTo>
+                    <a:pt x="3411636" y="2777808"/>
+                  </a:lnTo>
+                  <a:lnTo>
+                    <a:pt x="3489270" y="2761903"/>
+                  </a:lnTo>
+                  <a:lnTo>
+                    <a:pt x="3566904" y="2745709"/>
+                  </a:lnTo>
+                  <a:lnTo>
+                    <a:pt x="3644538" y="2729221"/>
+                  </a:lnTo>
+                  <a:lnTo>
+                    <a:pt x="3722172" y="2712433"/>
+                  </a:lnTo>
+                  <a:lnTo>
+                    <a:pt x="3799806" y="2695339"/>
+                  </a:lnTo>
+                  <a:lnTo>
+                    <a:pt x="3877440" y="2677935"/>
+                  </a:lnTo>
+                  <a:lnTo>
+                    <a:pt x="3955074" y="2660214"/>
+                  </a:lnTo>
+                  <a:lnTo>
+                    <a:pt x="4032708" y="2642172"/>
+                  </a:lnTo>
+                  <a:lnTo>
+                    <a:pt x="4110342" y="2623801"/>
+                  </a:lnTo>
+                  <a:lnTo>
+                    <a:pt x="4187976" y="2605096"/>
+                  </a:lnTo>
+                  <a:lnTo>
+                    <a:pt x="4265610" y="2586051"/>
+                  </a:lnTo>
+                  <a:lnTo>
+                    <a:pt x="4343244" y="2566660"/>
+                  </a:lnTo>
+                  <a:lnTo>
+                    <a:pt x="4420879" y="2546916"/>
+                  </a:lnTo>
+                  <a:lnTo>
+                    <a:pt x="4498513" y="2526814"/>
+                  </a:lnTo>
+                  <a:lnTo>
+                    <a:pt x="4576147" y="2506346"/>
+                  </a:lnTo>
+                  <a:lnTo>
+                    <a:pt x="4653781" y="2485506"/>
+                  </a:lnTo>
+                  <a:lnTo>
+                    <a:pt x="4731415" y="2464287"/>
+                  </a:lnTo>
+                  <a:lnTo>
+                    <a:pt x="4809049" y="2442682"/>
+                  </a:lnTo>
+                  <a:lnTo>
+                    <a:pt x="4886683" y="2420684"/>
+                  </a:lnTo>
+                  <a:lnTo>
+                    <a:pt x="4964317" y="2398287"/>
+                  </a:lnTo>
+                  <a:lnTo>
+                    <a:pt x="5041951" y="2375482"/>
+                  </a:lnTo>
+                  <a:lnTo>
+                    <a:pt x="5119585" y="2352263"/>
+                  </a:lnTo>
+                  <a:lnTo>
+                    <a:pt x="5197219" y="2328621"/>
+                  </a:lnTo>
+                  <a:lnTo>
+                    <a:pt x="5274853" y="2304550"/>
+                  </a:lnTo>
+                  <a:lnTo>
+                    <a:pt x="5352487" y="2280041"/>
+                  </a:lnTo>
+                  <a:lnTo>
+                    <a:pt x="5430121" y="2255087"/>
+                  </a:lnTo>
+                  <a:lnTo>
+                    <a:pt x="5507755" y="2229678"/>
+                  </a:lnTo>
+                  <a:lnTo>
+                    <a:pt x="5585389" y="2203808"/>
+                  </a:lnTo>
+                  <a:lnTo>
+                    <a:pt x="5663023" y="2177468"/>
+                  </a:lnTo>
+                  <a:lnTo>
+                    <a:pt x="5740657" y="2150649"/>
+                  </a:lnTo>
+                  <a:lnTo>
+                    <a:pt x="5818291" y="2123342"/>
+                  </a:lnTo>
+                  <a:lnTo>
+                    <a:pt x="5895925" y="2095538"/>
+                  </a:lnTo>
+                  <a:lnTo>
+                    <a:pt x="5973559" y="2067230"/>
+                  </a:lnTo>
+                  <a:lnTo>
+                    <a:pt x="6051193" y="2038406"/>
+                  </a:lnTo>
+                  <a:lnTo>
+                    <a:pt x="6128827" y="2009059"/>
+                  </a:lnTo>
+                  <a:lnTo>
+                    <a:pt x="6206462" y="1979178"/>
+                  </a:lnTo>
+                  <a:lnTo>
+                    <a:pt x="6284096" y="1948753"/>
+                  </a:lnTo>
+                  <a:lnTo>
+                    <a:pt x="6361730" y="1917776"/>
+                  </a:lnTo>
+                  <a:lnTo>
+                    <a:pt x="6439364" y="1886235"/>
+                  </a:lnTo>
+                  <a:lnTo>
+                    <a:pt x="6516998" y="1854121"/>
+                  </a:lnTo>
+                  <a:lnTo>
+                    <a:pt x="6594632" y="1821423"/>
+                  </a:lnTo>
+                  <a:lnTo>
+                    <a:pt x="6672266" y="1788131"/>
+                  </a:lnTo>
+                  <a:lnTo>
+                    <a:pt x="6749900" y="1754234"/>
+                  </a:lnTo>
+                  <a:lnTo>
+                    <a:pt x="6827534" y="1719720"/>
+                  </a:lnTo>
+                  <a:lnTo>
+                    <a:pt x="6905168" y="1684578"/>
+                  </a:lnTo>
+                  <a:lnTo>
+                    <a:pt x="6982802" y="1648798"/>
+                  </a:lnTo>
+                  <a:lnTo>
+                    <a:pt x="7060436" y="1612367"/>
+                  </a:lnTo>
+                  <a:lnTo>
+                    <a:pt x="7138070" y="1575274"/>
+                  </a:lnTo>
+                  <a:lnTo>
+                    <a:pt x="7215704" y="1537507"/>
+                  </a:lnTo>
+                  <a:lnTo>
+                    <a:pt x="7293338" y="1499053"/>
+                  </a:lnTo>
+                  <a:lnTo>
+                    <a:pt x="7370972" y="1459900"/>
+                  </a:lnTo>
+                  <a:lnTo>
+                    <a:pt x="7370972" y="3547410"/>
+                  </a:lnTo>
+                  <a:lnTo>
+                    <a:pt x="7293338" y="3542990"/>
+                  </a:lnTo>
+                  <a:lnTo>
+                    <a:pt x="7215704" y="3538384"/>
+                  </a:lnTo>
+                  <a:lnTo>
+                    <a:pt x="7138070" y="3533585"/>
+                  </a:lnTo>
+                  <a:lnTo>
+                    <a:pt x="7060436" y="3528584"/>
+                  </a:lnTo>
+                  <a:lnTo>
+                    <a:pt x="6982802" y="3523373"/>
+                  </a:lnTo>
+                  <a:lnTo>
+                    <a:pt x="6905168" y="3517943"/>
+                  </a:lnTo>
+                  <a:lnTo>
+                    <a:pt x="6827534" y="3512285"/>
+                  </a:lnTo>
+                  <a:lnTo>
+                    <a:pt x="6749900" y="3506389"/>
+                  </a:lnTo>
+                  <a:lnTo>
+                    <a:pt x="6672266" y="3500246"/>
+                  </a:lnTo>
+                  <a:lnTo>
+                    <a:pt x="6594632" y="3493845"/>
+                  </a:lnTo>
+                  <a:lnTo>
+                    <a:pt x="6516998" y="3487174"/>
+                  </a:lnTo>
+                  <a:lnTo>
+                    <a:pt x="6439364" y="3480224"/>
+                  </a:lnTo>
+                  <a:lnTo>
+                    <a:pt x="6361730" y="3472982"/>
+                  </a:lnTo>
+                  <a:lnTo>
+                    <a:pt x="6284096" y="3465435"/>
+                  </a:lnTo>
+                  <a:lnTo>
+                    <a:pt x="6206462" y="3457572"/>
+                  </a:lnTo>
+                  <a:lnTo>
+                    <a:pt x="6128827" y="3449378"/>
+                  </a:lnTo>
+                  <a:lnTo>
+                    <a:pt x="6051193" y="3440840"/>
+                  </a:lnTo>
+                  <a:lnTo>
+                    <a:pt x="5973559" y="3431943"/>
+                  </a:lnTo>
+                  <a:lnTo>
+                    <a:pt x="5895925" y="3422673"/>
+                  </a:lnTo>
+                  <a:lnTo>
+                    <a:pt x="5818291" y="3413013"/>
+                  </a:lnTo>
+                  <a:lnTo>
+                    <a:pt x="5740657" y="3402948"/>
+                  </a:lnTo>
+                  <a:lnTo>
+                    <a:pt x="5663023" y="3392460"/>
+                  </a:lnTo>
+                  <a:lnTo>
+                    <a:pt x="5585389" y="3381531"/>
+                  </a:lnTo>
+                  <a:lnTo>
+                    <a:pt x="5507755" y="3370143"/>
+                  </a:lnTo>
+                  <a:lnTo>
+                    <a:pt x="5430121" y="3358277"/>
+                  </a:lnTo>
+                  <a:lnTo>
+                    <a:pt x="5352487" y="3345912"/>
+                  </a:lnTo>
+                  <a:lnTo>
+                    <a:pt x="5274853" y="3333028"/>
+                  </a:lnTo>
+                  <a:lnTo>
+                    <a:pt x="5197219" y="3319603"/>
+                  </a:lnTo>
+                  <a:lnTo>
+                    <a:pt x="5119585" y="3305614"/>
+                  </a:lnTo>
+                  <a:lnTo>
+                    <a:pt x="5041951" y="3291038"/>
+                  </a:lnTo>
+                  <a:lnTo>
+                    <a:pt x="4964317" y="3275849"/>
+                  </a:lnTo>
+                  <a:lnTo>
+                    <a:pt x="4886683" y="3260022"/>
+                  </a:lnTo>
+                  <a:lnTo>
+                    <a:pt x="4809049" y="3243530"/>
+                  </a:lnTo>
+                  <a:lnTo>
+                    <a:pt x="4731415" y="3226346"/>
+                  </a:lnTo>
+                  <a:lnTo>
+                    <a:pt x="4653781" y="3208440"/>
+                  </a:lnTo>
+                  <a:lnTo>
+                    <a:pt x="4576147" y="3189781"/>
+                  </a:lnTo>
+                  <a:lnTo>
+                    <a:pt x="4498513" y="3170339"/>
+                  </a:lnTo>
+                  <a:lnTo>
+                    <a:pt x="4420879" y="3150080"/>
+                  </a:lnTo>
+                  <a:lnTo>
+                    <a:pt x="4343244" y="3128971"/>
+                  </a:lnTo>
+                  <a:lnTo>
+                    <a:pt x="4265610" y="3106974"/>
+                  </a:lnTo>
+                  <a:lnTo>
+                    <a:pt x="4187976" y="3084054"/>
+                  </a:lnTo>
+                  <a:lnTo>
+                    <a:pt x="4110342" y="3060171"/>
+                  </a:lnTo>
+                  <a:lnTo>
+                    <a:pt x="4032708" y="3035285"/>
+                  </a:lnTo>
+                  <a:lnTo>
+                    <a:pt x="3955074" y="3009353"/>
+                  </a:lnTo>
+                  <a:lnTo>
+                    <a:pt x="3877440" y="2982332"/>
+                  </a:lnTo>
+                  <a:lnTo>
+                    <a:pt x="3799806" y="2954176"/>
+                  </a:lnTo>
+                  <a:lnTo>
+                    <a:pt x="3722172" y="2924838"/>
+                  </a:lnTo>
+                  <a:lnTo>
+                    <a:pt x="3644538" y="2894267"/>
+                  </a:lnTo>
+                  <a:lnTo>
+                    <a:pt x="3566904" y="2862412"/>
+                  </a:lnTo>
+                  <a:lnTo>
+                    <a:pt x="3489270" y="2829219"/>
+                  </a:lnTo>
+                  <a:lnTo>
+                    <a:pt x="3411636" y="2794632"/>
+                  </a:lnTo>
+                  <a:lnTo>
+                    <a:pt x="3334002" y="2793429"/>
+                  </a:lnTo>
+                  <a:lnTo>
+                    <a:pt x="3256368" y="2808771"/>
+                  </a:lnTo>
+                  <a:lnTo>
+                    <a:pt x="3178734" y="2823839"/>
+                  </a:lnTo>
+                  <a:lnTo>
+                    <a:pt x="3101100" y="2838638"/>
+                  </a:lnTo>
+                  <a:lnTo>
+                    <a:pt x="3023466" y="2853173"/>
+                  </a:lnTo>
+                  <a:lnTo>
+                    <a:pt x="2945832" y="2867448"/>
+                  </a:lnTo>
+                  <a:lnTo>
+                    <a:pt x="2868198" y="2881468"/>
+                  </a:lnTo>
+                  <a:lnTo>
+                    <a:pt x="2790564" y="2895238"/>
+                  </a:lnTo>
+                  <a:lnTo>
+                    <a:pt x="2712930" y="2908762"/>
+                  </a:lnTo>
+                  <a:lnTo>
+                    <a:pt x="2635295" y="2922045"/>
+                  </a:lnTo>
+                  <a:lnTo>
+                    <a:pt x="2557661" y="2935090"/>
+                  </a:lnTo>
+                  <a:lnTo>
+                    <a:pt x="2480027" y="2947902"/>
+                  </a:lnTo>
+                  <a:lnTo>
+                    <a:pt x="2402393" y="2960486"/>
+                  </a:lnTo>
+                  <a:lnTo>
+                    <a:pt x="2324759" y="2972845"/>
+                  </a:lnTo>
+                  <a:lnTo>
+                    <a:pt x="2247125" y="2984984"/>
+                  </a:lnTo>
+                  <a:lnTo>
+                    <a:pt x="2169491" y="2996905"/>
+                  </a:lnTo>
+                  <a:lnTo>
+                    <a:pt x="2091857" y="3008614"/>
+                  </a:lnTo>
+                  <a:lnTo>
+                    <a:pt x="2014223" y="3020113"/>
+                  </a:lnTo>
+                  <a:lnTo>
+                    <a:pt x="1936589" y="3031408"/>
+                  </a:lnTo>
+                  <a:lnTo>
+                    <a:pt x="1858955" y="3042500"/>
+                  </a:lnTo>
+                  <a:lnTo>
+                    <a:pt x="1781321" y="3053395"/>
+                  </a:lnTo>
+                  <a:lnTo>
+                    <a:pt x="1703687" y="3064095"/>
+                  </a:lnTo>
+                  <a:lnTo>
+                    <a:pt x="1626053" y="3074604"/>
+                  </a:lnTo>
+                  <a:lnTo>
+                    <a:pt x="1548419" y="3084925"/>
+                  </a:lnTo>
+                  <a:lnTo>
+                    <a:pt x="1470785" y="3095062"/>
+                  </a:lnTo>
+                  <a:lnTo>
+                    <a:pt x="1393151" y="3105018"/>
+                  </a:lnTo>
+                  <a:lnTo>
+                    <a:pt x="1315517" y="3114797"/>
+                  </a:lnTo>
+                  <a:lnTo>
+                    <a:pt x="1237883" y="3124400"/>
+                  </a:lnTo>
+                  <a:lnTo>
+                    <a:pt x="1160249" y="3133833"/>
+                  </a:lnTo>
+                  <a:lnTo>
+                    <a:pt x="1082615" y="3143096"/>
+                  </a:lnTo>
+                  <a:lnTo>
+                    <a:pt x="1004981" y="3152195"/>
+                  </a:lnTo>
+                  <a:lnTo>
+                    <a:pt x="927346" y="3161131"/>
+                  </a:lnTo>
+                  <a:lnTo>
+                    <a:pt x="849712" y="3169907"/>
+                  </a:lnTo>
+                  <a:lnTo>
+                    <a:pt x="772078" y="3178527"/>
+                  </a:lnTo>
+                  <a:lnTo>
+                    <a:pt x="694444" y="3186992"/>
+                  </a:lnTo>
+                  <a:lnTo>
+                    <a:pt x="616810" y="3195307"/>
+                  </a:lnTo>
+                  <a:lnTo>
+                    <a:pt x="539176" y="3203473"/>
+                  </a:lnTo>
+                  <a:lnTo>
+                    <a:pt x="461542" y="3211493"/>
+                  </a:lnTo>
+                  <a:lnTo>
+                    <a:pt x="383908" y="3219370"/>
+                  </a:lnTo>
+                  <a:lnTo>
+                    <a:pt x="306274" y="3227107"/>
+                  </a:lnTo>
+                  <a:lnTo>
+                    <a:pt x="228640" y="3234705"/>
+                  </a:lnTo>
+                  <a:lnTo>
+                    <a:pt x="151006" y="3242168"/>
+                  </a:lnTo>
+                  <a:lnTo>
+                    <a:pt x="73372" y="3249497"/>
+                  </a:lnTo>
+                  <a:lnTo>
+                    <a:pt x="0" y="3256300"/>
                   </a:lnTo>
                   <a:close/>
                 </a:path>
@@ -3570,261 +3585,276 @@
           </p:nvSpPr>
           <p:spPr>
             <a:xfrm>
-              <a:off x="1831046" y="1896563"/>
-              <a:ext cx="6357444" cy="2777844"/>
+              <a:off x="1496214" y="1896563"/>
+              <a:ext cx="6692276" cy="2777808"/>
             </a:xfrm>
             <a:custGeom>
               <a:avLst/>
               <a:pathLst>
-                <a:path w="6357444" h="2777844">
+                <a:path w="6692276" h="2777808">
                   <a:moveTo>
                     <a:pt x="0" y="0"/>
                   </a:moveTo>
                   <a:lnTo>
-                    <a:pt x="69086" y="149850"/>
-                  </a:lnTo>
-                  <a:lnTo>
-                    <a:pt x="146720" y="310517"/>
-                  </a:lnTo>
-                  <a:lnTo>
-                    <a:pt x="224354" y="463815"/>
-                  </a:lnTo>
-                  <a:lnTo>
-                    <a:pt x="301988" y="610081"/>
-                  </a:lnTo>
-                  <a:lnTo>
-                    <a:pt x="379622" y="749638"/>
-                  </a:lnTo>
-                  <a:lnTo>
-                    <a:pt x="457256" y="882793"/>
-                  </a:lnTo>
-                  <a:lnTo>
-                    <a:pt x="534890" y="1009841"/>
-                  </a:lnTo>
-                  <a:lnTo>
-                    <a:pt x="612524" y="1131062"/>
-                  </a:lnTo>
-                  <a:lnTo>
-                    <a:pt x="690158" y="1246723"/>
-                  </a:lnTo>
-                  <a:lnTo>
-                    <a:pt x="767792" y="1357078"/>
-                  </a:lnTo>
-                  <a:lnTo>
-                    <a:pt x="845426" y="1462371"/>
-                  </a:lnTo>
-                  <a:lnTo>
-                    <a:pt x="923060" y="1562835"/>
-                  </a:lnTo>
-                  <a:lnTo>
-                    <a:pt x="1000694" y="1658691"/>
-                  </a:lnTo>
-                  <a:lnTo>
-                    <a:pt x="1078328" y="1750150"/>
-                  </a:lnTo>
-                  <a:lnTo>
-                    <a:pt x="1155963" y="1837414"/>
-                  </a:lnTo>
-                  <a:lnTo>
-                    <a:pt x="1233597" y="1920676"/>
-                  </a:lnTo>
-                  <a:lnTo>
-                    <a:pt x="1311231" y="2000118"/>
-                  </a:lnTo>
-                  <a:lnTo>
-                    <a:pt x="1388865" y="2075916"/>
-                  </a:lnTo>
-                  <a:lnTo>
-                    <a:pt x="1466499" y="2148238"/>
-                  </a:lnTo>
-                  <a:lnTo>
-                    <a:pt x="1544133" y="2217242"/>
-                  </a:lnTo>
-                  <a:lnTo>
-                    <a:pt x="1621767" y="2283082"/>
-                  </a:lnTo>
-                  <a:lnTo>
-                    <a:pt x="1699401" y="2345901"/>
-                  </a:lnTo>
-                  <a:lnTo>
-                    <a:pt x="1777035" y="2405839"/>
-                  </a:lnTo>
-                  <a:lnTo>
-                    <a:pt x="1854669" y="2463028"/>
-                  </a:lnTo>
-                  <a:lnTo>
-                    <a:pt x="1932303" y="2517593"/>
-                  </a:lnTo>
-                  <a:lnTo>
-                    <a:pt x="2009937" y="2569656"/>
-                  </a:lnTo>
-                  <a:lnTo>
-                    <a:pt x="2087571" y="2619331"/>
-                  </a:lnTo>
-                  <a:lnTo>
-                    <a:pt x="2165205" y="2666727"/>
-                  </a:lnTo>
-                  <a:lnTo>
-                    <a:pt x="2242839" y="2711949"/>
-                  </a:lnTo>
-                  <a:lnTo>
-                    <a:pt x="2320473" y="2755097"/>
-                  </a:lnTo>
-                  <a:lnTo>
-                    <a:pt x="2398107" y="2777844"/>
-                  </a:lnTo>
-                  <a:lnTo>
-                    <a:pt x="2475741" y="2762053"/>
-                  </a:lnTo>
-                  <a:lnTo>
-                    <a:pt x="2553375" y="2745976"/>
-                  </a:lnTo>
-                  <a:lnTo>
-                    <a:pt x="2631009" y="2729610"/>
-                  </a:lnTo>
-                  <a:lnTo>
-                    <a:pt x="2708643" y="2712948"/>
-                  </a:lnTo>
-                  <a:lnTo>
-                    <a:pt x="2786277" y="2695985"/>
-                  </a:lnTo>
-                  <a:lnTo>
-                    <a:pt x="2863912" y="2678716"/>
-                  </a:lnTo>
-                  <a:lnTo>
-                    <a:pt x="2941546" y="2661135"/>
-                  </a:lnTo>
-                  <a:lnTo>
-                    <a:pt x="3019180" y="2643236"/>
-                  </a:lnTo>
-                  <a:lnTo>
-                    <a:pt x="3096814" y="2625015"/>
-                  </a:lnTo>
-                  <a:lnTo>
-                    <a:pt x="3174448" y="2606465"/>
-                  </a:lnTo>
-                  <a:lnTo>
-                    <a:pt x="3252082" y="2587580"/>
-                  </a:lnTo>
-                  <a:lnTo>
-                    <a:pt x="3329716" y="2568354"/>
-                  </a:lnTo>
-                  <a:lnTo>
-                    <a:pt x="3407350" y="2548781"/>
-                  </a:lnTo>
-                  <a:lnTo>
-                    <a:pt x="3484984" y="2528854"/>
-                  </a:lnTo>
-                  <a:lnTo>
-                    <a:pt x="3562618" y="2508568"/>
-                  </a:lnTo>
-                  <a:lnTo>
-                    <a:pt x="3640252" y="2487916"/>
-                  </a:lnTo>
-                  <a:lnTo>
-                    <a:pt x="3717886" y="2466891"/>
-                  </a:lnTo>
-                  <a:lnTo>
-                    <a:pt x="3795520" y="2445486"/>
-                  </a:lnTo>
-                  <a:lnTo>
-                    <a:pt x="3873154" y="2423695"/>
-                  </a:lnTo>
-                  <a:lnTo>
-                    <a:pt x="3950788" y="2401511"/>
-                  </a:lnTo>
-                  <a:lnTo>
-                    <a:pt x="4028422" y="2378926"/>
-                  </a:lnTo>
-                  <a:lnTo>
-                    <a:pt x="4106056" y="2355934"/>
-                  </a:lnTo>
-                  <a:lnTo>
-                    <a:pt x="4183690" y="2332526"/>
-                  </a:lnTo>
-                  <a:lnTo>
-                    <a:pt x="4261324" y="2308696"/>
-                  </a:lnTo>
-                  <a:lnTo>
-                    <a:pt x="4338958" y="2284436"/>
-                  </a:lnTo>
-                  <a:lnTo>
-                    <a:pt x="4416592" y="2259737"/>
-                  </a:lnTo>
-                  <a:lnTo>
-                    <a:pt x="4494226" y="2234593"/>
-                  </a:lnTo>
-                  <a:lnTo>
-                    <a:pt x="4571861" y="2208995"/>
-                  </a:lnTo>
-                  <a:lnTo>
-                    <a:pt x="4649495" y="2182935"/>
-                  </a:lnTo>
-                  <a:lnTo>
-                    <a:pt x="4727129" y="2156405"/>
-                  </a:lnTo>
-                  <a:lnTo>
-                    <a:pt x="4804763" y="2129395"/>
-                  </a:lnTo>
-                  <a:lnTo>
-                    <a:pt x="4882397" y="2101899"/>
-                  </a:lnTo>
-                  <a:lnTo>
-                    <a:pt x="4960031" y="2073905"/>
-                  </a:lnTo>
-                  <a:lnTo>
-                    <a:pt x="5037665" y="2045407"/>
-                  </a:lnTo>
-                  <a:lnTo>
-                    <a:pt x="5115299" y="2016394"/>
-                  </a:lnTo>
-                  <a:lnTo>
-                    <a:pt x="5192933" y="1986857"/>
-                  </a:lnTo>
-                  <a:lnTo>
-                    <a:pt x="5270567" y="1956787"/>
-                  </a:lnTo>
-                  <a:lnTo>
-                    <a:pt x="5348201" y="1926174"/>
-                  </a:lnTo>
-                  <a:lnTo>
-                    <a:pt x="5425835" y="1895009"/>
-                  </a:lnTo>
-                  <a:lnTo>
-                    <a:pt x="5503469" y="1863281"/>
-                  </a:lnTo>
-                  <a:lnTo>
-                    <a:pt x="5581103" y="1830980"/>
-                  </a:lnTo>
-                  <a:lnTo>
-                    <a:pt x="5658737" y="1798096"/>
-                  </a:lnTo>
-                  <a:lnTo>
-                    <a:pt x="5736371" y="1764619"/>
-                  </a:lnTo>
-                  <a:lnTo>
-                    <a:pt x="5814005" y="1730537"/>
-                  </a:lnTo>
-                  <a:lnTo>
-                    <a:pt x="5891639" y="1695840"/>
-                  </a:lnTo>
-                  <a:lnTo>
-                    <a:pt x="5969273" y="1660517"/>
-                  </a:lnTo>
-                  <a:lnTo>
-                    <a:pt x="6046907" y="1624556"/>
-                  </a:lnTo>
-                  <a:lnTo>
-                    <a:pt x="6124541" y="1587946"/>
-                  </a:lnTo>
-                  <a:lnTo>
-                    <a:pt x="6202175" y="1550675"/>
-                  </a:lnTo>
-                  <a:lnTo>
-                    <a:pt x="6279810" y="1512731"/>
-                  </a:lnTo>
-                  <a:lnTo>
-                    <a:pt x="6357444" y="1474103"/>
+                    <a:pt x="15748" y="30860"/>
+                  </a:lnTo>
+                  <a:lnTo>
+                    <a:pt x="93382" y="176857"/>
+                  </a:lnTo>
+                  <a:lnTo>
+                    <a:pt x="171016" y="316969"/>
+                  </a:lnTo>
+                  <a:lnTo>
+                    <a:pt x="248650" y="451433"/>
+                  </a:lnTo>
+                  <a:lnTo>
+                    <a:pt x="326284" y="580476"/>
+                  </a:lnTo>
+                  <a:lnTo>
+                    <a:pt x="403918" y="704318"/>
+                  </a:lnTo>
+                  <a:lnTo>
+                    <a:pt x="481552" y="823168"/>
+                  </a:lnTo>
+                  <a:lnTo>
+                    <a:pt x="559186" y="937226"/>
+                  </a:lnTo>
+                  <a:lnTo>
+                    <a:pt x="636820" y="1046687"/>
+                  </a:lnTo>
+                  <a:lnTo>
+                    <a:pt x="714454" y="1151735"/>
+                  </a:lnTo>
+                  <a:lnTo>
+                    <a:pt x="792088" y="1252549"/>
+                  </a:lnTo>
+                  <a:lnTo>
+                    <a:pt x="869723" y="1349299"/>
+                  </a:lnTo>
+                  <a:lnTo>
+                    <a:pt x="947357" y="1442149"/>
+                  </a:lnTo>
+                  <a:lnTo>
+                    <a:pt x="1024991" y="1531255"/>
+                  </a:lnTo>
+                  <a:lnTo>
+                    <a:pt x="1102625" y="1616770"/>
+                  </a:lnTo>
+                  <a:lnTo>
+                    <a:pt x="1180259" y="1698838"/>
+                  </a:lnTo>
+                  <a:lnTo>
+                    <a:pt x="1257893" y="1777598"/>
+                  </a:lnTo>
+                  <a:lnTo>
+                    <a:pt x="1335527" y="1853182"/>
+                  </a:lnTo>
+                  <a:lnTo>
+                    <a:pt x="1413161" y="1925720"/>
+                  </a:lnTo>
+                  <a:lnTo>
+                    <a:pt x="1490795" y="1995334"/>
+                  </a:lnTo>
+                  <a:lnTo>
+                    <a:pt x="1568429" y="2062142"/>
+                  </a:lnTo>
+                  <a:lnTo>
+                    <a:pt x="1646063" y="2126256"/>
+                  </a:lnTo>
+                  <a:lnTo>
+                    <a:pt x="1723697" y="2187786"/>
+                  </a:lnTo>
+                  <a:lnTo>
+                    <a:pt x="1801331" y="2246836"/>
+                  </a:lnTo>
+                  <a:lnTo>
+                    <a:pt x="1878965" y="2303505"/>
+                  </a:lnTo>
+                  <a:lnTo>
+                    <a:pt x="1956599" y="2357890"/>
+                  </a:lnTo>
+                  <a:lnTo>
+                    <a:pt x="2034233" y="2410082"/>
+                  </a:lnTo>
+                  <a:lnTo>
+                    <a:pt x="2111867" y="2460171"/>
+                  </a:lnTo>
+                  <a:lnTo>
+                    <a:pt x="2189501" y="2508241"/>
+                  </a:lnTo>
+                  <a:lnTo>
+                    <a:pt x="2267135" y="2554373"/>
+                  </a:lnTo>
+                  <a:lnTo>
+                    <a:pt x="2344769" y="2598645"/>
+                  </a:lnTo>
+                  <a:lnTo>
+                    <a:pt x="2422403" y="2641132"/>
+                  </a:lnTo>
+                  <a:lnTo>
+                    <a:pt x="2500037" y="2681907"/>
+                  </a:lnTo>
+                  <a:lnTo>
+                    <a:pt x="2577671" y="2721038"/>
+                  </a:lnTo>
+                  <a:lnTo>
+                    <a:pt x="2655306" y="2758592"/>
+                  </a:lnTo>
+                  <a:lnTo>
+                    <a:pt x="2732940" y="2777808"/>
+                  </a:lnTo>
+                  <a:lnTo>
+                    <a:pt x="2810574" y="2761903"/>
+                  </a:lnTo>
+                  <a:lnTo>
+                    <a:pt x="2888208" y="2745709"/>
+                  </a:lnTo>
+                  <a:lnTo>
+                    <a:pt x="2965842" y="2729221"/>
+                  </a:lnTo>
+                  <a:lnTo>
+                    <a:pt x="3043476" y="2712433"/>
+                  </a:lnTo>
+                  <a:lnTo>
+                    <a:pt x="3121110" y="2695339"/>
+                  </a:lnTo>
+                  <a:lnTo>
+                    <a:pt x="3198744" y="2677935"/>
+                  </a:lnTo>
+                  <a:lnTo>
+                    <a:pt x="3276378" y="2660214"/>
+                  </a:lnTo>
+                  <a:lnTo>
+                    <a:pt x="3354012" y="2642172"/>
+                  </a:lnTo>
+                  <a:lnTo>
+                    <a:pt x="3431646" y="2623801"/>
+                  </a:lnTo>
+                  <a:lnTo>
+                    <a:pt x="3509280" y="2605096"/>
+                  </a:lnTo>
+                  <a:lnTo>
+                    <a:pt x="3586914" y="2586051"/>
+                  </a:lnTo>
+                  <a:lnTo>
+                    <a:pt x="3664548" y="2566660"/>
+                  </a:lnTo>
+                  <a:lnTo>
+                    <a:pt x="3742182" y="2546916"/>
+                  </a:lnTo>
+                  <a:lnTo>
+                    <a:pt x="3819816" y="2526814"/>
+                  </a:lnTo>
+                  <a:lnTo>
+                    <a:pt x="3897450" y="2506346"/>
+                  </a:lnTo>
+                  <a:lnTo>
+                    <a:pt x="3975084" y="2485506"/>
+                  </a:lnTo>
+                  <a:lnTo>
+                    <a:pt x="4052718" y="2464287"/>
+                  </a:lnTo>
+                  <a:lnTo>
+                    <a:pt x="4130352" y="2442682"/>
+                  </a:lnTo>
+                  <a:lnTo>
+                    <a:pt x="4207986" y="2420684"/>
+                  </a:lnTo>
+                  <a:lnTo>
+                    <a:pt x="4285620" y="2398287"/>
+                  </a:lnTo>
+                  <a:lnTo>
+                    <a:pt x="4363255" y="2375482"/>
+                  </a:lnTo>
+                  <a:lnTo>
+                    <a:pt x="4440889" y="2352263"/>
+                  </a:lnTo>
+                  <a:lnTo>
+                    <a:pt x="4518523" y="2328621"/>
+                  </a:lnTo>
+                  <a:lnTo>
+                    <a:pt x="4596157" y="2304550"/>
+                  </a:lnTo>
+                  <a:lnTo>
+                    <a:pt x="4673791" y="2280041"/>
+                  </a:lnTo>
+                  <a:lnTo>
+                    <a:pt x="4751425" y="2255087"/>
+                  </a:lnTo>
+                  <a:lnTo>
+                    <a:pt x="4829059" y="2229678"/>
+                  </a:lnTo>
+                  <a:lnTo>
+                    <a:pt x="4906693" y="2203808"/>
+                  </a:lnTo>
+                  <a:lnTo>
+                    <a:pt x="4984327" y="2177468"/>
+                  </a:lnTo>
+                  <a:lnTo>
+                    <a:pt x="5061961" y="2150649"/>
+                  </a:lnTo>
+                  <a:lnTo>
+                    <a:pt x="5139595" y="2123342"/>
+                  </a:lnTo>
+                  <a:lnTo>
+                    <a:pt x="5217229" y="2095538"/>
+                  </a:lnTo>
+                  <a:lnTo>
+                    <a:pt x="5294863" y="2067230"/>
+                  </a:lnTo>
+                  <a:lnTo>
+                    <a:pt x="5372497" y="2038406"/>
+                  </a:lnTo>
+                  <a:lnTo>
+                    <a:pt x="5450131" y="2009059"/>
+                  </a:lnTo>
+                  <a:lnTo>
+                    <a:pt x="5527765" y="1979178"/>
+                  </a:lnTo>
+                  <a:lnTo>
+                    <a:pt x="5605399" y="1948753"/>
+                  </a:lnTo>
+                  <a:lnTo>
+                    <a:pt x="5683033" y="1917776"/>
+                  </a:lnTo>
+                  <a:lnTo>
+                    <a:pt x="5760667" y="1886235"/>
+                  </a:lnTo>
+                  <a:lnTo>
+                    <a:pt x="5838301" y="1854121"/>
+                  </a:lnTo>
+                  <a:lnTo>
+                    <a:pt x="5915935" y="1821423"/>
+                  </a:lnTo>
+                  <a:lnTo>
+                    <a:pt x="5993569" y="1788131"/>
+                  </a:lnTo>
+                  <a:lnTo>
+                    <a:pt x="6071204" y="1754234"/>
+                  </a:lnTo>
+                  <a:lnTo>
+                    <a:pt x="6148838" y="1719720"/>
+                  </a:lnTo>
+                  <a:lnTo>
+                    <a:pt x="6226472" y="1684578"/>
+                  </a:lnTo>
+                  <a:lnTo>
+                    <a:pt x="6304106" y="1648798"/>
+                  </a:lnTo>
+                  <a:lnTo>
+                    <a:pt x="6381740" y="1612367"/>
+                  </a:lnTo>
+                  <a:lnTo>
+                    <a:pt x="6459374" y="1575274"/>
+                  </a:lnTo>
+                  <a:lnTo>
+                    <a:pt x="6537008" y="1537507"/>
+                  </a:lnTo>
+                  <a:lnTo>
+                    <a:pt x="6614642" y="1499053"/>
+                  </a:lnTo>
+                  <a:lnTo>
+                    <a:pt x="6692276" y="1459900"/>
                   </a:lnTo>
                 </a:path>
               </a:pathLst>
@@ -3844,300 +3874,300 @@
           </p:nvSpPr>
           <p:spPr>
             <a:xfrm>
-              <a:off x="817517" y="4689919"/>
-              <a:ext cx="7370972" cy="781180"/>
+              <a:off x="817517" y="4689992"/>
+              <a:ext cx="7370972" cy="753981"/>
             </a:xfrm>
             <a:custGeom>
               <a:avLst/>
               <a:pathLst>
-                <a:path w="7370972" h="781180">
+                <a:path w="7370972" h="753981">
                   <a:moveTo>
-                    <a:pt x="7370972" y="781180"/>
+                    <a:pt x="7370972" y="753981"/>
                   </a:moveTo>
                   <a:lnTo>
-                    <a:pt x="7293338" y="777425"/>
-                  </a:lnTo>
-                  <a:lnTo>
-                    <a:pt x="7215704" y="773490"/>
-                  </a:lnTo>
-                  <a:lnTo>
-                    <a:pt x="7138070" y="769365"/>
-                  </a:lnTo>
-                  <a:lnTo>
-                    <a:pt x="7060436" y="765042"/>
-                  </a:lnTo>
-                  <a:lnTo>
-                    <a:pt x="6982802" y="760511"/>
-                  </a:lnTo>
-                  <a:lnTo>
-                    <a:pt x="6905168" y="755763"/>
-                  </a:lnTo>
-                  <a:lnTo>
-                    <a:pt x="6827534" y="750786"/>
-                  </a:lnTo>
-                  <a:lnTo>
-                    <a:pt x="6749900" y="745570"/>
-                  </a:lnTo>
-                  <a:lnTo>
-                    <a:pt x="6672266" y="740104"/>
-                  </a:lnTo>
-                  <a:lnTo>
-                    <a:pt x="6594632" y="734374"/>
-                  </a:lnTo>
-                  <a:lnTo>
-                    <a:pt x="6516998" y="728369"/>
-                  </a:lnTo>
-                  <a:lnTo>
-                    <a:pt x="6439364" y="722075"/>
-                  </a:lnTo>
-                  <a:lnTo>
-                    <a:pt x="6361730" y="715479"/>
-                  </a:lnTo>
-                  <a:lnTo>
-                    <a:pt x="6284096" y="708566"/>
-                  </a:lnTo>
-                  <a:lnTo>
-                    <a:pt x="6206462" y="701320"/>
-                  </a:lnTo>
-                  <a:lnTo>
-                    <a:pt x="6128827" y="693726"/>
-                  </a:lnTo>
-                  <a:lnTo>
-                    <a:pt x="6051193" y="685767"/>
-                  </a:lnTo>
-                  <a:lnTo>
-                    <a:pt x="5973559" y="677425"/>
-                  </a:lnTo>
-                  <a:lnTo>
-                    <a:pt x="5895925" y="668683"/>
-                  </a:lnTo>
-                  <a:lnTo>
-                    <a:pt x="5818291" y="659520"/>
-                  </a:lnTo>
-                  <a:lnTo>
-                    <a:pt x="5740657" y="649916"/>
-                  </a:lnTo>
-                  <a:lnTo>
-                    <a:pt x="5663023" y="639851"/>
-                  </a:lnTo>
-                  <a:lnTo>
-                    <a:pt x="5585389" y="629302"/>
-                  </a:lnTo>
-                  <a:lnTo>
-                    <a:pt x="5507755" y="618246"/>
-                  </a:lnTo>
-                  <a:lnTo>
-                    <a:pt x="5430121" y="606659"/>
-                  </a:lnTo>
-                  <a:lnTo>
-                    <a:pt x="5352487" y="594514"/>
-                  </a:lnTo>
-                  <a:lnTo>
-                    <a:pt x="5274853" y="581785"/>
-                  </a:lnTo>
-                  <a:lnTo>
-                    <a:pt x="5197219" y="568445"/>
-                  </a:lnTo>
-                  <a:lnTo>
-                    <a:pt x="5119585" y="554463"/>
-                  </a:lnTo>
-                  <a:lnTo>
-                    <a:pt x="5041951" y="539809"/>
-                  </a:lnTo>
-                  <a:lnTo>
-                    <a:pt x="4964317" y="524451"/>
-                  </a:lnTo>
-                  <a:lnTo>
-                    <a:pt x="4886683" y="508354"/>
-                  </a:lnTo>
-                  <a:lnTo>
-                    <a:pt x="4809049" y="491484"/>
-                  </a:lnTo>
-                  <a:lnTo>
-                    <a:pt x="4731415" y="473802"/>
-                  </a:lnTo>
-                  <a:lnTo>
-                    <a:pt x="4653781" y="455271"/>
-                  </a:lnTo>
-                  <a:lnTo>
-                    <a:pt x="4576147" y="435848"/>
-                  </a:lnTo>
-                  <a:lnTo>
-                    <a:pt x="4498513" y="415492"/>
-                  </a:lnTo>
-                  <a:lnTo>
-                    <a:pt x="4420879" y="394158"/>
-                  </a:lnTo>
-                  <a:lnTo>
-                    <a:pt x="4343244" y="371797"/>
-                  </a:lnTo>
-                  <a:lnTo>
-                    <a:pt x="4265610" y="348362"/>
-                  </a:lnTo>
-                  <a:lnTo>
-                    <a:pt x="4187976" y="323800"/>
-                  </a:lnTo>
-                  <a:lnTo>
-                    <a:pt x="4110342" y="298058"/>
-                  </a:lnTo>
-                  <a:lnTo>
-                    <a:pt x="4032708" y="271078"/>
-                  </a:lnTo>
-                  <a:lnTo>
-                    <a:pt x="3955074" y="242801"/>
-                  </a:lnTo>
-                  <a:lnTo>
-                    <a:pt x="3877440" y="213164"/>
-                  </a:lnTo>
-                  <a:lnTo>
-                    <a:pt x="3799806" y="182103"/>
-                  </a:lnTo>
-                  <a:lnTo>
-                    <a:pt x="3722172" y="149548"/>
-                  </a:lnTo>
-                  <a:lnTo>
-                    <a:pt x="3644538" y="115429"/>
-                  </a:lnTo>
-                  <a:lnTo>
-                    <a:pt x="3566904" y="79669"/>
-                  </a:lnTo>
-                  <a:lnTo>
-                    <a:pt x="3489270" y="42190"/>
-                  </a:lnTo>
-                  <a:lnTo>
-                    <a:pt x="3411636" y="2910"/>
+                    <a:pt x="7293338" y="749560"/>
+                  </a:lnTo>
+                  <a:lnTo>
+                    <a:pt x="7215704" y="744955"/>
+                  </a:lnTo>
+                  <a:lnTo>
+                    <a:pt x="7138070" y="740155"/>
+                  </a:lnTo>
+                  <a:lnTo>
+                    <a:pt x="7060436" y="735154"/>
+                  </a:lnTo>
+                  <a:lnTo>
+                    <a:pt x="6982802" y="729943"/>
+                  </a:lnTo>
+                  <a:lnTo>
+                    <a:pt x="6905168" y="724513"/>
+                  </a:lnTo>
+                  <a:lnTo>
+                    <a:pt x="6827534" y="718855"/>
+                  </a:lnTo>
+                  <a:lnTo>
+                    <a:pt x="6749900" y="712960"/>
+                  </a:lnTo>
+                  <a:lnTo>
+                    <a:pt x="6672266" y="706817"/>
+                  </a:lnTo>
+                  <a:lnTo>
+                    <a:pt x="6594632" y="700415"/>
+                  </a:lnTo>
+                  <a:lnTo>
+                    <a:pt x="6516998" y="693745"/>
+                  </a:lnTo>
+                  <a:lnTo>
+                    <a:pt x="6439364" y="686795"/>
+                  </a:lnTo>
+                  <a:lnTo>
+                    <a:pt x="6361730" y="679552"/>
+                  </a:lnTo>
+                  <a:lnTo>
+                    <a:pt x="6284096" y="672006"/>
+                  </a:lnTo>
+                  <a:lnTo>
+                    <a:pt x="6206462" y="664142"/>
+                  </a:lnTo>
+                  <a:lnTo>
+                    <a:pt x="6128827" y="655949"/>
+                  </a:lnTo>
+                  <a:lnTo>
+                    <a:pt x="6051193" y="647411"/>
+                  </a:lnTo>
+                  <a:lnTo>
+                    <a:pt x="5973559" y="638514"/>
+                  </a:lnTo>
+                  <a:lnTo>
+                    <a:pt x="5895925" y="629244"/>
+                  </a:lnTo>
+                  <a:lnTo>
+                    <a:pt x="5818291" y="619584"/>
+                  </a:lnTo>
+                  <a:lnTo>
+                    <a:pt x="5740657" y="609519"/>
+                  </a:lnTo>
+                  <a:lnTo>
+                    <a:pt x="5663023" y="599030"/>
+                  </a:lnTo>
+                  <a:lnTo>
+                    <a:pt x="5585389" y="588102"/>
+                  </a:lnTo>
+                  <a:lnTo>
+                    <a:pt x="5507755" y="576714"/>
+                  </a:lnTo>
+                  <a:lnTo>
+                    <a:pt x="5430121" y="564848"/>
+                  </a:lnTo>
+                  <a:lnTo>
+                    <a:pt x="5352487" y="552483"/>
+                  </a:lnTo>
+                  <a:lnTo>
+                    <a:pt x="5274853" y="539599"/>
+                  </a:lnTo>
+                  <a:lnTo>
+                    <a:pt x="5197219" y="526174"/>
+                  </a:lnTo>
+                  <a:lnTo>
+                    <a:pt x="5119585" y="512185"/>
+                  </a:lnTo>
+                  <a:lnTo>
+                    <a:pt x="5041951" y="497608"/>
+                  </a:lnTo>
+                  <a:lnTo>
+                    <a:pt x="4964317" y="482419"/>
+                  </a:lnTo>
+                  <a:lnTo>
+                    <a:pt x="4886683" y="466592"/>
+                  </a:lnTo>
+                  <a:lnTo>
+                    <a:pt x="4809049" y="450101"/>
+                  </a:lnTo>
+                  <a:lnTo>
+                    <a:pt x="4731415" y="432916"/>
+                  </a:lnTo>
+                  <a:lnTo>
+                    <a:pt x="4653781" y="415010"/>
+                  </a:lnTo>
+                  <a:lnTo>
+                    <a:pt x="4576147" y="396352"/>
+                  </a:lnTo>
+                  <a:lnTo>
+                    <a:pt x="4498513" y="376910"/>
+                  </a:lnTo>
+                  <a:lnTo>
+                    <a:pt x="4420879" y="356651"/>
+                  </a:lnTo>
+                  <a:lnTo>
+                    <a:pt x="4343244" y="335541"/>
+                  </a:lnTo>
+                  <a:lnTo>
+                    <a:pt x="4265610" y="313545"/>
+                  </a:lnTo>
+                  <a:lnTo>
+                    <a:pt x="4187976" y="290624"/>
+                  </a:lnTo>
+                  <a:lnTo>
+                    <a:pt x="4110342" y="266741"/>
+                  </a:lnTo>
+                  <a:lnTo>
+                    <a:pt x="4032708" y="241855"/>
+                  </a:lnTo>
+                  <a:lnTo>
+                    <a:pt x="3955074" y="215924"/>
+                  </a:lnTo>
+                  <a:lnTo>
+                    <a:pt x="3877440" y="188903"/>
+                  </a:lnTo>
+                  <a:lnTo>
+                    <a:pt x="3799806" y="160747"/>
+                  </a:lnTo>
+                  <a:lnTo>
+                    <a:pt x="3722172" y="131409"/>
+                  </a:lnTo>
+                  <a:lnTo>
+                    <a:pt x="3644538" y="100838"/>
+                  </a:lnTo>
+                  <a:lnTo>
+                    <a:pt x="3566904" y="68983"/>
+                  </a:lnTo>
+                  <a:lnTo>
+                    <a:pt x="3489270" y="35790"/>
+                  </a:lnTo>
+                  <a:lnTo>
+                    <a:pt x="3411636" y="1203"/>
                   </a:lnTo>
                   <a:lnTo>
                     <a:pt x="3334002" y="0"/>
                   </a:lnTo>
                   <a:lnTo>
-                    <a:pt x="3256368" y="15236"/>
-                  </a:lnTo>
-                  <a:lnTo>
-                    <a:pt x="3178734" y="30202"/>
-                  </a:lnTo>
-                  <a:lnTo>
-                    <a:pt x="3101100" y="44903"/>
-                  </a:lnTo>
-                  <a:lnTo>
-                    <a:pt x="3023466" y="59343"/>
-                  </a:lnTo>
-                  <a:lnTo>
-                    <a:pt x="2945832" y="73527"/>
-                  </a:lnTo>
-                  <a:lnTo>
-                    <a:pt x="2868198" y="87460"/>
-                  </a:lnTo>
-                  <a:lnTo>
-                    <a:pt x="2790564" y="101146"/>
-                  </a:lnTo>
-                  <a:lnTo>
-                    <a:pt x="2712930" y="114589"/>
-                  </a:lnTo>
-                  <a:lnTo>
-                    <a:pt x="2635295" y="127793"/>
-                  </a:lnTo>
-                  <a:lnTo>
-                    <a:pt x="2557661" y="140764"/>
-                  </a:lnTo>
-                  <a:lnTo>
-                    <a:pt x="2480027" y="153504"/>
-                  </a:lnTo>
-                  <a:lnTo>
-                    <a:pt x="2402393" y="166019"/>
-                  </a:lnTo>
-                  <a:lnTo>
-                    <a:pt x="2324759" y="178311"/>
-                  </a:lnTo>
-                  <a:lnTo>
-                    <a:pt x="2247125" y="190386"/>
-                  </a:lnTo>
-                  <a:lnTo>
-                    <a:pt x="2169491" y="202246"/>
-                  </a:lnTo>
-                  <a:lnTo>
-                    <a:pt x="2091857" y="213897"/>
-                  </a:lnTo>
-                  <a:lnTo>
-                    <a:pt x="2014223" y="225340"/>
-                  </a:lnTo>
-                  <a:lnTo>
-                    <a:pt x="1936589" y="236581"/>
-                  </a:lnTo>
-                  <a:lnTo>
-                    <a:pt x="1858955" y="247623"/>
-                  </a:lnTo>
-                  <a:lnTo>
-                    <a:pt x="1781321" y="258468"/>
-                  </a:lnTo>
-                  <a:lnTo>
-                    <a:pt x="1703687" y="269122"/>
-                  </a:lnTo>
-                  <a:lnTo>
-                    <a:pt x="1626053" y="279586"/>
-                  </a:lnTo>
-                  <a:lnTo>
-                    <a:pt x="1548419" y="289865"/>
-                  </a:lnTo>
-                  <a:lnTo>
-                    <a:pt x="1470785" y="299962"/>
-                  </a:lnTo>
-                  <a:lnTo>
-                    <a:pt x="1393151" y="309879"/>
-                  </a:lnTo>
-                  <a:lnTo>
-                    <a:pt x="1315517" y="319621"/>
-                  </a:lnTo>
-                  <a:lnTo>
-                    <a:pt x="1237883" y="329190"/>
-                  </a:lnTo>
-                  <a:lnTo>
-                    <a:pt x="1160249" y="338590"/>
-                  </a:lnTo>
-                  <a:lnTo>
-                    <a:pt x="1082615" y="347822"/>
-                  </a:lnTo>
-                  <a:lnTo>
-                    <a:pt x="1004981" y="356891"/>
-                  </a:lnTo>
-                  <a:lnTo>
-                    <a:pt x="927346" y="365799"/>
-                  </a:lnTo>
-                  <a:lnTo>
-                    <a:pt x="849712" y="374550"/>
-                  </a:lnTo>
-                  <a:lnTo>
-                    <a:pt x="772078" y="383145"/>
-                  </a:lnTo>
-                  <a:lnTo>
-                    <a:pt x="694444" y="391587"/>
-                  </a:lnTo>
-                  <a:lnTo>
-                    <a:pt x="616810" y="399880"/>
-                  </a:lnTo>
-                  <a:lnTo>
-                    <a:pt x="539176" y="408026"/>
-                  </a:lnTo>
-                  <a:lnTo>
-                    <a:pt x="461542" y="416028"/>
-                  </a:lnTo>
-                  <a:lnTo>
-                    <a:pt x="383908" y="423888"/>
-                  </a:lnTo>
-                  <a:lnTo>
-                    <a:pt x="306274" y="431608"/>
-                  </a:lnTo>
-                  <a:lnTo>
-                    <a:pt x="228640" y="439191"/>
-                  </a:lnTo>
-                  <a:lnTo>
-                    <a:pt x="151006" y="446640"/>
-                  </a:lnTo>
-                  <a:lnTo>
-                    <a:pt x="73372" y="453957"/>
-                  </a:lnTo>
-                  <a:lnTo>
-                    <a:pt x="0" y="460749"/>
+                    <a:pt x="3256368" y="15341"/>
+                  </a:lnTo>
+                  <a:lnTo>
+                    <a:pt x="3178734" y="30409"/>
+                  </a:lnTo>
+                  <a:lnTo>
+                    <a:pt x="3101100" y="45208"/>
+                  </a:lnTo>
+                  <a:lnTo>
+                    <a:pt x="3023466" y="59743"/>
+                  </a:lnTo>
+                  <a:lnTo>
+                    <a:pt x="2945832" y="74018"/>
+                  </a:lnTo>
+                  <a:lnTo>
+                    <a:pt x="2868198" y="88039"/>
+                  </a:lnTo>
+                  <a:lnTo>
+                    <a:pt x="2790564" y="101809"/>
+                  </a:lnTo>
+                  <a:lnTo>
+                    <a:pt x="2712930" y="115333"/>
+                  </a:lnTo>
+                  <a:lnTo>
+                    <a:pt x="2635295" y="128615"/>
+                  </a:lnTo>
+                  <a:lnTo>
+                    <a:pt x="2557661" y="141661"/>
+                  </a:lnTo>
+                  <a:lnTo>
+                    <a:pt x="2480027" y="154473"/>
+                  </a:lnTo>
+                  <a:lnTo>
+                    <a:pt x="2402393" y="167057"/>
+                  </a:lnTo>
+                  <a:lnTo>
+                    <a:pt x="2324759" y="179416"/>
+                  </a:lnTo>
+                  <a:lnTo>
+                    <a:pt x="2247125" y="191554"/>
+                  </a:lnTo>
+                  <a:lnTo>
+                    <a:pt x="2169491" y="203476"/>
+                  </a:lnTo>
+                  <a:lnTo>
+                    <a:pt x="2091857" y="215184"/>
+                  </a:lnTo>
+                  <a:lnTo>
+                    <a:pt x="2014223" y="226684"/>
+                  </a:lnTo>
+                  <a:lnTo>
+                    <a:pt x="1936589" y="237978"/>
+                  </a:lnTo>
+                  <a:lnTo>
+                    <a:pt x="1858955" y="249071"/>
+                  </a:lnTo>
+                  <a:lnTo>
+                    <a:pt x="1781321" y="259966"/>
+                  </a:lnTo>
+                  <a:lnTo>
+                    <a:pt x="1703687" y="270666"/>
+                  </a:lnTo>
+                  <a:lnTo>
+                    <a:pt x="1626053" y="281175"/>
+                  </a:lnTo>
+                  <a:lnTo>
+                    <a:pt x="1548419" y="291496"/>
+                  </a:lnTo>
+                  <a:lnTo>
+                    <a:pt x="1470785" y="301633"/>
+                  </a:lnTo>
+                  <a:lnTo>
+                    <a:pt x="1393151" y="311589"/>
+                  </a:lnTo>
+                  <a:lnTo>
+                    <a:pt x="1315517" y="321367"/>
+                  </a:lnTo>
+                  <a:lnTo>
+                    <a:pt x="1237883" y="330971"/>
+                  </a:lnTo>
+                  <a:lnTo>
+                    <a:pt x="1160249" y="340403"/>
+                  </a:lnTo>
+                  <a:lnTo>
+                    <a:pt x="1082615" y="349667"/>
+                  </a:lnTo>
+                  <a:lnTo>
+                    <a:pt x="1004981" y="358765"/>
+                  </a:lnTo>
+                  <a:lnTo>
+                    <a:pt x="927346" y="367701"/>
+                  </a:lnTo>
+                  <a:lnTo>
+                    <a:pt x="849712" y="376478"/>
+                  </a:lnTo>
+                  <a:lnTo>
+                    <a:pt x="772078" y="385097"/>
+                  </a:lnTo>
+                  <a:lnTo>
+                    <a:pt x="694444" y="393563"/>
+                  </a:lnTo>
+                  <a:lnTo>
+                    <a:pt x="616810" y="401877"/>
+                  </a:lnTo>
+                  <a:lnTo>
+                    <a:pt x="539176" y="410044"/>
+                  </a:lnTo>
+                  <a:lnTo>
+                    <a:pt x="461542" y="418064"/>
+                  </a:lnTo>
+                  <a:lnTo>
+                    <a:pt x="383908" y="425941"/>
+                  </a:lnTo>
+                  <a:lnTo>
+                    <a:pt x="306274" y="433677"/>
+                  </a:lnTo>
+                  <a:lnTo>
+                    <a:pt x="228640" y="441276"/>
+                  </a:lnTo>
+                  <a:lnTo>
+                    <a:pt x="151006" y="448738"/>
+                  </a:lnTo>
+                  <a:lnTo>
+                    <a:pt x="73372" y="456068"/>
+                  </a:lnTo>
+                  <a:lnTo>
+                    <a:pt x="0" y="462871"/>
                   </a:lnTo>
                 </a:path>
               </a:pathLst>
@@ -4157,300 +4187,300 @@
           </p:nvSpPr>
           <p:spPr>
             <a:xfrm>
-              <a:off x="817517" y="3910036"/>
-              <a:ext cx="7370972" cy="1226666"/>
+              <a:off x="817517" y="4109022"/>
+              <a:ext cx="7370972" cy="959821"/>
             </a:xfrm>
             <a:custGeom>
               <a:avLst/>
               <a:pathLst>
-                <a:path w="7370972" h="1226666">
+                <a:path w="7370972" h="959821">
                   <a:moveTo>
                     <a:pt x="0" y="0"/>
                   </a:moveTo>
                   <a:lnTo>
-                    <a:pt x="73372" y="22367"/>
-                  </a:lnTo>
-                  <a:lnTo>
-                    <a:pt x="151006" y="45691"/>
-                  </a:lnTo>
-                  <a:lnTo>
-                    <a:pt x="228640" y="68679"/>
-                  </a:lnTo>
-                  <a:lnTo>
-                    <a:pt x="306274" y="91336"/>
-                  </a:lnTo>
-                  <a:lnTo>
-                    <a:pt x="383908" y="113666"/>
-                  </a:lnTo>
-                  <a:lnTo>
-                    <a:pt x="461542" y="135673"/>
-                  </a:lnTo>
-                  <a:lnTo>
-                    <a:pt x="539176" y="157363"/>
-                  </a:lnTo>
-                  <a:lnTo>
-                    <a:pt x="616810" y="178741"/>
-                  </a:lnTo>
-                  <a:lnTo>
-                    <a:pt x="694444" y="199809"/>
-                  </a:lnTo>
-                  <a:lnTo>
-                    <a:pt x="772078" y="220574"/>
-                  </a:lnTo>
-                  <a:lnTo>
-                    <a:pt x="849712" y="241039"/>
-                  </a:lnTo>
-                  <a:lnTo>
-                    <a:pt x="927346" y="261209"/>
-                  </a:lnTo>
-                  <a:lnTo>
-                    <a:pt x="1004981" y="281088"/>
-                  </a:lnTo>
-                  <a:lnTo>
-                    <a:pt x="1082615" y="300681"/>
-                  </a:lnTo>
-                  <a:lnTo>
-                    <a:pt x="1160249" y="319990"/>
-                  </a:lnTo>
-                  <a:lnTo>
-                    <a:pt x="1237883" y="339021"/>
-                  </a:lnTo>
-                  <a:lnTo>
-                    <a:pt x="1315517" y="357778"/>
-                  </a:lnTo>
-                  <a:lnTo>
-                    <a:pt x="1393151" y="376264"/>
-                  </a:lnTo>
-                  <a:lnTo>
-                    <a:pt x="1470785" y="394483"/>
-                  </a:lnTo>
-                  <a:lnTo>
-                    <a:pt x="1548419" y="412439"/>
-                  </a:lnTo>
-                  <a:lnTo>
-                    <a:pt x="1626053" y="430137"/>
-                  </a:lnTo>
-                  <a:lnTo>
-                    <a:pt x="1703687" y="447579"/>
-                  </a:lnTo>
-                  <a:lnTo>
-                    <a:pt x="1781321" y="464769"/>
-                  </a:lnTo>
-                  <a:lnTo>
-                    <a:pt x="1858955" y="481712"/>
-                  </a:lnTo>
-                  <a:lnTo>
-                    <a:pt x="1936589" y="498410"/>
-                  </a:lnTo>
-                  <a:lnTo>
-                    <a:pt x="2014223" y="514867"/>
-                  </a:lnTo>
-                  <a:lnTo>
-                    <a:pt x="2091857" y="531086"/>
-                  </a:lnTo>
-                  <a:lnTo>
-                    <a:pt x="2169491" y="547072"/>
-                  </a:lnTo>
-                  <a:lnTo>
-                    <a:pt x="2247125" y="562827"/>
-                  </a:lnTo>
-                  <a:lnTo>
-                    <a:pt x="2324759" y="578355"/>
-                  </a:lnTo>
-                  <a:lnTo>
-                    <a:pt x="2402393" y="593659"/>
-                  </a:lnTo>
-                  <a:lnTo>
-                    <a:pt x="2480027" y="608742"/>
-                  </a:lnTo>
-                  <a:lnTo>
-                    <a:pt x="2557661" y="623607"/>
-                  </a:lnTo>
-                  <a:lnTo>
-                    <a:pt x="2635295" y="638258"/>
-                  </a:lnTo>
-                  <a:lnTo>
-                    <a:pt x="2712930" y="652698"/>
-                  </a:lnTo>
-                  <a:lnTo>
-                    <a:pt x="2790564" y="666929"/>
-                  </a:lnTo>
-                  <a:lnTo>
-                    <a:pt x="2868198" y="680955"/>
-                  </a:lnTo>
-                  <a:lnTo>
-                    <a:pt x="2945832" y="694778"/>
-                  </a:lnTo>
-                  <a:lnTo>
-                    <a:pt x="3023466" y="708403"/>
-                  </a:lnTo>
-                  <a:lnTo>
-                    <a:pt x="3101100" y="721830"/>
-                  </a:lnTo>
-                  <a:lnTo>
-                    <a:pt x="3178734" y="735064"/>
-                  </a:lnTo>
-                  <a:lnTo>
-                    <a:pt x="3256368" y="748107"/>
-                  </a:lnTo>
-                  <a:lnTo>
-                    <a:pt x="3334002" y="760962"/>
-                  </a:lnTo>
-                  <a:lnTo>
-                    <a:pt x="3411636" y="773632"/>
-                  </a:lnTo>
-                  <a:lnTo>
-                    <a:pt x="3489270" y="786118"/>
-                  </a:lnTo>
-                  <a:lnTo>
-                    <a:pt x="3566904" y="798425"/>
-                  </a:lnTo>
-                  <a:lnTo>
-                    <a:pt x="3644538" y="810554"/>
-                  </a:lnTo>
-                  <a:lnTo>
-                    <a:pt x="3722172" y="822508"/>
-                  </a:lnTo>
-                  <a:lnTo>
-                    <a:pt x="3799806" y="834289"/>
-                  </a:lnTo>
-                  <a:lnTo>
-                    <a:pt x="3877440" y="845901"/>
-                  </a:lnTo>
-                  <a:lnTo>
-                    <a:pt x="3955074" y="857345"/>
-                  </a:lnTo>
-                  <a:lnTo>
-                    <a:pt x="4032708" y="868624"/>
-                  </a:lnTo>
-                  <a:lnTo>
-                    <a:pt x="4110342" y="879740"/>
-                  </a:lnTo>
-                  <a:lnTo>
-                    <a:pt x="4187976" y="890696"/>
-                  </a:lnTo>
-                  <a:lnTo>
-                    <a:pt x="4265610" y="901494"/>
-                  </a:lnTo>
-                  <a:lnTo>
-                    <a:pt x="4343244" y="912136"/>
-                  </a:lnTo>
-                  <a:lnTo>
-                    <a:pt x="4420879" y="922624"/>
-                  </a:lnTo>
-                  <a:lnTo>
-                    <a:pt x="4498513" y="932961"/>
-                  </a:lnTo>
-                  <a:lnTo>
-                    <a:pt x="4576147" y="943149"/>
-                  </a:lnTo>
-                  <a:lnTo>
-                    <a:pt x="4653781" y="953190"/>
-                  </a:lnTo>
-                  <a:lnTo>
-                    <a:pt x="4731415" y="963087"/>
-                  </a:lnTo>
-                  <a:lnTo>
-                    <a:pt x="4809049" y="972840"/>
-                  </a:lnTo>
-                  <a:lnTo>
-                    <a:pt x="4886683" y="982453"/>
-                  </a:lnTo>
-                  <a:lnTo>
-                    <a:pt x="4964317" y="991927"/>
-                  </a:lnTo>
-                  <a:lnTo>
-                    <a:pt x="5041951" y="1001264"/>
-                  </a:lnTo>
-                  <a:lnTo>
-                    <a:pt x="5119585" y="1010467"/>
-                  </a:lnTo>
-                  <a:lnTo>
-                    <a:pt x="5197219" y="1019537"/>
-                  </a:lnTo>
-                  <a:lnTo>
-                    <a:pt x="5274853" y="1028476"/>
-                  </a:lnTo>
-                  <a:lnTo>
-                    <a:pt x="5352487" y="1037286"/>
-                  </a:lnTo>
-                  <a:lnTo>
-                    <a:pt x="5430121" y="1045969"/>
-                  </a:lnTo>
-                  <a:lnTo>
-                    <a:pt x="5507755" y="1054527"/>
-                  </a:lnTo>
-                  <a:lnTo>
-                    <a:pt x="5585389" y="1062961"/>
-                  </a:lnTo>
-                  <a:lnTo>
-                    <a:pt x="5663023" y="1071274"/>
-                  </a:lnTo>
-                  <a:lnTo>
-                    <a:pt x="5740657" y="1079467"/>
-                  </a:lnTo>
-                  <a:lnTo>
-                    <a:pt x="5818291" y="1087541"/>
-                  </a:lnTo>
-                  <a:lnTo>
-                    <a:pt x="5895925" y="1095499"/>
-                  </a:lnTo>
-                  <a:lnTo>
-                    <a:pt x="5973559" y="1103343"/>
-                  </a:lnTo>
-                  <a:lnTo>
-                    <a:pt x="6051193" y="1111073"/>
-                  </a:lnTo>
-                  <a:lnTo>
-                    <a:pt x="6128827" y="1118691"/>
-                  </a:lnTo>
-                  <a:lnTo>
-                    <a:pt x="6206462" y="1126200"/>
-                  </a:lnTo>
-                  <a:lnTo>
-                    <a:pt x="6284096" y="1133600"/>
-                  </a:lnTo>
-                  <a:lnTo>
-                    <a:pt x="6361730" y="1140894"/>
-                  </a:lnTo>
-                  <a:lnTo>
-                    <a:pt x="6439364" y="1148082"/>
-                  </a:lnTo>
-                  <a:lnTo>
-                    <a:pt x="6516998" y="1155167"/>
-                  </a:lnTo>
-                  <a:lnTo>
-                    <a:pt x="6594632" y="1162149"/>
-                  </a:lnTo>
-                  <a:lnTo>
-                    <a:pt x="6672266" y="1169031"/>
-                  </a:lnTo>
-                  <a:lnTo>
-                    <a:pt x="6749900" y="1175813"/>
-                  </a:lnTo>
-                  <a:lnTo>
-                    <a:pt x="6827534" y="1182498"/>
-                  </a:lnTo>
-                  <a:lnTo>
-                    <a:pt x="6905168" y="1189086"/>
-                  </a:lnTo>
-                  <a:lnTo>
-                    <a:pt x="6982802" y="1195579"/>
-                  </a:lnTo>
-                  <a:lnTo>
-                    <a:pt x="7060436" y="1201979"/>
-                  </a:lnTo>
-                  <a:lnTo>
-                    <a:pt x="7138070" y="1208286"/>
-                  </a:lnTo>
-                  <a:lnTo>
-                    <a:pt x="7215704" y="1214502"/>
-                  </a:lnTo>
-                  <a:lnTo>
-                    <a:pt x="7293338" y="1220628"/>
-                  </a:lnTo>
-                  <a:lnTo>
-                    <a:pt x="7370972" y="1226666"/>
+                    <a:pt x="73372" y="15659"/>
+                  </a:lnTo>
+                  <a:lnTo>
+                    <a:pt x="151006" y="32038"/>
+                  </a:lnTo>
+                  <a:lnTo>
+                    <a:pt x="228640" y="48229"/>
+                  </a:lnTo>
+                  <a:lnTo>
+                    <a:pt x="306274" y="64233"/>
+                  </a:lnTo>
+                  <a:lnTo>
+                    <a:pt x="383908" y="80053"/>
+                  </a:lnTo>
+                  <a:lnTo>
+                    <a:pt x="461542" y="95692"/>
+                  </a:lnTo>
+                  <a:lnTo>
+                    <a:pt x="539176" y="111151"/>
+                  </a:lnTo>
+                  <a:lnTo>
+                    <a:pt x="616810" y="126431"/>
+                  </a:lnTo>
+                  <a:lnTo>
+                    <a:pt x="694444" y="141537"/>
+                  </a:lnTo>
+                  <a:lnTo>
+                    <a:pt x="772078" y="156468"/>
+                  </a:lnTo>
+                  <a:lnTo>
+                    <a:pt x="849712" y="171228"/>
+                  </a:lnTo>
+                  <a:lnTo>
+                    <a:pt x="927346" y="185818"/>
+                  </a:lnTo>
+                  <a:lnTo>
+                    <a:pt x="1004981" y="200241"/>
+                  </a:lnTo>
+                  <a:lnTo>
+                    <a:pt x="1082615" y="214497"/>
+                  </a:lnTo>
+                  <a:lnTo>
+                    <a:pt x="1160249" y="228590"/>
+                  </a:lnTo>
+                  <a:lnTo>
+                    <a:pt x="1237883" y="242520"/>
+                  </a:lnTo>
+                  <a:lnTo>
+                    <a:pt x="1315517" y="256291"/>
+                  </a:lnTo>
+                  <a:lnTo>
+                    <a:pt x="1393151" y="269903"/>
+                  </a:lnTo>
+                  <a:lnTo>
+                    <a:pt x="1470785" y="283359"/>
+                  </a:lnTo>
+                  <a:lnTo>
+                    <a:pt x="1548419" y="296660"/>
+                  </a:lnTo>
+                  <a:lnTo>
+                    <a:pt x="1626053" y="309807"/>
+                  </a:lnTo>
+                  <a:lnTo>
+                    <a:pt x="1703687" y="322804"/>
+                  </a:lnTo>
+                  <a:lnTo>
+                    <a:pt x="1781321" y="335652"/>
+                  </a:lnTo>
+                  <a:lnTo>
+                    <a:pt x="1858955" y="348351"/>
+                  </a:lnTo>
+                  <a:lnTo>
+                    <a:pt x="1936589" y="360905"/>
+                  </a:lnTo>
+                  <a:lnTo>
+                    <a:pt x="2014223" y="373314"/>
+                  </a:lnTo>
+                  <a:lnTo>
+                    <a:pt x="2091857" y="385581"/>
+                  </a:lnTo>
+                  <a:lnTo>
+                    <a:pt x="2169491" y="397706"/>
+                  </a:lnTo>
+                  <a:lnTo>
+                    <a:pt x="2247125" y="409693"/>
+                  </a:lnTo>
+                  <a:lnTo>
+                    <a:pt x="2324759" y="421541"/>
+                  </a:lnTo>
+                  <a:lnTo>
+                    <a:pt x="2402393" y="433253"/>
+                  </a:lnTo>
+                  <a:lnTo>
+                    <a:pt x="2480027" y="444830"/>
+                  </a:lnTo>
+                  <a:lnTo>
+                    <a:pt x="2557661" y="456275"/>
+                  </a:lnTo>
+                  <a:lnTo>
+                    <a:pt x="2635295" y="467588"/>
+                  </a:lnTo>
+                  <a:lnTo>
+                    <a:pt x="2712930" y="478770"/>
+                  </a:lnTo>
+                  <a:lnTo>
+                    <a:pt x="2790564" y="489824"/>
+                  </a:lnTo>
+                  <a:lnTo>
+                    <a:pt x="2868198" y="500751"/>
+                  </a:lnTo>
+                  <a:lnTo>
+                    <a:pt x="2945832" y="511553"/>
+                  </a:lnTo>
+                  <a:lnTo>
+                    <a:pt x="3023466" y="522230"/>
+                  </a:lnTo>
+                  <a:lnTo>
+                    <a:pt x="3101100" y="532784"/>
+                  </a:lnTo>
+                  <a:lnTo>
+                    <a:pt x="3178734" y="543217"/>
+                  </a:lnTo>
+                  <a:lnTo>
+                    <a:pt x="3256368" y="553531"/>
+                  </a:lnTo>
+                  <a:lnTo>
+                    <a:pt x="3334002" y="563725"/>
+                  </a:lnTo>
+                  <a:lnTo>
+                    <a:pt x="3411636" y="573802"/>
+                  </a:lnTo>
+                  <a:lnTo>
+                    <a:pt x="3489270" y="583764"/>
+                  </a:lnTo>
+                  <a:lnTo>
+                    <a:pt x="3566904" y="593611"/>
+                  </a:lnTo>
+                  <a:lnTo>
+                    <a:pt x="3644538" y="603344"/>
+                  </a:lnTo>
+                  <a:lnTo>
+                    <a:pt x="3722172" y="612966"/>
+                  </a:lnTo>
+                  <a:lnTo>
+                    <a:pt x="3799806" y="622477"/>
+                  </a:lnTo>
+                  <a:lnTo>
+                    <a:pt x="3877440" y="631879"/>
+                  </a:lnTo>
+                  <a:lnTo>
+                    <a:pt x="3955074" y="641173"/>
+                  </a:lnTo>
+                  <a:lnTo>
+                    <a:pt x="4032708" y="650360"/>
+                  </a:lnTo>
+                  <a:lnTo>
+                    <a:pt x="4110342" y="659441"/>
+                  </a:lnTo>
+                  <a:lnTo>
+                    <a:pt x="4187976" y="668418"/>
+                  </a:lnTo>
+                  <a:lnTo>
+                    <a:pt x="4265610" y="677291"/>
+                  </a:lnTo>
+                  <a:lnTo>
+                    <a:pt x="4343244" y="686063"/>
+                  </a:lnTo>
+                  <a:lnTo>
+                    <a:pt x="4420879" y="694734"/>
+                  </a:lnTo>
+                  <a:lnTo>
+                    <a:pt x="4498513" y="703305"/>
+                  </a:lnTo>
+                  <a:lnTo>
+                    <a:pt x="4576147" y="711777"/>
+                  </a:lnTo>
+                  <a:lnTo>
+                    <a:pt x="4653781" y="720152"/>
+                  </a:lnTo>
+                  <a:lnTo>
+                    <a:pt x="4731415" y="728431"/>
+                  </a:lnTo>
+                  <a:lnTo>
+                    <a:pt x="4809049" y="736614"/>
+                  </a:lnTo>
+                  <a:lnTo>
+                    <a:pt x="4886683" y="744704"/>
+                  </a:lnTo>
+                  <a:lnTo>
+                    <a:pt x="4964317" y="752700"/>
+                  </a:lnTo>
+                  <a:lnTo>
+                    <a:pt x="5041951" y="760605"/>
+                  </a:lnTo>
+                  <a:lnTo>
+                    <a:pt x="5119585" y="768419"/>
+                  </a:lnTo>
+                  <a:lnTo>
+                    <a:pt x="5197219" y="776142"/>
+                  </a:lnTo>
+                  <a:lnTo>
+                    <a:pt x="5274853" y="783777"/>
+                  </a:lnTo>
+                  <a:lnTo>
+                    <a:pt x="5352487" y="791325"/>
+                  </a:lnTo>
+                  <a:lnTo>
+                    <a:pt x="5430121" y="798785"/>
+                  </a:lnTo>
+                  <a:lnTo>
+                    <a:pt x="5507755" y="806160"/>
+                  </a:lnTo>
+                  <a:lnTo>
+                    <a:pt x="5585389" y="813450"/>
+                  </a:lnTo>
+                  <a:lnTo>
+                    <a:pt x="5663023" y="820656"/>
+                  </a:lnTo>
+                  <a:lnTo>
+                    <a:pt x="5740657" y="827779"/>
+                  </a:lnTo>
+                  <a:lnTo>
+                    <a:pt x="5818291" y="834820"/>
+                  </a:lnTo>
+                  <a:lnTo>
+                    <a:pt x="5895925" y="841780"/>
+                  </a:lnTo>
+                  <a:lnTo>
+                    <a:pt x="5973559" y="848661"/>
+                  </a:lnTo>
+                  <a:lnTo>
+                    <a:pt x="6051193" y="855462"/>
+                  </a:lnTo>
+                  <a:lnTo>
+                    <a:pt x="6128827" y="862185"/>
+                  </a:lnTo>
+                  <a:lnTo>
+                    <a:pt x="6206462" y="868831"/>
+                  </a:lnTo>
+                  <a:lnTo>
+                    <a:pt x="6284096" y="875400"/>
+                  </a:lnTo>
+                  <a:lnTo>
+                    <a:pt x="6361730" y="881894"/>
+                  </a:lnTo>
+                  <a:lnTo>
+                    <a:pt x="6439364" y="888313"/>
+                  </a:lnTo>
+                  <a:lnTo>
+                    <a:pt x="6516998" y="894658"/>
+                  </a:lnTo>
+                  <a:lnTo>
+                    <a:pt x="6594632" y="900930"/>
+                  </a:lnTo>
+                  <a:lnTo>
+                    <a:pt x="6672266" y="907131"/>
+                  </a:lnTo>
+                  <a:lnTo>
+                    <a:pt x="6749900" y="913260"/>
+                  </a:lnTo>
+                  <a:lnTo>
+                    <a:pt x="6827534" y="919318"/>
+                  </a:lnTo>
+                  <a:lnTo>
+                    <a:pt x="6905168" y="925307"/>
+                  </a:lnTo>
+                  <a:lnTo>
+                    <a:pt x="6982802" y="931227"/>
+                  </a:lnTo>
+                  <a:lnTo>
+                    <a:pt x="7060436" y="937079"/>
+                  </a:lnTo>
+                  <a:lnTo>
+                    <a:pt x="7138070" y="942863"/>
+                  </a:lnTo>
+                  <a:lnTo>
+                    <a:pt x="7215704" y="948581"/>
+                  </a:lnTo>
+                  <a:lnTo>
+                    <a:pt x="7293338" y="954234"/>
+                  </a:lnTo>
+                  <a:lnTo>
+                    <a:pt x="7370972" y="959821"/>
                   </a:lnTo>
                 </a:path>
               </a:pathLst>

--- a/docs/plots/carbo/jx_carbo_linsubhr_ratio_hosp_immune_other.pptx
+++ b/docs/plots/carbo/jx_carbo_linsubhr_ratio_hosp_immune_other.pptx
@@ -3003,563 +3003,557 @@
           <p:spPr>
             <a:xfrm>
               <a:off x="817517" y="1896563"/>
-              <a:ext cx="7370972" cy="3547410"/>
+              <a:ext cx="7370972" cy="3560123"/>
             </a:xfrm>
             <a:custGeom>
               <a:avLst/>
               <a:pathLst>
-                <a:path w="7370972" h="3547410">
+                <a:path w="7370972" h="3560123">
                   <a:moveTo>
-                    <a:pt x="678696" y="0"/>
+                    <a:pt x="834295" y="0"/>
                   </a:moveTo>
                   <a:lnTo>
-                    <a:pt x="694444" y="30860"/>
-                  </a:lnTo>
-                  <a:lnTo>
-                    <a:pt x="772078" y="176857"/>
-                  </a:lnTo>
-                  <a:lnTo>
-                    <a:pt x="849712" y="316969"/>
-                  </a:lnTo>
-                  <a:lnTo>
-                    <a:pt x="927346" y="451433"/>
-                  </a:lnTo>
-                  <a:lnTo>
-                    <a:pt x="1004981" y="580476"/>
-                  </a:lnTo>
-                  <a:lnTo>
-                    <a:pt x="1082615" y="704318"/>
-                  </a:lnTo>
-                  <a:lnTo>
-                    <a:pt x="1160249" y="823168"/>
-                  </a:lnTo>
-                  <a:lnTo>
-                    <a:pt x="1237883" y="937226"/>
-                  </a:lnTo>
-                  <a:lnTo>
-                    <a:pt x="1315517" y="1046687"/>
-                  </a:lnTo>
-                  <a:lnTo>
-                    <a:pt x="1393151" y="1151735"/>
-                  </a:lnTo>
-                  <a:lnTo>
-                    <a:pt x="1470785" y="1252549"/>
-                  </a:lnTo>
-                  <a:lnTo>
-                    <a:pt x="1548419" y="1349299"/>
-                  </a:lnTo>
-                  <a:lnTo>
-                    <a:pt x="1626053" y="1442149"/>
-                  </a:lnTo>
-                  <a:lnTo>
-                    <a:pt x="1703687" y="1531255"/>
-                  </a:lnTo>
-                  <a:lnTo>
-                    <a:pt x="1781321" y="1616770"/>
-                  </a:lnTo>
-                  <a:lnTo>
-                    <a:pt x="1858955" y="1698838"/>
-                  </a:lnTo>
-                  <a:lnTo>
-                    <a:pt x="1936589" y="1777598"/>
-                  </a:lnTo>
-                  <a:lnTo>
-                    <a:pt x="2014223" y="1853182"/>
-                  </a:lnTo>
-                  <a:lnTo>
-                    <a:pt x="2091857" y="1925720"/>
-                  </a:lnTo>
-                  <a:lnTo>
-                    <a:pt x="2169491" y="1995334"/>
-                  </a:lnTo>
-                  <a:lnTo>
-                    <a:pt x="2247125" y="2062142"/>
-                  </a:lnTo>
-                  <a:lnTo>
-                    <a:pt x="2324759" y="2126256"/>
-                  </a:lnTo>
-                  <a:lnTo>
-                    <a:pt x="2402393" y="2187786"/>
-                  </a:lnTo>
-                  <a:lnTo>
-                    <a:pt x="2480027" y="2246836"/>
-                  </a:lnTo>
-                  <a:lnTo>
-                    <a:pt x="2557661" y="2303505"/>
-                  </a:lnTo>
-                  <a:lnTo>
-                    <a:pt x="2635295" y="2357890"/>
-                  </a:lnTo>
-                  <a:lnTo>
-                    <a:pt x="2712930" y="2410082"/>
-                  </a:lnTo>
-                  <a:lnTo>
-                    <a:pt x="2790564" y="2460171"/>
-                  </a:lnTo>
-                  <a:lnTo>
-                    <a:pt x="2868198" y="2508241"/>
-                  </a:lnTo>
-                  <a:lnTo>
-                    <a:pt x="2945832" y="2554373"/>
-                  </a:lnTo>
-                  <a:lnTo>
-                    <a:pt x="3023466" y="2598645"/>
-                  </a:lnTo>
-                  <a:lnTo>
-                    <a:pt x="3101100" y="2641132"/>
-                  </a:lnTo>
-                  <a:lnTo>
-                    <a:pt x="3178734" y="2681907"/>
-                  </a:lnTo>
-                  <a:lnTo>
-                    <a:pt x="3256368" y="2721038"/>
-                  </a:lnTo>
-                  <a:lnTo>
-                    <a:pt x="3334002" y="2758592"/>
-                  </a:lnTo>
-                  <a:lnTo>
-                    <a:pt x="3411636" y="2777808"/>
-                  </a:lnTo>
-                  <a:lnTo>
-                    <a:pt x="3489270" y="2761903"/>
-                  </a:lnTo>
-                  <a:lnTo>
-                    <a:pt x="3566904" y="2745709"/>
-                  </a:lnTo>
-                  <a:lnTo>
-                    <a:pt x="3644538" y="2729221"/>
-                  </a:lnTo>
-                  <a:lnTo>
-                    <a:pt x="3722172" y="2712433"/>
-                  </a:lnTo>
-                  <a:lnTo>
-                    <a:pt x="3799806" y="2695339"/>
-                  </a:lnTo>
-                  <a:lnTo>
-                    <a:pt x="3877440" y="2677935"/>
-                  </a:lnTo>
-                  <a:lnTo>
-                    <a:pt x="3955074" y="2660214"/>
-                  </a:lnTo>
-                  <a:lnTo>
-                    <a:pt x="4032708" y="2642172"/>
-                  </a:lnTo>
-                  <a:lnTo>
-                    <a:pt x="4110342" y="2623801"/>
-                  </a:lnTo>
-                  <a:lnTo>
-                    <a:pt x="4187976" y="2605096"/>
-                  </a:lnTo>
-                  <a:lnTo>
-                    <a:pt x="4265610" y="2586051"/>
-                  </a:lnTo>
-                  <a:lnTo>
-                    <a:pt x="4343244" y="2566660"/>
-                  </a:lnTo>
-                  <a:lnTo>
-                    <a:pt x="4420879" y="2546916"/>
-                  </a:lnTo>
-                  <a:lnTo>
-                    <a:pt x="4498513" y="2526814"/>
-                  </a:lnTo>
-                  <a:lnTo>
-                    <a:pt x="4576147" y="2506346"/>
-                  </a:lnTo>
-                  <a:lnTo>
-                    <a:pt x="4653781" y="2485506"/>
-                  </a:lnTo>
-                  <a:lnTo>
-                    <a:pt x="4731415" y="2464287"/>
-                  </a:lnTo>
-                  <a:lnTo>
-                    <a:pt x="4809049" y="2442682"/>
-                  </a:lnTo>
-                  <a:lnTo>
-                    <a:pt x="4886683" y="2420684"/>
-                  </a:lnTo>
-                  <a:lnTo>
-                    <a:pt x="4964317" y="2398287"/>
-                  </a:lnTo>
-                  <a:lnTo>
-                    <a:pt x="5041951" y="2375482"/>
-                  </a:lnTo>
-                  <a:lnTo>
-                    <a:pt x="5119585" y="2352263"/>
-                  </a:lnTo>
-                  <a:lnTo>
-                    <a:pt x="5197219" y="2328621"/>
-                  </a:lnTo>
-                  <a:lnTo>
-                    <a:pt x="5274853" y="2304550"/>
-                  </a:lnTo>
-                  <a:lnTo>
-                    <a:pt x="5352487" y="2280041"/>
-                  </a:lnTo>
-                  <a:lnTo>
-                    <a:pt x="5430121" y="2255087"/>
-                  </a:lnTo>
-                  <a:lnTo>
-                    <a:pt x="5507755" y="2229678"/>
-                  </a:lnTo>
-                  <a:lnTo>
-                    <a:pt x="5585389" y="2203808"/>
-                  </a:lnTo>
-                  <a:lnTo>
-                    <a:pt x="5663023" y="2177468"/>
-                  </a:lnTo>
-                  <a:lnTo>
-                    <a:pt x="5740657" y="2150649"/>
-                  </a:lnTo>
-                  <a:lnTo>
-                    <a:pt x="5818291" y="2123342"/>
-                  </a:lnTo>
-                  <a:lnTo>
-                    <a:pt x="5895925" y="2095538"/>
-                  </a:lnTo>
-                  <a:lnTo>
-                    <a:pt x="5973559" y="2067230"/>
-                  </a:lnTo>
-                  <a:lnTo>
-                    <a:pt x="6051193" y="2038406"/>
-                  </a:lnTo>
-                  <a:lnTo>
-                    <a:pt x="6128827" y="2009059"/>
-                  </a:lnTo>
-                  <a:lnTo>
-                    <a:pt x="6206462" y="1979178"/>
-                  </a:lnTo>
-                  <a:lnTo>
-                    <a:pt x="6284096" y="1948753"/>
-                  </a:lnTo>
-                  <a:lnTo>
-                    <a:pt x="6361730" y="1917776"/>
-                  </a:lnTo>
-                  <a:lnTo>
-                    <a:pt x="6439364" y="1886235"/>
-                  </a:lnTo>
-                  <a:lnTo>
-                    <a:pt x="6516998" y="1854121"/>
-                  </a:lnTo>
-                  <a:lnTo>
-                    <a:pt x="6594632" y="1821423"/>
-                  </a:lnTo>
-                  <a:lnTo>
-                    <a:pt x="6672266" y="1788131"/>
-                  </a:lnTo>
-                  <a:lnTo>
-                    <a:pt x="6749900" y="1754234"/>
-                  </a:lnTo>
-                  <a:lnTo>
-                    <a:pt x="6827534" y="1719720"/>
-                  </a:lnTo>
-                  <a:lnTo>
-                    <a:pt x="6905168" y="1684578"/>
-                  </a:lnTo>
-                  <a:lnTo>
-                    <a:pt x="6982802" y="1648798"/>
-                  </a:lnTo>
-                  <a:lnTo>
-                    <a:pt x="7060436" y="1612367"/>
-                  </a:lnTo>
-                  <a:lnTo>
-                    <a:pt x="7138070" y="1575274"/>
-                  </a:lnTo>
-                  <a:lnTo>
-                    <a:pt x="7215704" y="1537507"/>
-                  </a:lnTo>
-                  <a:lnTo>
-                    <a:pt x="7293338" y="1499053"/>
-                  </a:lnTo>
-                  <a:lnTo>
-                    <a:pt x="7370972" y="1459900"/>
-                  </a:lnTo>
-                  <a:lnTo>
-                    <a:pt x="7370972" y="3547410"/>
-                  </a:lnTo>
-                  <a:lnTo>
-                    <a:pt x="7293338" y="3542990"/>
-                  </a:lnTo>
-                  <a:lnTo>
-                    <a:pt x="7215704" y="3538384"/>
-                  </a:lnTo>
-                  <a:lnTo>
-                    <a:pt x="7138070" y="3533585"/>
-                  </a:lnTo>
-                  <a:lnTo>
-                    <a:pt x="7060436" y="3528584"/>
-                  </a:lnTo>
-                  <a:lnTo>
-                    <a:pt x="6982802" y="3523373"/>
-                  </a:lnTo>
-                  <a:lnTo>
-                    <a:pt x="6905168" y="3517943"/>
-                  </a:lnTo>
-                  <a:lnTo>
-                    <a:pt x="6827534" y="3512285"/>
-                  </a:lnTo>
-                  <a:lnTo>
-                    <a:pt x="6749900" y="3506389"/>
-                  </a:lnTo>
-                  <a:lnTo>
-                    <a:pt x="6672266" y="3500246"/>
-                  </a:lnTo>
-                  <a:lnTo>
-                    <a:pt x="6594632" y="3493845"/>
-                  </a:lnTo>
-                  <a:lnTo>
-                    <a:pt x="6516998" y="3487174"/>
-                  </a:lnTo>
-                  <a:lnTo>
-                    <a:pt x="6439364" y="3480224"/>
-                  </a:lnTo>
-                  <a:lnTo>
-                    <a:pt x="6361730" y="3472982"/>
-                  </a:lnTo>
-                  <a:lnTo>
-                    <a:pt x="6284096" y="3465435"/>
-                  </a:lnTo>
-                  <a:lnTo>
-                    <a:pt x="6206462" y="3457572"/>
-                  </a:lnTo>
-                  <a:lnTo>
-                    <a:pt x="6128827" y="3449378"/>
-                  </a:lnTo>
-                  <a:lnTo>
-                    <a:pt x="6051193" y="3440840"/>
-                  </a:lnTo>
-                  <a:lnTo>
-                    <a:pt x="5973559" y="3431943"/>
-                  </a:lnTo>
-                  <a:lnTo>
-                    <a:pt x="5895925" y="3422673"/>
-                  </a:lnTo>
-                  <a:lnTo>
-                    <a:pt x="5818291" y="3413013"/>
-                  </a:lnTo>
-                  <a:lnTo>
-                    <a:pt x="5740657" y="3402948"/>
-                  </a:lnTo>
-                  <a:lnTo>
-                    <a:pt x="5663023" y="3392460"/>
-                  </a:lnTo>
-                  <a:lnTo>
-                    <a:pt x="5585389" y="3381531"/>
-                  </a:lnTo>
-                  <a:lnTo>
-                    <a:pt x="5507755" y="3370143"/>
-                  </a:lnTo>
-                  <a:lnTo>
-                    <a:pt x="5430121" y="3358277"/>
-                  </a:lnTo>
-                  <a:lnTo>
-                    <a:pt x="5352487" y="3345912"/>
-                  </a:lnTo>
-                  <a:lnTo>
-                    <a:pt x="5274853" y="3333028"/>
-                  </a:lnTo>
-                  <a:lnTo>
-                    <a:pt x="5197219" y="3319603"/>
-                  </a:lnTo>
-                  <a:lnTo>
-                    <a:pt x="5119585" y="3305614"/>
-                  </a:lnTo>
-                  <a:lnTo>
-                    <a:pt x="5041951" y="3291038"/>
-                  </a:lnTo>
-                  <a:lnTo>
-                    <a:pt x="4964317" y="3275849"/>
-                  </a:lnTo>
-                  <a:lnTo>
-                    <a:pt x="4886683" y="3260022"/>
-                  </a:lnTo>
-                  <a:lnTo>
-                    <a:pt x="4809049" y="3243530"/>
-                  </a:lnTo>
-                  <a:lnTo>
-                    <a:pt x="4731415" y="3226346"/>
-                  </a:lnTo>
-                  <a:lnTo>
-                    <a:pt x="4653781" y="3208440"/>
-                  </a:lnTo>
-                  <a:lnTo>
-                    <a:pt x="4576147" y="3189781"/>
-                  </a:lnTo>
-                  <a:lnTo>
-                    <a:pt x="4498513" y="3170339"/>
-                  </a:lnTo>
-                  <a:lnTo>
-                    <a:pt x="4420879" y="3150080"/>
-                  </a:lnTo>
-                  <a:lnTo>
-                    <a:pt x="4343244" y="3128971"/>
-                  </a:lnTo>
-                  <a:lnTo>
-                    <a:pt x="4265610" y="3106974"/>
-                  </a:lnTo>
-                  <a:lnTo>
-                    <a:pt x="4187976" y="3084054"/>
-                  </a:lnTo>
-                  <a:lnTo>
-                    <a:pt x="4110342" y="3060171"/>
-                  </a:lnTo>
-                  <a:lnTo>
-                    <a:pt x="4032708" y="3035285"/>
-                  </a:lnTo>
-                  <a:lnTo>
-                    <a:pt x="3955074" y="3009353"/>
-                  </a:lnTo>
-                  <a:lnTo>
-                    <a:pt x="3877440" y="2982332"/>
-                  </a:lnTo>
-                  <a:lnTo>
-                    <a:pt x="3799806" y="2954176"/>
-                  </a:lnTo>
-                  <a:lnTo>
-                    <a:pt x="3722172" y="2924838"/>
-                  </a:lnTo>
-                  <a:lnTo>
-                    <a:pt x="3644538" y="2894267"/>
-                  </a:lnTo>
-                  <a:lnTo>
-                    <a:pt x="3566904" y="2862412"/>
-                  </a:lnTo>
-                  <a:lnTo>
-                    <a:pt x="3489270" y="2829219"/>
-                  </a:lnTo>
-                  <a:lnTo>
-                    <a:pt x="3411636" y="2794632"/>
-                  </a:lnTo>
-                  <a:lnTo>
-                    <a:pt x="3334002" y="2793429"/>
-                  </a:lnTo>
-                  <a:lnTo>
-                    <a:pt x="3256368" y="2808771"/>
-                  </a:lnTo>
-                  <a:lnTo>
-                    <a:pt x="3178734" y="2823839"/>
-                  </a:lnTo>
-                  <a:lnTo>
-                    <a:pt x="3101100" y="2838638"/>
-                  </a:lnTo>
-                  <a:lnTo>
-                    <a:pt x="3023466" y="2853173"/>
-                  </a:lnTo>
-                  <a:lnTo>
-                    <a:pt x="2945832" y="2867448"/>
-                  </a:lnTo>
-                  <a:lnTo>
-                    <a:pt x="2868198" y="2881468"/>
-                  </a:lnTo>
-                  <a:lnTo>
-                    <a:pt x="2790564" y="2895238"/>
-                  </a:lnTo>
-                  <a:lnTo>
-                    <a:pt x="2712930" y="2908762"/>
-                  </a:lnTo>
-                  <a:lnTo>
-                    <a:pt x="2635295" y="2922045"/>
-                  </a:lnTo>
-                  <a:lnTo>
-                    <a:pt x="2557661" y="2935090"/>
-                  </a:lnTo>
-                  <a:lnTo>
-                    <a:pt x="2480027" y="2947902"/>
-                  </a:lnTo>
-                  <a:lnTo>
-                    <a:pt x="2402393" y="2960486"/>
-                  </a:lnTo>
-                  <a:lnTo>
-                    <a:pt x="2324759" y="2972845"/>
-                  </a:lnTo>
-                  <a:lnTo>
-                    <a:pt x="2247125" y="2984984"/>
-                  </a:lnTo>
-                  <a:lnTo>
-                    <a:pt x="2169491" y="2996905"/>
-                  </a:lnTo>
-                  <a:lnTo>
-                    <a:pt x="2091857" y="3008614"/>
-                  </a:lnTo>
-                  <a:lnTo>
-                    <a:pt x="2014223" y="3020113"/>
-                  </a:lnTo>
-                  <a:lnTo>
-                    <a:pt x="1936589" y="3031408"/>
-                  </a:lnTo>
-                  <a:lnTo>
-                    <a:pt x="1858955" y="3042500"/>
-                  </a:lnTo>
-                  <a:lnTo>
-                    <a:pt x="1781321" y="3053395"/>
-                  </a:lnTo>
-                  <a:lnTo>
-                    <a:pt x="1703687" y="3064095"/>
-                  </a:lnTo>
-                  <a:lnTo>
-                    <a:pt x="1626053" y="3074604"/>
-                  </a:lnTo>
-                  <a:lnTo>
-                    <a:pt x="1548419" y="3084925"/>
-                  </a:lnTo>
-                  <a:lnTo>
-                    <a:pt x="1470785" y="3095062"/>
-                  </a:lnTo>
-                  <a:lnTo>
-                    <a:pt x="1393151" y="3105018"/>
-                  </a:lnTo>
-                  <a:lnTo>
-                    <a:pt x="1315517" y="3114797"/>
-                  </a:lnTo>
-                  <a:lnTo>
-                    <a:pt x="1237883" y="3124400"/>
-                  </a:lnTo>
-                  <a:lnTo>
-                    <a:pt x="1160249" y="3133833"/>
-                  </a:lnTo>
-                  <a:lnTo>
-                    <a:pt x="1082615" y="3143096"/>
-                  </a:lnTo>
-                  <a:lnTo>
-                    <a:pt x="1004981" y="3152195"/>
-                  </a:lnTo>
-                  <a:lnTo>
-                    <a:pt x="927346" y="3161131"/>
-                  </a:lnTo>
-                  <a:lnTo>
-                    <a:pt x="849712" y="3169907"/>
-                  </a:lnTo>
-                  <a:lnTo>
-                    <a:pt x="772078" y="3178527"/>
-                  </a:lnTo>
-                  <a:lnTo>
-                    <a:pt x="694444" y="3186992"/>
-                  </a:lnTo>
-                  <a:lnTo>
-                    <a:pt x="616810" y="3195307"/>
-                  </a:lnTo>
-                  <a:lnTo>
-                    <a:pt x="539176" y="3203473"/>
-                  </a:lnTo>
-                  <a:lnTo>
-                    <a:pt x="461542" y="3211493"/>
-                  </a:lnTo>
-                  <a:lnTo>
-                    <a:pt x="383908" y="3219370"/>
-                  </a:lnTo>
-                  <a:lnTo>
-                    <a:pt x="306274" y="3227107"/>
-                  </a:lnTo>
-                  <a:lnTo>
-                    <a:pt x="228640" y="3234705"/>
-                  </a:lnTo>
-                  <a:lnTo>
-                    <a:pt x="151006" y="3242168"/>
-                  </a:lnTo>
-                  <a:lnTo>
-                    <a:pt x="73372" y="3249497"/>
-                  </a:lnTo>
-                  <a:lnTo>
-                    <a:pt x="0" y="3256300"/>
+                    <a:pt x="849712" y="32083"/>
+                  </a:lnTo>
+                  <a:lnTo>
+                    <a:pt x="927346" y="186736"/>
+                  </a:lnTo>
+                  <a:lnTo>
+                    <a:pt x="1004981" y="334782"/>
+                  </a:lnTo>
+                  <a:lnTo>
+                    <a:pt x="1082615" y="476505"/>
+                  </a:lnTo>
+                  <a:lnTo>
+                    <a:pt x="1160249" y="612174"/>
+                  </a:lnTo>
+                  <a:lnTo>
+                    <a:pt x="1237883" y="742048"/>
+                  </a:lnTo>
+                  <a:lnTo>
+                    <a:pt x="1315517" y="866375"/>
+                  </a:lnTo>
+                  <a:lnTo>
+                    <a:pt x="1393151" y="985390"/>
+                  </a:lnTo>
+                  <a:lnTo>
+                    <a:pt x="1470785" y="1099322"/>
+                  </a:lnTo>
+                  <a:lnTo>
+                    <a:pt x="1548419" y="1208388"/>
+                  </a:lnTo>
+                  <a:lnTo>
+                    <a:pt x="1626053" y="1312795"/>
+                  </a:lnTo>
+                  <a:lnTo>
+                    <a:pt x="1703687" y="1412741"/>
+                  </a:lnTo>
+                  <a:lnTo>
+                    <a:pt x="1781321" y="1508419"/>
+                  </a:lnTo>
+                  <a:lnTo>
+                    <a:pt x="1858955" y="1600010"/>
+                  </a:lnTo>
+                  <a:lnTo>
+                    <a:pt x="1936589" y="1687688"/>
+                  </a:lnTo>
+                  <a:lnTo>
+                    <a:pt x="2014223" y="1771622"/>
+                  </a:lnTo>
+                  <a:lnTo>
+                    <a:pt x="2091857" y="1851970"/>
+                  </a:lnTo>
+                  <a:lnTo>
+                    <a:pt x="2169491" y="1928886"/>
+                  </a:lnTo>
+                  <a:lnTo>
+                    <a:pt x="2247125" y="2002516"/>
+                  </a:lnTo>
+                  <a:lnTo>
+                    <a:pt x="2324759" y="2073002"/>
+                  </a:lnTo>
+                  <a:lnTo>
+                    <a:pt x="2402393" y="2140476"/>
+                  </a:lnTo>
+                  <a:lnTo>
+                    <a:pt x="2480027" y="2205069"/>
+                  </a:lnTo>
+                  <a:lnTo>
+                    <a:pt x="2557661" y="2266902"/>
+                  </a:lnTo>
+                  <a:lnTo>
+                    <a:pt x="2635295" y="2326094"/>
+                  </a:lnTo>
+                  <a:lnTo>
+                    <a:pt x="2712930" y="2382758"/>
+                  </a:lnTo>
+                  <a:lnTo>
+                    <a:pt x="2790564" y="2437001"/>
+                  </a:lnTo>
+                  <a:lnTo>
+                    <a:pt x="2868198" y="2488927"/>
+                  </a:lnTo>
+                  <a:lnTo>
+                    <a:pt x="2945832" y="2538636"/>
+                  </a:lnTo>
+                  <a:lnTo>
+                    <a:pt x="3023466" y="2586221"/>
+                  </a:lnTo>
+                  <a:lnTo>
+                    <a:pt x="3101100" y="2631773"/>
+                  </a:lnTo>
+                  <a:lnTo>
+                    <a:pt x="3178734" y="2675380"/>
+                  </a:lnTo>
+                  <a:lnTo>
+                    <a:pt x="3256368" y="2717124"/>
+                  </a:lnTo>
+                  <a:lnTo>
+                    <a:pt x="3334002" y="2757084"/>
+                  </a:lnTo>
+                  <a:lnTo>
+                    <a:pt x="3411636" y="2775079"/>
+                  </a:lnTo>
+                  <a:lnTo>
+                    <a:pt x="3489270" y="2750604"/>
+                  </a:lnTo>
+                  <a:lnTo>
+                    <a:pt x="3566904" y="2725446"/>
+                  </a:lnTo>
+                  <a:lnTo>
+                    <a:pt x="3644538" y="2699587"/>
+                  </a:lnTo>
+                  <a:lnTo>
+                    <a:pt x="3722172" y="2673007"/>
+                  </a:lnTo>
+                  <a:lnTo>
+                    <a:pt x="3799806" y="2645685"/>
+                  </a:lnTo>
+                  <a:lnTo>
+                    <a:pt x="3877440" y="2617601"/>
+                  </a:lnTo>
+                  <a:lnTo>
+                    <a:pt x="3955074" y="2588734"/>
+                  </a:lnTo>
+                  <a:lnTo>
+                    <a:pt x="4032708" y="2559062"/>
+                  </a:lnTo>
+                  <a:lnTo>
+                    <a:pt x="4110342" y="2528563"/>
+                  </a:lnTo>
+                  <a:lnTo>
+                    <a:pt x="4187976" y="2497213"/>
+                  </a:lnTo>
+                  <a:lnTo>
+                    <a:pt x="4265610" y="2464988"/>
+                  </a:lnTo>
+                  <a:lnTo>
+                    <a:pt x="4343244" y="2431865"/>
+                  </a:lnTo>
+                  <a:lnTo>
+                    <a:pt x="4420879" y="2397818"/>
+                  </a:lnTo>
+                  <a:lnTo>
+                    <a:pt x="4498513" y="2362821"/>
+                  </a:lnTo>
+                  <a:lnTo>
+                    <a:pt x="4576147" y="2326848"/>
+                  </a:lnTo>
+                  <a:lnTo>
+                    <a:pt x="4653781" y="2289873"/>
+                  </a:lnTo>
+                  <a:lnTo>
+                    <a:pt x="4731415" y="2251865"/>
+                  </a:lnTo>
+                  <a:lnTo>
+                    <a:pt x="4809049" y="2212798"/>
+                  </a:lnTo>
+                  <a:lnTo>
+                    <a:pt x="4886683" y="2172641"/>
+                  </a:lnTo>
+                  <a:lnTo>
+                    <a:pt x="4964317" y="2131365"/>
+                  </a:lnTo>
+                  <a:lnTo>
+                    <a:pt x="5041951" y="2088937"/>
+                  </a:lnTo>
+                  <a:lnTo>
+                    <a:pt x="5119585" y="2045326"/>
+                  </a:lnTo>
+                  <a:lnTo>
+                    <a:pt x="5197219" y="2000498"/>
+                  </a:lnTo>
+                  <a:lnTo>
+                    <a:pt x="5274853" y="1954421"/>
+                  </a:lnTo>
+                  <a:lnTo>
+                    <a:pt x="5352487" y="1907058"/>
+                  </a:lnTo>
+                  <a:lnTo>
+                    <a:pt x="5430121" y="1858374"/>
+                  </a:lnTo>
+                  <a:lnTo>
+                    <a:pt x="5507755" y="1808333"/>
+                  </a:lnTo>
+                  <a:lnTo>
+                    <a:pt x="5585389" y="1756895"/>
+                  </a:lnTo>
+                  <a:lnTo>
+                    <a:pt x="5663023" y="1704024"/>
+                  </a:lnTo>
+                  <a:lnTo>
+                    <a:pt x="5740657" y="1649678"/>
+                  </a:lnTo>
+                  <a:lnTo>
+                    <a:pt x="5818291" y="1593816"/>
+                  </a:lnTo>
+                  <a:lnTo>
+                    <a:pt x="5895925" y="1536396"/>
+                  </a:lnTo>
+                  <a:lnTo>
+                    <a:pt x="5973559" y="1477374"/>
+                  </a:lnTo>
+                  <a:lnTo>
+                    <a:pt x="6051193" y="1416707"/>
+                  </a:lnTo>
+                  <a:lnTo>
+                    <a:pt x="6128827" y="1354347"/>
+                  </a:lnTo>
+                  <a:lnTo>
+                    <a:pt x="6206462" y="1290249"/>
+                  </a:lnTo>
+                  <a:lnTo>
+                    <a:pt x="6284096" y="1224363"/>
+                  </a:lnTo>
+                  <a:lnTo>
+                    <a:pt x="6361730" y="1156639"/>
+                  </a:lnTo>
+                  <a:lnTo>
+                    <a:pt x="6439364" y="1087026"/>
+                  </a:lnTo>
+                  <a:lnTo>
+                    <a:pt x="6516998" y="1015472"/>
+                  </a:lnTo>
+                  <a:lnTo>
+                    <a:pt x="6594632" y="941922"/>
+                  </a:lnTo>
+                  <a:lnTo>
+                    <a:pt x="6672266" y="866321"/>
+                  </a:lnTo>
+                  <a:lnTo>
+                    <a:pt x="6749900" y="788612"/>
+                  </a:lnTo>
+                  <a:lnTo>
+                    <a:pt x="6827534" y="708735"/>
+                  </a:lnTo>
+                  <a:lnTo>
+                    <a:pt x="6905168" y="626631"/>
+                  </a:lnTo>
+                  <a:lnTo>
+                    <a:pt x="6982802" y="542236"/>
+                  </a:lnTo>
+                  <a:lnTo>
+                    <a:pt x="7060436" y="455488"/>
+                  </a:lnTo>
+                  <a:lnTo>
+                    <a:pt x="7138070" y="366321"/>
+                  </a:lnTo>
+                  <a:lnTo>
+                    <a:pt x="7215704" y="274667"/>
+                  </a:lnTo>
+                  <a:lnTo>
+                    <a:pt x="7293338" y="180456"/>
+                  </a:lnTo>
+                  <a:lnTo>
+                    <a:pt x="7370972" y="83618"/>
+                  </a:lnTo>
+                  <a:lnTo>
+                    <a:pt x="7370972" y="3560123"/>
+                  </a:lnTo>
+                  <a:lnTo>
+                    <a:pt x="7293338" y="3555995"/>
+                  </a:lnTo>
+                  <a:lnTo>
+                    <a:pt x="7215704" y="3551682"/>
+                  </a:lnTo>
+                  <a:lnTo>
+                    <a:pt x="7138070" y="3547177"/>
+                  </a:lnTo>
+                  <a:lnTo>
+                    <a:pt x="7060436" y="3542471"/>
+                  </a:lnTo>
+                  <a:lnTo>
+                    <a:pt x="6982802" y="3537555"/>
+                  </a:lnTo>
+                  <a:lnTo>
+                    <a:pt x="6905168" y="3532420"/>
+                  </a:lnTo>
+                  <a:lnTo>
+                    <a:pt x="6827534" y="3527055"/>
+                  </a:lnTo>
+                  <a:lnTo>
+                    <a:pt x="6749900" y="3521451"/>
+                  </a:lnTo>
+                  <a:lnTo>
+                    <a:pt x="6672266" y="3515598"/>
+                  </a:lnTo>
+                  <a:lnTo>
+                    <a:pt x="6594632" y="3509482"/>
+                  </a:lnTo>
+                  <a:lnTo>
+                    <a:pt x="6516998" y="3503094"/>
+                  </a:lnTo>
+                  <a:lnTo>
+                    <a:pt x="6439364" y="3496421"/>
+                  </a:lnTo>
+                  <a:lnTo>
+                    <a:pt x="6361730" y="3489451"/>
+                  </a:lnTo>
+                  <a:lnTo>
+                    <a:pt x="6284096" y="3482169"/>
+                  </a:lnTo>
+                  <a:lnTo>
+                    <a:pt x="6206462" y="3474562"/>
+                  </a:lnTo>
+                  <a:lnTo>
+                    <a:pt x="6128827" y="3466616"/>
+                  </a:lnTo>
+                  <a:lnTo>
+                    <a:pt x="6051193" y="3458315"/>
+                  </a:lnTo>
+                  <a:lnTo>
+                    <a:pt x="5973559" y="3449644"/>
+                  </a:lnTo>
+                  <a:lnTo>
+                    <a:pt x="5895925" y="3440586"/>
+                  </a:lnTo>
+                  <a:lnTo>
+                    <a:pt x="5818291" y="3431124"/>
+                  </a:lnTo>
+                  <a:lnTo>
+                    <a:pt x="5740657" y="3421239"/>
+                  </a:lnTo>
+                  <a:lnTo>
+                    <a:pt x="5663023" y="3410914"/>
+                  </a:lnTo>
+                  <a:lnTo>
+                    <a:pt x="5585389" y="3400127"/>
+                  </a:lnTo>
+                  <a:lnTo>
+                    <a:pt x="5507755" y="3388860"/>
+                  </a:lnTo>
+                  <a:lnTo>
+                    <a:pt x="5430121" y="3377089"/>
+                  </a:lnTo>
+                  <a:lnTo>
+                    <a:pt x="5352487" y="3364794"/>
+                  </a:lnTo>
+                  <a:lnTo>
+                    <a:pt x="5274853" y="3351950"/>
+                  </a:lnTo>
+                  <a:lnTo>
+                    <a:pt x="5197219" y="3338532"/>
+                  </a:lnTo>
+                  <a:lnTo>
+                    <a:pt x="5119585" y="3324516"/>
+                  </a:lnTo>
+                  <a:lnTo>
+                    <a:pt x="5041951" y="3309875"/>
+                  </a:lnTo>
+                  <a:lnTo>
+                    <a:pt x="4964317" y="3294580"/>
+                  </a:lnTo>
+                  <a:lnTo>
+                    <a:pt x="4886683" y="3278603"/>
+                  </a:lnTo>
+                  <a:lnTo>
+                    <a:pt x="4809049" y="3261913"/>
+                  </a:lnTo>
+                  <a:lnTo>
+                    <a:pt x="4731415" y="3244478"/>
+                  </a:lnTo>
+                  <a:lnTo>
+                    <a:pt x="4653781" y="3226266"/>
+                  </a:lnTo>
+                  <a:lnTo>
+                    <a:pt x="4576147" y="3207240"/>
+                  </a:lnTo>
+                  <a:lnTo>
+                    <a:pt x="4498513" y="3187366"/>
+                  </a:lnTo>
+                  <a:lnTo>
+                    <a:pt x="4420879" y="3166604"/>
+                  </a:lnTo>
+                  <a:lnTo>
+                    <a:pt x="4343244" y="3144917"/>
+                  </a:lnTo>
+                  <a:lnTo>
+                    <a:pt x="4265610" y="3122262"/>
+                  </a:lnTo>
+                  <a:lnTo>
+                    <a:pt x="4187976" y="3098595"/>
+                  </a:lnTo>
+                  <a:lnTo>
+                    <a:pt x="4110342" y="3073873"/>
+                  </a:lnTo>
+                  <a:lnTo>
+                    <a:pt x="4032708" y="3048048"/>
+                  </a:lnTo>
+                  <a:lnTo>
+                    <a:pt x="3955074" y="3021070"/>
+                  </a:lnTo>
+                  <a:lnTo>
+                    <a:pt x="3877440" y="2992889"/>
+                  </a:lnTo>
+                  <a:lnTo>
+                    <a:pt x="3799806" y="2963450"/>
+                  </a:lnTo>
+                  <a:lnTo>
+                    <a:pt x="3722172" y="2932697"/>
+                  </a:lnTo>
+                  <a:lnTo>
+                    <a:pt x="3644538" y="2900572"/>
+                  </a:lnTo>
+                  <a:lnTo>
+                    <a:pt x="3566904" y="2867014"/>
+                  </a:lnTo>
+                  <a:lnTo>
+                    <a:pt x="3489270" y="2831958"/>
+                  </a:lnTo>
+                  <a:lnTo>
+                    <a:pt x="3411636" y="2795338"/>
+                  </a:lnTo>
+                  <a:lnTo>
+                    <a:pt x="3334002" y="2798890"/>
+                  </a:lnTo>
+                  <a:lnTo>
+                    <a:pt x="3256368" y="2822054"/>
+                  </a:lnTo>
+                  <a:lnTo>
+                    <a:pt x="3178734" y="2844591"/>
+                  </a:lnTo>
+                  <a:lnTo>
+                    <a:pt x="3101100" y="2866515"/>
+                  </a:lnTo>
+                  <a:lnTo>
+                    <a:pt x="3023466" y="2887845"/>
+                  </a:lnTo>
+                  <a:lnTo>
+                    <a:pt x="2945832" y="2908597"/>
+                  </a:lnTo>
+                  <a:lnTo>
+                    <a:pt x="2868198" y="2928785"/>
+                  </a:lnTo>
+                  <a:lnTo>
+                    <a:pt x="2790564" y="2948425"/>
+                  </a:lnTo>
+                  <a:lnTo>
+                    <a:pt x="2712930" y="2967533"/>
+                  </a:lnTo>
+                  <a:lnTo>
+                    <a:pt x="2635295" y="2986122"/>
+                  </a:lnTo>
+                  <a:lnTo>
+                    <a:pt x="2557661" y="3004206"/>
+                  </a:lnTo>
+                  <a:lnTo>
+                    <a:pt x="2480027" y="3021800"/>
+                  </a:lnTo>
+                  <a:lnTo>
+                    <a:pt x="2402393" y="3038917"/>
+                  </a:lnTo>
+                  <a:lnTo>
+                    <a:pt x="2324759" y="3055569"/>
+                  </a:lnTo>
+                  <a:lnTo>
+                    <a:pt x="2247125" y="3071769"/>
+                  </a:lnTo>
+                  <a:lnTo>
+                    <a:pt x="2169491" y="3087530"/>
+                  </a:lnTo>
+                  <a:lnTo>
+                    <a:pt x="2091857" y="3102863"/>
+                  </a:lnTo>
+                  <a:lnTo>
+                    <a:pt x="2014223" y="3117780"/>
+                  </a:lnTo>
+                  <a:lnTo>
+                    <a:pt x="1936589" y="3132293"/>
+                  </a:lnTo>
+                  <a:lnTo>
+                    <a:pt x="1858955" y="3146411"/>
+                  </a:lnTo>
+                  <a:lnTo>
+                    <a:pt x="1781321" y="3160147"/>
+                  </a:lnTo>
+                  <a:lnTo>
+                    <a:pt x="1703687" y="3173510"/>
+                  </a:lnTo>
+                  <a:lnTo>
+                    <a:pt x="1626053" y="3186510"/>
+                  </a:lnTo>
+                  <a:lnTo>
+                    <a:pt x="1548419" y="3199158"/>
+                  </a:lnTo>
+                  <a:lnTo>
+                    <a:pt x="1470785" y="3211462"/>
+                  </a:lnTo>
+                  <a:lnTo>
+                    <a:pt x="1393151" y="3223433"/>
+                  </a:lnTo>
+                  <a:lnTo>
+                    <a:pt x="1315517" y="3235078"/>
+                  </a:lnTo>
+                  <a:lnTo>
+                    <a:pt x="1237883" y="3246408"/>
+                  </a:lnTo>
+                  <a:lnTo>
+                    <a:pt x="1160249" y="3257430"/>
+                  </a:lnTo>
+                  <a:lnTo>
+                    <a:pt x="1082615" y="3268154"/>
+                  </a:lnTo>
+                  <a:lnTo>
+                    <a:pt x="1004981" y="3278586"/>
+                  </a:lnTo>
+                  <a:lnTo>
+                    <a:pt x="927346" y="3288735"/>
+                  </a:lnTo>
+                  <a:lnTo>
+                    <a:pt x="849712" y="3298609"/>
+                  </a:lnTo>
+                  <a:lnTo>
+                    <a:pt x="772078" y="3308215"/>
+                  </a:lnTo>
+                  <a:lnTo>
+                    <a:pt x="694444" y="3317560"/>
+                  </a:lnTo>
+                  <a:lnTo>
+                    <a:pt x="616810" y="3326652"/>
+                  </a:lnTo>
+                  <a:lnTo>
+                    <a:pt x="539176" y="3335497"/>
+                  </a:lnTo>
+                  <a:lnTo>
+                    <a:pt x="461542" y="3344102"/>
+                  </a:lnTo>
+                  <a:lnTo>
+                    <a:pt x="383908" y="3352474"/>
+                  </a:lnTo>
+                  <a:lnTo>
+                    <a:pt x="306274" y="3360618"/>
+                  </a:lnTo>
+                  <a:lnTo>
+                    <a:pt x="228640" y="3368542"/>
+                  </a:lnTo>
+                  <a:lnTo>
+                    <a:pt x="151006" y="3376250"/>
+                  </a:lnTo>
+                  <a:lnTo>
+                    <a:pt x="73372" y="3383750"/>
+                  </a:lnTo>
+                  <a:lnTo>
+                    <a:pt x="0" y="3390645"/>
                   </a:lnTo>
                   <a:close/>
                 </a:path>
@@ -3585,276 +3579,270 @@
           </p:nvSpPr>
           <p:spPr>
             <a:xfrm>
-              <a:off x="1496214" y="1896563"/>
-              <a:ext cx="6692276" cy="2777808"/>
+              <a:off x="1651813" y="1896563"/>
+              <a:ext cx="6536677" cy="2775079"/>
             </a:xfrm>
             <a:custGeom>
               <a:avLst/>
               <a:pathLst>
-                <a:path w="6692276" h="2777808">
+                <a:path w="6536677" h="2775079">
                   <a:moveTo>
                     <a:pt x="0" y="0"/>
                   </a:moveTo>
                   <a:lnTo>
-                    <a:pt x="15748" y="30860"/>
-                  </a:lnTo>
-                  <a:lnTo>
-                    <a:pt x="93382" y="176857"/>
-                  </a:lnTo>
-                  <a:lnTo>
-                    <a:pt x="171016" y="316969"/>
-                  </a:lnTo>
-                  <a:lnTo>
-                    <a:pt x="248650" y="451433"/>
-                  </a:lnTo>
-                  <a:lnTo>
-                    <a:pt x="326284" y="580476"/>
-                  </a:lnTo>
-                  <a:lnTo>
-                    <a:pt x="403918" y="704318"/>
-                  </a:lnTo>
-                  <a:lnTo>
-                    <a:pt x="481552" y="823168"/>
-                  </a:lnTo>
-                  <a:lnTo>
-                    <a:pt x="559186" y="937226"/>
-                  </a:lnTo>
-                  <a:lnTo>
-                    <a:pt x="636820" y="1046687"/>
-                  </a:lnTo>
-                  <a:lnTo>
-                    <a:pt x="714454" y="1151735"/>
-                  </a:lnTo>
-                  <a:lnTo>
-                    <a:pt x="792088" y="1252549"/>
-                  </a:lnTo>
-                  <a:lnTo>
-                    <a:pt x="869723" y="1349299"/>
-                  </a:lnTo>
-                  <a:lnTo>
-                    <a:pt x="947357" y="1442149"/>
-                  </a:lnTo>
-                  <a:lnTo>
-                    <a:pt x="1024991" y="1531255"/>
-                  </a:lnTo>
-                  <a:lnTo>
-                    <a:pt x="1102625" y="1616770"/>
-                  </a:lnTo>
-                  <a:lnTo>
-                    <a:pt x="1180259" y="1698838"/>
-                  </a:lnTo>
-                  <a:lnTo>
-                    <a:pt x="1257893" y="1777598"/>
-                  </a:lnTo>
-                  <a:lnTo>
-                    <a:pt x="1335527" y="1853182"/>
-                  </a:lnTo>
-                  <a:lnTo>
-                    <a:pt x="1413161" y="1925720"/>
-                  </a:lnTo>
-                  <a:lnTo>
-                    <a:pt x="1490795" y="1995334"/>
-                  </a:lnTo>
-                  <a:lnTo>
-                    <a:pt x="1568429" y="2062142"/>
-                  </a:lnTo>
-                  <a:lnTo>
-                    <a:pt x="1646063" y="2126256"/>
-                  </a:lnTo>
-                  <a:lnTo>
-                    <a:pt x="1723697" y="2187786"/>
-                  </a:lnTo>
-                  <a:lnTo>
-                    <a:pt x="1801331" y="2246836"/>
-                  </a:lnTo>
-                  <a:lnTo>
-                    <a:pt x="1878965" y="2303505"/>
-                  </a:lnTo>
-                  <a:lnTo>
-                    <a:pt x="1956599" y="2357890"/>
-                  </a:lnTo>
-                  <a:lnTo>
-                    <a:pt x="2034233" y="2410082"/>
-                  </a:lnTo>
-                  <a:lnTo>
-                    <a:pt x="2111867" y="2460171"/>
-                  </a:lnTo>
-                  <a:lnTo>
-                    <a:pt x="2189501" y="2508241"/>
-                  </a:lnTo>
-                  <a:lnTo>
-                    <a:pt x="2267135" y="2554373"/>
-                  </a:lnTo>
-                  <a:lnTo>
-                    <a:pt x="2344769" y="2598645"/>
-                  </a:lnTo>
-                  <a:lnTo>
-                    <a:pt x="2422403" y="2641132"/>
-                  </a:lnTo>
-                  <a:lnTo>
-                    <a:pt x="2500037" y="2681907"/>
-                  </a:lnTo>
-                  <a:lnTo>
-                    <a:pt x="2577671" y="2721038"/>
-                  </a:lnTo>
-                  <a:lnTo>
-                    <a:pt x="2655306" y="2758592"/>
-                  </a:lnTo>
-                  <a:lnTo>
-                    <a:pt x="2732940" y="2777808"/>
-                  </a:lnTo>
-                  <a:lnTo>
-                    <a:pt x="2810574" y="2761903"/>
-                  </a:lnTo>
-                  <a:lnTo>
-                    <a:pt x="2888208" y="2745709"/>
-                  </a:lnTo>
-                  <a:lnTo>
-                    <a:pt x="2965842" y="2729221"/>
-                  </a:lnTo>
-                  <a:lnTo>
-                    <a:pt x="3043476" y="2712433"/>
-                  </a:lnTo>
-                  <a:lnTo>
-                    <a:pt x="3121110" y="2695339"/>
-                  </a:lnTo>
-                  <a:lnTo>
-                    <a:pt x="3198744" y="2677935"/>
-                  </a:lnTo>
-                  <a:lnTo>
-                    <a:pt x="3276378" y="2660214"/>
-                  </a:lnTo>
-                  <a:lnTo>
-                    <a:pt x="3354012" y="2642172"/>
-                  </a:lnTo>
-                  <a:lnTo>
-                    <a:pt x="3431646" y="2623801"/>
-                  </a:lnTo>
-                  <a:lnTo>
-                    <a:pt x="3509280" y="2605096"/>
-                  </a:lnTo>
-                  <a:lnTo>
-                    <a:pt x="3586914" y="2586051"/>
-                  </a:lnTo>
-                  <a:lnTo>
-                    <a:pt x="3664548" y="2566660"/>
-                  </a:lnTo>
-                  <a:lnTo>
-                    <a:pt x="3742182" y="2546916"/>
-                  </a:lnTo>
-                  <a:lnTo>
-                    <a:pt x="3819816" y="2526814"/>
-                  </a:lnTo>
-                  <a:lnTo>
-                    <a:pt x="3897450" y="2506346"/>
-                  </a:lnTo>
-                  <a:lnTo>
-                    <a:pt x="3975084" y="2485506"/>
-                  </a:lnTo>
-                  <a:lnTo>
-                    <a:pt x="4052718" y="2464287"/>
-                  </a:lnTo>
-                  <a:lnTo>
-                    <a:pt x="4130352" y="2442682"/>
-                  </a:lnTo>
-                  <a:lnTo>
-                    <a:pt x="4207986" y="2420684"/>
-                  </a:lnTo>
-                  <a:lnTo>
-                    <a:pt x="4285620" y="2398287"/>
-                  </a:lnTo>
-                  <a:lnTo>
-                    <a:pt x="4363255" y="2375482"/>
-                  </a:lnTo>
-                  <a:lnTo>
-                    <a:pt x="4440889" y="2352263"/>
-                  </a:lnTo>
-                  <a:lnTo>
-                    <a:pt x="4518523" y="2328621"/>
-                  </a:lnTo>
-                  <a:lnTo>
-                    <a:pt x="4596157" y="2304550"/>
-                  </a:lnTo>
-                  <a:lnTo>
-                    <a:pt x="4673791" y="2280041"/>
-                  </a:lnTo>
-                  <a:lnTo>
-                    <a:pt x="4751425" y="2255087"/>
-                  </a:lnTo>
-                  <a:lnTo>
-                    <a:pt x="4829059" y="2229678"/>
-                  </a:lnTo>
-                  <a:lnTo>
-                    <a:pt x="4906693" y="2203808"/>
-                  </a:lnTo>
-                  <a:lnTo>
-                    <a:pt x="4984327" y="2177468"/>
-                  </a:lnTo>
-                  <a:lnTo>
-                    <a:pt x="5061961" y="2150649"/>
-                  </a:lnTo>
-                  <a:lnTo>
-                    <a:pt x="5139595" y="2123342"/>
-                  </a:lnTo>
-                  <a:lnTo>
-                    <a:pt x="5217229" y="2095538"/>
-                  </a:lnTo>
-                  <a:lnTo>
-                    <a:pt x="5294863" y="2067230"/>
-                  </a:lnTo>
-                  <a:lnTo>
-                    <a:pt x="5372497" y="2038406"/>
-                  </a:lnTo>
-                  <a:lnTo>
-                    <a:pt x="5450131" y="2009059"/>
-                  </a:lnTo>
-                  <a:lnTo>
-                    <a:pt x="5527765" y="1979178"/>
-                  </a:lnTo>
-                  <a:lnTo>
-                    <a:pt x="5605399" y="1948753"/>
-                  </a:lnTo>
-                  <a:lnTo>
-                    <a:pt x="5683033" y="1917776"/>
-                  </a:lnTo>
-                  <a:lnTo>
-                    <a:pt x="5760667" y="1886235"/>
-                  </a:lnTo>
-                  <a:lnTo>
-                    <a:pt x="5838301" y="1854121"/>
-                  </a:lnTo>
-                  <a:lnTo>
-                    <a:pt x="5915935" y="1821423"/>
-                  </a:lnTo>
-                  <a:lnTo>
-                    <a:pt x="5993569" y="1788131"/>
-                  </a:lnTo>
-                  <a:lnTo>
-                    <a:pt x="6071204" y="1754234"/>
-                  </a:lnTo>
-                  <a:lnTo>
-                    <a:pt x="6148838" y="1719720"/>
-                  </a:lnTo>
-                  <a:lnTo>
-                    <a:pt x="6226472" y="1684578"/>
-                  </a:lnTo>
-                  <a:lnTo>
-                    <a:pt x="6304106" y="1648798"/>
-                  </a:lnTo>
-                  <a:lnTo>
-                    <a:pt x="6381740" y="1612367"/>
-                  </a:lnTo>
-                  <a:lnTo>
-                    <a:pt x="6459374" y="1575274"/>
-                  </a:lnTo>
-                  <a:lnTo>
-                    <a:pt x="6537008" y="1537507"/>
-                  </a:lnTo>
-                  <a:lnTo>
-                    <a:pt x="6614642" y="1499053"/>
-                  </a:lnTo>
-                  <a:lnTo>
-                    <a:pt x="6692276" y="1459900"/>
+                    <a:pt x="15417" y="32083"/>
+                  </a:lnTo>
+                  <a:lnTo>
+                    <a:pt x="93051" y="186736"/>
+                  </a:lnTo>
+                  <a:lnTo>
+                    <a:pt x="170685" y="334782"/>
+                  </a:lnTo>
+                  <a:lnTo>
+                    <a:pt x="248319" y="476505"/>
+                  </a:lnTo>
+                  <a:lnTo>
+                    <a:pt x="325953" y="612174"/>
+                  </a:lnTo>
+                  <a:lnTo>
+                    <a:pt x="403587" y="742048"/>
+                  </a:lnTo>
+                  <a:lnTo>
+                    <a:pt x="481221" y="866375"/>
+                  </a:lnTo>
+                  <a:lnTo>
+                    <a:pt x="558855" y="985390"/>
+                  </a:lnTo>
+                  <a:lnTo>
+                    <a:pt x="636489" y="1099322"/>
+                  </a:lnTo>
+                  <a:lnTo>
+                    <a:pt x="714124" y="1208388"/>
+                  </a:lnTo>
+                  <a:lnTo>
+                    <a:pt x="791758" y="1312795"/>
+                  </a:lnTo>
+                  <a:lnTo>
+                    <a:pt x="869392" y="1412741"/>
+                  </a:lnTo>
+                  <a:lnTo>
+                    <a:pt x="947026" y="1508419"/>
+                  </a:lnTo>
+                  <a:lnTo>
+                    <a:pt x="1024660" y="1600010"/>
+                  </a:lnTo>
+                  <a:lnTo>
+                    <a:pt x="1102294" y="1687688"/>
+                  </a:lnTo>
+                  <a:lnTo>
+                    <a:pt x="1179928" y="1771622"/>
+                  </a:lnTo>
+                  <a:lnTo>
+                    <a:pt x="1257562" y="1851970"/>
+                  </a:lnTo>
+                  <a:lnTo>
+                    <a:pt x="1335196" y="1928886"/>
+                  </a:lnTo>
+                  <a:lnTo>
+                    <a:pt x="1412830" y="2002516"/>
+                  </a:lnTo>
+                  <a:lnTo>
+                    <a:pt x="1490464" y="2073002"/>
+                  </a:lnTo>
+                  <a:lnTo>
+                    <a:pt x="1568098" y="2140476"/>
+                  </a:lnTo>
+                  <a:lnTo>
+                    <a:pt x="1645732" y="2205069"/>
+                  </a:lnTo>
+                  <a:lnTo>
+                    <a:pt x="1723366" y="2266902"/>
+                  </a:lnTo>
+                  <a:lnTo>
+                    <a:pt x="1801000" y="2326094"/>
+                  </a:lnTo>
+                  <a:lnTo>
+                    <a:pt x="1878634" y="2382758"/>
+                  </a:lnTo>
+                  <a:lnTo>
+                    <a:pt x="1956268" y="2437001"/>
+                  </a:lnTo>
+                  <a:lnTo>
+                    <a:pt x="2033902" y="2488927"/>
+                  </a:lnTo>
+                  <a:lnTo>
+                    <a:pt x="2111536" y="2538636"/>
+                  </a:lnTo>
+                  <a:lnTo>
+                    <a:pt x="2189170" y="2586221"/>
+                  </a:lnTo>
+                  <a:lnTo>
+                    <a:pt x="2266804" y="2631773"/>
+                  </a:lnTo>
+                  <a:lnTo>
+                    <a:pt x="2344438" y="2675380"/>
+                  </a:lnTo>
+                  <a:lnTo>
+                    <a:pt x="2422072" y="2717124"/>
+                  </a:lnTo>
+                  <a:lnTo>
+                    <a:pt x="2499707" y="2757084"/>
+                  </a:lnTo>
+                  <a:lnTo>
+                    <a:pt x="2577341" y="2775079"/>
+                  </a:lnTo>
+                  <a:lnTo>
+                    <a:pt x="2654975" y="2750604"/>
+                  </a:lnTo>
+                  <a:lnTo>
+                    <a:pt x="2732609" y="2725446"/>
+                  </a:lnTo>
+                  <a:lnTo>
+                    <a:pt x="2810243" y="2699587"/>
+                  </a:lnTo>
+                  <a:lnTo>
+                    <a:pt x="2887877" y="2673007"/>
+                  </a:lnTo>
+                  <a:lnTo>
+                    <a:pt x="2965511" y="2645685"/>
+                  </a:lnTo>
+                  <a:lnTo>
+                    <a:pt x="3043145" y="2617601"/>
+                  </a:lnTo>
+                  <a:lnTo>
+                    <a:pt x="3120779" y="2588734"/>
+                  </a:lnTo>
+                  <a:lnTo>
+                    <a:pt x="3198413" y="2559062"/>
+                  </a:lnTo>
+                  <a:lnTo>
+                    <a:pt x="3276047" y="2528563"/>
+                  </a:lnTo>
+                  <a:lnTo>
+                    <a:pt x="3353681" y="2497213"/>
+                  </a:lnTo>
+                  <a:lnTo>
+                    <a:pt x="3431315" y="2464988"/>
+                  </a:lnTo>
+                  <a:lnTo>
+                    <a:pt x="3508949" y="2431865"/>
+                  </a:lnTo>
+                  <a:lnTo>
+                    <a:pt x="3586583" y="2397818"/>
+                  </a:lnTo>
+                  <a:lnTo>
+                    <a:pt x="3664217" y="2362821"/>
+                  </a:lnTo>
+                  <a:lnTo>
+                    <a:pt x="3741851" y="2326848"/>
+                  </a:lnTo>
+                  <a:lnTo>
+                    <a:pt x="3819485" y="2289873"/>
+                  </a:lnTo>
+                  <a:lnTo>
+                    <a:pt x="3897119" y="2251865"/>
+                  </a:lnTo>
+                  <a:lnTo>
+                    <a:pt x="3974753" y="2212798"/>
+                  </a:lnTo>
+                  <a:lnTo>
+                    <a:pt x="4052387" y="2172641"/>
+                  </a:lnTo>
+                  <a:lnTo>
+                    <a:pt x="4130021" y="2131365"/>
+                  </a:lnTo>
+                  <a:lnTo>
+                    <a:pt x="4207656" y="2088937"/>
+                  </a:lnTo>
+                  <a:lnTo>
+                    <a:pt x="4285290" y="2045326"/>
+                  </a:lnTo>
+                  <a:lnTo>
+                    <a:pt x="4362924" y="2000498"/>
+                  </a:lnTo>
+                  <a:lnTo>
+                    <a:pt x="4440558" y="1954421"/>
+                  </a:lnTo>
+                  <a:lnTo>
+                    <a:pt x="4518192" y="1907058"/>
+                  </a:lnTo>
+                  <a:lnTo>
+                    <a:pt x="4595826" y="1858374"/>
+                  </a:lnTo>
+                  <a:lnTo>
+                    <a:pt x="4673460" y="1808333"/>
+                  </a:lnTo>
+                  <a:lnTo>
+                    <a:pt x="4751094" y="1756895"/>
+                  </a:lnTo>
+                  <a:lnTo>
+                    <a:pt x="4828728" y="1704024"/>
+                  </a:lnTo>
+                  <a:lnTo>
+                    <a:pt x="4906362" y="1649678"/>
+                  </a:lnTo>
+                  <a:lnTo>
+                    <a:pt x="4983996" y="1593816"/>
+                  </a:lnTo>
+                  <a:lnTo>
+                    <a:pt x="5061630" y="1536396"/>
+                  </a:lnTo>
+                  <a:lnTo>
+                    <a:pt x="5139264" y="1477374"/>
+                  </a:lnTo>
+                  <a:lnTo>
+                    <a:pt x="5216898" y="1416707"/>
+                  </a:lnTo>
+                  <a:lnTo>
+                    <a:pt x="5294532" y="1354347"/>
+                  </a:lnTo>
+                  <a:lnTo>
+                    <a:pt x="5372166" y="1290249"/>
+                  </a:lnTo>
+                  <a:lnTo>
+                    <a:pt x="5449800" y="1224363"/>
+                  </a:lnTo>
+                  <a:lnTo>
+                    <a:pt x="5527434" y="1156639"/>
+                  </a:lnTo>
+                  <a:lnTo>
+                    <a:pt x="5605068" y="1087026"/>
+                  </a:lnTo>
+                  <a:lnTo>
+                    <a:pt x="5682702" y="1015472"/>
+                  </a:lnTo>
+                  <a:lnTo>
+                    <a:pt x="5760336" y="941922"/>
+                  </a:lnTo>
+                  <a:lnTo>
+                    <a:pt x="5837970" y="866321"/>
+                  </a:lnTo>
+                  <a:lnTo>
+                    <a:pt x="5915605" y="788612"/>
+                  </a:lnTo>
+                  <a:lnTo>
+                    <a:pt x="5993239" y="708735"/>
+                  </a:lnTo>
+                  <a:lnTo>
+                    <a:pt x="6070873" y="626631"/>
+                  </a:lnTo>
+                  <a:lnTo>
+                    <a:pt x="6148507" y="542236"/>
+                  </a:lnTo>
+                  <a:lnTo>
+                    <a:pt x="6226141" y="455488"/>
+                  </a:lnTo>
+                  <a:lnTo>
+                    <a:pt x="6303775" y="366321"/>
+                  </a:lnTo>
+                  <a:lnTo>
+                    <a:pt x="6381409" y="274667"/>
+                  </a:lnTo>
+                  <a:lnTo>
+                    <a:pt x="6459043" y="180456"/>
+                  </a:lnTo>
+                  <a:lnTo>
+                    <a:pt x="6536677" y="83618"/>
                   </a:lnTo>
                 </a:path>
               </a:pathLst>
@@ -3874,300 +3862,300 @@
           </p:nvSpPr>
           <p:spPr>
             <a:xfrm>
-              <a:off x="817517" y="4689992"/>
-              <a:ext cx="7370972" cy="753981"/>
+              <a:off x="817517" y="4691902"/>
+              <a:ext cx="7370972" cy="764784"/>
             </a:xfrm>
             <a:custGeom>
               <a:avLst/>
               <a:pathLst>
-                <a:path w="7370972" h="753981">
+                <a:path w="7370972" h="764784">
                   <a:moveTo>
-                    <a:pt x="7370972" y="753981"/>
+                    <a:pt x="7370972" y="764784"/>
                   </a:moveTo>
                   <a:lnTo>
-                    <a:pt x="7293338" y="749560"/>
-                  </a:lnTo>
-                  <a:lnTo>
-                    <a:pt x="7215704" y="744955"/>
-                  </a:lnTo>
-                  <a:lnTo>
-                    <a:pt x="7138070" y="740155"/>
-                  </a:lnTo>
-                  <a:lnTo>
-                    <a:pt x="7060436" y="735154"/>
-                  </a:lnTo>
-                  <a:lnTo>
-                    <a:pt x="6982802" y="729943"/>
-                  </a:lnTo>
-                  <a:lnTo>
-                    <a:pt x="6905168" y="724513"/>
-                  </a:lnTo>
-                  <a:lnTo>
-                    <a:pt x="6827534" y="718855"/>
-                  </a:lnTo>
-                  <a:lnTo>
-                    <a:pt x="6749900" y="712960"/>
-                  </a:lnTo>
-                  <a:lnTo>
-                    <a:pt x="6672266" y="706817"/>
-                  </a:lnTo>
-                  <a:lnTo>
-                    <a:pt x="6594632" y="700415"/>
-                  </a:lnTo>
-                  <a:lnTo>
-                    <a:pt x="6516998" y="693745"/>
-                  </a:lnTo>
-                  <a:lnTo>
-                    <a:pt x="6439364" y="686795"/>
-                  </a:lnTo>
-                  <a:lnTo>
-                    <a:pt x="6361730" y="679552"/>
-                  </a:lnTo>
-                  <a:lnTo>
-                    <a:pt x="6284096" y="672006"/>
-                  </a:lnTo>
-                  <a:lnTo>
-                    <a:pt x="6206462" y="664142"/>
-                  </a:lnTo>
-                  <a:lnTo>
-                    <a:pt x="6128827" y="655949"/>
-                  </a:lnTo>
-                  <a:lnTo>
-                    <a:pt x="6051193" y="647411"/>
-                  </a:lnTo>
-                  <a:lnTo>
-                    <a:pt x="5973559" y="638514"/>
-                  </a:lnTo>
-                  <a:lnTo>
-                    <a:pt x="5895925" y="629244"/>
-                  </a:lnTo>
-                  <a:lnTo>
-                    <a:pt x="5818291" y="619584"/>
-                  </a:lnTo>
-                  <a:lnTo>
-                    <a:pt x="5740657" y="609519"/>
-                  </a:lnTo>
-                  <a:lnTo>
-                    <a:pt x="5663023" y="599030"/>
-                  </a:lnTo>
-                  <a:lnTo>
-                    <a:pt x="5585389" y="588102"/>
-                  </a:lnTo>
-                  <a:lnTo>
-                    <a:pt x="5507755" y="576714"/>
-                  </a:lnTo>
-                  <a:lnTo>
-                    <a:pt x="5430121" y="564848"/>
-                  </a:lnTo>
-                  <a:lnTo>
-                    <a:pt x="5352487" y="552483"/>
-                  </a:lnTo>
-                  <a:lnTo>
-                    <a:pt x="5274853" y="539599"/>
-                  </a:lnTo>
-                  <a:lnTo>
-                    <a:pt x="5197219" y="526174"/>
-                  </a:lnTo>
-                  <a:lnTo>
-                    <a:pt x="5119585" y="512185"/>
-                  </a:lnTo>
-                  <a:lnTo>
-                    <a:pt x="5041951" y="497608"/>
-                  </a:lnTo>
-                  <a:lnTo>
-                    <a:pt x="4964317" y="482419"/>
-                  </a:lnTo>
-                  <a:lnTo>
-                    <a:pt x="4886683" y="466592"/>
-                  </a:lnTo>
-                  <a:lnTo>
-                    <a:pt x="4809049" y="450101"/>
-                  </a:lnTo>
-                  <a:lnTo>
-                    <a:pt x="4731415" y="432916"/>
-                  </a:lnTo>
-                  <a:lnTo>
-                    <a:pt x="4653781" y="415010"/>
-                  </a:lnTo>
-                  <a:lnTo>
-                    <a:pt x="4576147" y="396352"/>
-                  </a:lnTo>
-                  <a:lnTo>
-                    <a:pt x="4498513" y="376910"/>
-                  </a:lnTo>
-                  <a:lnTo>
-                    <a:pt x="4420879" y="356651"/>
-                  </a:lnTo>
-                  <a:lnTo>
-                    <a:pt x="4343244" y="335541"/>
-                  </a:lnTo>
-                  <a:lnTo>
-                    <a:pt x="4265610" y="313545"/>
-                  </a:lnTo>
-                  <a:lnTo>
-                    <a:pt x="4187976" y="290624"/>
-                  </a:lnTo>
-                  <a:lnTo>
-                    <a:pt x="4110342" y="266741"/>
-                  </a:lnTo>
-                  <a:lnTo>
-                    <a:pt x="4032708" y="241855"/>
-                  </a:lnTo>
-                  <a:lnTo>
-                    <a:pt x="3955074" y="215924"/>
-                  </a:lnTo>
-                  <a:lnTo>
-                    <a:pt x="3877440" y="188903"/>
-                  </a:lnTo>
-                  <a:lnTo>
-                    <a:pt x="3799806" y="160747"/>
-                  </a:lnTo>
-                  <a:lnTo>
-                    <a:pt x="3722172" y="131409"/>
-                  </a:lnTo>
-                  <a:lnTo>
-                    <a:pt x="3644538" y="100838"/>
-                  </a:lnTo>
-                  <a:lnTo>
-                    <a:pt x="3566904" y="68983"/>
-                  </a:lnTo>
-                  <a:lnTo>
-                    <a:pt x="3489270" y="35790"/>
-                  </a:lnTo>
-                  <a:lnTo>
-                    <a:pt x="3411636" y="1203"/>
-                  </a:lnTo>
-                  <a:lnTo>
-                    <a:pt x="3334002" y="0"/>
-                  </a:lnTo>
-                  <a:lnTo>
-                    <a:pt x="3256368" y="15341"/>
-                  </a:lnTo>
-                  <a:lnTo>
-                    <a:pt x="3178734" y="30409"/>
-                  </a:lnTo>
-                  <a:lnTo>
-                    <a:pt x="3101100" y="45208"/>
-                  </a:lnTo>
-                  <a:lnTo>
-                    <a:pt x="3023466" y="59743"/>
-                  </a:lnTo>
-                  <a:lnTo>
-                    <a:pt x="2945832" y="74018"/>
-                  </a:lnTo>
-                  <a:lnTo>
-                    <a:pt x="2868198" y="88039"/>
-                  </a:lnTo>
-                  <a:lnTo>
-                    <a:pt x="2790564" y="101809"/>
-                  </a:lnTo>
-                  <a:lnTo>
-                    <a:pt x="2712930" y="115333"/>
-                  </a:lnTo>
-                  <a:lnTo>
-                    <a:pt x="2635295" y="128615"/>
-                  </a:lnTo>
-                  <a:lnTo>
-                    <a:pt x="2557661" y="141661"/>
-                  </a:lnTo>
-                  <a:lnTo>
-                    <a:pt x="2480027" y="154473"/>
-                  </a:lnTo>
-                  <a:lnTo>
-                    <a:pt x="2402393" y="167057"/>
-                  </a:lnTo>
-                  <a:lnTo>
-                    <a:pt x="2324759" y="179416"/>
-                  </a:lnTo>
-                  <a:lnTo>
-                    <a:pt x="2247125" y="191554"/>
-                  </a:lnTo>
-                  <a:lnTo>
-                    <a:pt x="2169491" y="203476"/>
-                  </a:lnTo>
-                  <a:lnTo>
-                    <a:pt x="2091857" y="215184"/>
-                  </a:lnTo>
-                  <a:lnTo>
-                    <a:pt x="2014223" y="226684"/>
-                  </a:lnTo>
-                  <a:lnTo>
-                    <a:pt x="1936589" y="237978"/>
-                  </a:lnTo>
-                  <a:lnTo>
-                    <a:pt x="1858955" y="249071"/>
-                  </a:lnTo>
-                  <a:lnTo>
-                    <a:pt x="1781321" y="259966"/>
-                  </a:lnTo>
-                  <a:lnTo>
-                    <a:pt x="1703687" y="270666"/>
-                  </a:lnTo>
-                  <a:lnTo>
-                    <a:pt x="1626053" y="281175"/>
-                  </a:lnTo>
-                  <a:lnTo>
-                    <a:pt x="1548419" y="291496"/>
-                  </a:lnTo>
-                  <a:lnTo>
-                    <a:pt x="1470785" y="301633"/>
-                  </a:lnTo>
-                  <a:lnTo>
-                    <a:pt x="1393151" y="311589"/>
-                  </a:lnTo>
-                  <a:lnTo>
-                    <a:pt x="1315517" y="321367"/>
-                  </a:lnTo>
-                  <a:lnTo>
-                    <a:pt x="1237883" y="330971"/>
-                  </a:lnTo>
-                  <a:lnTo>
-                    <a:pt x="1160249" y="340403"/>
-                  </a:lnTo>
-                  <a:lnTo>
-                    <a:pt x="1082615" y="349667"/>
-                  </a:lnTo>
-                  <a:lnTo>
-                    <a:pt x="1004981" y="358765"/>
-                  </a:lnTo>
-                  <a:lnTo>
-                    <a:pt x="927346" y="367701"/>
-                  </a:lnTo>
-                  <a:lnTo>
-                    <a:pt x="849712" y="376478"/>
-                  </a:lnTo>
-                  <a:lnTo>
-                    <a:pt x="772078" y="385097"/>
-                  </a:lnTo>
-                  <a:lnTo>
-                    <a:pt x="694444" y="393563"/>
-                  </a:lnTo>
-                  <a:lnTo>
-                    <a:pt x="616810" y="401877"/>
-                  </a:lnTo>
-                  <a:lnTo>
-                    <a:pt x="539176" y="410044"/>
-                  </a:lnTo>
-                  <a:lnTo>
-                    <a:pt x="461542" y="418064"/>
-                  </a:lnTo>
-                  <a:lnTo>
-                    <a:pt x="383908" y="425941"/>
-                  </a:lnTo>
-                  <a:lnTo>
-                    <a:pt x="306274" y="433677"/>
-                  </a:lnTo>
-                  <a:lnTo>
-                    <a:pt x="228640" y="441276"/>
-                  </a:lnTo>
-                  <a:lnTo>
-                    <a:pt x="151006" y="448738"/>
-                  </a:lnTo>
-                  <a:lnTo>
-                    <a:pt x="73372" y="456068"/>
-                  </a:lnTo>
-                  <a:lnTo>
-                    <a:pt x="0" y="462871"/>
+                    <a:pt x="7293338" y="760656"/>
+                  </a:lnTo>
+                  <a:lnTo>
+                    <a:pt x="7215704" y="756343"/>
+                  </a:lnTo>
+                  <a:lnTo>
+                    <a:pt x="7138070" y="751838"/>
+                  </a:lnTo>
+                  <a:lnTo>
+                    <a:pt x="7060436" y="747132"/>
+                  </a:lnTo>
+                  <a:lnTo>
+                    <a:pt x="6982802" y="742216"/>
+                  </a:lnTo>
+                  <a:lnTo>
+                    <a:pt x="6905168" y="737081"/>
+                  </a:lnTo>
+                  <a:lnTo>
+                    <a:pt x="6827534" y="731717"/>
+                  </a:lnTo>
+                  <a:lnTo>
+                    <a:pt x="6749900" y="726113"/>
+                  </a:lnTo>
+                  <a:lnTo>
+                    <a:pt x="6672266" y="720259"/>
+                  </a:lnTo>
+                  <a:lnTo>
+                    <a:pt x="6594632" y="714144"/>
+                  </a:lnTo>
+                  <a:lnTo>
+                    <a:pt x="6516998" y="707756"/>
+                  </a:lnTo>
+                  <a:lnTo>
+                    <a:pt x="6439364" y="701083"/>
+                  </a:lnTo>
+                  <a:lnTo>
+                    <a:pt x="6361730" y="694112"/>
+                  </a:lnTo>
+                  <a:lnTo>
+                    <a:pt x="6284096" y="686830"/>
+                  </a:lnTo>
+                  <a:lnTo>
+                    <a:pt x="6206462" y="679223"/>
+                  </a:lnTo>
+                  <a:lnTo>
+                    <a:pt x="6128827" y="671277"/>
+                  </a:lnTo>
+                  <a:lnTo>
+                    <a:pt x="6051193" y="662976"/>
+                  </a:lnTo>
+                  <a:lnTo>
+                    <a:pt x="5973559" y="654305"/>
+                  </a:lnTo>
+                  <a:lnTo>
+                    <a:pt x="5895925" y="645247"/>
+                  </a:lnTo>
+                  <a:lnTo>
+                    <a:pt x="5818291" y="635785"/>
+                  </a:lnTo>
+                  <a:lnTo>
+                    <a:pt x="5740657" y="625900"/>
+                  </a:lnTo>
+                  <a:lnTo>
+                    <a:pt x="5663023" y="615575"/>
+                  </a:lnTo>
+                  <a:lnTo>
+                    <a:pt x="5585389" y="604788"/>
+                  </a:lnTo>
+                  <a:lnTo>
+                    <a:pt x="5507755" y="593521"/>
+                  </a:lnTo>
+                  <a:lnTo>
+                    <a:pt x="5430121" y="581751"/>
+                  </a:lnTo>
+                  <a:lnTo>
+                    <a:pt x="5352487" y="569455"/>
+                  </a:lnTo>
+                  <a:lnTo>
+                    <a:pt x="5274853" y="556611"/>
+                  </a:lnTo>
+                  <a:lnTo>
+                    <a:pt x="5197219" y="543194"/>
+                  </a:lnTo>
+                  <a:lnTo>
+                    <a:pt x="5119585" y="529178"/>
+                  </a:lnTo>
+                  <a:lnTo>
+                    <a:pt x="5041951" y="514536"/>
+                  </a:lnTo>
+                  <a:lnTo>
+                    <a:pt x="4964317" y="499242"/>
+                  </a:lnTo>
+                  <a:lnTo>
+                    <a:pt x="4886683" y="483264"/>
+                  </a:lnTo>
+                  <a:lnTo>
+                    <a:pt x="4809049" y="466574"/>
+                  </a:lnTo>
+                  <a:lnTo>
+                    <a:pt x="4731415" y="449140"/>
+                  </a:lnTo>
+                  <a:lnTo>
+                    <a:pt x="4653781" y="430927"/>
+                  </a:lnTo>
+                  <a:lnTo>
+                    <a:pt x="4576147" y="411901"/>
+                  </a:lnTo>
+                  <a:lnTo>
+                    <a:pt x="4498513" y="392027"/>
+                  </a:lnTo>
+                  <a:lnTo>
+                    <a:pt x="4420879" y="371266"/>
+                  </a:lnTo>
+                  <a:lnTo>
+                    <a:pt x="4343244" y="349578"/>
+                  </a:lnTo>
+                  <a:lnTo>
+                    <a:pt x="4265610" y="326923"/>
+                  </a:lnTo>
+                  <a:lnTo>
+                    <a:pt x="4187976" y="303257"/>
+                  </a:lnTo>
+                  <a:lnTo>
+                    <a:pt x="4110342" y="278534"/>
+                  </a:lnTo>
+                  <a:lnTo>
+                    <a:pt x="4032708" y="252709"/>
+                  </a:lnTo>
+                  <a:lnTo>
+                    <a:pt x="3955074" y="225731"/>
+                  </a:lnTo>
+                  <a:lnTo>
+                    <a:pt x="3877440" y="197550"/>
+                  </a:lnTo>
+                  <a:lnTo>
+                    <a:pt x="3799806" y="168111"/>
+                  </a:lnTo>
+                  <a:lnTo>
+                    <a:pt x="3722172" y="137358"/>
+                  </a:lnTo>
+                  <a:lnTo>
+                    <a:pt x="3644538" y="105233"/>
+                  </a:lnTo>
+                  <a:lnTo>
+                    <a:pt x="3566904" y="71675"/>
+                  </a:lnTo>
+                  <a:lnTo>
+                    <a:pt x="3489270" y="36619"/>
+                  </a:lnTo>
+                  <a:lnTo>
+                    <a:pt x="3411636" y="0"/>
+                  </a:lnTo>
+                  <a:lnTo>
+                    <a:pt x="3334002" y="3551"/>
+                  </a:lnTo>
+                  <a:lnTo>
+                    <a:pt x="3256368" y="26716"/>
+                  </a:lnTo>
+                  <a:lnTo>
+                    <a:pt x="3178734" y="49252"/>
+                  </a:lnTo>
+                  <a:lnTo>
+                    <a:pt x="3101100" y="71177"/>
+                  </a:lnTo>
+                  <a:lnTo>
+                    <a:pt x="3023466" y="92507"/>
+                  </a:lnTo>
+                  <a:lnTo>
+                    <a:pt x="2945832" y="113258"/>
+                  </a:lnTo>
+                  <a:lnTo>
+                    <a:pt x="2868198" y="133446"/>
+                  </a:lnTo>
+                  <a:lnTo>
+                    <a:pt x="2790564" y="153086"/>
+                  </a:lnTo>
+                  <a:lnTo>
+                    <a:pt x="2712930" y="172194"/>
+                  </a:lnTo>
+                  <a:lnTo>
+                    <a:pt x="2635295" y="190783"/>
+                  </a:lnTo>
+                  <a:lnTo>
+                    <a:pt x="2557661" y="208867"/>
+                  </a:lnTo>
+                  <a:lnTo>
+                    <a:pt x="2480027" y="226461"/>
+                  </a:lnTo>
+                  <a:lnTo>
+                    <a:pt x="2402393" y="243578"/>
+                  </a:lnTo>
+                  <a:lnTo>
+                    <a:pt x="2324759" y="260230"/>
+                  </a:lnTo>
+                  <a:lnTo>
+                    <a:pt x="2247125" y="276431"/>
+                  </a:lnTo>
+                  <a:lnTo>
+                    <a:pt x="2169491" y="292191"/>
+                  </a:lnTo>
+                  <a:lnTo>
+                    <a:pt x="2091857" y="307524"/>
+                  </a:lnTo>
+                  <a:lnTo>
+                    <a:pt x="2014223" y="322442"/>
+                  </a:lnTo>
+                  <a:lnTo>
+                    <a:pt x="1936589" y="336954"/>
+                  </a:lnTo>
+                  <a:lnTo>
+                    <a:pt x="1858955" y="351073"/>
+                  </a:lnTo>
+                  <a:lnTo>
+                    <a:pt x="1781321" y="364808"/>
+                  </a:lnTo>
+                  <a:lnTo>
+                    <a:pt x="1703687" y="378171"/>
+                  </a:lnTo>
+                  <a:lnTo>
+                    <a:pt x="1626053" y="391171"/>
+                  </a:lnTo>
+                  <a:lnTo>
+                    <a:pt x="1548419" y="403819"/>
+                  </a:lnTo>
+                  <a:lnTo>
+                    <a:pt x="1470785" y="416123"/>
+                  </a:lnTo>
+                  <a:lnTo>
+                    <a:pt x="1393151" y="428094"/>
+                  </a:lnTo>
+                  <a:lnTo>
+                    <a:pt x="1315517" y="439739"/>
+                  </a:lnTo>
+                  <a:lnTo>
+                    <a:pt x="1237883" y="451069"/>
+                  </a:lnTo>
+                  <a:lnTo>
+                    <a:pt x="1160249" y="462092"/>
+                  </a:lnTo>
+                  <a:lnTo>
+                    <a:pt x="1082615" y="472815"/>
+                  </a:lnTo>
+                  <a:lnTo>
+                    <a:pt x="1004981" y="483247"/>
+                  </a:lnTo>
+                  <a:lnTo>
+                    <a:pt x="927346" y="493396"/>
+                  </a:lnTo>
+                  <a:lnTo>
+                    <a:pt x="849712" y="503270"/>
+                  </a:lnTo>
+                  <a:lnTo>
+                    <a:pt x="772078" y="512876"/>
+                  </a:lnTo>
+                  <a:lnTo>
+                    <a:pt x="694444" y="522222"/>
+                  </a:lnTo>
+                  <a:lnTo>
+                    <a:pt x="616810" y="531313"/>
+                  </a:lnTo>
+                  <a:lnTo>
+                    <a:pt x="539176" y="540158"/>
+                  </a:lnTo>
+                  <a:lnTo>
+                    <a:pt x="461542" y="548764"/>
+                  </a:lnTo>
+                  <a:lnTo>
+                    <a:pt x="383908" y="557135"/>
+                  </a:lnTo>
+                  <a:lnTo>
+                    <a:pt x="306274" y="565280"/>
+                  </a:lnTo>
+                  <a:lnTo>
+                    <a:pt x="228640" y="573203"/>
+                  </a:lnTo>
+                  <a:lnTo>
+                    <a:pt x="151006" y="580912"/>
+                  </a:lnTo>
+                  <a:lnTo>
+                    <a:pt x="73372" y="588411"/>
+                  </a:lnTo>
+                  <a:lnTo>
+                    <a:pt x="0" y="595306"/>
                   </a:lnTo>
                 </a:path>
               </a:pathLst>
@@ -4187,300 +4175,300 @@
           </p:nvSpPr>
           <p:spPr>
             <a:xfrm>
-              <a:off x="817517" y="4109022"/>
-              <a:ext cx="7370972" cy="959821"/>
+              <a:off x="817517" y="4312444"/>
+              <a:ext cx="7370972" cy="662126"/>
             </a:xfrm>
             <a:custGeom>
               <a:avLst/>
               <a:pathLst>
-                <a:path w="7370972" h="959821">
+                <a:path w="7370972" h="662126">
                   <a:moveTo>
                     <a:pt x="0" y="0"/>
                   </a:moveTo>
                   <a:lnTo>
-                    <a:pt x="73372" y="15659"/>
-                  </a:lnTo>
-                  <a:lnTo>
-                    <a:pt x="151006" y="32038"/>
-                  </a:lnTo>
-                  <a:lnTo>
-                    <a:pt x="228640" y="48229"/>
-                  </a:lnTo>
-                  <a:lnTo>
-                    <a:pt x="306274" y="64233"/>
-                  </a:lnTo>
-                  <a:lnTo>
-                    <a:pt x="383908" y="80053"/>
-                  </a:lnTo>
-                  <a:lnTo>
-                    <a:pt x="461542" y="95692"/>
-                  </a:lnTo>
-                  <a:lnTo>
-                    <a:pt x="539176" y="111151"/>
-                  </a:lnTo>
-                  <a:lnTo>
-                    <a:pt x="616810" y="126431"/>
-                  </a:lnTo>
-                  <a:lnTo>
-                    <a:pt x="694444" y="141537"/>
-                  </a:lnTo>
-                  <a:lnTo>
-                    <a:pt x="772078" y="156468"/>
-                  </a:lnTo>
-                  <a:lnTo>
-                    <a:pt x="849712" y="171228"/>
-                  </a:lnTo>
-                  <a:lnTo>
-                    <a:pt x="927346" y="185818"/>
-                  </a:lnTo>
-                  <a:lnTo>
-                    <a:pt x="1004981" y="200241"/>
-                  </a:lnTo>
-                  <a:lnTo>
-                    <a:pt x="1082615" y="214497"/>
-                  </a:lnTo>
-                  <a:lnTo>
-                    <a:pt x="1160249" y="228590"/>
-                  </a:lnTo>
-                  <a:lnTo>
-                    <a:pt x="1237883" y="242520"/>
-                  </a:lnTo>
-                  <a:lnTo>
-                    <a:pt x="1315517" y="256291"/>
-                  </a:lnTo>
-                  <a:lnTo>
-                    <a:pt x="1393151" y="269903"/>
-                  </a:lnTo>
-                  <a:lnTo>
-                    <a:pt x="1470785" y="283359"/>
-                  </a:lnTo>
-                  <a:lnTo>
-                    <a:pt x="1548419" y="296660"/>
-                  </a:lnTo>
-                  <a:lnTo>
-                    <a:pt x="1626053" y="309807"/>
-                  </a:lnTo>
-                  <a:lnTo>
-                    <a:pt x="1703687" y="322804"/>
-                  </a:lnTo>
-                  <a:lnTo>
-                    <a:pt x="1781321" y="335652"/>
-                  </a:lnTo>
-                  <a:lnTo>
-                    <a:pt x="1858955" y="348351"/>
-                  </a:lnTo>
-                  <a:lnTo>
-                    <a:pt x="1936589" y="360905"/>
-                  </a:lnTo>
-                  <a:lnTo>
-                    <a:pt x="2014223" y="373314"/>
-                  </a:lnTo>
-                  <a:lnTo>
-                    <a:pt x="2091857" y="385581"/>
-                  </a:lnTo>
-                  <a:lnTo>
-                    <a:pt x="2169491" y="397706"/>
-                  </a:lnTo>
-                  <a:lnTo>
-                    <a:pt x="2247125" y="409693"/>
-                  </a:lnTo>
-                  <a:lnTo>
-                    <a:pt x="2324759" y="421541"/>
-                  </a:lnTo>
-                  <a:lnTo>
-                    <a:pt x="2402393" y="433253"/>
-                  </a:lnTo>
-                  <a:lnTo>
-                    <a:pt x="2480027" y="444830"/>
-                  </a:lnTo>
-                  <a:lnTo>
-                    <a:pt x="2557661" y="456275"/>
-                  </a:lnTo>
-                  <a:lnTo>
-                    <a:pt x="2635295" y="467588"/>
-                  </a:lnTo>
-                  <a:lnTo>
-                    <a:pt x="2712930" y="478770"/>
-                  </a:lnTo>
-                  <a:lnTo>
-                    <a:pt x="2790564" y="489824"/>
-                  </a:lnTo>
-                  <a:lnTo>
-                    <a:pt x="2868198" y="500751"/>
-                  </a:lnTo>
-                  <a:lnTo>
-                    <a:pt x="2945832" y="511553"/>
-                  </a:lnTo>
-                  <a:lnTo>
-                    <a:pt x="3023466" y="522230"/>
-                  </a:lnTo>
-                  <a:lnTo>
-                    <a:pt x="3101100" y="532784"/>
-                  </a:lnTo>
-                  <a:lnTo>
-                    <a:pt x="3178734" y="543217"/>
-                  </a:lnTo>
-                  <a:lnTo>
-                    <a:pt x="3256368" y="553531"/>
-                  </a:lnTo>
-                  <a:lnTo>
-                    <a:pt x="3334002" y="563725"/>
-                  </a:lnTo>
-                  <a:lnTo>
-                    <a:pt x="3411636" y="573802"/>
-                  </a:lnTo>
-                  <a:lnTo>
-                    <a:pt x="3489270" y="583764"/>
-                  </a:lnTo>
-                  <a:lnTo>
-                    <a:pt x="3566904" y="593611"/>
-                  </a:lnTo>
-                  <a:lnTo>
-                    <a:pt x="3644538" y="603344"/>
-                  </a:lnTo>
-                  <a:lnTo>
-                    <a:pt x="3722172" y="612966"/>
-                  </a:lnTo>
-                  <a:lnTo>
-                    <a:pt x="3799806" y="622477"/>
-                  </a:lnTo>
-                  <a:lnTo>
-                    <a:pt x="3877440" y="631879"/>
-                  </a:lnTo>
-                  <a:lnTo>
-                    <a:pt x="3955074" y="641173"/>
-                  </a:lnTo>
-                  <a:lnTo>
-                    <a:pt x="4032708" y="650360"/>
-                  </a:lnTo>
-                  <a:lnTo>
-                    <a:pt x="4110342" y="659441"/>
-                  </a:lnTo>
-                  <a:lnTo>
-                    <a:pt x="4187976" y="668418"/>
-                  </a:lnTo>
-                  <a:lnTo>
-                    <a:pt x="4265610" y="677291"/>
-                  </a:lnTo>
-                  <a:lnTo>
-                    <a:pt x="4343244" y="686063"/>
-                  </a:lnTo>
-                  <a:lnTo>
-                    <a:pt x="4420879" y="694734"/>
-                  </a:lnTo>
-                  <a:lnTo>
-                    <a:pt x="4498513" y="703305"/>
-                  </a:lnTo>
-                  <a:lnTo>
-                    <a:pt x="4576147" y="711777"/>
-                  </a:lnTo>
-                  <a:lnTo>
-                    <a:pt x="4653781" y="720152"/>
-                  </a:lnTo>
-                  <a:lnTo>
-                    <a:pt x="4731415" y="728431"/>
-                  </a:lnTo>
-                  <a:lnTo>
-                    <a:pt x="4809049" y="736614"/>
-                  </a:lnTo>
-                  <a:lnTo>
-                    <a:pt x="4886683" y="744704"/>
-                  </a:lnTo>
-                  <a:lnTo>
-                    <a:pt x="4964317" y="752700"/>
-                  </a:lnTo>
-                  <a:lnTo>
-                    <a:pt x="5041951" y="760605"/>
-                  </a:lnTo>
-                  <a:lnTo>
-                    <a:pt x="5119585" y="768419"/>
-                  </a:lnTo>
-                  <a:lnTo>
-                    <a:pt x="5197219" y="776142"/>
-                  </a:lnTo>
-                  <a:lnTo>
-                    <a:pt x="5274853" y="783777"/>
-                  </a:lnTo>
-                  <a:lnTo>
-                    <a:pt x="5352487" y="791325"/>
-                  </a:lnTo>
-                  <a:lnTo>
-                    <a:pt x="5430121" y="798785"/>
-                  </a:lnTo>
-                  <a:lnTo>
-                    <a:pt x="5507755" y="806160"/>
-                  </a:lnTo>
-                  <a:lnTo>
-                    <a:pt x="5585389" y="813450"/>
-                  </a:lnTo>
-                  <a:lnTo>
-                    <a:pt x="5663023" y="820656"/>
-                  </a:lnTo>
-                  <a:lnTo>
-                    <a:pt x="5740657" y="827779"/>
-                  </a:lnTo>
-                  <a:lnTo>
-                    <a:pt x="5818291" y="834820"/>
-                  </a:lnTo>
-                  <a:lnTo>
-                    <a:pt x="5895925" y="841780"/>
-                  </a:lnTo>
-                  <a:lnTo>
-                    <a:pt x="5973559" y="848661"/>
-                  </a:lnTo>
-                  <a:lnTo>
-                    <a:pt x="6051193" y="855462"/>
-                  </a:lnTo>
-                  <a:lnTo>
-                    <a:pt x="6128827" y="862185"/>
-                  </a:lnTo>
-                  <a:lnTo>
-                    <a:pt x="6206462" y="868831"/>
-                  </a:lnTo>
-                  <a:lnTo>
-                    <a:pt x="6284096" y="875400"/>
-                  </a:lnTo>
-                  <a:lnTo>
-                    <a:pt x="6361730" y="881894"/>
-                  </a:lnTo>
-                  <a:lnTo>
-                    <a:pt x="6439364" y="888313"/>
-                  </a:lnTo>
-                  <a:lnTo>
-                    <a:pt x="6516998" y="894658"/>
-                  </a:lnTo>
-                  <a:lnTo>
-                    <a:pt x="6594632" y="900930"/>
-                  </a:lnTo>
-                  <a:lnTo>
-                    <a:pt x="6672266" y="907131"/>
-                  </a:lnTo>
-                  <a:lnTo>
-                    <a:pt x="6749900" y="913260"/>
-                  </a:lnTo>
-                  <a:lnTo>
-                    <a:pt x="6827534" y="919318"/>
-                  </a:lnTo>
-                  <a:lnTo>
-                    <a:pt x="6905168" y="925307"/>
-                  </a:lnTo>
-                  <a:lnTo>
-                    <a:pt x="6982802" y="931227"/>
-                  </a:lnTo>
-                  <a:lnTo>
-                    <a:pt x="7060436" y="937079"/>
-                  </a:lnTo>
-                  <a:lnTo>
-                    <a:pt x="7138070" y="942863"/>
-                  </a:lnTo>
-                  <a:lnTo>
-                    <a:pt x="7215704" y="948581"/>
-                  </a:lnTo>
-                  <a:lnTo>
-                    <a:pt x="7293338" y="954234"/>
-                  </a:lnTo>
-                  <a:lnTo>
-                    <a:pt x="7370972" y="959821"/>
+                    <a:pt x="73372" y="9402"/>
+                  </a:lnTo>
+                  <a:lnTo>
+                    <a:pt x="151006" y="19271"/>
+                  </a:lnTo>
+                  <a:lnTo>
+                    <a:pt x="228640" y="29061"/>
+                  </a:lnTo>
+                  <a:lnTo>
+                    <a:pt x="306274" y="38771"/>
+                  </a:lnTo>
+                  <a:lnTo>
+                    <a:pt x="383908" y="48404"/>
+                  </a:lnTo>
+                  <a:lnTo>
+                    <a:pt x="461542" y="57959"/>
+                  </a:lnTo>
+                  <a:lnTo>
+                    <a:pt x="539176" y="67438"/>
+                  </a:lnTo>
+                  <a:lnTo>
+                    <a:pt x="616810" y="76840"/>
+                  </a:lnTo>
+                  <a:lnTo>
+                    <a:pt x="694444" y="86167"/>
+                  </a:lnTo>
+                  <a:lnTo>
+                    <a:pt x="772078" y="95418"/>
+                  </a:lnTo>
+                  <a:lnTo>
+                    <a:pt x="849712" y="104596"/>
+                  </a:lnTo>
+                  <a:lnTo>
+                    <a:pt x="927346" y="113699"/>
+                  </a:lnTo>
+                  <a:lnTo>
+                    <a:pt x="1004981" y="122729"/>
+                  </a:lnTo>
+                  <a:lnTo>
+                    <a:pt x="1082615" y="131687"/>
+                  </a:lnTo>
+                  <a:lnTo>
+                    <a:pt x="1160249" y="140573"/>
+                  </a:lnTo>
+                  <a:lnTo>
+                    <a:pt x="1237883" y="149387"/>
+                  </a:lnTo>
+                  <a:lnTo>
+                    <a:pt x="1315517" y="158130"/>
+                  </a:lnTo>
+                  <a:lnTo>
+                    <a:pt x="1393151" y="166803"/>
+                  </a:lnTo>
+                  <a:lnTo>
+                    <a:pt x="1470785" y="175406"/>
+                  </a:lnTo>
+                  <a:lnTo>
+                    <a:pt x="1548419" y="183940"/>
+                  </a:lnTo>
+                  <a:lnTo>
+                    <a:pt x="1626053" y="192406"/>
+                  </a:lnTo>
+                  <a:lnTo>
+                    <a:pt x="1703687" y="200803"/>
+                  </a:lnTo>
+                  <a:lnTo>
+                    <a:pt x="1781321" y="209133"/>
+                  </a:lnTo>
+                  <a:lnTo>
+                    <a:pt x="1858955" y="217396"/>
+                  </a:lnTo>
+                  <a:lnTo>
+                    <a:pt x="1936589" y="225592"/>
+                  </a:lnTo>
+                  <a:lnTo>
+                    <a:pt x="2014223" y="233723"/>
+                  </a:lnTo>
+                  <a:lnTo>
+                    <a:pt x="2091857" y="241788"/>
+                  </a:lnTo>
+                  <a:lnTo>
+                    <a:pt x="2169491" y="249789"/>
+                  </a:lnTo>
+                  <a:lnTo>
+                    <a:pt x="2247125" y="257725"/>
+                  </a:lnTo>
+                  <a:lnTo>
+                    <a:pt x="2324759" y="265597"/>
+                  </a:lnTo>
+                  <a:lnTo>
+                    <a:pt x="2402393" y="273406"/>
+                  </a:lnTo>
+                  <a:lnTo>
+                    <a:pt x="2480027" y="281152"/>
+                  </a:lnTo>
+                  <a:lnTo>
+                    <a:pt x="2557661" y="288835"/>
+                  </a:lnTo>
+                  <a:lnTo>
+                    <a:pt x="2635295" y="296458"/>
+                  </a:lnTo>
+                  <a:lnTo>
+                    <a:pt x="2712930" y="304018"/>
+                  </a:lnTo>
+                  <a:lnTo>
+                    <a:pt x="2790564" y="311518"/>
+                  </a:lnTo>
+                  <a:lnTo>
+                    <a:pt x="2868198" y="318958"/>
+                  </a:lnTo>
+                  <a:lnTo>
+                    <a:pt x="2945832" y="326338"/>
+                  </a:lnTo>
+                  <a:lnTo>
+                    <a:pt x="3023466" y="333658"/>
+                  </a:lnTo>
+                  <a:lnTo>
+                    <a:pt x="3101100" y="340920"/>
+                  </a:lnTo>
+                  <a:lnTo>
+                    <a:pt x="3178734" y="348123"/>
+                  </a:lnTo>
+                  <a:lnTo>
+                    <a:pt x="3256368" y="355268"/>
+                  </a:lnTo>
+                  <a:lnTo>
+                    <a:pt x="3334002" y="362356"/>
+                  </a:lnTo>
+                  <a:lnTo>
+                    <a:pt x="3411636" y="369387"/>
+                  </a:lnTo>
+                  <a:lnTo>
+                    <a:pt x="3489270" y="376361"/>
+                  </a:lnTo>
+                  <a:lnTo>
+                    <a:pt x="3566904" y="383280"/>
+                  </a:lnTo>
+                  <a:lnTo>
+                    <a:pt x="3644538" y="390142"/>
+                  </a:lnTo>
+                  <a:lnTo>
+                    <a:pt x="3722172" y="396950"/>
+                  </a:lnTo>
+                  <a:lnTo>
+                    <a:pt x="3799806" y="403702"/>
+                  </a:lnTo>
+                  <a:lnTo>
+                    <a:pt x="3877440" y="410401"/>
+                  </a:lnTo>
+                  <a:lnTo>
+                    <a:pt x="3955074" y="417045"/>
+                  </a:lnTo>
+                  <a:lnTo>
+                    <a:pt x="4032708" y="423637"/>
+                  </a:lnTo>
+                  <a:lnTo>
+                    <a:pt x="4110342" y="430175"/>
+                  </a:lnTo>
+                  <a:lnTo>
+                    <a:pt x="4187976" y="436660"/>
+                  </a:lnTo>
+                  <a:lnTo>
+                    <a:pt x="4265610" y="443094"/>
+                  </a:lnTo>
+                  <a:lnTo>
+                    <a:pt x="4343244" y="449475"/>
+                  </a:lnTo>
+                  <a:lnTo>
+                    <a:pt x="4420879" y="455806"/>
+                  </a:lnTo>
+                  <a:lnTo>
+                    <a:pt x="4498513" y="462085"/>
+                  </a:lnTo>
+                  <a:lnTo>
+                    <a:pt x="4576147" y="468314"/>
+                  </a:lnTo>
+                  <a:lnTo>
+                    <a:pt x="4653781" y="474493"/>
+                  </a:lnTo>
+                  <a:lnTo>
+                    <a:pt x="4731415" y="480622"/>
+                  </a:lnTo>
+                  <a:lnTo>
+                    <a:pt x="4809049" y="486702"/>
+                  </a:lnTo>
+                  <a:lnTo>
+                    <a:pt x="4886683" y="492733"/>
+                  </a:lnTo>
+                  <a:lnTo>
+                    <a:pt x="4964317" y="498716"/>
+                  </a:lnTo>
+                  <a:lnTo>
+                    <a:pt x="5041951" y="504650"/>
+                  </a:lnTo>
+                  <a:lnTo>
+                    <a:pt x="5119585" y="510537"/>
+                  </a:lnTo>
+                  <a:lnTo>
+                    <a:pt x="5197219" y="516376"/>
+                  </a:lnTo>
+                  <a:lnTo>
+                    <a:pt x="5274853" y="522169"/>
+                  </a:lnTo>
+                  <a:lnTo>
+                    <a:pt x="5352487" y="527915"/>
+                  </a:lnTo>
+                  <a:lnTo>
+                    <a:pt x="5430121" y="533614"/>
+                  </a:lnTo>
+                  <a:lnTo>
+                    <a:pt x="5507755" y="539268"/>
+                  </a:lnTo>
+                  <a:lnTo>
+                    <a:pt x="5585389" y="544876"/>
+                  </a:lnTo>
+                  <a:lnTo>
+                    <a:pt x="5663023" y="550440"/>
+                  </a:lnTo>
+                  <a:lnTo>
+                    <a:pt x="5740657" y="555958"/>
+                  </a:lnTo>
+                  <a:lnTo>
+                    <a:pt x="5818291" y="561432"/>
+                  </a:lnTo>
+                  <a:lnTo>
+                    <a:pt x="5895925" y="566863"/>
+                  </a:lnTo>
+                  <a:lnTo>
+                    <a:pt x="5973559" y="572249"/>
+                  </a:lnTo>
+                  <a:lnTo>
+                    <a:pt x="6051193" y="577592"/>
+                  </a:lnTo>
+                  <a:lnTo>
+                    <a:pt x="6128827" y="582892"/>
+                  </a:lnTo>
+                  <a:lnTo>
+                    <a:pt x="6206462" y="588150"/>
+                  </a:lnTo>
+                  <a:lnTo>
+                    <a:pt x="6284096" y="593365"/>
+                  </a:lnTo>
+                  <a:lnTo>
+                    <a:pt x="6361730" y="598539"/>
+                  </a:lnTo>
+                  <a:lnTo>
+                    <a:pt x="6439364" y="603670"/>
+                  </a:lnTo>
+                  <a:lnTo>
+                    <a:pt x="6516998" y="608761"/>
+                  </a:lnTo>
+                  <a:lnTo>
+                    <a:pt x="6594632" y="613811"/>
+                  </a:lnTo>
+                  <a:lnTo>
+                    <a:pt x="6672266" y="618820"/>
+                  </a:lnTo>
+                  <a:lnTo>
+                    <a:pt x="6749900" y="623788"/>
+                  </a:lnTo>
+                  <a:lnTo>
+                    <a:pt x="6827534" y="628717"/>
+                  </a:lnTo>
+                  <a:lnTo>
+                    <a:pt x="6905168" y="633606"/>
+                  </a:lnTo>
+                  <a:lnTo>
+                    <a:pt x="6982802" y="638456"/>
+                  </a:lnTo>
+                  <a:lnTo>
+                    <a:pt x="7060436" y="643267"/>
+                  </a:lnTo>
+                  <a:lnTo>
+                    <a:pt x="7138070" y="648039"/>
+                  </a:lnTo>
+                  <a:lnTo>
+                    <a:pt x="7215704" y="652773"/>
+                  </a:lnTo>
+                  <a:lnTo>
+                    <a:pt x="7293338" y="657468"/>
+                  </a:lnTo>
+                  <a:lnTo>
+                    <a:pt x="7370972" y="662126"/>
                   </a:lnTo>
                 </a:path>
               </a:pathLst>

--- a/docs/plots/carbo/jx_carbo_linsubhr_ratio_hosp_immune_other.pptx
+++ b/docs/plots/carbo/jx_carbo_linsubhr_ratio_hosp_immune_other.pptx
@@ -3003,557 +3003,563 @@
           <p:spPr>
             <a:xfrm>
               <a:off x="817517" y="1896563"/>
-              <a:ext cx="7370972" cy="3560123"/>
+              <a:ext cx="7370972" cy="3547410"/>
             </a:xfrm>
             <a:custGeom>
               <a:avLst/>
               <a:pathLst>
-                <a:path w="7370972" h="3560123">
+                <a:path w="7370972" h="3547410">
                   <a:moveTo>
-                    <a:pt x="834295" y="0"/>
+                    <a:pt x="678696" y="0"/>
                   </a:moveTo>
                   <a:lnTo>
-                    <a:pt x="849712" y="32083"/>
-                  </a:lnTo>
-                  <a:lnTo>
-                    <a:pt x="927346" y="186736"/>
-                  </a:lnTo>
-                  <a:lnTo>
-                    <a:pt x="1004981" y="334782"/>
-                  </a:lnTo>
-                  <a:lnTo>
-                    <a:pt x="1082615" y="476505"/>
-                  </a:lnTo>
-                  <a:lnTo>
-                    <a:pt x="1160249" y="612174"/>
-                  </a:lnTo>
-                  <a:lnTo>
-                    <a:pt x="1237883" y="742048"/>
-                  </a:lnTo>
-                  <a:lnTo>
-                    <a:pt x="1315517" y="866375"/>
-                  </a:lnTo>
-                  <a:lnTo>
-                    <a:pt x="1393151" y="985390"/>
-                  </a:lnTo>
-                  <a:lnTo>
-                    <a:pt x="1470785" y="1099322"/>
-                  </a:lnTo>
-                  <a:lnTo>
-                    <a:pt x="1548419" y="1208388"/>
-                  </a:lnTo>
-                  <a:lnTo>
-                    <a:pt x="1626053" y="1312795"/>
-                  </a:lnTo>
-                  <a:lnTo>
-                    <a:pt x="1703687" y="1412741"/>
-                  </a:lnTo>
-                  <a:lnTo>
-                    <a:pt x="1781321" y="1508419"/>
-                  </a:lnTo>
-                  <a:lnTo>
-                    <a:pt x="1858955" y="1600010"/>
-                  </a:lnTo>
-                  <a:lnTo>
-                    <a:pt x="1936589" y="1687688"/>
-                  </a:lnTo>
-                  <a:lnTo>
-                    <a:pt x="2014223" y="1771622"/>
-                  </a:lnTo>
-                  <a:lnTo>
-                    <a:pt x="2091857" y="1851970"/>
-                  </a:lnTo>
-                  <a:lnTo>
-                    <a:pt x="2169491" y="1928886"/>
-                  </a:lnTo>
-                  <a:lnTo>
-                    <a:pt x="2247125" y="2002516"/>
-                  </a:lnTo>
-                  <a:lnTo>
-                    <a:pt x="2324759" y="2073002"/>
-                  </a:lnTo>
-                  <a:lnTo>
-                    <a:pt x="2402393" y="2140476"/>
-                  </a:lnTo>
-                  <a:lnTo>
-                    <a:pt x="2480027" y="2205069"/>
-                  </a:lnTo>
-                  <a:lnTo>
-                    <a:pt x="2557661" y="2266902"/>
-                  </a:lnTo>
-                  <a:lnTo>
-                    <a:pt x="2635295" y="2326094"/>
-                  </a:lnTo>
-                  <a:lnTo>
-                    <a:pt x="2712930" y="2382758"/>
-                  </a:lnTo>
-                  <a:lnTo>
-                    <a:pt x="2790564" y="2437001"/>
-                  </a:lnTo>
-                  <a:lnTo>
-                    <a:pt x="2868198" y="2488927"/>
-                  </a:lnTo>
-                  <a:lnTo>
-                    <a:pt x="2945832" y="2538636"/>
-                  </a:lnTo>
-                  <a:lnTo>
-                    <a:pt x="3023466" y="2586221"/>
-                  </a:lnTo>
-                  <a:lnTo>
-                    <a:pt x="3101100" y="2631773"/>
-                  </a:lnTo>
-                  <a:lnTo>
-                    <a:pt x="3178734" y="2675380"/>
-                  </a:lnTo>
-                  <a:lnTo>
-                    <a:pt x="3256368" y="2717124"/>
-                  </a:lnTo>
-                  <a:lnTo>
-                    <a:pt x="3334002" y="2757084"/>
-                  </a:lnTo>
-                  <a:lnTo>
-                    <a:pt x="3411636" y="2775079"/>
-                  </a:lnTo>
-                  <a:lnTo>
-                    <a:pt x="3489270" y="2750604"/>
-                  </a:lnTo>
-                  <a:lnTo>
-                    <a:pt x="3566904" y="2725446"/>
-                  </a:lnTo>
-                  <a:lnTo>
-                    <a:pt x="3644538" y="2699587"/>
-                  </a:lnTo>
-                  <a:lnTo>
-                    <a:pt x="3722172" y="2673007"/>
-                  </a:lnTo>
-                  <a:lnTo>
-                    <a:pt x="3799806" y="2645685"/>
-                  </a:lnTo>
-                  <a:lnTo>
-                    <a:pt x="3877440" y="2617601"/>
-                  </a:lnTo>
-                  <a:lnTo>
-                    <a:pt x="3955074" y="2588734"/>
-                  </a:lnTo>
-                  <a:lnTo>
-                    <a:pt x="4032708" y="2559062"/>
-                  </a:lnTo>
-                  <a:lnTo>
-                    <a:pt x="4110342" y="2528563"/>
-                  </a:lnTo>
-                  <a:lnTo>
-                    <a:pt x="4187976" y="2497213"/>
-                  </a:lnTo>
-                  <a:lnTo>
-                    <a:pt x="4265610" y="2464988"/>
-                  </a:lnTo>
-                  <a:lnTo>
-                    <a:pt x="4343244" y="2431865"/>
-                  </a:lnTo>
-                  <a:lnTo>
-                    <a:pt x="4420879" y="2397818"/>
-                  </a:lnTo>
-                  <a:lnTo>
-                    <a:pt x="4498513" y="2362821"/>
-                  </a:lnTo>
-                  <a:lnTo>
-                    <a:pt x="4576147" y="2326848"/>
-                  </a:lnTo>
-                  <a:lnTo>
-                    <a:pt x="4653781" y="2289873"/>
-                  </a:lnTo>
-                  <a:lnTo>
-                    <a:pt x="4731415" y="2251865"/>
-                  </a:lnTo>
-                  <a:lnTo>
-                    <a:pt x="4809049" y="2212798"/>
-                  </a:lnTo>
-                  <a:lnTo>
-                    <a:pt x="4886683" y="2172641"/>
-                  </a:lnTo>
-                  <a:lnTo>
-                    <a:pt x="4964317" y="2131365"/>
-                  </a:lnTo>
-                  <a:lnTo>
-                    <a:pt x="5041951" y="2088937"/>
-                  </a:lnTo>
-                  <a:lnTo>
-                    <a:pt x="5119585" y="2045326"/>
-                  </a:lnTo>
-                  <a:lnTo>
-                    <a:pt x="5197219" y="2000498"/>
-                  </a:lnTo>
-                  <a:lnTo>
-                    <a:pt x="5274853" y="1954421"/>
-                  </a:lnTo>
-                  <a:lnTo>
-                    <a:pt x="5352487" y="1907058"/>
-                  </a:lnTo>
-                  <a:lnTo>
-                    <a:pt x="5430121" y="1858374"/>
-                  </a:lnTo>
-                  <a:lnTo>
-                    <a:pt x="5507755" y="1808333"/>
-                  </a:lnTo>
-                  <a:lnTo>
-                    <a:pt x="5585389" y="1756895"/>
-                  </a:lnTo>
-                  <a:lnTo>
-                    <a:pt x="5663023" y="1704024"/>
-                  </a:lnTo>
-                  <a:lnTo>
-                    <a:pt x="5740657" y="1649678"/>
-                  </a:lnTo>
-                  <a:lnTo>
-                    <a:pt x="5818291" y="1593816"/>
-                  </a:lnTo>
-                  <a:lnTo>
-                    <a:pt x="5895925" y="1536396"/>
-                  </a:lnTo>
-                  <a:lnTo>
-                    <a:pt x="5973559" y="1477374"/>
-                  </a:lnTo>
-                  <a:lnTo>
-                    <a:pt x="6051193" y="1416707"/>
-                  </a:lnTo>
-                  <a:lnTo>
-                    <a:pt x="6128827" y="1354347"/>
-                  </a:lnTo>
-                  <a:lnTo>
-                    <a:pt x="6206462" y="1290249"/>
-                  </a:lnTo>
-                  <a:lnTo>
-                    <a:pt x="6284096" y="1224363"/>
-                  </a:lnTo>
-                  <a:lnTo>
-                    <a:pt x="6361730" y="1156639"/>
-                  </a:lnTo>
-                  <a:lnTo>
-                    <a:pt x="6439364" y="1087026"/>
-                  </a:lnTo>
-                  <a:lnTo>
-                    <a:pt x="6516998" y="1015472"/>
-                  </a:lnTo>
-                  <a:lnTo>
-                    <a:pt x="6594632" y="941922"/>
-                  </a:lnTo>
-                  <a:lnTo>
-                    <a:pt x="6672266" y="866321"/>
-                  </a:lnTo>
-                  <a:lnTo>
-                    <a:pt x="6749900" y="788612"/>
-                  </a:lnTo>
-                  <a:lnTo>
-                    <a:pt x="6827534" y="708735"/>
-                  </a:lnTo>
-                  <a:lnTo>
-                    <a:pt x="6905168" y="626631"/>
-                  </a:lnTo>
-                  <a:lnTo>
-                    <a:pt x="6982802" y="542236"/>
-                  </a:lnTo>
-                  <a:lnTo>
-                    <a:pt x="7060436" y="455488"/>
-                  </a:lnTo>
-                  <a:lnTo>
-                    <a:pt x="7138070" y="366321"/>
-                  </a:lnTo>
-                  <a:lnTo>
-                    <a:pt x="7215704" y="274667"/>
-                  </a:lnTo>
-                  <a:lnTo>
-                    <a:pt x="7293338" y="180456"/>
-                  </a:lnTo>
-                  <a:lnTo>
-                    <a:pt x="7370972" y="83618"/>
-                  </a:lnTo>
-                  <a:lnTo>
-                    <a:pt x="7370972" y="3560123"/>
-                  </a:lnTo>
-                  <a:lnTo>
-                    <a:pt x="7293338" y="3555995"/>
-                  </a:lnTo>
-                  <a:lnTo>
-                    <a:pt x="7215704" y="3551682"/>
-                  </a:lnTo>
-                  <a:lnTo>
-                    <a:pt x="7138070" y="3547177"/>
-                  </a:lnTo>
-                  <a:lnTo>
-                    <a:pt x="7060436" y="3542471"/>
-                  </a:lnTo>
-                  <a:lnTo>
-                    <a:pt x="6982802" y="3537555"/>
-                  </a:lnTo>
-                  <a:lnTo>
-                    <a:pt x="6905168" y="3532420"/>
-                  </a:lnTo>
-                  <a:lnTo>
-                    <a:pt x="6827534" y="3527055"/>
-                  </a:lnTo>
-                  <a:lnTo>
-                    <a:pt x="6749900" y="3521451"/>
-                  </a:lnTo>
-                  <a:lnTo>
-                    <a:pt x="6672266" y="3515598"/>
-                  </a:lnTo>
-                  <a:lnTo>
-                    <a:pt x="6594632" y="3509482"/>
-                  </a:lnTo>
-                  <a:lnTo>
-                    <a:pt x="6516998" y="3503094"/>
-                  </a:lnTo>
-                  <a:lnTo>
-                    <a:pt x="6439364" y="3496421"/>
-                  </a:lnTo>
-                  <a:lnTo>
-                    <a:pt x="6361730" y="3489451"/>
-                  </a:lnTo>
-                  <a:lnTo>
-                    <a:pt x="6284096" y="3482169"/>
-                  </a:lnTo>
-                  <a:lnTo>
-                    <a:pt x="6206462" y="3474562"/>
-                  </a:lnTo>
-                  <a:lnTo>
-                    <a:pt x="6128827" y="3466616"/>
-                  </a:lnTo>
-                  <a:lnTo>
-                    <a:pt x="6051193" y="3458315"/>
-                  </a:lnTo>
-                  <a:lnTo>
-                    <a:pt x="5973559" y="3449644"/>
-                  </a:lnTo>
-                  <a:lnTo>
-                    <a:pt x="5895925" y="3440586"/>
-                  </a:lnTo>
-                  <a:lnTo>
-                    <a:pt x="5818291" y="3431124"/>
-                  </a:lnTo>
-                  <a:lnTo>
-                    <a:pt x="5740657" y="3421239"/>
-                  </a:lnTo>
-                  <a:lnTo>
-                    <a:pt x="5663023" y="3410914"/>
-                  </a:lnTo>
-                  <a:lnTo>
-                    <a:pt x="5585389" y="3400127"/>
-                  </a:lnTo>
-                  <a:lnTo>
-                    <a:pt x="5507755" y="3388860"/>
-                  </a:lnTo>
-                  <a:lnTo>
-                    <a:pt x="5430121" y="3377089"/>
-                  </a:lnTo>
-                  <a:lnTo>
-                    <a:pt x="5352487" y="3364794"/>
-                  </a:lnTo>
-                  <a:lnTo>
-                    <a:pt x="5274853" y="3351950"/>
-                  </a:lnTo>
-                  <a:lnTo>
-                    <a:pt x="5197219" y="3338532"/>
-                  </a:lnTo>
-                  <a:lnTo>
-                    <a:pt x="5119585" y="3324516"/>
-                  </a:lnTo>
-                  <a:lnTo>
-                    <a:pt x="5041951" y="3309875"/>
-                  </a:lnTo>
-                  <a:lnTo>
-                    <a:pt x="4964317" y="3294580"/>
-                  </a:lnTo>
-                  <a:lnTo>
-                    <a:pt x="4886683" y="3278603"/>
-                  </a:lnTo>
-                  <a:lnTo>
-                    <a:pt x="4809049" y="3261913"/>
-                  </a:lnTo>
-                  <a:lnTo>
-                    <a:pt x="4731415" y="3244478"/>
-                  </a:lnTo>
-                  <a:lnTo>
-                    <a:pt x="4653781" y="3226266"/>
-                  </a:lnTo>
-                  <a:lnTo>
-                    <a:pt x="4576147" y="3207240"/>
-                  </a:lnTo>
-                  <a:lnTo>
-                    <a:pt x="4498513" y="3187366"/>
-                  </a:lnTo>
-                  <a:lnTo>
-                    <a:pt x="4420879" y="3166604"/>
-                  </a:lnTo>
-                  <a:lnTo>
-                    <a:pt x="4343244" y="3144917"/>
-                  </a:lnTo>
-                  <a:lnTo>
-                    <a:pt x="4265610" y="3122262"/>
-                  </a:lnTo>
-                  <a:lnTo>
-                    <a:pt x="4187976" y="3098595"/>
-                  </a:lnTo>
-                  <a:lnTo>
-                    <a:pt x="4110342" y="3073873"/>
-                  </a:lnTo>
-                  <a:lnTo>
-                    <a:pt x="4032708" y="3048048"/>
-                  </a:lnTo>
-                  <a:lnTo>
-                    <a:pt x="3955074" y="3021070"/>
-                  </a:lnTo>
-                  <a:lnTo>
-                    <a:pt x="3877440" y="2992889"/>
-                  </a:lnTo>
-                  <a:lnTo>
-                    <a:pt x="3799806" y="2963450"/>
-                  </a:lnTo>
-                  <a:lnTo>
-                    <a:pt x="3722172" y="2932697"/>
-                  </a:lnTo>
-                  <a:lnTo>
-                    <a:pt x="3644538" y="2900572"/>
-                  </a:lnTo>
-                  <a:lnTo>
-                    <a:pt x="3566904" y="2867014"/>
-                  </a:lnTo>
-                  <a:lnTo>
-                    <a:pt x="3489270" y="2831958"/>
-                  </a:lnTo>
-                  <a:lnTo>
-                    <a:pt x="3411636" y="2795338"/>
-                  </a:lnTo>
-                  <a:lnTo>
-                    <a:pt x="3334002" y="2798890"/>
-                  </a:lnTo>
-                  <a:lnTo>
-                    <a:pt x="3256368" y="2822054"/>
-                  </a:lnTo>
-                  <a:lnTo>
-                    <a:pt x="3178734" y="2844591"/>
-                  </a:lnTo>
-                  <a:lnTo>
-                    <a:pt x="3101100" y="2866515"/>
-                  </a:lnTo>
-                  <a:lnTo>
-                    <a:pt x="3023466" y="2887845"/>
-                  </a:lnTo>
-                  <a:lnTo>
-                    <a:pt x="2945832" y="2908597"/>
-                  </a:lnTo>
-                  <a:lnTo>
-                    <a:pt x="2868198" y="2928785"/>
-                  </a:lnTo>
-                  <a:lnTo>
-                    <a:pt x="2790564" y="2948425"/>
-                  </a:lnTo>
-                  <a:lnTo>
-                    <a:pt x="2712930" y="2967533"/>
-                  </a:lnTo>
-                  <a:lnTo>
-                    <a:pt x="2635295" y="2986122"/>
-                  </a:lnTo>
-                  <a:lnTo>
-                    <a:pt x="2557661" y="3004206"/>
-                  </a:lnTo>
-                  <a:lnTo>
-                    <a:pt x="2480027" y="3021800"/>
-                  </a:lnTo>
-                  <a:lnTo>
-                    <a:pt x="2402393" y="3038917"/>
-                  </a:lnTo>
-                  <a:lnTo>
-                    <a:pt x="2324759" y="3055569"/>
-                  </a:lnTo>
-                  <a:lnTo>
-                    <a:pt x="2247125" y="3071769"/>
-                  </a:lnTo>
-                  <a:lnTo>
-                    <a:pt x="2169491" y="3087530"/>
-                  </a:lnTo>
-                  <a:lnTo>
-                    <a:pt x="2091857" y="3102863"/>
-                  </a:lnTo>
-                  <a:lnTo>
-                    <a:pt x="2014223" y="3117780"/>
-                  </a:lnTo>
-                  <a:lnTo>
-                    <a:pt x="1936589" y="3132293"/>
-                  </a:lnTo>
-                  <a:lnTo>
-                    <a:pt x="1858955" y="3146411"/>
-                  </a:lnTo>
-                  <a:lnTo>
-                    <a:pt x="1781321" y="3160147"/>
-                  </a:lnTo>
-                  <a:lnTo>
-                    <a:pt x="1703687" y="3173510"/>
-                  </a:lnTo>
-                  <a:lnTo>
-                    <a:pt x="1626053" y="3186510"/>
-                  </a:lnTo>
-                  <a:lnTo>
-                    <a:pt x="1548419" y="3199158"/>
-                  </a:lnTo>
-                  <a:lnTo>
-                    <a:pt x="1470785" y="3211462"/>
-                  </a:lnTo>
-                  <a:lnTo>
-                    <a:pt x="1393151" y="3223433"/>
-                  </a:lnTo>
-                  <a:lnTo>
-                    <a:pt x="1315517" y="3235078"/>
-                  </a:lnTo>
-                  <a:lnTo>
-                    <a:pt x="1237883" y="3246408"/>
-                  </a:lnTo>
-                  <a:lnTo>
-                    <a:pt x="1160249" y="3257430"/>
-                  </a:lnTo>
-                  <a:lnTo>
-                    <a:pt x="1082615" y="3268154"/>
-                  </a:lnTo>
-                  <a:lnTo>
-                    <a:pt x="1004981" y="3278586"/>
-                  </a:lnTo>
-                  <a:lnTo>
-                    <a:pt x="927346" y="3288735"/>
-                  </a:lnTo>
-                  <a:lnTo>
-                    <a:pt x="849712" y="3298609"/>
-                  </a:lnTo>
-                  <a:lnTo>
-                    <a:pt x="772078" y="3308215"/>
-                  </a:lnTo>
-                  <a:lnTo>
-                    <a:pt x="694444" y="3317560"/>
-                  </a:lnTo>
-                  <a:lnTo>
-                    <a:pt x="616810" y="3326652"/>
-                  </a:lnTo>
-                  <a:lnTo>
-                    <a:pt x="539176" y="3335497"/>
-                  </a:lnTo>
-                  <a:lnTo>
-                    <a:pt x="461542" y="3344102"/>
-                  </a:lnTo>
-                  <a:lnTo>
-                    <a:pt x="383908" y="3352474"/>
-                  </a:lnTo>
-                  <a:lnTo>
-                    <a:pt x="306274" y="3360618"/>
-                  </a:lnTo>
-                  <a:lnTo>
-                    <a:pt x="228640" y="3368542"/>
-                  </a:lnTo>
-                  <a:lnTo>
-                    <a:pt x="151006" y="3376250"/>
-                  </a:lnTo>
-                  <a:lnTo>
-                    <a:pt x="73372" y="3383750"/>
-                  </a:lnTo>
-                  <a:lnTo>
-                    <a:pt x="0" y="3390645"/>
+                    <a:pt x="694444" y="30860"/>
+                  </a:lnTo>
+                  <a:lnTo>
+                    <a:pt x="772078" y="176857"/>
+                  </a:lnTo>
+                  <a:lnTo>
+                    <a:pt x="849712" y="316969"/>
+                  </a:lnTo>
+                  <a:lnTo>
+                    <a:pt x="927346" y="451433"/>
+                  </a:lnTo>
+                  <a:lnTo>
+                    <a:pt x="1004981" y="580476"/>
+                  </a:lnTo>
+                  <a:lnTo>
+                    <a:pt x="1082615" y="704318"/>
+                  </a:lnTo>
+                  <a:lnTo>
+                    <a:pt x="1160249" y="823168"/>
+                  </a:lnTo>
+                  <a:lnTo>
+                    <a:pt x="1237883" y="937226"/>
+                  </a:lnTo>
+                  <a:lnTo>
+                    <a:pt x="1315517" y="1046687"/>
+                  </a:lnTo>
+                  <a:lnTo>
+                    <a:pt x="1393151" y="1151735"/>
+                  </a:lnTo>
+                  <a:lnTo>
+                    <a:pt x="1470785" y="1252549"/>
+                  </a:lnTo>
+                  <a:lnTo>
+                    <a:pt x="1548419" y="1349299"/>
+                  </a:lnTo>
+                  <a:lnTo>
+                    <a:pt x="1626053" y="1442149"/>
+                  </a:lnTo>
+                  <a:lnTo>
+                    <a:pt x="1703687" y="1531255"/>
+                  </a:lnTo>
+                  <a:lnTo>
+                    <a:pt x="1781321" y="1616770"/>
+                  </a:lnTo>
+                  <a:lnTo>
+                    <a:pt x="1858955" y="1698838"/>
+                  </a:lnTo>
+                  <a:lnTo>
+                    <a:pt x="1936589" y="1777598"/>
+                  </a:lnTo>
+                  <a:lnTo>
+                    <a:pt x="2014223" y="1853182"/>
+                  </a:lnTo>
+                  <a:lnTo>
+                    <a:pt x="2091857" y="1925720"/>
+                  </a:lnTo>
+                  <a:lnTo>
+                    <a:pt x="2169491" y="1995334"/>
+                  </a:lnTo>
+                  <a:lnTo>
+                    <a:pt x="2247125" y="2062142"/>
+                  </a:lnTo>
+                  <a:lnTo>
+                    <a:pt x="2324759" y="2126256"/>
+                  </a:lnTo>
+                  <a:lnTo>
+                    <a:pt x="2402393" y="2187786"/>
+                  </a:lnTo>
+                  <a:lnTo>
+                    <a:pt x="2480027" y="2246836"/>
+                  </a:lnTo>
+                  <a:lnTo>
+                    <a:pt x="2557661" y="2303505"/>
+                  </a:lnTo>
+                  <a:lnTo>
+                    <a:pt x="2635295" y="2357890"/>
+                  </a:lnTo>
+                  <a:lnTo>
+                    <a:pt x="2712930" y="2410082"/>
+                  </a:lnTo>
+                  <a:lnTo>
+                    <a:pt x="2790564" y="2460171"/>
+                  </a:lnTo>
+                  <a:lnTo>
+                    <a:pt x="2868198" y="2508241"/>
+                  </a:lnTo>
+                  <a:lnTo>
+                    <a:pt x="2945832" y="2554373"/>
+                  </a:lnTo>
+                  <a:lnTo>
+                    <a:pt x="3023466" y="2598645"/>
+                  </a:lnTo>
+                  <a:lnTo>
+                    <a:pt x="3101100" y="2641132"/>
+                  </a:lnTo>
+                  <a:lnTo>
+                    <a:pt x="3178734" y="2681907"/>
+                  </a:lnTo>
+                  <a:lnTo>
+                    <a:pt x="3256368" y="2721038"/>
+                  </a:lnTo>
+                  <a:lnTo>
+                    <a:pt x="3334002" y="2758592"/>
+                  </a:lnTo>
+                  <a:lnTo>
+                    <a:pt x="3411636" y="2777808"/>
+                  </a:lnTo>
+                  <a:lnTo>
+                    <a:pt x="3489270" y="2761903"/>
+                  </a:lnTo>
+                  <a:lnTo>
+                    <a:pt x="3566904" y="2745709"/>
+                  </a:lnTo>
+                  <a:lnTo>
+                    <a:pt x="3644538" y="2729221"/>
+                  </a:lnTo>
+                  <a:lnTo>
+                    <a:pt x="3722172" y="2712433"/>
+                  </a:lnTo>
+                  <a:lnTo>
+                    <a:pt x="3799806" y="2695339"/>
+                  </a:lnTo>
+                  <a:lnTo>
+                    <a:pt x="3877440" y="2677935"/>
+                  </a:lnTo>
+                  <a:lnTo>
+                    <a:pt x="3955074" y="2660214"/>
+                  </a:lnTo>
+                  <a:lnTo>
+                    <a:pt x="4032708" y="2642172"/>
+                  </a:lnTo>
+                  <a:lnTo>
+                    <a:pt x="4110342" y="2623801"/>
+                  </a:lnTo>
+                  <a:lnTo>
+                    <a:pt x="4187976" y="2605096"/>
+                  </a:lnTo>
+                  <a:lnTo>
+                    <a:pt x="4265610" y="2586051"/>
+                  </a:lnTo>
+                  <a:lnTo>
+                    <a:pt x="4343244" y="2566660"/>
+                  </a:lnTo>
+                  <a:lnTo>
+                    <a:pt x="4420879" y="2546916"/>
+                  </a:lnTo>
+                  <a:lnTo>
+                    <a:pt x="4498513" y="2526814"/>
+                  </a:lnTo>
+                  <a:lnTo>
+                    <a:pt x="4576147" y="2506346"/>
+                  </a:lnTo>
+                  <a:lnTo>
+                    <a:pt x="4653781" y="2485506"/>
+                  </a:lnTo>
+                  <a:lnTo>
+                    <a:pt x="4731415" y="2464287"/>
+                  </a:lnTo>
+                  <a:lnTo>
+                    <a:pt x="4809049" y="2442682"/>
+                  </a:lnTo>
+                  <a:lnTo>
+                    <a:pt x="4886683" y="2420684"/>
+                  </a:lnTo>
+                  <a:lnTo>
+                    <a:pt x="4964317" y="2398287"/>
+                  </a:lnTo>
+                  <a:lnTo>
+                    <a:pt x="5041951" y="2375482"/>
+                  </a:lnTo>
+                  <a:lnTo>
+                    <a:pt x="5119585" y="2352263"/>
+                  </a:lnTo>
+                  <a:lnTo>
+                    <a:pt x="5197219" y="2328621"/>
+                  </a:lnTo>
+                  <a:lnTo>
+                    <a:pt x="5274853" y="2304550"/>
+                  </a:lnTo>
+                  <a:lnTo>
+                    <a:pt x="5352487" y="2280041"/>
+                  </a:lnTo>
+                  <a:lnTo>
+                    <a:pt x="5430121" y="2255087"/>
+                  </a:lnTo>
+                  <a:lnTo>
+                    <a:pt x="5507755" y="2229678"/>
+                  </a:lnTo>
+                  <a:lnTo>
+                    <a:pt x="5585389" y="2203808"/>
+                  </a:lnTo>
+                  <a:lnTo>
+                    <a:pt x="5663023" y="2177468"/>
+                  </a:lnTo>
+                  <a:lnTo>
+                    <a:pt x="5740657" y="2150649"/>
+                  </a:lnTo>
+                  <a:lnTo>
+                    <a:pt x="5818291" y="2123342"/>
+                  </a:lnTo>
+                  <a:lnTo>
+                    <a:pt x="5895925" y="2095538"/>
+                  </a:lnTo>
+                  <a:lnTo>
+                    <a:pt x="5973559" y="2067230"/>
+                  </a:lnTo>
+                  <a:lnTo>
+                    <a:pt x="6051193" y="2038406"/>
+                  </a:lnTo>
+                  <a:lnTo>
+                    <a:pt x="6128827" y="2009059"/>
+                  </a:lnTo>
+                  <a:lnTo>
+                    <a:pt x="6206462" y="1979178"/>
+                  </a:lnTo>
+                  <a:lnTo>
+                    <a:pt x="6284096" y="1948753"/>
+                  </a:lnTo>
+                  <a:lnTo>
+                    <a:pt x="6361730" y="1917776"/>
+                  </a:lnTo>
+                  <a:lnTo>
+                    <a:pt x="6439364" y="1886235"/>
+                  </a:lnTo>
+                  <a:lnTo>
+                    <a:pt x="6516998" y="1854121"/>
+                  </a:lnTo>
+                  <a:lnTo>
+                    <a:pt x="6594632" y="1821423"/>
+                  </a:lnTo>
+                  <a:lnTo>
+                    <a:pt x="6672266" y="1788131"/>
+                  </a:lnTo>
+                  <a:lnTo>
+                    <a:pt x="6749900" y="1754234"/>
+                  </a:lnTo>
+                  <a:lnTo>
+                    <a:pt x="6827534" y="1719720"/>
+                  </a:lnTo>
+                  <a:lnTo>
+                    <a:pt x="6905168" y="1684578"/>
+                  </a:lnTo>
+                  <a:lnTo>
+                    <a:pt x="6982802" y="1648798"/>
+                  </a:lnTo>
+                  <a:lnTo>
+                    <a:pt x="7060436" y="1612367"/>
+                  </a:lnTo>
+                  <a:lnTo>
+                    <a:pt x="7138070" y="1575274"/>
+                  </a:lnTo>
+                  <a:lnTo>
+                    <a:pt x="7215704" y="1537507"/>
+                  </a:lnTo>
+                  <a:lnTo>
+                    <a:pt x="7293338" y="1499053"/>
+                  </a:lnTo>
+                  <a:lnTo>
+                    <a:pt x="7370972" y="1459900"/>
+                  </a:lnTo>
+                  <a:lnTo>
+                    <a:pt x="7370972" y="3547410"/>
+                  </a:lnTo>
+                  <a:lnTo>
+                    <a:pt x="7293338" y="3542990"/>
+                  </a:lnTo>
+                  <a:lnTo>
+                    <a:pt x="7215704" y="3538384"/>
+                  </a:lnTo>
+                  <a:lnTo>
+                    <a:pt x="7138070" y="3533585"/>
+                  </a:lnTo>
+                  <a:lnTo>
+                    <a:pt x="7060436" y="3528584"/>
+                  </a:lnTo>
+                  <a:lnTo>
+                    <a:pt x="6982802" y="3523373"/>
+                  </a:lnTo>
+                  <a:lnTo>
+                    <a:pt x="6905168" y="3517943"/>
+                  </a:lnTo>
+                  <a:lnTo>
+                    <a:pt x="6827534" y="3512285"/>
+                  </a:lnTo>
+                  <a:lnTo>
+                    <a:pt x="6749900" y="3506389"/>
+                  </a:lnTo>
+                  <a:lnTo>
+                    <a:pt x="6672266" y="3500246"/>
+                  </a:lnTo>
+                  <a:lnTo>
+                    <a:pt x="6594632" y="3493845"/>
+                  </a:lnTo>
+                  <a:lnTo>
+                    <a:pt x="6516998" y="3487174"/>
+                  </a:lnTo>
+                  <a:lnTo>
+                    <a:pt x="6439364" y="3480224"/>
+                  </a:lnTo>
+                  <a:lnTo>
+                    <a:pt x="6361730" y="3472982"/>
+                  </a:lnTo>
+                  <a:lnTo>
+                    <a:pt x="6284096" y="3465435"/>
+                  </a:lnTo>
+                  <a:lnTo>
+                    <a:pt x="6206462" y="3457572"/>
+                  </a:lnTo>
+                  <a:lnTo>
+                    <a:pt x="6128827" y="3449378"/>
+                  </a:lnTo>
+                  <a:lnTo>
+                    <a:pt x="6051193" y="3440840"/>
+                  </a:lnTo>
+                  <a:lnTo>
+                    <a:pt x="5973559" y="3431943"/>
+                  </a:lnTo>
+                  <a:lnTo>
+                    <a:pt x="5895925" y="3422673"/>
+                  </a:lnTo>
+                  <a:lnTo>
+                    <a:pt x="5818291" y="3413013"/>
+                  </a:lnTo>
+                  <a:lnTo>
+                    <a:pt x="5740657" y="3402948"/>
+                  </a:lnTo>
+                  <a:lnTo>
+                    <a:pt x="5663023" y="3392460"/>
+                  </a:lnTo>
+                  <a:lnTo>
+                    <a:pt x="5585389" y="3381531"/>
+                  </a:lnTo>
+                  <a:lnTo>
+                    <a:pt x="5507755" y="3370143"/>
+                  </a:lnTo>
+                  <a:lnTo>
+                    <a:pt x="5430121" y="3358277"/>
+                  </a:lnTo>
+                  <a:lnTo>
+                    <a:pt x="5352487" y="3345912"/>
+                  </a:lnTo>
+                  <a:lnTo>
+                    <a:pt x="5274853" y="3333028"/>
+                  </a:lnTo>
+                  <a:lnTo>
+                    <a:pt x="5197219" y="3319603"/>
+                  </a:lnTo>
+                  <a:lnTo>
+                    <a:pt x="5119585" y="3305614"/>
+                  </a:lnTo>
+                  <a:lnTo>
+                    <a:pt x="5041951" y="3291038"/>
+                  </a:lnTo>
+                  <a:lnTo>
+                    <a:pt x="4964317" y="3275849"/>
+                  </a:lnTo>
+                  <a:lnTo>
+                    <a:pt x="4886683" y="3260022"/>
+                  </a:lnTo>
+                  <a:lnTo>
+                    <a:pt x="4809049" y="3243530"/>
+                  </a:lnTo>
+                  <a:lnTo>
+                    <a:pt x="4731415" y="3226346"/>
+                  </a:lnTo>
+                  <a:lnTo>
+                    <a:pt x="4653781" y="3208440"/>
+                  </a:lnTo>
+                  <a:lnTo>
+                    <a:pt x="4576147" y="3189781"/>
+                  </a:lnTo>
+                  <a:lnTo>
+                    <a:pt x="4498513" y="3170339"/>
+                  </a:lnTo>
+                  <a:lnTo>
+                    <a:pt x="4420879" y="3150080"/>
+                  </a:lnTo>
+                  <a:lnTo>
+                    <a:pt x="4343244" y="3128971"/>
+                  </a:lnTo>
+                  <a:lnTo>
+                    <a:pt x="4265610" y="3106974"/>
+                  </a:lnTo>
+                  <a:lnTo>
+                    <a:pt x="4187976" y="3084054"/>
+                  </a:lnTo>
+                  <a:lnTo>
+                    <a:pt x="4110342" y="3060171"/>
+                  </a:lnTo>
+                  <a:lnTo>
+                    <a:pt x="4032708" y="3035285"/>
+                  </a:lnTo>
+                  <a:lnTo>
+                    <a:pt x="3955074" y="3009353"/>
+                  </a:lnTo>
+                  <a:lnTo>
+                    <a:pt x="3877440" y="2982332"/>
+                  </a:lnTo>
+                  <a:lnTo>
+                    <a:pt x="3799806" y="2954176"/>
+                  </a:lnTo>
+                  <a:lnTo>
+                    <a:pt x="3722172" y="2924838"/>
+                  </a:lnTo>
+                  <a:lnTo>
+                    <a:pt x="3644538" y="2894267"/>
+                  </a:lnTo>
+                  <a:lnTo>
+                    <a:pt x="3566904" y="2862412"/>
+                  </a:lnTo>
+                  <a:lnTo>
+                    <a:pt x="3489270" y="2829219"/>
+                  </a:lnTo>
+                  <a:lnTo>
+                    <a:pt x="3411636" y="2794632"/>
+                  </a:lnTo>
+                  <a:lnTo>
+                    <a:pt x="3334002" y="2793429"/>
+                  </a:lnTo>
+                  <a:lnTo>
+                    <a:pt x="3256368" y="2808771"/>
+                  </a:lnTo>
+                  <a:lnTo>
+                    <a:pt x="3178734" y="2823839"/>
+                  </a:lnTo>
+                  <a:lnTo>
+                    <a:pt x="3101100" y="2838638"/>
+                  </a:lnTo>
+                  <a:lnTo>
+                    <a:pt x="3023466" y="2853173"/>
+                  </a:lnTo>
+                  <a:lnTo>
+                    <a:pt x="2945832" y="2867448"/>
+                  </a:lnTo>
+                  <a:lnTo>
+                    <a:pt x="2868198" y="2881468"/>
+                  </a:lnTo>
+                  <a:lnTo>
+                    <a:pt x="2790564" y="2895238"/>
+                  </a:lnTo>
+                  <a:lnTo>
+                    <a:pt x="2712930" y="2908762"/>
+                  </a:lnTo>
+                  <a:lnTo>
+                    <a:pt x="2635295" y="2922045"/>
+                  </a:lnTo>
+                  <a:lnTo>
+                    <a:pt x="2557661" y="2935090"/>
+                  </a:lnTo>
+                  <a:lnTo>
+                    <a:pt x="2480027" y="2947902"/>
+                  </a:lnTo>
+                  <a:lnTo>
+                    <a:pt x="2402393" y="2960486"/>
+                  </a:lnTo>
+                  <a:lnTo>
+                    <a:pt x="2324759" y="2972845"/>
+                  </a:lnTo>
+                  <a:lnTo>
+                    <a:pt x="2247125" y="2984984"/>
+                  </a:lnTo>
+                  <a:lnTo>
+                    <a:pt x="2169491" y="2996905"/>
+                  </a:lnTo>
+                  <a:lnTo>
+                    <a:pt x="2091857" y="3008614"/>
+                  </a:lnTo>
+                  <a:lnTo>
+                    <a:pt x="2014223" y="3020113"/>
+                  </a:lnTo>
+                  <a:lnTo>
+                    <a:pt x="1936589" y="3031408"/>
+                  </a:lnTo>
+                  <a:lnTo>
+                    <a:pt x="1858955" y="3042500"/>
+                  </a:lnTo>
+                  <a:lnTo>
+                    <a:pt x="1781321" y="3053395"/>
+                  </a:lnTo>
+                  <a:lnTo>
+                    <a:pt x="1703687" y="3064095"/>
+                  </a:lnTo>
+                  <a:lnTo>
+                    <a:pt x="1626053" y="3074604"/>
+                  </a:lnTo>
+                  <a:lnTo>
+                    <a:pt x="1548419" y="3084925"/>
+                  </a:lnTo>
+                  <a:lnTo>
+                    <a:pt x="1470785" y="3095062"/>
+                  </a:lnTo>
+                  <a:lnTo>
+                    <a:pt x="1393151" y="3105018"/>
+                  </a:lnTo>
+                  <a:lnTo>
+                    <a:pt x="1315517" y="3114797"/>
+                  </a:lnTo>
+                  <a:lnTo>
+                    <a:pt x="1237883" y="3124400"/>
+                  </a:lnTo>
+                  <a:lnTo>
+                    <a:pt x="1160249" y="3133833"/>
+                  </a:lnTo>
+                  <a:lnTo>
+                    <a:pt x="1082615" y="3143096"/>
+                  </a:lnTo>
+                  <a:lnTo>
+                    <a:pt x="1004981" y="3152195"/>
+                  </a:lnTo>
+                  <a:lnTo>
+                    <a:pt x="927346" y="3161131"/>
+                  </a:lnTo>
+                  <a:lnTo>
+                    <a:pt x="849712" y="3169907"/>
+                  </a:lnTo>
+                  <a:lnTo>
+                    <a:pt x="772078" y="3178527"/>
+                  </a:lnTo>
+                  <a:lnTo>
+                    <a:pt x="694444" y="3186992"/>
+                  </a:lnTo>
+                  <a:lnTo>
+                    <a:pt x="616810" y="3195307"/>
+                  </a:lnTo>
+                  <a:lnTo>
+                    <a:pt x="539176" y="3203473"/>
+                  </a:lnTo>
+                  <a:lnTo>
+                    <a:pt x="461542" y="3211493"/>
+                  </a:lnTo>
+                  <a:lnTo>
+                    <a:pt x="383908" y="3219370"/>
+                  </a:lnTo>
+                  <a:lnTo>
+                    <a:pt x="306274" y="3227107"/>
+                  </a:lnTo>
+                  <a:lnTo>
+                    <a:pt x="228640" y="3234705"/>
+                  </a:lnTo>
+                  <a:lnTo>
+                    <a:pt x="151006" y="3242168"/>
+                  </a:lnTo>
+                  <a:lnTo>
+                    <a:pt x="73372" y="3249497"/>
+                  </a:lnTo>
+                  <a:lnTo>
+                    <a:pt x="0" y="3256300"/>
                   </a:lnTo>
                   <a:close/>
                 </a:path>
@@ -3579,270 +3585,276 @@
           </p:nvSpPr>
           <p:spPr>
             <a:xfrm>
-              <a:off x="1651813" y="1896563"/>
-              <a:ext cx="6536677" cy="2775079"/>
+              <a:off x="1496214" y="1896563"/>
+              <a:ext cx="6692276" cy="2777808"/>
             </a:xfrm>
             <a:custGeom>
               <a:avLst/>
               <a:pathLst>
-                <a:path w="6536677" h="2775079">
+                <a:path w="6692276" h="2777808">
                   <a:moveTo>
                     <a:pt x="0" y="0"/>
                   </a:moveTo>
                   <a:lnTo>
-                    <a:pt x="15417" y="32083"/>
-                  </a:lnTo>
-                  <a:lnTo>
-                    <a:pt x="93051" y="186736"/>
-                  </a:lnTo>
-                  <a:lnTo>
-                    <a:pt x="170685" y="334782"/>
-                  </a:lnTo>
-                  <a:lnTo>
-                    <a:pt x="248319" y="476505"/>
-                  </a:lnTo>
-                  <a:lnTo>
-                    <a:pt x="325953" y="612174"/>
-                  </a:lnTo>
-                  <a:lnTo>
-                    <a:pt x="403587" y="742048"/>
-                  </a:lnTo>
-                  <a:lnTo>
-                    <a:pt x="481221" y="866375"/>
-                  </a:lnTo>
-                  <a:lnTo>
-                    <a:pt x="558855" y="985390"/>
-                  </a:lnTo>
-                  <a:lnTo>
-                    <a:pt x="636489" y="1099322"/>
-                  </a:lnTo>
-                  <a:lnTo>
-                    <a:pt x="714124" y="1208388"/>
-                  </a:lnTo>
-                  <a:lnTo>
-                    <a:pt x="791758" y="1312795"/>
-                  </a:lnTo>
-                  <a:lnTo>
-                    <a:pt x="869392" y="1412741"/>
-                  </a:lnTo>
-                  <a:lnTo>
-                    <a:pt x="947026" y="1508419"/>
-                  </a:lnTo>
-                  <a:lnTo>
-                    <a:pt x="1024660" y="1600010"/>
-                  </a:lnTo>
-                  <a:lnTo>
-                    <a:pt x="1102294" y="1687688"/>
-                  </a:lnTo>
-                  <a:lnTo>
-                    <a:pt x="1179928" y="1771622"/>
-                  </a:lnTo>
-                  <a:lnTo>
-                    <a:pt x="1257562" y="1851970"/>
-                  </a:lnTo>
-                  <a:lnTo>
-                    <a:pt x="1335196" y="1928886"/>
-                  </a:lnTo>
-                  <a:lnTo>
-                    <a:pt x="1412830" y="2002516"/>
-                  </a:lnTo>
-                  <a:lnTo>
-                    <a:pt x="1490464" y="2073002"/>
-                  </a:lnTo>
-                  <a:lnTo>
-                    <a:pt x="1568098" y="2140476"/>
-                  </a:lnTo>
-                  <a:lnTo>
-                    <a:pt x="1645732" y="2205069"/>
-                  </a:lnTo>
-                  <a:lnTo>
-                    <a:pt x="1723366" y="2266902"/>
-                  </a:lnTo>
-                  <a:lnTo>
-                    <a:pt x="1801000" y="2326094"/>
-                  </a:lnTo>
-                  <a:lnTo>
-                    <a:pt x="1878634" y="2382758"/>
-                  </a:lnTo>
-                  <a:lnTo>
-                    <a:pt x="1956268" y="2437001"/>
-                  </a:lnTo>
-                  <a:lnTo>
-                    <a:pt x="2033902" y="2488927"/>
-                  </a:lnTo>
-                  <a:lnTo>
-                    <a:pt x="2111536" y="2538636"/>
-                  </a:lnTo>
-                  <a:lnTo>
-                    <a:pt x="2189170" y="2586221"/>
-                  </a:lnTo>
-                  <a:lnTo>
-                    <a:pt x="2266804" y="2631773"/>
-                  </a:lnTo>
-                  <a:lnTo>
-                    <a:pt x="2344438" y="2675380"/>
-                  </a:lnTo>
-                  <a:lnTo>
-                    <a:pt x="2422072" y="2717124"/>
-                  </a:lnTo>
-                  <a:lnTo>
-                    <a:pt x="2499707" y="2757084"/>
-                  </a:lnTo>
-                  <a:lnTo>
-                    <a:pt x="2577341" y="2775079"/>
-                  </a:lnTo>
-                  <a:lnTo>
-                    <a:pt x="2654975" y="2750604"/>
-                  </a:lnTo>
-                  <a:lnTo>
-                    <a:pt x="2732609" y="2725446"/>
-                  </a:lnTo>
-                  <a:lnTo>
-                    <a:pt x="2810243" y="2699587"/>
-                  </a:lnTo>
-                  <a:lnTo>
-                    <a:pt x="2887877" y="2673007"/>
-                  </a:lnTo>
-                  <a:lnTo>
-                    <a:pt x="2965511" y="2645685"/>
-                  </a:lnTo>
-                  <a:lnTo>
-                    <a:pt x="3043145" y="2617601"/>
-                  </a:lnTo>
-                  <a:lnTo>
-                    <a:pt x="3120779" y="2588734"/>
-                  </a:lnTo>
-                  <a:lnTo>
-                    <a:pt x="3198413" y="2559062"/>
-                  </a:lnTo>
-                  <a:lnTo>
-                    <a:pt x="3276047" y="2528563"/>
-                  </a:lnTo>
-                  <a:lnTo>
-                    <a:pt x="3353681" y="2497213"/>
-                  </a:lnTo>
-                  <a:lnTo>
-                    <a:pt x="3431315" y="2464988"/>
-                  </a:lnTo>
-                  <a:lnTo>
-                    <a:pt x="3508949" y="2431865"/>
-                  </a:lnTo>
-                  <a:lnTo>
-                    <a:pt x="3586583" y="2397818"/>
-                  </a:lnTo>
-                  <a:lnTo>
-                    <a:pt x="3664217" y="2362821"/>
-                  </a:lnTo>
-                  <a:lnTo>
-                    <a:pt x="3741851" y="2326848"/>
-                  </a:lnTo>
-                  <a:lnTo>
-                    <a:pt x="3819485" y="2289873"/>
-                  </a:lnTo>
-                  <a:lnTo>
-                    <a:pt x="3897119" y="2251865"/>
-                  </a:lnTo>
-                  <a:lnTo>
-                    <a:pt x="3974753" y="2212798"/>
-                  </a:lnTo>
-                  <a:lnTo>
-                    <a:pt x="4052387" y="2172641"/>
-                  </a:lnTo>
-                  <a:lnTo>
-                    <a:pt x="4130021" y="2131365"/>
-                  </a:lnTo>
-                  <a:lnTo>
-                    <a:pt x="4207656" y="2088937"/>
-                  </a:lnTo>
-                  <a:lnTo>
-                    <a:pt x="4285290" y="2045326"/>
-                  </a:lnTo>
-                  <a:lnTo>
-                    <a:pt x="4362924" y="2000498"/>
-                  </a:lnTo>
-                  <a:lnTo>
-                    <a:pt x="4440558" y="1954421"/>
-                  </a:lnTo>
-                  <a:lnTo>
-                    <a:pt x="4518192" y="1907058"/>
-                  </a:lnTo>
-                  <a:lnTo>
-                    <a:pt x="4595826" y="1858374"/>
-                  </a:lnTo>
-                  <a:lnTo>
-                    <a:pt x="4673460" y="1808333"/>
-                  </a:lnTo>
-                  <a:lnTo>
-                    <a:pt x="4751094" y="1756895"/>
-                  </a:lnTo>
-                  <a:lnTo>
-                    <a:pt x="4828728" y="1704024"/>
-                  </a:lnTo>
-                  <a:lnTo>
-                    <a:pt x="4906362" y="1649678"/>
-                  </a:lnTo>
-                  <a:lnTo>
-                    <a:pt x="4983996" y="1593816"/>
-                  </a:lnTo>
-                  <a:lnTo>
-                    <a:pt x="5061630" y="1536396"/>
-                  </a:lnTo>
-                  <a:lnTo>
-                    <a:pt x="5139264" y="1477374"/>
-                  </a:lnTo>
-                  <a:lnTo>
-                    <a:pt x="5216898" y="1416707"/>
-                  </a:lnTo>
-                  <a:lnTo>
-                    <a:pt x="5294532" y="1354347"/>
-                  </a:lnTo>
-                  <a:lnTo>
-                    <a:pt x="5372166" y="1290249"/>
-                  </a:lnTo>
-                  <a:lnTo>
-                    <a:pt x="5449800" y="1224363"/>
-                  </a:lnTo>
-                  <a:lnTo>
-                    <a:pt x="5527434" y="1156639"/>
-                  </a:lnTo>
-                  <a:lnTo>
-                    <a:pt x="5605068" y="1087026"/>
-                  </a:lnTo>
-                  <a:lnTo>
-                    <a:pt x="5682702" y="1015472"/>
-                  </a:lnTo>
-                  <a:lnTo>
-                    <a:pt x="5760336" y="941922"/>
-                  </a:lnTo>
-                  <a:lnTo>
-                    <a:pt x="5837970" y="866321"/>
-                  </a:lnTo>
-                  <a:lnTo>
-                    <a:pt x="5915605" y="788612"/>
-                  </a:lnTo>
-                  <a:lnTo>
-                    <a:pt x="5993239" y="708735"/>
-                  </a:lnTo>
-                  <a:lnTo>
-                    <a:pt x="6070873" y="626631"/>
-                  </a:lnTo>
-                  <a:lnTo>
-                    <a:pt x="6148507" y="542236"/>
-                  </a:lnTo>
-                  <a:lnTo>
-                    <a:pt x="6226141" y="455488"/>
-                  </a:lnTo>
-                  <a:lnTo>
-                    <a:pt x="6303775" y="366321"/>
-                  </a:lnTo>
-                  <a:lnTo>
-                    <a:pt x="6381409" y="274667"/>
-                  </a:lnTo>
-                  <a:lnTo>
-                    <a:pt x="6459043" y="180456"/>
-                  </a:lnTo>
-                  <a:lnTo>
-                    <a:pt x="6536677" y="83618"/>
+                    <a:pt x="15748" y="30860"/>
+                  </a:lnTo>
+                  <a:lnTo>
+                    <a:pt x="93382" y="176857"/>
+                  </a:lnTo>
+                  <a:lnTo>
+                    <a:pt x="171016" y="316969"/>
+                  </a:lnTo>
+                  <a:lnTo>
+                    <a:pt x="248650" y="451433"/>
+                  </a:lnTo>
+                  <a:lnTo>
+                    <a:pt x="326284" y="580476"/>
+                  </a:lnTo>
+                  <a:lnTo>
+                    <a:pt x="403918" y="704318"/>
+                  </a:lnTo>
+                  <a:lnTo>
+                    <a:pt x="481552" y="823168"/>
+                  </a:lnTo>
+                  <a:lnTo>
+                    <a:pt x="559186" y="937226"/>
+                  </a:lnTo>
+                  <a:lnTo>
+                    <a:pt x="636820" y="1046687"/>
+                  </a:lnTo>
+                  <a:lnTo>
+                    <a:pt x="714454" y="1151735"/>
+                  </a:lnTo>
+                  <a:lnTo>
+                    <a:pt x="792088" y="1252549"/>
+                  </a:lnTo>
+                  <a:lnTo>
+                    <a:pt x="869723" y="1349299"/>
+                  </a:lnTo>
+                  <a:lnTo>
+                    <a:pt x="947357" y="1442149"/>
+                  </a:lnTo>
+                  <a:lnTo>
+                    <a:pt x="1024991" y="1531255"/>
+                  </a:lnTo>
+                  <a:lnTo>
+                    <a:pt x="1102625" y="1616770"/>
+                  </a:lnTo>
+                  <a:lnTo>
+                    <a:pt x="1180259" y="1698838"/>
+                  </a:lnTo>
+                  <a:lnTo>
+                    <a:pt x="1257893" y="1777598"/>
+                  </a:lnTo>
+                  <a:lnTo>
+                    <a:pt x="1335527" y="1853182"/>
+                  </a:lnTo>
+                  <a:lnTo>
+                    <a:pt x="1413161" y="1925720"/>
+                  </a:lnTo>
+                  <a:lnTo>
+                    <a:pt x="1490795" y="1995334"/>
+                  </a:lnTo>
+                  <a:lnTo>
+                    <a:pt x="1568429" y="2062142"/>
+                  </a:lnTo>
+                  <a:lnTo>
+                    <a:pt x="1646063" y="2126256"/>
+                  </a:lnTo>
+                  <a:lnTo>
+                    <a:pt x="1723697" y="2187786"/>
+                  </a:lnTo>
+                  <a:lnTo>
+                    <a:pt x="1801331" y="2246836"/>
+                  </a:lnTo>
+                  <a:lnTo>
+                    <a:pt x="1878965" y="2303505"/>
+                  </a:lnTo>
+                  <a:lnTo>
+                    <a:pt x="1956599" y="2357890"/>
+                  </a:lnTo>
+                  <a:lnTo>
+                    <a:pt x="2034233" y="2410082"/>
+                  </a:lnTo>
+                  <a:lnTo>
+                    <a:pt x="2111867" y="2460171"/>
+                  </a:lnTo>
+                  <a:lnTo>
+                    <a:pt x="2189501" y="2508241"/>
+                  </a:lnTo>
+                  <a:lnTo>
+                    <a:pt x="2267135" y="2554373"/>
+                  </a:lnTo>
+                  <a:lnTo>
+                    <a:pt x="2344769" y="2598645"/>
+                  </a:lnTo>
+                  <a:lnTo>
+                    <a:pt x="2422403" y="2641132"/>
+                  </a:lnTo>
+                  <a:lnTo>
+                    <a:pt x="2500037" y="2681907"/>
+                  </a:lnTo>
+                  <a:lnTo>
+                    <a:pt x="2577671" y="2721038"/>
+                  </a:lnTo>
+                  <a:lnTo>
+                    <a:pt x="2655306" y="2758592"/>
+                  </a:lnTo>
+                  <a:lnTo>
+                    <a:pt x="2732940" y="2777808"/>
+                  </a:lnTo>
+                  <a:lnTo>
+                    <a:pt x="2810574" y="2761903"/>
+                  </a:lnTo>
+                  <a:lnTo>
+                    <a:pt x="2888208" y="2745709"/>
+                  </a:lnTo>
+                  <a:lnTo>
+                    <a:pt x="2965842" y="2729221"/>
+                  </a:lnTo>
+                  <a:lnTo>
+                    <a:pt x="3043476" y="2712433"/>
+                  </a:lnTo>
+                  <a:lnTo>
+                    <a:pt x="3121110" y="2695339"/>
+                  </a:lnTo>
+                  <a:lnTo>
+                    <a:pt x="3198744" y="2677935"/>
+                  </a:lnTo>
+                  <a:lnTo>
+                    <a:pt x="3276378" y="2660214"/>
+                  </a:lnTo>
+                  <a:lnTo>
+                    <a:pt x="3354012" y="2642172"/>
+                  </a:lnTo>
+                  <a:lnTo>
+                    <a:pt x="3431646" y="2623801"/>
+                  </a:lnTo>
+                  <a:lnTo>
+                    <a:pt x="3509280" y="2605096"/>
+                  </a:lnTo>
+                  <a:lnTo>
+                    <a:pt x="3586914" y="2586051"/>
+                  </a:lnTo>
+                  <a:lnTo>
+                    <a:pt x="3664548" y="2566660"/>
+                  </a:lnTo>
+                  <a:lnTo>
+                    <a:pt x="3742182" y="2546916"/>
+                  </a:lnTo>
+                  <a:lnTo>
+                    <a:pt x="3819816" y="2526814"/>
+                  </a:lnTo>
+                  <a:lnTo>
+                    <a:pt x="3897450" y="2506346"/>
+                  </a:lnTo>
+                  <a:lnTo>
+                    <a:pt x="3975084" y="2485506"/>
+                  </a:lnTo>
+                  <a:lnTo>
+                    <a:pt x="4052718" y="2464287"/>
+                  </a:lnTo>
+                  <a:lnTo>
+                    <a:pt x="4130352" y="2442682"/>
+                  </a:lnTo>
+                  <a:lnTo>
+                    <a:pt x="4207986" y="2420684"/>
+                  </a:lnTo>
+                  <a:lnTo>
+                    <a:pt x="4285620" y="2398287"/>
+                  </a:lnTo>
+                  <a:lnTo>
+                    <a:pt x="4363255" y="2375482"/>
+                  </a:lnTo>
+                  <a:lnTo>
+                    <a:pt x="4440889" y="2352263"/>
+                  </a:lnTo>
+                  <a:lnTo>
+                    <a:pt x="4518523" y="2328621"/>
+                  </a:lnTo>
+                  <a:lnTo>
+                    <a:pt x="4596157" y="2304550"/>
+                  </a:lnTo>
+                  <a:lnTo>
+                    <a:pt x="4673791" y="2280041"/>
+                  </a:lnTo>
+                  <a:lnTo>
+                    <a:pt x="4751425" y="2255087"/>
+                  </a:lnTo>
+                  <a:lnTo>
+                    <a:pt x="4829059" y="2229678"/>
+                  </a:lnTo>
+                  <a:lnTo>
+                    <a:pt x="4906693" y="2203808"/>
+                  </a:lnTo>
+                  <a:lnTo>
+                    <a:pt x="4984327" y="2177468"/>
+                  </a:lnTo>
+                  <a:lnTo>
+                    <a:pt x="5061961" y="2150649"/>
+                  </a:lnTo>
+                  <a:lnTo>
+                    <a:pt x="5139595" y="2123342"/>
+                  </a:lnTo>
+                  <a:lnTo>
+                    <a:pt x="5217229" y="2095538"/>
+                  </a:lnTo>
+                  <a:lnTo>
+                    <a:pt x="5294863" y="2067230"/>
+                  </a:lnTo>
+                  <a:lnTo>
+                    <a:pt x="5372497" y="2038406"/>
+                  </a:lnTo>
+                  <a:lnTo>
+                    <a:pt x="5450131" y="2009059"/>
+                  </a:lnTo>
+                  <a:lnTo>
+                    <a:pt x="5527765" y="1979178"/>
+                  </a:lnTo>
+                  <a:lnTo>
+                    <a:pt x="5605399" y="1948753"/>
+                  </a:lnTo>
+                  <a:lnTo>
+                    <a:pt x="5683033" y="1917776"/>
+                  </a:lnTo>
+                  <a:lnTo>
+                    <a:pt x="5760667" y="1886235"/>
+                  </a:lnTo>
+                  <a:lnTo>
+                    <a:pt x="5838301" y="1854121"/>
+                  </a:lnTo>
+                  <a:lnTo>
+                    <a:pt x="5915935" y="1821423"/>
+                  </a:lnTo>
+                  <a:lnTo>
+                    <a:pt x="5993569" y="1788131"/>
+                  </a:lnTo>
+                  <a:lnTo>
+                    <a:pt x="6071204" y="1754234"/>
+                  </a:lnTo>
+                  <a:lnTo>
+                    <a:pt x="6148838" y="1719720"/>
+                  </a:lnTo>
+                  <a:lnTo>
+                    <a:pt x="6226472" y="1684578"/>
+                  </a:lnTo>
+                  <a:lnTo>
+                    <a:pt x="6304106" y="1648798"/>
+                  </a:lnTo>
+                  <a:lnTo>
+                    <a:pt x="6381740" y="1612367"/>
+                  </a:lnTo>
+                  <a:lnTo>
+                    <a:pt x="6459374" y="1575274"/>
+                  </a:lnTo>
+                  <a:lnTo>
+                    <a:pt x="6537008" y="1537507"/>
+                  </a:lnTo>
+                  <a:lnTo>
+                    <a:pt x="6614642" y="1499053"/>
+                  </a:lnTo>
+                  <a:lnTo>
+                    <a:pt x="6692276" y="1459900"/>
                   </a:lnTo>
                 </a:path>
               </a:pathLst>
@@ -3862,300 +3874,300 @@
           </p:nvSpPr>
           <p:spPr>
             <a:xfrm>
-              <a:off x="817517" y="4691902"/>
-              <a:ext cx="7370972" cy="764784"/>
+              <a:off x="817517" y="4689992"/>
+              <a:ext cx="7370972" cy="753981"/>
             </a:xfrm>
             <a:custGeom>
               <a:avLst/>
               <a:pathLst>
-                <a:path w="7370972" h="764784">
+                <a:path w="7370972" h="753981">
                   <a:moveTo>
-                    <a:pt x="7370972" y="764784"/>
+                    <a:pt x="7370972" y="753981"/>
                   </a:moveTo>
                   <a:lnTo>
-                    <a:pt x="7293338" y="760656"/>
-                  </a:lnTo>
-                  <a:lnTo>
-                    <a:pt x="7215704" y="756343"/>
-                  </a:lnTo>
-                  <a:lnTo>
-                    <a:pt x="7138070" y="751838"/>
-                  </a:lnTo>
-                  <a:lnTo>
-                    <a:pt x="7060436" y="747132"/>
-                  </a:lnTo>
-                  <a:lnTo>
-                    <a:pt x="6982802" y="742216"/>
-                  </a:lnTo>
-                  <a:lnTo>
-                    <a:pt x="6905168" y="737081"/>
-                  </a:lnTo>
-                  <a:lnTo>
-                    <a:pt x="6827534" y="731717"/>
-                  </a:lnTo>
-                  <a:lnTo>
-                    <a:pt x="6749900" y="726113"/>
-                  </a:lnTo>
-                  <a:lnTo>
-                    <a:pt x="6672266" y="720259"/>
-                  </a:lnTo>
-                  <a:lnTo>
-                    <a:pt x="6594632" y="714144"/>
-                  </a:lnTo>
-                  <a:lnTo>
-                    <a:pt x="6516998" y="707756"/>
-                  </a:lnTo>
-                  <a:lnTo>
-                    <a:pt x="6439364" y="701083"/>
-                  </a:lnTo>
-                  <a:lnTo>
-                    <a:pt x="6361730" y="694112"/>
-                  </a:lnTo>
-                  <a:lnTo>
-                    <a:pt x="6284096" y="686830"/>
-                  </a:lnTo>
-                  <a:lnTo>
-                    <a:pt x="6206462" y="679223"/>
-                  </a:lnTo>
-                  <a:lnTo>
-                    <a:pt x="6128827" y="671277"/>
-                  </a:lnTo>
-                  <a:lnTo>
-                    <a:pt x="6051193" y="662976"/>
-                  </a:lnTo>
-                  <a:lnTo>
-                    <a:pt x="5973559" y="654305"/>
-                  </a:lnTo>
-                  <a:lnTo>
-                    <a:pt x="5895925" y="645247"/>
-                  </a:lnTo>
-                  <a:lnTo>
-                    <a:pt x="5818291" y="635785"/>
-                  </a:lnTo>
-                  <a:lnTo>
-                    <a:pt x="5740657" y="625900"/>
-                  </a:lnTo>
-                  <a:lnTo>
-                    <a:pt x="5663023" y="615575"/>
-                  </a:lnTo>
-                  <a:lnTo>
-                    <a:pt x="5585389" y="604788"/>
-                  </a:lnTo>
-                  <a:lnTo>
-                    <a:pt x="5507755" y="593521"/>
-                  </a:lnTo>
-                  <a:lnTo>
-                    <a:pt x="5430121" y="581751"/>
-                  </a:lnTo>
-                  <a:lnTo>
-                    <a:pt x="5352487" y="569455"/>
-                  </a:lnTo>
-                  <a:lnTo>
-                    <a:pt x="5274853" y="556611"/>
-                  </a:lnTo>
-                  <a:lnTo>
-                    <a:pt x="5197219" y="543194"/>
-                  </a:lnTo>
-                  <a:lnTo>
-                    <a:pt x="5119585" y="529178"/>
-                  </a:lnTo>
-                  <a:lnTo>
-                    <a:pt x="5041951" y="514536"/>
-                  </a:lnTo>
-                  <a:lnTo>
-                    <a:pt x="4964317" y="499242"/>
-                  </a:lnTo>
-                  <a:lnTo>
-                    <a:pt x="4886683" y="483264"/>
-                  </a:lnTo>
-                  <a:lnTo>
-                    <a:pt x="4809049" y="466574"/>
-                  </a:lnTo>
-                  <a:lnTo>
-                    <a:pt x="4731415" y="449140"/>
-                  </a:lnTo>
-                  <a:lnTo>
-                    <a:pt x="4653781" y="430927"/>
-                  </a:lnTo>
-                  <a:lnTo>
-                    <a:pt x="4576147" y="411901"/>
-                  </a:lnTo>
-                  <a:lnTo>
-                    <a:pt x="4498513" y="392027"/>
-                  </a:lnTo>
-                  <a:lnTo>
-                    <a:pt x="4420879" y="371266"/>
-                  </a:lnTo>
-                  <a:lnTo>
-                    <a:pt x="4343244" y="349578"/>
-                  </a:lnTo>
-                  <a:lnTo>
-                    <a:pt x="4265610" y="326923"/>
-                  </a:lnTo>
-                  <a:lnTo>
-                    <a:pt x="4187976" y="303257"/>
-                  </a:lnTo>
-                  <a:lnTo>
-                    <a:pt x="4110342" y="278534"/>
-                  </a:lnTo>
-                  <a:lnTo>
-                    <a:pt x="4032708" y="252709"/>
-                  </a:lnTo>
-                  <a:lnTo>
-                    <a:pt x="3955074" y="225731"/>
-                  </a:lnTo>
-                  <a:lnTo>
-                    <a:pt x="3877440" y="197550"/>
-                  </a:lnTo>
-                  <a:lnTo>
-                    <a:pt x="3799806" y="168111"/>
-                  </a:lnTo>
-                  <a:lnTo>
-                    <a:pt x="3722172" y="137358"/>
-                  </a:lnTo>
-                  <a:lnTo>
-                    <a:pt x="3644538" y="105233"/>
-                  </a:lnTo>
-                  <a:lnTo>
-                    <a:pt x="3566904" y="71675"/>
-                  </a:lnTo>
-                  <a:lnTo>
-                    <a:pt x="3489270" y="36619"/>
-                  </a:lnTo>
-                  <a:lnTo>
-                    <a:pt x="3411636" y="0"/>
-                  </a:lnTo>
-                  <a:lnTo>
-                    <a:pt x="3334002" y="3551"/>
-                  </a:lnTo>
-                  <a:lnTo>
-                    <a:pt x="3256368" y="26716"/>
-                  </a:lnTo>
-                  <a:lnTo>
-                    <a:pt x="3178734" y="49252"/>
-                  </a:lnTo>
-                  <a:lnTo>
-                    <a:pt x="3101100" y="71177"/>
-                  </a:lnTo>
-                  <a:lnTo>
-                    <a:pt x="3023466" y="92507"/>
-                  </a:lnTo>
-                  <a:lnTo>
-                    <a:pt x="2945832" y="113258"/>
-                  </a:lnTo>
-                  <a:lnTo>
-                    <a:pt x="2868198" y="133446"/>
-                  </a:lnTo>
-                  <a:lnTo>
-                    <a:pt x="2790564" y="153086"/>
-                  </a:lnTo>
-                  <a:lnTo>
-                    <a:pt x="2712930" y="172194"/>
-                  </a:lnTo>
-                  <a:lnTo>
-                    <a:pt x="2635295" y="190783"/>
-                  </a:lnTo>
-                  <a:lnTo>
-                    <a:pt x="2557661" y="208867"/>
-                  </a:lnTo>
-                  <a:lnTo>
-                    <a:pt x="2480027" y="226461"/>
-                  </a:lnTo>
-                  <a:lnTo>
-                    <a:pt x="2402393" y="243578"/>
-                  </a:lnTo>
-                  <a:lnTo>
-                    <a:pt x="2324759" y="260230"/>
-                  </a:lnTo>
-                  <a:lnTo>
-                    <a:pt x="2247125" y="276431"/>
-                  </a:lnTo>
-                  <a:lnTo>
-                    <a:pt x="2169491" y="292191"/>
-                  </a:lnTo>
-                  <a:lnTo>
-                    <a:pt x="2091857" y="307524"/>
-                  </a:lnTo>
-                  <a:lnTo>
-                    <a:pt x="2014223" y="322442"/>
-                  </a:lnTo>
-                  <a:lnTo>
-                    <a:pt x="1936589" y="336954"/>
-                  </a:lnTo>
-                  <a:lnTo>
-                    <a:pt x="1858955" y="351073"/>
-                  </a:lnTo>
-                  <a:lnTo>
-                    <a:pt x="1781321" y="364808"/>
-                  </a:lnTo>
-                  <a:lnTo>
-                    <a:pt x="1703687" y="378171"/>
-                  </a:lnTo>
-                  <a:lnTo>
-                    <a:pt x="1626053" y="391171"/>
-                  </a:lnTo>
-                  <a:lnTo>
-                    <a:pt x="1548419" y="403819"/>
-                  </a:lnTo>
-                  <a:lnTo>
-                    <a:pt x="1470785" y="416123"/>
-                  </a:lnTo>
-                  <a:lnTo>
-                    <a:pt x="1393151" y="428094"/>
-                  </a:lnTo>
-                  <a:lnTo>
-                    <a:pt x="1315517" y="439739"/>
-                  </a:lnTo>
-                  <a:lnTo>
-                    <a:pt x="1237883" y="451069"/>
-                  </a:lnTo>
-                  <a:lnTo>
-                    <a:pt x="1160249" y="462092"/>
-                  </a:lnTo>
-                  <a:lnTo>
-                    <a:pt x="1082615" y="472815"/>
-                  </a:lnTo>
-                  <a:lnTo>
-                    <a:pt x="1004981" y="483247"/>
-                  </a:lnTo>
-                  <a:lnTo>
-                    <a:pt x="927346" y="493396"/>
-                  </a:lnTo>
-                  <a:lnTo>
-                    <a:pt x="849712" y="503270"/>
-                  </a:lnTo>
-                  <a:lnTo>
-                    <a:pt x="772078" y="512876"/>
-                  </a:lnTo>
-                  <a:lnTo>
-                    <a:pt x="694444" y="522222"/>
-                  </a:lnTo>
-                  <a:lnTo>
-                    <a:pt x="616810" y="531313"/>
-                  </a:lnTo>
-                  <a:lnTo>
-                    <a:pt x="539176" y="540158"/>
-                  </a:lnTo>
-                  <a:lnTo>
-                    <a:pt x="461542" y="548764"/>
-                  </a:lnTo>
-                  <a:lnTo>
-                    <a:pt x="383908" y="557135"/>
-                  </a:lnTo>
-                  <a:lnTo>
-                    <a:pt x="306274" y="565280"/>
-                  </a:lnTo>
-                  <a:lnTo>
-                    <a:pt x="228640" y="573203"/>
-                  </a:lnTo>
-                  <a:lnTo>
-                    <a:pt x="151006" y="580912"/>
-                  </a:lnTo>
-                  <a:lnTo>
-                    <a:pt x="73372" y="588411"/>
-                  </a:lnTo>
-                  <a:lnTo>
-                    <a:pt x="0" y="595306"/>
+                    <a:pt x="7293338" y="749560"/>
+                  </a:lnTo>
+                  <a:lnTo>
+                    <a:pt x="7215704" y="744955"/>
+                  </a:lnTo>
+                  <a:lnTo>
+                    <a:pt x="7138070" y="740155"/>
+                  </a:lnTo>
+                  <a:lnTo>
+                    <a:pt x="7060436" y="735154"/>
+                  </a:lnTo>
+                  <a:lnTo>
+                    <a:pt x="6982802" y="729943"/>
+                  </a:lnTo>
+                  <a:lnTo>
+                    <a:pt x="6905168" y="724513"/>
+                  </a:lnTo>
+                  <a:lnTo>
+                    <a:pt x="6827534" y="718855"/>
+                  </a:lnTo>
+                  <a:lnTo>
+                    <a:pt x="6749900" y="712960"/>
+                  </a:lnTo>
+                  <a:lnTo>
+                    <a:pt x="6672266" y="706817"/>
+                  </a:lnTo>
+                  <a:lnTo>
+                    <a:pt x="6594632" y="700415"/>
+                  </a:lnTo>
+                  <a:lnTo>
+                    <a:pt x="6516998" y="693745"/>
+                  </a:lnTo>
+                  <a:lnTo>
+                    <a:pt x="6439364" y="686795"/>
+                  </a:lnTo>
+                  <a:lnTo>
+                    <a:pt x="6361730" y="679552"/>
+                  </a:lnTo>
+                  <a:lnTo>
+                    <a:pt x="6284096" y="672006"/>
+                  </a:lnTo>
+                  <a:lnTo>
+                    <a:pt x="6206462" y="664142"/>
+                  </a:lnTo>
+                  <a:lnTo>
+                    <a:pt x="6128827" y="655949"/>
+                  </a:lnTo>
+                  <a:lnTo>
+                    <a:pt x="6051193" y="647411"/>
+                  </a:lnTo>
+                  <a:lnTo>
+                    <a:pt x="5973559" y="638514"/>
+                  </a:lnTo>
+                  <a:lnTo>
+                    <a:pt x="5895925" y="629244"/>
+                  </a:lnTo>
+                  <a:lnTo>
+                    <a:pt x="5818291" y="619584"/>
+                  </a:lnTo>
+                  <a:lnTo>
+                    <a:pt x="5740657" y="609519"/>
+                  </a:lnTo>
+                  <a:lnTo>
+                    <a:pt x="5663023" y="599030"/>
+                  </a:lnTo>
+                  <a:lnTo>
+                    <a:pt x="5585389" y="588102"/>
+                  </a:lnTo>
+                  <a:lnTo>
+                    <a:pt x="5507755" y="576714"/>
+                  </a:lnTo>
+                  <a:lnTo>
+                    <a:pt x="5430121" y="564848"/>
+                  </a:lnTo>
+                  <a:lnTo>
+                    <a:pt x="5352487" y="552483"/>
+                  </a:lnTo>
+                  <a:lnTo>
+                    <a:pt x="5274853" y="539599"/>
+                  </a:lnTo>
+                  <a:lnTo>
+                    <a:pt x="5197219" y="526174"/>
+                  </a:lnTo>
+                  <a:lnTo>
+                    <a:pt x="5119585" y="512185"/>
+                  </a:lnTo>
+                  <a:lnTo>
+                    <a:pt x="5041951" y="497608"/>
+                  </a:lnTo>
+                  <a:lnTo>
+                    <a:pt x="4964317" y="482419"/>
+                  </a:lnTo>
+                  <a:lnTo>
+                    <a:pt x="4886683" y="466592"/>
+                  </a:lnTo>
+                  <a:lnTo>
+                    <a:pt x="4809049" y="450101"/>
+                  </a:lnTo>
+                  <a:lnTo>
+                    <a:pt x="4731415" y="432916"/>
+                  </a:lnTo>
+                  <a:lnTo>
+                    <a:pt x="4653781" y="415010"/>
+                  </a:lnTo>
+                  <a:lnTo>
+                    <a:pt x="4576147" y="396352"/>
+                  </a:lnTo>
+                  <a:lnTo>
+                    <a:pt x="4498513" y="376910"/>
+                  </a:lnTo>
+                  <a:lnTo>
+                    <a:pt x="4420879" y="356651"/>
+                  </a:lnTo>
+                  <a:lnTo>
+                    <a:pt x="4343244" y="335541"/>
+                  </a:lnTo>
+                  <a:lnTo>
+                    <a:pt x="4265610" y="313545"/>
+                  </a:lnTo>
+                  <a:lnTo>
+                    <a:pt x="4187976" y="290624"/>
+                  </a:lnTo>
+                  <a:lnTo>
+                    <a:pt x="4110342" y="266741"/>
+                  </a:lnTo>
+                  <a:lnTo>
+                    <a:pt x="4032708" y="241855"/>
+                  </a:lnTo>
+                  <a:lnTo>
+                    <a:pt x="3955074" y="215924"/>
+                  </a:lnTo>
+                  <a:lnTo>
+                    <a:pt x="3877440" y="188903"/>
+                  </a:lnTo>
+                  <a:lnTo>
+                    <a:pt x="3799806" y="160747"/>
+                  </a:lnTo>
+                  <a:lnTo>
+                    <a:pt x="3722172" y="131409"/>
+                  </a:lnTo>
+                  <a:lnTo>
+                    <a:pt x="3644538" y="100838"/>
+                  </a:lnTo>
+                  <a:lnTo>
+                    <a:pt x="3566904" y="68983"/>
+                  </a:lnTo>
+                  <a:lnTo>
+                    <a:pt x="3489270" y="35790"/>
+                  </a:lnTo>
+                  <a:lnTo>
+                    <a:pt x="3411636" y="1203"/>
+                  </a:lnTo>
+                  <a:lnTo>
+                    <a:pt x="3334002" y="0"/>
+                  </a:lnTo>
+                  <a:lnTo>
+                    <a:pt x="3256368" y="15341"/>
+                  </a:lnTo>
+                  <a:lnTo>
+                    <a:pt x="3178734" y="30409"/>
+                  </a:lnTo>
+                  <a:lnTo>
+                    <a:pt x="3101100" y="45208"/>
+                  </a:lnTo>
+                  <a:lnTo>
+                    <a:pt x="3023466" y="59743"/>
+                  </a:lnTo>
+                  <a:lnTo>
+                    <a:pt x="2945832" y="74018"/>
+                  </a:lnTo>
+                  <a:lnTo>
+                    <a:pt x="2868198" y="88039"/>
+                  </a:lnTo>
+                  <a:lnTo>
+                    <a:pt x="2790564" y="101809"/>
+                  </a:lnTo>
+                  <a:lnTo>
+                    <a:pt x="2712930" y="115333"/>
+                  </a:lnTo>
+                  <a:lnTo>
+                    <a:pt x="2635295" y="128615"/>
+                  </a:lnTo>
+                  <a:lnTo>
+                    <a:pt x="2557661" y="141661"/>
+                  </a:lnTo>
+                  <a:lnTo>
+                    <a:pt x="2480027" y="154473"/>
+                  </a:lnTo>
+                  <a:lnTo>
+                    <a:pt x="2402393" y="167057"/>
+                  </a:lnTo>
+                  <a:lnTo>
+                    <a:pt x="2324759" y="179416"/>
+                  </a:lnTo>
+                  <a:lnTo>
+                    <a:pt x="2247125" y="191554"/>
+                  </a:lnTo>
+                  <a:lnTo>
+                    <a:pt x="2169491" y="203476"/>
+                  </a:lnTo>
+                  <a:lnTo>
+                    <a:pt x="2091857" y="215184"/>
+                  </a:lnTo>
+                  <a:lnTo>
+                    <a:pt x="2014223" y="226684"/>
+                  </a:lnTo>
+                  <a:lnTo>
+                    <a:pt x="1936589" y="237978"/>
+                  </a:lnTo>
+                  <a:lnTo>
+                    <a:pt x="1858955" y="249071"/>
+                  </a:lnTo>
+                  <a:lnTo>
+                    <a:pt x="1781321" y="259966"/>
+                  </a:lnTo>
+                  <a:lnTo>
+                    <a:pt x="1703687" y="270666"/>
+                  </a:lnTo>
+                  <a:lnTo>
+                    <a:pt x="1626053" y="281175"/>
+                  </a:lnTo>
+                  <a:lnTo>
+                    <a:pt x="1548419" y="291496"/>
+                  </a:lnTo>
+                  <a:lnTo>
+                    <a:pt x="1470785" y="301633"/>
+                  </a:lnTo>
+                  <a:lnTo>
+                    <a:pt x="1393151" y="311589"/>
+                  </a:lnTo>
+                  <a:lnTo>
+                    <a:pt x="1315517" y="321367"/>
+                  </a:lnTo>
+                  <a:lnTo>
+                    <a:pt x="1237883" y="330971"/>
+                  </a:lnTo>
+                  <a:lnTo>
+                    <a:pt x="1160249" y="340403"/>
+                  </a:lnTo>
+                  <a:lnTo>
+                    <a:pt x="1082615" y="349667"/>
+                  </a:lnTo>
+                  <a:lnTo>
+                    <a:pt x="1004981" y="358765"/>
+                  </a:lnTo>
+                  <a:lnTo>
+                    <a:pt x="927346" y="367701"/>
+                  </a:lnTo>
+                  <a:lnTo>
+                    <a:pt x="849712" y="376478"/>
+                  </a:lnTo>
+                  <a:lnTo>
+                    <a:pt x="772078" y="385097"/>
+                  </a:lnTo>
+                  <a:lnTo>
+                    <a:pt x="694444" y="393563"/>
+                  </a:lnTo>
+                  <a:lnTo>
+                    <a:pt x="616810" y="401877"/>
+                  </a:lnTo>
+                  <a:lnTo>
+                    <a:pt x="539176" y="410044"/>
+                  </a:lnTo>
+                  <a:lnTo>
+                    <a:pt x="461542" y="418064"/>
+                  </a:lnTo>
+                  <a:lnTo>
+                    <a:pt x="383908" y="425941"/>
+                  </a:lnTo>
+                  <a:lnTo>
+                    <a:pt x="306274" y="433677"/>
+                  </a:lnTo>
+                  <a:lnTo>
+                    <a:pt x="228640" y="441276"/>
+                  </a:lnTo>
+                  <a:lnTo>
+                    <a:pt x="151006" y="448738"/>
+                  </a:lnTo>
+                  <a:lnTo>
+                    <a:pt x="73372" y="456068"/>
+                  </a:lnTo>
+                  <a:lnTo>
+                    <a:pt x="0" y="462871"/>
                   </a:lnTo>
                 </a:path>
               </a:pathLst>
@@ -4175,300 +4187,300 @@
           </p:nvSpPr>
           <p:spPr>
             <a:xfrm>
-              <a:off x="817517" y="4312444"/>
-              <a:ext cx="7370972" cy="662126"/>
+              <a:off x="817517" y="4109022"/>
+              <a:ext cx="7370972" cy="959821"/>
             </a:xfrm>
             <a:custGeom>
               <a:avLst/>
               <a:pathLst>
-                <a:path w="7370972" h="662126">
+                <a:path w="7370972" h="959821">
                   <a:moveTo>
                     <a:pt x="0" y="0"/>
                   </a:moveTo>
                   <a:lnTo>
-                    <a:pt x="73372" y="9402"/>
-                  </a:lnTo>
-                  <a:lnTo>
-                    <a:pt x="151006" y="19271"/>
-                  </a:lnTo>
-                  <a:lnTo>
-                    <a:pt x="228640" y="29061"/>
-                  </a:lnTo>
-                  <a:lnTo>
-                    <a:pt x="306274" y="38771"/>
-                  </a:lnTo>
-                  <a:lnTo>
-                    <a:pt x="383908" y="48404"/>
-                  </a:lnTo>
-                  <a:lnTo>
-                    <a:pt x="461542" y="57959"/>
-                  </a:lnTo>
-                  <a:lnTo>
-                    <a:pt x="539176" y="67438"/>
-                  </a:lnTo>
-                  <a:lnTo>
-                    <a:pt x="616810" y="76840"/>
-                  </a:lnTo>
-                  <a:lnTo>
-                    <a:pt x="694444" y="86167"/>
-                  </a:lnTo>
-                  <a:lnTo>
-                    <a:pt x="772078" y="95418"/>
-                  </a:lnTo>
-                  <a:lnTo>
-                    <a:pt x="849712" y="104596"/>
-                  </a:lnTo>
-                  <a:lnTo>
-                    <a:pt x="927346" y="113699"/>
-                  </a:lnTo>
-                  <a:lnTo>
-                    <a:pt x="1004981" y="122729"/>
-                  </a:lnTo>
-                  <a:lnTo>
-                    <a:pt x="1082615" y="131687"/>
-                  </a:lnTo>
-                  <a:lnTo>
-                    <a:pt x="1160249" y="140573"/>
-                  </a:lnTo>
-                  <a:lnTo>
-                    <a:pt x="1237883" y="149387"/>
-                  </a:lnTo>
-                  <a:lnTo>
-                    <a:pt x="1315517" y="158130"/>
-                  </a:lnTo>
-                  <a:lnTo>
-                    <a:pt x="1393151" y="166803"/>
-                  </a:lnTo>
-                  <a:lnTo>
-                    <a:pt x="1470785" y="175406"/>
-                  </a:lnTo>
-                  <a:lnTo>
-                    <a:pt x="1548419" y="183940"/>
-                  </a:lnTo>
-                  <a:lnTo>
-                    <a:pt x="1626053" y="192406"/>
-                  </a:lnTo>
-                  <a:lnTo>
-                    <a:pt x="1703687" y="200803"/>
-                  </a:lnTo>
-                  <a:lnTo>
-                    <a:pt x="1781321" y="209133"/>
-                  </a:lnTo>
-                  <a:lnTo>
-                    <a:pt x="1858955" y="217396"/>
-                  </a:lnTo>
-                  <a:lnTo>
-                    <a:pt x="1936589" y="225592"/>
-                  </a:lnTo>
-                  <a:lnTo>
-                    <a:pt x="2014223" y="233723"/>
-                  </a:lnTo>
-                  <a:lnTo>
-                    <a:pt x="2091857" y="241788"/>
-                  </a:lnTo>
-                  <a:lnTo>
-                    <a:pt x="2169491" y="249789"/>
-                  </a:lnTo>
-                  <a:lnTo>
-                    <a:pt x="2247125" y="257725"/>
-                  </a:lnTo>
-                  <a:lnTo>
-                    <a:pt x="2324759" y="265597"/>
-                  </a:lnTo>
-                  <a:lnTo>
-                    <a:pt x="2402393" y="273406"/>
-                  </a:lnTo>
-                  <a:lnTo>
-                    <a:pt x="2480027" y="281152"/>
-                  </a:lnTo>
-                  <a:lnTo>
-                    <a:pt x="2557661" y="288835"/>
-                  </a:lnTo>
-                  <a:lnTo>
-                    <a:pt x="2635295" y="296458"/>
-                  </a:lnTo>
-                  <a:lnTo>
-                    <a:pt x="2712930" y="304018"/>
-                  </a:lnTo>
-                  <a:lnTo>
-                    <a:pt x="2790564" y="311518"/>
-                  </a:lnTo>
-                  <a:lnTo>
-                    <a:pt x="2868198" y="318958"/>
-                  </a:lnTo>
-                  <a:lnTo>
-                    <a:pt x="2945832" y="326338"/>
-                  </a:lnTo>
-                  <a:lnTo>
-                    <a:pt x="3023466" y="333658"/>
-                  </a:lnTo>
-                  <a:lnTo>
-                    <a:pt x="3101100" y="340920"/>
-                  </a:lnTo>
-                  <a:lnTo>
-                    <a:pt x="3178734" y="348123"/>
-                  </a:lnTo>
-                  <a:lnTo>
-                    <a:pt x="3256368" y="355268"/>
-                  </a:lnTo>
-                  <a:lnTo>
-                    <a:pt x="3334002" y="362356"/>
-                  </a:lnTo>
-                  <a:lnTo>
-                    <a:pt x="3411636" y="369387"/>
-                  </a:lnTo>
-                  <a:lnTo>
-                    <a:pt x="3489270" y="376361"/>
-                  </a:lnTo>
-                  <a:lnTo>
-                    <a:pt x="3566904" y="383280"/>
-                  </a:lnTo>
-                  <a:lnTo>
-                    <a:pt x="3644538" y="390142"/>
-                  </a:lnTo>
-                  <a:lnTo>
-                    <a:pt x="3722172" y="396950"/>
-                  </a:lnTo>
-                  <a:lnTo>
-                    <a:pt x="3799806" y="403702"/>
-                  </a:lnTo>
-                  <a:lnTo>
-                    <a:pt x="3877440" y="410401"/>
-                  </a:lnTo>
-                  <a:lnTo>
-                    <a:pt x="3955074" y="417045"/>
-                  </a:lnTo>
-                  <a:lnTo>
-                    <a:pt x="4032708" y="423637"/>
-                  </a:lnTo>
-                  <a:lnTo>
-                    <a:pt x="4110342" y="430175"/>
-                  </a:lnTo>
-                  <a:lnTo>
-                    <a:pt x="4187976" y="436660"/>
-                  </a:lnTo>
-                  <a:lnTo>
-                    <a:pt x="4265610" y="443094"/>
-                  </a:lnTo>
-                  <a:lnTo>
-                    <a:pt x="4343244" y="449475"/>
-                  </a:lnTo>
-                  <a:lnTo>
-                    <a:pt x="4420879" y="455806"/>
-                  </a:lnTo>
-                  <a:lnTo>
-                    <a:pt x="4498513" y="462085"/>
-                  </a:lnTo>
-                  <a:lnTo>
-                    <a:pt x="4576147" y="468314"/>
-                  </a:lnTo>
-                  <a:lnTo>
-                    <a:pt x="4653781" y="474493"/>
-                  </a:lnTo>
-                  <a:lnTo>
-                    <a:pt x="4731415" y="480622"/>
-                  </a:lnTo>
-                  <a:lnTo>
-                    <a:pt x="4809049" y="486702"/>
-                  </a:lnTo>
-                  <a:lnTo>
-                    <a:pt x="4886683" y="492733"/>
-                  </a:lnTo>
-                  <a:lnTo>
-                    <a:pt x="4964317" y="498716"/>
-                  </a:lnTo>
-                  <a:lnTo>
-                    <a:pt x="5041951" y="504650"/>
-                  </a:lnTo>
-                  <a:lnTo>
-                    <a:pt x="5119585" y="510537"/>
-                  </a:lnTo>
-                  <a:lnTo>
-                    <a:pt x="5197219" y="516376"/>
-                  </a:lnTo>
-                  <a:lnTo>
-                    <a:pt x="5274853" y="522169"/>
-                  </a:lnTo>
-                  <a:lnTo>
-                    <a:pt x="5352487" y="527915"/>
-                  </a:lnTo>
-                  <a:lnTo>
-                    <a:pt x="5430121" y="533614"/>
-                  </a:lnTo>
-                  <a:lnTo>
-                    <a:pt x="5507755" y="539268"/>
-                  </a:lnTo>
-                  <a:lnTo>
-                    <a:pt x="5585389" y="544876"/>
-                  </a:lnTo>
-                  <a:lnTo>
-                    <a:pt x="5663023" y="550440"/>
-                  </a:lnTo>
-                  <a:lnTo>
-                    <a:pt x="5740657" y="555958"/>
-                  </a:lnTo>
-                  <a:lnTo>
-                    <a:pt x="5818291" y="561432"/>
-                  </a:lnTo>
-                  <a:lnTo>
-                    <a:pt x="5895925" y="566863"/>
-                  </a:lnTo>
-                  <a:lnTo>
-                    <a:pt x="5973559" y="572249"/>
-                  </a:lnTo>
-                  <a:lnTo>
-                    <a:pt x="6051193" y="577592"/>
-                  </a:lnTo>
-                  <a:lnTo>
-                    <a:pt x="6128827" y="582892"/>
-                  </a:lnTo>
-                  <a:lnTo>
-                    <a:pt x="6206462" y="588150"/>
-                  </a:lnTo>
-                  <a:lnTo>
-                    <a:pt x="6284096" y="593365"/>
-                  </a:lnTo>
-                  <a:lnTo>
-                    <a:pt x="6361730" y="598539"/>
-                  </a:lnTo>
-                  <a:lnTo>
-                    <a:pt x="6439364" y="603670"/>
-                  </a:lnTo>
-                  <a:lnTo>
-                    <a:pt x="6516998" y="608761"/>
-                  </a:lnTo>
-                  <a:lnTo>
-                    <a:pt x="6594632" y="613811"/>
-                  </a:lnTo>
-                  <a:lnTo>
-                    <a:pt x="6672266" y="618820"/>
-                  </a:lnTo>
-                  <a:lnTo>
-                    <a:pt x="6749900" y="623788"/>
-                  </a:lnTo>
-                  <a:lnTo>
-                    <a:pt x="6827534" y="628717"/>
-                  </a:lnTo>
-                  <a:lnTo>
-                    <a:pt x="6905168" y="633606"/>
-                  </a:lnTo>
-                  <a:lnTo>
-                    <a:pt x="6982802" y="638456"/>
-                  </a:lnTo>
-                  <a:lnTo>
-                    <a:pt x="7060436" y="643267"/>
-                  </a:lnTo>
-                  <a:lnTo>
-                    <a:pt x="7138070" y="648039"/>
-                  </a:lnTo>
-                  <a:lnTo>
-                    <a:pt x="7215704" y="652773"/>
-                  </a:lnTo>
-                  <a:lnTo>
-                    <a:pt x="7293338" y="657468"/>
-                  </a:lnTo>
-                  <a:lnTo>
-                    <a:pt x="7370972" y="662126"/>
+                    <a:pt x="73372" y="15659"/>
+                  </a:lnTo>
+                  <a:lnTo>
+                    <a:pt x="151006" y="32038"/>
+                  </a:lnTo>
+                  <a:lnTo>
+                    <a:pt x="228640" y="48229"/>
+                  </a:lnTo>
+                  <a:lnTo>
+                    <a:pt x="306274" y="64233"/>
+                  </a:lnTo>
+                  <a:lnTo>
+                    <a:pt x="383908" y="80053"/>
+                  </a:lnTo>
+                  <a:lnTo>
+                    <a:pt x="461542" y="95692"/>
+                  </a:lnTo>
+                  <a:lnTo>
+                    <a:pt x="539176" y="111151"/>
+                  </a:lnTo>
+                  <a:lnTo>
+                    <a:pt x="616810" y="126431"/>
+                  </a:lnTo>
+                  <a:lnTo>
+                    <a:pt x="694444" y="141537"/>
+                  </a:lnTo>
+                  <a:lnTo>
+                    <a:pt x="772078" y="156468"/>
+                  </a:lnTo>
+                  <a:lnTo>
+                    <a:pt x="849712" y="171228"/>
+                  </a:lnTo>
+                  <a:lnTo>
+                    <a:pt x="927346" y="185818"/>
+                  </a:lnTo>
+                  <a:lnTo>
+                    <a:pt x="1004981" y="200241"/>
+                  </a:lnTo>
+                  <a:lnTo>
+                    <a:pt x="1082615" y="214497"/>
+                  </a:lnTo>
+                  <a:lnTo>
+                    <a:pt x="1160249" y="228590"/>
+                  </a:lnTo>
+                  <a:lnTo>
+                    <a:pt x="1237883" y="242520"/>
+                  </a:lnTo>
+                  <a:lnTo>
+                    <a:pt x="1315517" y="256291"/>
+                  </a:lnTo>
+                  <a:lnTo>
+                    <a:pt x="1393151" y="269903"/>
+                  </a:lnTo>
+                  <a:lnTo>
+                    <a:pt x="1470785" y="283359"/>
+                  </a:lnTo>
+                  <a:lnTo>
+                    <a:pt x="1548419" y="296660"/>
+                  </a:lnTo>
+                  <a:lnTo>
+                    <a:pt x="1626053" y="309807"/>
+                  </a:lnTo>
+                  <a:lnTo>
+                    <a:pt x="1703687" y="322804"/>
+                  </a:lnTo>
+                  <a:lnTo>
+                    <a:pt x="1781321" y="335652"/>
+                  </a:lnTo>
+                  <a:lnTo>
+                    <a:pt x="1858955" y="348351"/>
+                  </a:lnTo>
+                  <a:lnTo>
+                    <a:pt x="1936589" y="360905"/>
+                  </a:lnTo>
+                  <a:lnTo>
+                    <a:pt x="2014223" y="373314"/>
+                  </a:lnTo>
+                  <a:lnTo>
+                    <a:pt x="2091857" y="385581"/>
+                  </a:lnTo>
+                  <a:lnTo>
+                    <a:pt x="2169491" y="397706"/>
+                  </a:lnTo>
+                  <a:lnTo>
+                    <a:pt x="2247125" y="409693"/>
+                  </a:lnTo>
+                  <a:lnTo>
+                    <a:pt x="2324759" y="421541"/>
+                  </a:lnTo>
+                  <a:lnTo>
+                    <a:pt x="2402393" y="433253"/>
+                  </a:lnTo>
+                  <a:lnTo>
+                    <a:pt x="2480027" y="444830"/>
+                  </a:lnTo>
+                  <a:lnTo>
+                    <a:pt x="2557661" y="456275"/>
+                  </a:lnTo>
+                  <a:lnTo>
+                    <a:pt x="2635295" y="467588"/>
+                  </a:lnTo>
+                  <a:lnTo>
+                    <a:pt x="2712930" y="478770"/>
+                  </a:lnTo>
+                  <a:lnTo>
+                    <a:pt x="2790564" y="489824"/>
+                  </a:lnTo>
+                  <a:lnTo>
+                    <a:pt x="2868198" y="500751"/>
+                  </a:lnTo>
+                  <a:lnTo>
+                    <a:pt x="2945832" y="511553"/>
+                  </a:lnTo>
+                  <a:lnTo>
+                    <a:pt x="3023466" y="522230"/>
+                  </a:lnTo>
+                  <a:lnTo>
+                    <a:pt x="3101100" y="532784"/>
+                  </a:lnTo>
+                  <a:lnTo>
+                    <a:pt x="3178734" y="543217"/>
+                  </a:lnTo>
+                  <a:lnTo>
+                    <a:pt x="3256368" y="553531"/>
+                  </a:lnTo>
+                  <a:lnTo>
+                    <a:pt x="3334002" y="563725"/>
+                  </a:lnTo>
+                  <a:lnTo>
+                    <a:pt x="3411636" y="573802"/>
+                  </a:lnTo>
+                  <a:lnTo>
+                    <a:pt x="3489270" y="583764"/>
+                  </a:lnTo>
+                  <a:lnTo>
+                    <a:pt x="3566904" y="593611"/>
+                  </a:lnTo>
+                  <a:lnTo>
+                    <a:pt x="3644538" y="603344"/>
+                  </a:lnTo>
+                  <a:lnTo>
+                    <a:pt x="3722172" y="612966"/>
+                  </a:lnTo>
+                  <a:lnTo>
+                    <a:pt x="3799806" y="622477"/>
+                  </a:lnTo>
+                  <a:lnTo>
+                    <a:pt x="3877440" y="631879"/>
+                  </a:lnTo>
+                  <a:lnTo>
+                    <a:pt x="3955074" y="641173"/>
+                  </a:lnTo>
+                  <a:lnTo>
+                    <a:pt x="4032708" y="650360"/>
+                  </a:lnTo>
+                  <a:lnTo>
+                    <a:pt x="4110342" y="659441"/>
+                  </a:lnTo>
+                  <a:lnTo>
+                    <a:pt x="4187976" y="668418"/>
+                  </a:lnTo>
+                  <a:lnTo>
+                    <a:pt x="4265610" y="677291"/>
+                  </a:lnTo>
+                  <a:lnTo>
+                    <a:pt x="4343244" y="686063"/>
+                  </a:lnTo>
+                  <a:lnTo>
+                    <a:pt x="4420879" y="694734"/>
+                  </a:lnTo>
+                  <a:lnTo>
+                    <a:pt x="4498513" y="703305"/>
+                  </a:lnTo>
+                  <a:lnTo>
+                    <a:pt x="4576147" y="711777"/>
+                  </a:lnTo>
+                  <a:lnTo>
+                    <a:pt x="4653781" y="720152"/>
+                  </a:lnTo>
+                  <a:lnTo>
+                    <a:pt x="4731415" y="728431"/>
+                  </a:lnTo>
+                  <a:lnTo>
+                    <a:pt x="4809049" y="736614"/>
+                  </a:lnTo>
+                  <a:lnTo>
+                    <a:pt x="4886683" y="744704"/>
+                  </a:lnTo>
+                  <a:lnTo>
+                    <a:pt x="4964317" y="752700"/>
+                  </a:lnTo>
+                  <a:lnTo>
+                    <a:pt x="5041951" y="760605"/>
+                  </a:lnTo>
+                  <a:lnTo>
+                    <a:pt x="5119585" y="768419"/>
+                  </a:lnTo>
+                  <a:lnTo>
+                    <a:pt x="5197219" y="776142"/>
+                  </a:lnTo>
+                  <a:lnTo>
+                    <a:pt x="5274853" y="783777"/>
+                  </a:lnTo>
+                  <a:lnTo>
+                    <a:pt x="5352487" y="791325"/>
+                  </a:lnTo>
+                  <a:lnTo>
+                    <a:pt x="5430121" y="798785"/>
+                  </a:lnTo>
+                  <a:lnTo>
+                    <a:pt x="5507755" y="806160"/>
+                  </a:lnTo>
+                  <a:lnTo>
+                    <a:pt x="5585389" y="813450"/>
+                  </a:lnTo>
+                  <a:lnTo>
+                    <a:pt x="5663023" y="820656"/>
+                  </a:lnTo>
+                  <a:lnTo>
+                    <a:pt x="5740657" y="827779"/>
+                  </a:lnTo>
+                  <a:lnTo>
+                    <a:pt x="5818291" y="834820"/>
+                  </a:lnTo>
+                  <a:lnTo>
+                    <a:pt x="5895925" y="841780"/>
+                  </a:lnTo>
+                  <a:lnTo>
+                    <a:pt x="5973559" y="848661"/>
+                  </a:lnTo>
+                  <a:lnTo>
+                    <a:pt x="6051193" y="855462"/>
+                  </a:lnTo>
+                  <a:lnTo>
+                    <a:pt x="6128827" y="862185"/>
+                  </a:lnTo>
+                  <a:lnTo>
+                    <a:pt x="6206462" y="868831"/>
+                  </a:lnTo>
+                  <a:lnTo>
+                    <a:pt x="6284096" y="875400"/>
+                  </a:lnTo>
+                  <a:lnTo>
+                    <a:pt x="6361730" y="881894"/>
+                  </a:lnTo>
+                  <a:lnTo>
+                    <a:pt x="6439364" y="888313"/>
+                  </a:lnTo>
+                  <a:lnTo>
+                    <a:pt x="6516998" y="894658"/>
+                  </a:lnTo>
+                  <a:lnTo>
+                    <a:pt x="6594632" y="900930"/>
+                  </a:lnTo>
+                  <a:lnTo>
+                    <a:pt x="6672266" y="907131"/>
+                  </a:lnTo>
+                  <a:lnTo>
+                    <a:pt x="6749900" y="913260"/>
+                  </a:lnTo>
+                  <a:lnTo>
+                    <a:pt x="6827534" y="919318"/>
+                  </a:lnTo>
+                  <a:lnTo>
+                    <a:pt x="6905168" y="925307"/>
+                  </a:lnTo>
+                  <a:lnTo>
+                    <a:pt x="6982802" y="931227"/>
+                  </a:lnTo>
+                  <a:lnTo>
+                    <a:pt x="7060436" y="937079"/>
+                  </a:lnTo>
+                  <a:lnTo>
+                    <a:pt x="7138070" y="942863"/>
+                  </a:lnTo>
+                  <a:lnTo>
+                    <a:pt x="7215704" y="948581"/>
+                  </a:lnTo>
+                  <a:lnTo>
+                    <a:pt x="7293338" y="954234"/>
+                  </a:lnTo>
+                  <a:lnTo>
+                    <a:pt x="7370972" y="959821"/>
                   </a:lnTo>
                 </a:path>
               </a:pathLst>

--- a/docs/plots/carbo/jx_carbo_linsubhr_ratio_hosp_immune_other.pptx
+++ b/docs/plots/carbo/jx_carbo_linsubhr_ratio_hosp_immune_other.pptx
@@ -3031,7 +3031,7 @@
                     <a:pt x="1082615" y="704318"/>
                   </a:lnTo>
                   <a:lnTo>
-                    <a:pt x="1160249" y="823168"/>
+                    <a:pt x="1160249" y="823167"/>
                   </a:lnTo>
                   <a:lnTo>
                     <a:pt x="1237883" y="937226"/>
@@ -3199,7 +3199,7 @@
                     <a:pt x="5430121" y="2255087"/>
                   </a:lnTo>
                   <a:lnTo>
-                    <a:pt x="5507755" y="2229678"/>
+                    <a:pt x="5507755" y="2229679"/>
                   </a:lnTo>
                   <a:lnTo>
                     <a:pt x="5585389" y="2203808"/>
@@ -3214,7 +3214,7 @@
                     <a:pt x="5818291" y="2123342"/>
                   </a:lnTo>
                   <a:lnTo>
-                    <a:pt x="5895925" y="2095538"/>
+                    <a:pt x="5895925" y="2095539"/>
                   </a:lnTo>
                   <a:lnTo>
                     <a:pt x="5973559" y="2067230"/>
@@ -3229,19 +3229,19 @@
                     <a:pt x="6206462" y="1979178"/>
                   </a:lnTo>
                   <a:lnTo>
-                    <a:pt x="6284096" y="1948753"/>
+                    <a:pt x="6284096" y="1948754"/>
                   </a:lnTo>
                   <a:lnTo>
                     <a:pt x="6361730" y="1917776"/>
                   </a:lnTo>
                   <a:lnTo>
-                    <a:pt x="6439364" y="1886235"/>
+                    <a:pt x="6439364" y="1886236"/>
                   </a:lnTo>
                   <a:lnTo>
                     <a:pt x="6516998" y="1854121"/>
                   </a:lnTo>
                   <a:lnTo>
-                    <a:pt x="6594632" y="1821423"/>
+                    <a:pt x="6594632" y="1821424"/>
                   </a:lnTo>
                   <a:lnTo>
                     <a:pt x="6672266" y="1788131"/>
@@ -3253,16 +3253,16 @@
                     <a:pt x="6827534" y="1719720"/>
                   </a:lnTo>
                   <a:lnTo>
-                    <a:pt x="6905168" y="1684578"/>
+                    <a:pt x="6905168" y="1684579"/>
                   </a:lnTo>
                   <a:lnTo>
                     <a:pt x="6982802" y="1648798"/>
                   </a:lnTo>
                   <a:lnTo>
-                    <a:pt x="7060436" y="1612367"/>
-                  </a:lnTo>
-                  <a:lnTo>
-                    <a:pt x="7138070" y="1575274"/>
+                    <a:pt x="7060436" y="1612368"/>
+                  </a:lnTo>
+                  <a:lnTo>
+                    <a:pt x="7138070" y="1575275"/>
                   </a:lnTo>
                   <a:lnTo>
                     <a:pt x="7215704" y="1537507"/>
@@ -3472,7 +3472,7 @@
                     <a:pt x="2324759" y="2972845"/>
                   </a:lnTo>
                   <a:lnTo>
-                    <a:pt x="2247125" y="2984984"/>
+                    <a:pt x="2247125" y="2984983"/>
                   </a:lnTo>
                   <a:lnTo>
                     <a:pt x="2169491" y="2996905"/>
@@ -3614,7 +3614,7 @@
                     <a:pt x="403918" y="704318"/>
                   </a:lnTo>
                   <a:lnTo>
-                    <a:pt x="481552" y="823168"/>
+                    <a:pt x="481552" y="823167"/>
                   </a:lnTo>
                   <a:lnTo>
                     <a:pt x="559186" y="937226"/>
@@ -3629,7 +3629,7 @@
                     <a:pt x="792088" y="1252549"/>
                   </a:lnTo>
                   <a:lnTo>
-                    <a:pt x="869723" y="1349299"/>
+                    <a:pt x="869722" y="1349299"/>
                   </a:lnTo>
                   <a:lnTo>
                     <a:pt x="947357" y="1442149"/>
@@ -3782,7 +3782,7 @@
                     <a:pt x="4751425" y="2255087"/>
                   </a:lnTo>
                   <a:lnTo>
-                    <a:pt x="4829059" y="2229678"/>
+                    <a:pt x="4829059" y="2229679"/>
                   </a:lnTo>
                   <a:lnTo>
                     <a:pt x="4906693" y="2203808"/>
@@ -3797,7 +3797,7 @@
                     <a:pt x="5139595" y="2123342"/>
                   </a:lnTo>
                   <a:lnTo>
-                    <a:pt x="5217229" y="2095538"/>
+                    <a:pt x="5217229" y="2095539"/>
                   </a:lnTo>
                   <a:lnTo>
                     <a:pt x="5294863" y="2067230"/>
@@ -3812,19 +3812,19 @@
                     <a:pt x="5527765" y="1979178"/>
                   </a:lnTo>
                   <a:lnTo>
-                    <a:pt x="5605399" y="1948753"/>
+                    <a:pt x="5605399" y="1948754"/>
                   </a:lnTo>
                   <a:lnTo>
                     <a:pt x="5683033" y="1917776"/>
                   </a:lnTo>
                   <a:lnTo>
-                    <a:pt x="5760667" y="1886235"/>
+                    <a:pt x="5760667" y="1886236"/>
                   </a:lnTo>
                   <a:lnTo>
                     <a:pt x="5838301" y="1854121"/>
                   </a:lnTo>
                   <a:lnTo>
-                    <a:pt x="5915935" y="1821423"/>
+                    <a:pt x="5915935" y="1821424"/>
                   </a:lnTo>
                   <a:lnTo>
                     <a:pt x="5993569" y="1788131"/>
@@ -3836,16 +3836,16 @@
                     <a:pt x="6148838" y="1719720"/>
                   </a:lnTo>
                   <a:lnTo>
-                    <a:pt x="6226472" y="1684578"/>
+                    <a:pt x="6226472" y="1684579"/>
                   </a:lnTo>
                   <a:lnTo>
                     <a:pt x="6304106" y="1648798"/>
                   </a:lnTo>
                   <a:lnTo>
-                    <a:pt x="6381740" y="1612367"/>
-                  </a:lnTo>
-                  <a:lnTo>
-                    <a:pt x="6459374" y="1575274"/>
+                    <a:pt x="6381740" y="1612368"/>
+                  </a:lnTo>
+                  <a:lnTo>
+                    <a:pt x="6459374" y="1575275"/>
                   </a:lnTo>
                   <a:lnTo>
                     <a:pt x="6537008" y="1537507"/>
@@ -4059,7 +4059,7 @@
                     <a:pt x="2868198" y="88039"/>
                   </a:lnTo>
                   <a:lnTo>
-                    <a:pt x="2790564" y="101809"/>
+                    <a:pt x="2790564" y="101808"/>
                   </a:lnTo>
                   <a:lnTo>
                     <a:pt x="2712930" y="115333"/>
@@ -4187,7 +4187,7 @@
           </p:nvSpPr>
           <p:spPr>
             <a:xfrm>
-              <a:off x="817517" y="4109022"/>
+              <a:off x="817517" y="4109021"/>
               <a:ext cx="7370972" cy="959821"/>
             </a:xfrm>
             <a:custGeom>
@@ -4258,7 +4258,7 @@
                     <a:pt x="1548419" y="296660"/>
                   </a:lnTo>
                   <a:lnTo>
-                    <a:pt x="1626053" y="309807"/>
+                    <a:pt x="1626053" y="309808"/>
                   </a:lnTo>
                   <a:lnTo>
                     <a:pt x="1703687" y="322804"/>
@@ -4291,7 +4291,7 @@
                     <a:pt x="2402393" y="433253"/>
                   </a:lnTo>
                   <a:lnTo>
-                    <a:pt x="2480027" y="444830"/>
+                    <a:pt x="2480027" y="444831"/>
                   </a:lnTo>
                   <a:lnTo>
                     <a:pt x="2557661" y="456275"/>
@@ -4336,7 +4336,7 @@
                     <a:pt x="3566904" y="593611"/>
                   </a:lnTo>
                   <a:lnTo>
-                    <a:pt x="3644538" y="603344"/>
+                    <a:pt x="3644538" y="603345"/>
                   </a:lnTo>
                   <a:lnTo>
                     <a:pt x="3722172" y="612966"/>
@@ -4381,7 +4381,7 @@
                     <a:pt x="4731415" y="728431"/>
                   </a:lnTo>
                   <a:lnTo>
-                    <a:pt x="4809049" y="736614"/>
+                    <a:pt x="4809049" y="736615"/>
                   </a:lnTo>
                   <a:lnTo>
                     <a:pt x="4886683" y="744704"/>

--- a/docs/plots/carbo/jx_carbo_linsubhr_ratio_hosp_immune_other.pptx
+++ b/docs/plots/carbo/jx_carbo_linsubhr_ratio_hosp_immune_other.pptx
@@ -2271,7 +2271,7 @@
           </p:nvSpPr>
           <p:spPr>
             <a:xfrm>
-              <a:off x="817517" y="5114368"/>
+              <a:off x="817517" y="5142518"/>
               <a:ext cx="7799693" cy="0"/>
             </a:xfrm>
             <a:custGeom>
@@ -2314,7 +2314,7 @@
           </p:nvSpPr>
           <p:spPr>
             <a:xfrm>
-              <a:off x="817517" y="4244691"/>
+              <a:off x="817517" y="4313054"/>
               <a:ext cx="7799693" cy="0"/>
             </a:xfrm>
             <a:custGeom>
@@ -2357,7 +2357,7 @@
           </p:nvSpPr>
           <p:spPr>
             <a:xfrm>
-              <a:off x="817517" y="3375014"/>
+              <a:off x="817517" y="3483591"/>
               <a:ext cx="7799693" cy="0"/>
             </a:xfrm>
             <a:custGeom>
@@ -2400,7 +2400,7 @@
           </p:nvSpPr>
           <p:spPr>
             <a:xfrm>
-              <a:off x="817517" y="2505337"/>
+              <a:off x="817517" y="2654127"/>
               <a:ext cx="7799693" cy="0"/>
             </a:xfrm>
             <a:custGeom>
@@ -2443,15 +2443,15 @@
           </p:nvSpPr>
           <p:spPr>
             <a:xfrm>
-              <a:off x="1615213" y="1896563"/>
-              <a:ext cx="0" cy="3826579"/>
+              <a:off x="1615213" y="2073503"/>
+              <a:ext cx="0" cy="3649639"/>
             </a:xfrm>
             <a:custGeom>
               <a:avLst/>
               <a:pathLst>
-                <a:path w="0" h="3826579">
+                <a:path w="0" h="3649639">
                   <a:moveTo>
-                    <a:pt x="0" y="3826579"/>
+                    <a:pt x="0" y="3649639"/>
                   </a:moveTo>
                   <a:lnTo>
                     <a:pt x="0" y="0"/>
@@ -2486,15 +2486,15 @@
           </p:nvSpPr>
           <p:spPr>
             <a:xfrm>
-              <a:off x="3387871" y="1896563"/>
-              <a:ext cx="0" cy="3826579"/>
+              <a:off x="3387871" y="2073503"/>
+              <a:ext cx="0" cy="3649639"/>
             </a:xfrm>
             <a:custGeom>
               <a:avLst/>
               <a:pathLst>
-                <a:path w="0" h="3826579">
+                <a:path w="0" h="3649639">
                   <a:moveTo>
-                    <a:pt x="0" y="3826579"/>
+                    <a:pt x="0" y="3649639"/>
                   </a:moveTo>
                   <a:lnTo>
                     <a:pt x="0" y="0"/>
@@ -2529,15 +2529,15 @@
           </p:nvSpPr>
           <p:spPr>
             <a:xfrm>
-              <a:off x="5160528" y="1896563"/>
-              <a:ext cx="0" cy="3826579"/>
+              <a:off x="5160528" y="2073503"/>
+              <a:ext cx="0" cy="3649639"/>
             </a:xfrm>
             <a:custGeom>
               <a:avLst/>
               <a:pathLst>
-                <a:path w="0" h="3826579">
+                <a:path w="0" h="3649639">
                   <a:moveTo>
-                    <a:pt x="0" y="3826579"/>
+                    <a:pt x="0" y="3649639"/>
                   </a:moveTo>
                   <a:lnTo>
                     <a:pt x="0" y="0"/>
@@ -2572,15 +2572,15 @@
           </p:nvSpPr>
           <p:spPr>
             <a:xfrm>
-              <a:off x="6933186" y="1896563"/>
-              <a:ext cx="0" cy="3826579"/>
+              <a:off x="6933186" y="2073503"/>
+              <a:ext cx="0" cy="3649639"/>
             </a:xfrm>
             <a:custGeom>
               <a:avLst/>
               <a:pathLst>
-                <a:path w="0" h="3826579">
+                <a:path w="0" h="3649639">
                   <a:moveTo>
-                    <a:pt x="0" y="3826579"/>
+                    <a:pt x="0" y="3649639"/>
                   </a:moveTo>
                   <a:lnTo>
                     <a:pt x="0" y="0"/>
@@ -2615,7 +2615,7 @@
           </p:nvSpPr>
           <p:spPr>
             <a:xfrm>
-              <a:off x="817517" y="5549207"/>
+              <a:off x="817517" y="5557249"/>
               <a:ext cx="7799693" cy="0"/>
             </a:xfrm>
             <a:custGeom>
@@ -2658,7 +2658,7 @@
           </p:nvSpPr>
           <p:spPr>
             <a:xfrm>
-              <a:off x="817517" y="4679530"/>
+              <a:off x="817517" y="4727786"/>
               <a:ext cx="7799693" cy="0"/>
             </a:xfrm>
             <a:custGeom>
@@ -2701,7 +2701,7 @@
           </p:nvSpPr>
           <p:spPr>
             <a:xfrm>
-              <a:off x="817517" y="3809853"/>
+              <a:off x="817517" y="3898322"/>
               <a:ext cx="7799693" cy="0"/>
             </a:xfrm>
             <a:custGeom>
@@ -2744,7 +2744,7 @@
           </p:nvSpPr>
           <p:spPr>
             <a:xfrm>
-              <a:off x="817517" y="2940175"/>
+              <a:off x="817517" y="3068859"/>
               <a:ext cx="7799693" cy="0"/>
             </a:xfrm>
             <a:custGeom>
@@ -2787,7 +2787,7 @@
           </p:nvSpPr>
           <p:spPr>
             <a:xfrm>
-              <a:off x="817517" y="2070498"/>
+              <a:off x="817517" y="2239395"/>
               <a:ext cx="7799693" cy="0"/>
             </a:xfrm>
             <a:custGeom>
@@ -2830,15 +2830,15 @@
           </p:nvSpPr>
           <p:spPr>
             <a:xfrm>
-              <a:off x="2501542" y="1896563"/>
-              <a:ext cx="0" cy="3826579"/>
+              <a:off x="2501542" y="2073503"/>
+              <a:ext cx="0" cy="3649639"/>
             </a:xfrm>
             <a:custGeom>
               <a:avLst/>
               <a:pathLst>
-                <a:path w="0" h="3826579">
+                <a:path w="0" h="3649639">
                   <a:moveTo>
-                    <a:pt x="0" y="3826579"/>
+                    <a:pt x="0" y="3649639"/>
                   </a:moveTo>
                   <a:lnTo>
                     <a:pt x="0" y="0"/>
@@ -2873,15 +2873,15 @@
           </p:nvSpPr>
           <p:spPr>
             <a:xfrm>
-              <a:off x="4274200" y="1896563"/>
-              <a:ext cx="0" cy="3826579"/>
+              <a:off x="4274200" y="2073503"/>
+              <a:ext cx="0" cy="3649639"/>
             </a:xfrm>
             <a:custGeom>
               <a:avLst/>
               <a:pathLst>
-                <a:path w="0" h="3826579">
+                <a:path w="0" h="3649639">
                   <a:moveTo>
-                    <a:pt x="0" y="3826579"/>
+                    <a:pt x="0" y="3649639"/>
                   </a:moveTo>
                   <a:lnTo>
                     <a:pt x="0" y="0"/>
@@ -2916,15 +2916,15 @@
           </p:nvSpPr>
           <p:spPr>
             <a:xfrm>
-              <a:off x="6046857" y="1896563"/>
-              <a:ext cx="0" cy="3826579"/>
+              <a:off x="6046857" y="2073503"/>
+              <a:ext cx="0" cy="3649639"/>
             </a:xfrm>
             <a:custGeom>
               <a:avLst/>
               <a:pathLst>
-                <a:path w="0" h="3826579">
+                <a:path w="0" h="3649639">
                   <a:moveTo>
-                    <a:pt x="0" y="3826579"/>
+                    <a:pt x="0" y="3649639"/>
                   </a:moveTo>
                   <a:lnTo>
                     <a:pt x="0" y="0"/>
@@ -2959,15 +2959,15 @@
           </p:nvSpPr>
           <p:spPr>
             <a:xfrm>
-              <a:off x="7819515" y="1896563"/>
-              <a:ext cx="0" cy="3826579"/>
+              <a:off x="7819515" y="2073503"/>
+              <a:ext cx="0" cy="3649639"/>
             </a:xfrm>
             <a:custGeom>
               <a:avLst/>
               <a:pathLst>
-                <a:path w="0" h="3826579">
+                <a:path w="0" h="3649639">
                   <a:moveTo>
-                    <a:pt x="0" y="3826579"/>
+                    <a:pt x="0" y="3649639"/>
                   </a:moveTo>
                   <a:lnTo>
                     <a:pt x="0" y="0"/>
@@ -3002,564 +3002,564 @@
           </p:nvSpPr>
           <p:spPr>
             <a:xfrm>
-              <a:off x="817517" y="1896563"/>
-              <a:ext cx="7370972" cy="3547410"/>
+              <a:off x="817517" y="2073503"/>
+              <a:ext cx="7370972" cy="3383379"/>
             </a:xfrm>
             <a:custGeom>
               <a:avLst/>
               <a:pathLst>
-                <a:path w="7370972" h="3547410">
+                <a:path w="7370972" h="3383379">
                   <a:moveTo>
                     <a:pt x="678696" y="0"/>
                   </a:moveTo>
                   <a:lnTo>
-                    <a:pt x="694444" y="30860"/>
-                  </a:lnTo>
-                  <a:lnTo>
-                    <a:pt x="772078" y="176857"/>
-                  </a:lnTo>
-                  <a:lnTo>
-                    <a:pt x="849712" y="316969"/>
-                  </a:lnTo>
-                  <a:lnTo>
-                    <a:pt x="927346" y="451433"/>
-                  </a:lnTo>
-                  <a:lnTo>
-                    <a:pt x="1004981" y="580476"/>
-                  </a:lnTo>
-                  <a:lnTo>
-                    <a:pt x="1082615" y="704318"/>
-                  </a:lnTo>
-                  <a:lnTo>
-                    <a:pt x="1160249" y="823167"/>
-                  </a:lnTo>
-                  <a:lnTo>
-                    <a:pt x="1237883" y="937226"/>
-                  </a:lnTo>
-                  <a:lnTo>
-                    <a:pt x="1315517" y="1046687"/>
-                  </a:lnTo>
-                  <a:lnTo>
-                    <a:pt x="1393151" y="1151735"/>
-                  </a:lnTo>
-                  <a:lnTo>
-                    <a:pt x="1470785" y="1252549"/>
-                  </a:lnTo>
-                  <a:lnTo>
-                    <a:pt x="1548419" y="1349299"/>
-                  </a:lnTo>
-                  <a:lnTo>
-                    <a:pt x="1626053" y="1442149"/>
-                  </a:lnTo>
-                  <a:lnTo>
-                    <a:pt x="1703687" y="1531255"/>
-                  </a:lnTo>
-                  <a:lnTo>
-                    <a:pt x="1781321" y="1616770"/>
-                  </a:lnTo>
-                  <a:lnTo>
-                    <a:pt x="1858955" y="1698838"/>
-                  </a:lnTo>
-                  <a:lnTo>
-                    <a:pt x="1936589" y="1777598"/>
-                  </a:lnTo>
-                  <a:lnTo>
-                    <a:pt x="2014223" y="1853182"/>
-                  </a:lnTo>
-                  <a:lnTo>
-                    <a:pt x="2091857" y="1925720"/>
-                  </a:lnTo>
-                  <a:lnTo>
-                    <a:pt x="2169491" y="1995334"/>
-                  </a:lnTo>
-                  <a:lnTo>
-                    <a:pt x="2247125" y="2062142"/>
-                  </a:lnTo>
-                  <a:lnTo>
-                    <a:pt x="2324759" y="2126256"/>
-                  </a:lnTo>
-                  <a:lnTo>
-                    <a:pt x="2402393" y="2187786"/>
-                  </a:lnTo>
-                  <a:lnTo>
-                    <a:pt x="2480027" y="2246836"/>
-                  </a:lnTo>
-                  <a:lnTo>
-                    <a:pt x="2557661" y="2303505"/>
-                  </a:lnTo>
-                  <a:lnTo>
-                    <a:pt x="2635295" y="2357890"/>
-                  </a:lnTo>
-                  <a:lnTo>
-                    <a:pt x="2712930" y="2410082"/>
-                  </a:lnTo>
-                  <a:lnTo>
-                    <a:pt x="2790564" y="2460171"/>
-                  </a:lnTo>
-                  <a:lnTo>
-                    <a:pt x="2868198" y="2508241"/>
-                  </a:lnTo>
-                  <a:lnTo>
-                    <a:pt x="2945832" y="2554373"/>
-                  </a:lnTo>
-                  <a:lnTo>
-                    <a:pt x="3023466" y="2598645"/>
-                  </a:lnTo>
-                  <a:lnTo>
-                    <a:pt x="3101100" y="2641132"/>
-                  </a:lnTo>
-                  <a:lnTo>
-                    <a:pt x="3178734" y="2681907"/>
-                  </a:lnTo>
-                  <a:lnTo>
-                    <a:pt x="3256368" y="2721038"/>
-                  </a:lnTo>
-                  <a:lnTo>
-                    <a:pt x="3334002" y="2758592"/>
-                  </a:lnTo>
-                  <a:lnTo>
-                    <a:pt x="3411636" y="2777808"/>
-                  </a:lnTo>
-                  <a:lnTo>
-                    <a:pt x="3489270" y="2761903"/>
-                  </a:lnTo>
-                  <a:lnTo>
-                    <a:pt x="3566904" y="2745709"/>
-                  </a:lnTo>
-                  <a:lnTo>
-                    <a:pt x="3644538" y="2729221"/>
-                  </a:lnTo>
-                  <a:lnTo>
-                    <a:pt x="3722172" y="2712433"/>
-                  </a:lnTo>
-                  <a:lnTo>
-                    <a:pt x="3799806" y="2695339"/>
-                  </a:lnTo>
-                  <a:lnTo>
-                    <a:pt x="3877440" y="2677935"/>
-                  </a:lnTo>
-                  <a:lnTo>
-                    <a:pt x="3955074" y="2660214"/>
-                  </a:lnTo>
-                  <a:lnTo>
-                    <a:pt x="4032708" y="2642172"/>
-                  </a:lnTo>
-                  <a:lnTo>
-                    <a:pt x="4110342" y="2623801"/>
-                  </a:lnTo>
-                  <a:lnTo>
-                    <a:pt x="4187976" y="2605096"/>
-                  </a:lnTo>
-                  <a:lnTo>
-                    <a:pt x="4265610" y="2586051"/>
-                  </a:lnTo>
-                  <a:lnTo>
-                    <a:pt x="4343244" y="2566660"/>
-                  </a:lnTo>
-                  <a:lnTo>
-                    <a:pt x="4420879" y="2546916"/>
-                  </a:lnTo>
-                  <a:lnTo>
-                    <a:pt x="4498513" y="2526814"/>
-                  </a:lnTo>
-                  <a:lnTo>
-                    <a:pt x="4576147" y="2506346"/>
-                  </a:lnTo>
-                  <a:lnTo>
-                    <a:pt x="4653781" y="2485506"/>
-                  </a:lnTo>
-                  <a:lnTo>
-                    <a:pt x="4731415" y="2464287"/>
-                  </a:lnTo>
-                  <a:lnTo>
-                    <a:pt x="4809049" y="2442682"/>
-                  </a:lnTo>
-                  <a:lnTo>
-                    <a:pt x="4886683" y="2420684"/>
-                  </a:lnTo>
-                  <a:lnTo>
-                    <a:pt x="4964317" y="2398287"/>
-                  </a:lnTo>
-                  <a:lnTo>
-                    <a:pt x="5041951" y="2375482"/>
-                  </a:lnTo>
-                  <a:lnTo>
-                    <a:pt x="5119585" y="2352263"/>
-                  </a:lnTo>
-                  <a:lnTo>
-                    <a:pt x="5197219" y="2328621"/>
-                  </a:lnTo>
-                  <a:lnTo>
-                    <a:pt x="5274853" y="2304550"/>
-                  </a:lnTo>
-                  <a:lnTo>
-                    <a:pt x="5352487" y="2280041"/>
-                  </a:lnTo>
-                  <a:lnTo>
-                    <a:pt x="5430121" y="2255087"/>
-                  </a:lnTo>
-                  <a:lnTo>
-                    <a:pt x="5507755" y="2229679"/>
-                  </a:lnTo>
-                  <a:lnTo>
-                    <a:pt x="5585389" y="2203808"/>
-                  </a:lnTo>
-                  <a:lnTo>
-                    <a:pt x="5663023" y="2177468"/>
-                  </a:lnTo>
-                  <a:lnTo>
-                    <a:pt x="5740657" y="2150649"/>
-                  </a:lnTo>
-                  <a:lnTo>
-                    <a:pt x="5818291" y="2123342"/>
-                  </a:lnTo>
-                  <a:lnTo>
-                    <a:pt x="5895925" y="2095539"/>
-                  </a:lnTo>
-                  <a:lnTo>
-                    <a:pt x="5973559" y="2067230"/>
-                  </a:lnTo>
-                  <a:lnTo>
-                    <a:pt x="6051193" y="2038406"/>
-                  </a:lnTo>
-                  <a:lnTo>
-                    <a:pt x="6128827" y="2009059"/>
-                  </a:lnTo>
-                  <a:lnTo>
-                    <a:pt x="6206462" y="1979178"/>
-                  </a:lnTo>
-                  <a:lnTo>
-                    <a:pt x="6284096" y="1948754"/>
-                  </a:lnTo>
-                  <a:lnTo>
-                    <a:pt x="6361730" y="1917776"/>
-                  </a:lnTo>
-                  <a:lnTo>
-                    <a:pt x="6439364" y="1886236"/>
-                  </a:lnTo>
-                  <a:lnTo>
-                    <a:pt x="6516998" y="1854121"/>
-                  </a:lnTo>
-                  <a:lnTo>
-                    <a:pt x="6594632" y="1821424"/>
-                  </a:lnTo>
-                  <a:lnTo>
-                    <a:pt x="6672266" y="1788131"/>
-                  </a:lnTo>
-                  <a:lnTo>
-                    <a:pt x="6749900" y="1754234"/>
-                  </a:lnTo>
-                  <a:lnTo>
-                    <a:pt x="6827534" y="1719720"/>
-                  </a:lnTo>
-                  <a:lnTo>
-                    <a:pt x="6905168" y="1684579"/>
-                  </a:lnTo>
-                  <a:lnTo>
-                    <a:pt x="6982802" y="1648798"/>
-                  </a:lnTo>
-                  <a:lnTo>
-                    <a:pt x="7060436" y="1612368"/>
-                  </a:lnTo>
-                  <a:lnTo>
-                    <a:pt x="7138070" y="1575275"/>
-                  </a:lnTo>
-                  <a:lnTo>
-                    <a:pt x="7215704" y="1537507"/>
-                  </a:lnTo>
-                  <a:lnTo>
-                    <a:pt x="7293338" y="1499053"/>
-                  </a:lnTo>
-                  <a:lnTo>
-                    <a:pt x="7370972" y="1459900"/>
-                  </a:lnTo>
-                  <a:lnTo>
-                    <a:pt x="7370972" y="3547410"/>
-                  </a:lnTo>
-                  <a:lnTo>
-                    <a:pt x="7293338" y="3542990"/>
-                  </a:lnTo>
-                  <a:lnTo>
-                    <a:pt x="7215704" y="3538384"/>
-                  </a:lnTo>
-                  <a:lnTo>
-                    <a:pt x="7138070" y="3533585"/>
-                  </a:lnTo>
-                  <a:lnTo>
-                    <a:pt x="7060436" y="3528584"/>
-                  </a:lnTo>
-                  <a:lnTo>
-                    <a:pt x="6982802" y="3523373"/>
-                  </a:lnTo>
-                  <a:lnTo>
-                    <a:pt x="6905168" y="3517943"/>
-                  </a:lnTo>
-                  <a:lnTo>
-                    <a:pt x="6827534" y="3512285"/>
-                  </a:lnTo>
-                  <a:lnTo>
-                    <a:pt x="6749900" y="3506389"/>
-                  </a:lnTo>
-                  <a:lnTo>
-                    <a:pt x="6672266" y="3500246"/>
-                  </a:lnTo>
-                  <a:lnTo>
-                    <a:pt x="6594632" y="3493845"/>
-                  </a:lnTo>
-                  <a:lnTo>
-                    <a:pt x="6516998" y="3487174"/>
-                  </a:lnTo>
-                  <a:lnTo>
-                    <a:pt x="6439364" y="3480224"/>
-                  </a:lnTo>
-                  <a:lnTo>
-                    <a:pt x="6361730" y="3472982"/>
-                  </a:lnTo>
-                  <a:lnTo>
-                    <a:pt x="6284096" y="3465435"/>
-                  </a:lnTo>
-                  <a:lnTo>
-                    <a:pt x="6206462" y="3457572"/>
-                  </a:lnTo>
-                  <a:lnTo>
-                    <a:pt x="6128827" y="3449378"/>
-                  </a:lnTo>
-                  <a:lnTo>
-                    <a:pt x="6051193" y="3440840"/>
-                  </a:lnTo>
-                  <a:lnTo>
-                    <a:pt x="5973559" y="3431943"/>
-                  </a:lnTo>
-                  <a:lnTo>
-                    <a:pt x="5895925" y="3422673"/>
-                  </a:lnTo>
-                  <a:lnTo>
-                    <a:pt x="5818291" y="3413013"/>
-                  </a:lnTo>
-                  <a:lnTo>
-                    <a:pt x="5740657" y="3402948"/>
-                  </a:lnTo>
-                  <a:lnTo>
-                    <a:pt x="5663023" y="3392460"/>
-                  </a:lnTo>
-                  <a:lnTo>
-                    <a:pt x="5585389" y="3381531"/>
-                  </a:lnTo>
-                  <a:lnTo>
-                    <a:pt x="5507755" y="3370143"/>
-                  </a:lnTo>
-                  <a:lnTo>
-                    <a:pt x="5430121" y="3358277"/>
-                  </a:lnTo>
-                  <a:lnTo>
-                    <a:pt x="5352487" y="3345912"/>
-                  </a:lnTo>
-                  <a:lnTo>
-                    <a:pt x="5274853" y="3333028"/>
-                  </a:lnTo>
-                  <a:lnTo>
-                    <a:pt x="5197219" y="3319603"/>
-                  </a:lnTo>
-                  <a:lnTo>
-                    <a:pt x="5119585" y="3305614"/>
-                  </a:lnTo>
-                  <a:lnTo>
-                    <a:pt x="5041951" y="3291038"/>
-                  </a:lnTo>
-                  <a:lnTo>
-                    <a:pt x="4964317" y="3275849"/>
-                  </a:lnTo>
-                  <a:lnTo>
-                    <a:pt x="4886683" y="3260022"/>
-                  </a:lnTo>
-                  <a:lnTo>
-                    <a:pt x="4809049" y="3243530"/>
-                  </a:lnTo>
-                  <a:lnTo>
-                    <a:pt x="4731415" y="3226346"/>
-                  </a:lnTo>
-                  <a:lnTo>
-                    <a:pt x="4653781" y="3208440"/>
-                  </a:lnTo>
-                  <a:lnTo>
-                    <a:pt x="4576147" y="3189781"/>
-                  </a:lnTo>
-                  <a:lnTo>
-                    <a:pt x="4498513" y="3170339"/>
-                  </a:lnTo>
-                  <a:lnTo>
-                    <a:pt x="4420879" y="3150080"/>
-                  </a:lnTo>
-                  <a:lnTo>
-                    <a:pt x="4343244" y="3128971"/>
-                  </a:lnTo>
-                  <a:lnTo>
-                    <a:pt x="4265610" y="3106974"/>
-                  </a:lnTo>
-                  <a:lnTo>
-                    <a:pt x="4187976" y="3084054"/>
-                  </a:lnTo>
-                  <a:lnTo>
-                    <a:pt x="4110342" y="3060171"/>
-                  </a:lnTo>
-                  <a:lnTo>
-                    <a:pt x="4032708" y="3035285"/>
-                  </a:lnTo>
-                  <a:lnTo>
-                    <a:pt x="3955074" y="3009353"/>
-                  </a:lnTo>
-                  <a:lnTo>
-                    <a:pt x="3877440" y="2982332"/>
-                  </a:lnTo>
-                  <a:lnTo>
-                    <a:pt x="3799806" y="2954176"/>
-                  </a:lnTo>
-                  <a:lnTo>
-                    <a:pt x="3722172" y="2924838"/>
-                  </a:lnTo>
-                  <a:lnTo>
-                    <a:pt x="3644538" y="2894267"/>
-                  </a:lnTo>
-                  <a:lnTo>
-                    <a:pt x="3566904" y="2862412"/>
-                  </a:lnTo>
-                  <a:lnTo>
-                    <a:pt x="3489270" y="2829219"/>
-                  </a:lnTo>
-                  <a:lnTo>
-                    <a:pt x="3411636" y="2794632"/>
-                  </a:lnTo>
-                  <a:lnTo>
-                    <a:pt x="3334002" y="2793429"/>
-                  </a:lnTo>
-                  <a:lnTo>
-                    <a:pt x="3256368" y="2808771"/>
-                  </a:lnTo>
-                  <a:lnTo>
-                    <a:pt x="3178734" y="2823839"/>
-                  </a:lnTo>
-                  <a:lnTo>
-                    <a:pt x="3101100" y="2838638"/>
-                  </a:lnTo>
-                  <a:lnTo>
-                    <a:pt x="3023466" y="2853173"/>
-                  </a:lnTo>
-                  <a:lnTo>
-                    <a:pt x="2945832" y="2867448"/>
-                  </a:lnTo>
-                  <a:lnTo>
-                    <a:pt x="2868198" y="2881468"/>
-                  </a:lnTo>
-                  <a:lnTo>
-                    <a:pt x="2790564" y="2895238"/>
-                  </a:lnTo>
-                  <a:lnTo>
-                    <a:pt x="2712930" y="2908762"/>
-                  </a:lnTo>
-                  <a:lnTo>
-                    <a:pt x="2635295" y="2922045"/>
-                  </a:lnTo>
-                  <a:lnTo>
-                    <a:pt x="2557661" y="2935090"/>
-                  </a:lnTo>
-                  <a:lnTo>
-                    <a:pt x="2480027" y="2947902"/>
-                  </a:lnTo>
-                  <a:lnTo>
-                    <a:pt x="2402393" y="2960486"/>
-                  </a:lnTo>
-                  <a:lnTo>
-                    <a:pt x="2324759" y="2972845"/>
-                  </a:lnTo>
-                  <a:lnTo>
-                    <a:pt x="2247125" y="2984983"/>
-                  </a:lnTo>
-                  <a:lnTo>
-                    <a:pt x="2169491" y="2996905"/>
-                  </a:lnTo>
-                  <a:lnTo>
-                    <a:pt x="2091857" y="3008614"/>
-                  </a:lnTo>
-                  <a:lnTo>
-                    <a:pt x="2014223" y="3020113"/>
-                  </a:lnTo>
-                  <a:lnTo>
-                    <a:pt x="1936589" y="3031408"/>
-                  </a:lnTo>
-                  <a:lnTo>
-                    <a:pt x="1858955" y="3042500"/>
-                  </a:lnTo>
-                  <a:lnTo>
-                    <a:pt x="1781321" y="3053395"/>
-                  </a:lnTo>
-                  <a:lnTo>
-                    <a:pt x="1703687" y="3064095"/>
-                  </a:lnTo>
-                  <a:lnTo>
-                    <a:pt x="1626053" y="3074604"/>
-                  </a:lnTo>
-                  <a:lnTo>
-                    <a:pt x="1548419" y="3084925"/>
-                  </a:lnTo>
-                  <a:lnTo>
-                    <a:pt x="1470785" y="3095062"/>
-                  </a:lnTo>
-                  <a:lnTo>
-                    <a:pt x="1393151" y="3105018"/>
-                  </a:lnTo>
-                  <a:lnTo>
-                    <a:pt x="1315517" y="3114797"/>
-                  </a:lnTo>
-                  <a:lnTo>
-                    <a:pt x="1237883" y="3124400"/>
-                  </a:lnTo>
-                  <a:lnTo>
-                    <a:pt x="1160249" y="3133833"/>
-                  </a:lnTo>
-                  <a:lnTo>
-                    <a:pt x="1082615" y="3143096"/>
-                  </a:lnTo>
-                  <a:lnTo>
-                    <a:pt x="1004981" y="3152195"/>
-                  </a:lnTo>
-                  <a:lnTo>
-                    <a:pt x="927346" y="3161131"/>
-                  </a:lnTo>
-                  <a:lnTo>
-                    <a:pt x="849712" y="3169907"/>
-                  </a:lnTo>
-                  <a:lnTo>
-                    <a:pt x="772078" y="3178527"/>
-                  </a:lnTo>
-                  <a:lnTo>
-                    <a:pt x="694444" y="3186992"/>
-                  </a:lnTo>
-                  <a:lnTo>
-                    <a:pt x="616810" y="3195307"/>
-                  </a:lnTo>
-                  <a:lnTo>
-                    <a:pt x="539176" y="3203473"/>
-                  </a:lnTo>
-                  <a:lnTo>
-                    <a:pt x="461542" y="3211493"/>
-                  </a:lnTo>
-                  <a:lnTo>
-                    <a:pt x="383908" y="3219370"/>
-                  </a:lnTo>
-                  <a:lnTo>
-                    <a:pt x="306274" y="3227107"/>
-                  </a:lnTo>
-                  <a:lnTo>
-                    <a:pt x="228640" y="3234705"/>
-                  </a:lnTo>
-                  <a:lnTo>
-                    <a:pt x="151006" y="3242168"/>
-                  </a:lnTo>
-                  <a:lnTo>
-                    <a:pt x="73372" y="3249497"/>
-                  </a:lnTo>
-                  <a:lnTo>
-                    <a:pt x="0" y="3256300"/>
+                    <a:pt x="694444" y="29433"/>
+                  </a:lnTo>
+                  <a:lnTo>
+                    <a:pt x="772078" y="168679"/>
+                  </a:lnTo>
+                  <a:lnTo>
+                    <a:pt x="849712" y="302312"/>
+                  </a:lnTo>
+                  <a:lnTo>
+                    <a:pt x="927346" y="430559"/>
+                  </a:lnTo>
+                  <a:lnTo>
+                    <a:pt x="1004981" y="553635"/>
+                  </a:lnTo>
+                  <a:lnTo>
+                    <a:pt x="1082615" y="671751"/>
+                  </a:lnTo>
+                  <a:lnTo>
+                    <a:pt x="1160249" y="785105"/>
+                  </a:lnTo>
+                  <a:lnTo>
+                    <a:pt x="1237883" y="893889"/>
+                  </a:lnTo>
+                  <a:lnTo>
+                    <a:pt x="1315517" y="998288"/>
+                  </a:lnTo>
+                  <a:lnTo>
+                    <a:pt x="1393151" y="1098479"/>
+                  </a:lnTo>
+                  <a:lnTo>
+                    <a:pt x="1470785" y="1194632"/>
+                  </a:lnTo>
+                  <a:lnTo>
+                    <a:pt x="1548419" y="1286908"/>
+                  </a:lnTo>
+                  <a:lnTo>
+                    <a:pt x="1626053" y="1375464"/>
+                  </a:lnTo>
+                  <a:lnTo>
+                    <a:pt x="1703687" y="1460451"/>
+                  </a:lnTo>
+                  <a:lnTo>
+                    <a:pt x="1781321" y="1542012"/>
+                  </a:lnTo>
+                  <a:lnTo>
+                    <a:pt x="1858955" y="1620285"/>
+                  </a:lnTo>
+                  <a:lnTo>
+                    <a:pt x="1936589" y="1695402"/>
+                  </a:lnTo>
+                  <a:lnTo>
+                    <a:pt x="2014223" y="1767492"/>
+                  </a:lnTo>
+                  <a:lnTo>
+                    <a:pt x="2091857" y="1836676"/>
+                  </a:lnTo>
+                  <a:lnTo>
+                    <a:pt x="2169491" y="1903070"/>
+                  </a:lnTo>
+                  <a:lnTo>
+                    <a:pt x="2247125" y="1966789"/>
+                  </a:lnTo>
+                  <a:lnTo>
+                    <a:pt x="2324759" y="2027939"/>
+                  </a:lnTo>
+                  <a:lnTo>
+                    <a:pt x="2402393" y="2086624"/>
+                  </a:lnTo>
+                  <a:lnTo>
+                    <a:pt x="2480027" y="2142943"/>
+                  </a:lnTo>
+                  <a:lnTo>
+                    <a:pt x="2557661" y="2196992"/>
+                  </a:lnTo>
+                  <a:lnTo>
+                    <a:pt x="2635295" y="2248862"/>
+                  </a:lnTo>
+                  <a:lnTo>
+                    <a:pt x="2712930" y="2298641"/>
+                  </a:lnTo>
+                  <a:lnTo>
+                    <a:pt x="2790564" y="2346414"/>
+                  </a:lnTo>
+                  <a:lnTo>
+                    <a:pt x="2868198" y="2392261"/>
+                  </a:lnTo>
+                  <a:lnTo>
+                    <a:pt x="2945832" y="2436259"/>
+                  </a:lnTo>
+                  <a:lnTo>
+                    <a:pt x="3023466" y="2478484"/>
+                  </a:lnTo>
+                  <a:lnTo>
+                    <a:pt x="3101100" y="2519007"/>
+                  </a:lnTo>
+                  <a:lnTo>
+                    <a:pt x="3178734" y="2557897"/>
+                  </a:lnTo>
+                  <a:lnTo>
+                    <a:pt x="3256368" y="2595219"/>
+                  </a:lnTo>
+                  <a:lnTo>
+                    <a:pt x="3334002" y="2631036"/>
+                  </a:lnTo>
+                  <a:lnTo>
+                    <a:pt x="3411636" y="2649363"/>
+                  </a:lnTo>
+                  <a:lnTo>
+                    <a:pt x="3489270" y="2634194"/>
+                  </a:lnTo>
+                  <a:lnTo>
+                    <a:pt x="3566904" y="2618749"/>
+                  </a:lnTo>
+                  <a:lnTo>
+                    <a:pt x="3644538" y="2603023"/>
+                  </a:lnTo>
+                  <a:lnTo>
+                    <a:pt x="3722172" y="2587011"/>
+                  </a:lnTo>
+                  <a:lnTo>
+                    <a:pt x="3799806" y="2570708"/>
+                  </a:lnTo>
+                  <a:lnTo>
+                    <a:pt x="3877440" y="2554108"/>
+                  </a:lnTo>
+                  <a:lnTo>
+                    <a:pt x="3955074" y="2537207"/>
+                  </a:lnTo>
+                  <a:lnTo>
+                    <a:pt x="4032708" y="2519999"/>
+                  </a:lnTo>
+                  <a:lnTo>
+                    <a:pt x="4110342" y="2502477"/>
+                  </a:lnTo>
+                  <a:lnTo>
+                    <a:pt x="4187976" y="2484637"/>
+                  </a:lnTo>
+                  <a:lnTo>
+                    <a:pt x="4265610" y="2466473"/>
+                  </a:lnTo>
+                  <a:lnTo>
+                    <a:pt x="4343244" y="2447979"/>
+                  </a:lnTo>
+                  <a:lnTo>
+                    <a:pt x="4420879" y="2429148"/>
+                  </a:lnTo>
+                  <a:lnTo>
+                    <a:pt x="4498513" y="2409975"/>
+                  </a:lnTo>
+                  <a:lnTo>
+                    <a:pt x="4576147" y="2390453"/>
+                  </a:lnTo>
+                  <a:lnTo>
+                    <a:pt x="4653781" y="2370577"/>
+                  </a:lnTo>
+                  <a:lnTo>
+                    <a:pt x="4731415" y="2350339"/>
+                  </a:lnTo>
+                  <a:lnTo>
+                    <a:pt x="4809049" y="2329733"/>
+                  </a:lnTo>
+                  <a:lnTo>
+                    <a:pt x="4886683" y="2308753"/>
+                  </a:lnTo>
+                  <a:lnTo>
+                    <a:pt x="4964317" y="2287391"/>
+                  </a:lnTo>
+                  <a:lnTo>
+                    <a:pt x="5041951" y="2265641"/>
+                  </a:lnTo>
+                  <a:lnTo>
+                    <a:pt x="5119585" y="2243495"/>
+                  </a:lnTo>
+                  <a:lnTo>
+                    <a:pt x="5197219" y="2220947"/>
+                  </a:lnTo>
+                  <a:lnTo>
+                    <a:pt x="5274853" y="2197988"/>
+                  </a:lnTo>
+                  <a:lnTo>
+                    <a:pt x="5352487" y="2174613"/>
+                  </a:lnTo>
+                  <a:lnTo>
+                    <a:pt x="5430121" y="2150812"/>
+                  </a:lnTo>
+                  <a:lnTo>
+                    <a:pt x="5507755" y="2126579"/>
+                  </a:lnTo>
+                  <a:lnTo>
+                    <a:pt x="5585389" y="2101905"/>
+                  </a:lnTo>
+                  <a:lnTo>
+                    <a:pt x="5663023" y="2076783"/>
+                  </a:lnTo>
+                  <a:lnTo>
+                    <a:pt x="5740657" y="2051204"/>
+                  </a:lnTo>
+                  <a:lnTo>
+                    <a:pt x="5818291" y="2025159"/>
+                  </a:lnTo>
+                  <a:lnTo>
+                    <a:pt x="5895925" y="1998642"/>
+                  </a:lnTo>
+                  <a:lnTo>
+                    <a:pt x="5973559" y="1971642"/>
+                  </a:lnTo>
+                  <a:lnTo>
+                    <a:pt x="6051193" y="1944151"/>
+                  </a:lnTo>
+                  <a:lnTo>
+                    <a:pt x="6128827" y="1916161"/>
+                  </a:lnTo>
+                  <a:lnTo>
+                    <a:pt x="6206462" y="1887661"/>
+                  </a:lnTo>
+                  <a:lnTo>
+                    <a:pt x="6284096" y="1858644"/>
+                  </a:lnTo>
+                  <a:lnTo>
+                    <a:pt x="6361730" y="1829099"/>
+                  </a:lnTo>
+                  <a:lnTo>
+                    <a:pt x="6439364" y="1799017"/>
+                  </a:lnTo>
+                  <a:lnTo>
+                    <a:pt x="6516998" y="1768388"/>
+                  </a:lnTo>
+                  <a:lnTo>
+                    <a:pt x="6594632" y="1737202"/>
+                  </a:lnTo>
+                  <a:lnTo>
+                    <a:pt x="6672266" y="1705449"/>
+                  </a:lnTo>
+                  <a:lnTo>
+                    <a:pt x="6749900" y="1673119"/>
+                  </a:lnTo>
+                  <a:lnTo>
+                    <a:pt x="6827534" y="1640201"/>
+                  </a:lnTo>
+                  <a:lnTo>
+                    <a:pt x="6905168" y="1606684"/>
+                  </a:lnTo>
+                  <a:lnTo>
+                    <a:pt x="6982802" y="1572558"/>
+                  </a:lnTo>
+                  <a:lnTo>
+                    <a:pt x="7060436" y="1537812"/>
+                  </a:lnTo>
+                  <a:lnTo>
+                    <a:pt x="7138070" y="1502434"/>
+                  </a:lnTo>
+                  <a:lnTo>
+                    <a:pt x="7215704" y="1466413"/>
+                  </a:lnTo>
+                  <a:lnTo>
+                    <a:pt x="7293338" y="1429737"/>
+                  </a:lnTo>
+                  <a:lnTo>
+                    <a:pt x="7370972" y="1392395"/>
+                  </a:lnTo>
+                  <a:lnTo>
+                    <a:pt x="7370972" y="3383379"/>
+                  </a:lnTo>
+                  <a:lnTo>
+                    <a:pt x="7293338" y="3379163"/>
+                  </a:lnTo>
+                  <a:lnTo>
+                    <a:pt x="7215704" y="3374770"/>
+                  </a:lnTo>
+                  <a:lnTo>
+                    <a:pt x="7138070" y="3370193"/>
+                  </a:lnTo>
+                  <a:lnTo>
+                    <a:pt x="7060436" y="3365423"/>
+                  </a:lnTo>
+                  <a:lnTo>
+                    <a:pt x="6982802" y="3360453"/>
+                  </a:lnTo>
+                  <a:lnTo>
+                    <a:pt x="6905168" y="3355274"/>
+                  </a:lnTo>
+                  <a:lnTo>
+                    <a:pt x="6827534" y="3349878"/>
+                  </a:lnTo>
+                  <a:lnTo>
+                    <a:pt x="6749900" y="3344255"/>
+                  </a:lnTo>
+                  <a:lnTo>
+                    <a:pt x="6672266" y="3338396"/>
+                  </a:lnTo>
+                  <a:lnTo>
+                    <a:pt x="6594632" y="3332291"/>
+                  </a:lnTo>
+                  <a:lnTo>
+                    <a:pt x="6516998" y="3325929"/>
+                  </a:lnTo>
+                  <a:lnTo>
+                    <a:pt x="6439364" y="3319300"/>
+                  </a:lnTo>
+                  <a:lnTo>
+                    <a:pt x="6361730" y="3312392"/>
+                  </a:lnTo>
+                  <a:lnTo>
+                    <a:pt x="6284096" y="3305195"/>
+                  </a:lnTo>
+                  <a:lnTo>
+                    <a:pt x="6206462" y="3297695"/>
+                  </a:lnTo>
+                  <a:lnTo>
+                    <a:pt x="6128827" y="3289880"/>
+                  </a:lnTo>
+                  <a:lnTo>
+                    <a:pt x="6051193" y="3281737"/>
+                  </a:lnTo>
+                  <a:lnTo>
+                    <a:pt x="5973559" y="3273252"/>
+                  </a:lnTo>
+                  <a:lnTo>
+                    <a:pt x="5895925" y="3264410"/>
+                  </a:lnTo>
+                  <a:lnTo>
+                    <a:pt x="5818291" y="3255197"/>
+                  </a:lnTo>
+                  <a:lnTo>
+                    <a:pt x="5740657" y="3245597"/>
+                  </a:lnTo>
+                  <a:lnTo>
+                    <a:pt x="5663023" y="3235594"/>
+                  </a:lnTo>
+                  <a:lnTo>
+                    <a:pt x="5585389" y="3225170"/>
+                  </a:lnTo>
+                  <a:lnTo>
+                    <a:pt x="5507755" y="3214309"/>
+                  </a:lnTo>
+                  <a:lnTo>
+                    <a:pt x="5430121" y="3202991"/>
+                  </a:lnTo>
+                  <a:lnTo>
+                    <a:pt x="5352487" y="3191199"/>
+                  </a:lnTo>
+                  <a:lnTo>
+                    <a:pt x="5274853" y="3178910"/>
+                  </a:lnTo>
+                  <a:lnTo>
+                    <a:pt x="5197219" y="3166106"/>
+                  </a:lnTo>
+                  <a:lnTo>
+                    <a:pt x="5119585" y="3152764"/>
+                  </a:lnTo>
+                  <a:lnTo>
+                    <a:pt x="5041951" y="3138861"/>
+                  </a:lnTo>
+                  <a:lnTo>
+                    <a:pt x="4964317" y="3124375"/>
+                  </a:lnTo>
+                  <a:lnTo>
+                    <a:pt x="4886683" y="3109280"/>
+                  </a:lnTo>
+                  <a:lnTo>
+                    <a:pt x="4809049" y="3093551"/>
+                  </a:lnTo>
+                  <a:lnTo>
+                    <a:pt x="4731415" y="3077161"/>
+                  </a:lnTo>
+                  <a:lnTo>
+                    <a:pt x="4653781" y="3060082"/>
+                  </a:lnTo>
+                  <a:lnTo>
+                    <a:pt x="4576147" y="3042287"/>
+                  </a:lnTo>
+                  <a:lnTo>
+                    <a:pt x="4498513" y="3023744"/>
+                  </a:lnTo>
+                  <a:lnTo>
+                    <a:pt x="4420879" y="3004422"/>
+                  </a:lnTo>
+                  <a:lnTo>
+                    <a:pt x="4343244" y="2984288"/>
+                  </a:lnTo>
+                  <a:lnTo>
+                    <a:pt x="4265610" y="2963309"/>
+                  </a:lnTo>
+                  <a:lnTo>
+                    <a:pt x="4187976" y="2941448"/>
+                  </a:lnTo>
+                  <a:lnTo>
+                    <a:pt x="4110342" y="2918670"/>
+                  </a:lnTo>
+                  <a:lnTo>
+                    <a:pt x="4032708" y="2894934"/>
+                  </a:lnTo>
+                  <a:lnTo>
+                    <a:pt x="3955074" y="2870202"/>
+                  </a:lnTo>
+                  <a:lnTo>
+                    <a:pt x="3877440" y="2844430"/>
+                  </a:lnTo>
+                  <a:lnTo>
+                    <a:pt x="3799806" y="2817576"/>
+                  </a:lnTo>
+                  <a:lnTo>
+                    <a:pt x="3722172" y="2789594"/>
+                  </a:lnTo>
+                  <a:lnTo>
+                    <a:pt x="3644538" y="2760437"/>
+                  </a:lnTo>
+                  <a:lnTo>
+                    <a:pt x="3566904" y="2730055"/>
+                  </a:lnTo>
+                  <a:lnTo>
+                    <a:pt x="3489270" y="2698397"/>
+                  </a:lnTo>
+                  <a:lnTo>
+                    <a:pt x="3411636" y="2665409"/>
+                  </a:lnTo>
+                  <a:lnTo>
+                    <a:pt x="3334002" y="2664262"/>
+                  </a:lnTo>
+                  <a:lnTo>
+                    <a:pt x="3256368" y="2678894"/>
+                  </a:lnTo>
+                  <a:lnTo>
+                    <a:pt x="3178734" y="2693266"/>
+                  </a:lnTo>
+                  <a:lnTo>
+                    <a:pt x="3101100" y="2707380"/>
+                  </a:lnTo>
+                  <a:lnTo>
+                    <a:pt x="3023466" y="2721243"/>
+                  </a:lnTo>
+                  <a:lnTo>
+                    <a:pt x="2945832" y="2734858"/>
+                  </a:lnTo>
+                  <a:lnTo>
+                    <a:pt x="2868198" y="2748230"/>
+                  </a:lnTo>
+                  <a:lnTo>
+                    <a:pt x="2790564" y="2761363"/>
+                  </a:lnTo>
+                  <a:lnTo>
+                    <a:pt x="2712930" y="2774262"/>
+                  </a:lnTo>
+                  <a:lnTo>
+                    <a:pt x="2635295" y="2786930"/>
+                  </a:lnTo>
+                  <a:lnTo>
+                    <a:pt x="2557661" y="2799372"/>
+                  </a:lnTo>
+                  <a:lnTo>
+                    <a:pt x="2480027" y="2811593"/>
+                  </a:lnTo>
+                  <a:lnTo>
+                    <a:pt x="2402393" y="2823594"/>
+                  </a:lnTo>
+                  <a:lnTo>
+                    <a:pt x="2324759" y="2835382"/>
+                  </a:lnTo>
+                  <a:lnTo>
+                    <a:pt x="2247125" y="2846959"/>
+                  </a:lnTo>
+                  <a:lnTo>
+                    <a:pt x="2169491" y="2858329"/>
+                  </a:lnTo>
+                  <a:lnTo>
+                    <a:pt x="2091857" y="2869497"/>
+                  </a:lnTo>
+                  <a:lnTo>
+                    <a:pt x="2014223" y="2880464"/>
+                  </a:lnTo>
+                  <a:lnTo>
+                    <a:pt x="1936589" y="2891237"/>
+                  </a:lnTo>
+                  <a:lnTo>
+                    <a:pt x="1858955" y="2901816"/>
+                  </a:lnTo>
+                  <a:lnTo>
+                    <a:pt x="1781321" y="2912207"/>
+                  </a:lnTo>
+                  <a:lnTo>
+                    <a:pt x="1703687" y="2922412"/>
+                  </a:lnTo>
+                  <a:lnTo>
+                    <a:pt x="1626053" y="2932435"/>
+                  </a:lnTo>
+                  <a:lnTo>
+                    <a:pt x="1548419" y="2942280"/>
+                  </a:lnTo>
+                  <a:lnTo>
+                    <a:pt x="1470785" y="2951948"/>
+                  </a:lnTo>
+                  <a:lnTo>
+                    <a:pt x="1393151" y="2961444"/>
+                  </a:lnTo>
+                  <a:lnTo>
+                    <a:pt x="1315517" y="2970770"/>
+                  </a:lnTo>
+                  <a:lnTo>
+                    <a:pt x="1237883" y="2979929"/>
+                  </a:lnTo>
+                  <a:lnTo>
+                    <a:pt x="1160249" y="2988925"/>
+                  </a:lnTo>
+                  <a:lnTo>
+                    <a:pt x="1082615" y="2997761"/>
+                  </a:lnTo>
+                  <a:lnTo>
+                    <a:pt x="1004981" y="3006438"/>
+                  </a:lnTo>
+                  <a:lnTo>
+                    <a:pt x="927346" y="3014961"/>
+                  </a:lnTo>
+                  <a:lnTo>
+                    <a:pt x="849712" y="3023332"/>
+                  </a:lnTo>
+                  <a:lnTo>
+                    <a:pt x="772078" y="3031553"/>
+                  </a:lnTo>
+                  <a:lnTo>
+                    <a:pt x="694444" y="3039627"/>
+                  </a:lnTo>
+                  <a:lnTo>
+                    <a:pt x="616810" y="3047557"/>
+                  </a:lnTo>
+                  <a:lnTo>
+                    <a:pt x="539176" y="3055346"/>
+                  </a:lnTo>
+                  <a:lnTo>
+                    <a:pt x="461542" y="3062995"/>
+                  </a:lnTo>
+                  <a:lnTo>
+                    <a:pt x="383908" y="3070508"/>
+                  </a:lnTo>
+                  <a:lnTo>
+                    <a:pt x="306274" y="3077887"/>
+                  </a:lnTo>
+                  <a:lnTo>
+                    <a:pt x="228640" y="3085133"/>
+                  </a:lnTo>
+                  <a:lnTo>
+                    <a:pt x="151006" y="3092251"/>
+                  </a:lnTo>
+                  <a:lnTo>
+                    <a:pt x="73372" y="3099241"/>
+                  </a:lnTo>
+                  <a:lnTo>
+                    <a:pt x="0" y="3105730"/>
                   </a:lnTo>
                   <a:close/>
                 </a:path>
@@ -3585,276 +3585,276 @@
           </p:nvSpPr>
           <p:spPr>
             <a:xfrm>
-              <a:off x="1496214" y="1896563"/>
-              <a:ext cx="6692276" cy="2777808"/>
+              <a:off x="1496214" y="2073503"/>
+              <a:ext cx="6692276" cy="2649363"/>
             </a:xfrm>
             <a:custGeom>
               <a:avLst/>
               <a:pathLst>
-                <a:path w="6692276" h="2777808">
+                <a:path w="6692276" h="2649363">
                   <a:moveTo>
                     <a:pt x="0" y="0"/>
                   </a:moveTo>
                   <a:lnTo>
-                    <a:pt x="15748" y="30860"/>
-                  </a:lnTo>
-                  <a:lnTo>
-                    <a:pt x="93382" y="176857"/>
-                  </a:lnTo>
-                  <a:lnTo>
-                    <a:pt x="171016" y="316969"/>
-                  </a:lnTo>
-                  <a:lnTo>
-                    <a:pt x="248650" y="451433"/>
-                  </a:lnTo>
-                  <a:lnTo>
-                    <a:pt x="326284" y="580476"/>
-                  </a:lnTo>
-                  <a:lnTo>
-                    <a:pt x="403918" y="704318"/>
-                  </a:lnTo>
-                  <a:lnTo>
-                    <a:pt x="481552" y="823167"/>
-                  </a:lnTo>
-                  <a:lnTo>
-                    <a:pt x="559186" y="937226"/>
-                  </a:lnTo>
-                  <a:lnTo>
-                    <a:pt x="636820" y="1046687"/>
-                  </a:lnTo>
-                  <a:lnTo>
-                    <a:pt x="714454" y="1151735"/>
-                  </a:lnTo>
-                  <a:lnTo>
-                    <a:pt x="792088" y="1252549"/>
-                  </a:lnTo>
-                  <a:lnTo>
-                    <a:pt x="869722" y="1349299"/>
-                  </a:lnTo>
-                  <a:lnTo>
-                    <a:pt x="947357" y="1442149"/>
-                  </a:lnTo>
-                  <a:lnTo>
-                    <a:pt x="1024991" y="1531255"/>
-                  </a:lnTo>
-                  <a:lnTo>
-                    <a:pt x="1102625" y="1616770"/>
-                  </a:lnTo>
-                  <a:lnTo>
-                    <a:pt x="1180259" y="1698838"/>
-                  </a:lnTo>
-                  <a:lnTo>
-                    <a:pt x="1257893" y="1777598"/>
-                  </a:lnTo>
-                  <a:lnTo>
-                    <a:pt x="1335527" y="1853182"/>
-                  </a:lnTo>
-                  <a:lnTo>
-                    <a:pt x="1413161" y="1925720"/>
-                  </a:lnTo>
-                  <a:lnTo>
-                    <a:pt x="1490795" y="1995334"/>
-                  </a:lnTo>
-                  <a:lnTo>
-                    <a:pt x="1568429" y="2062142"/>
-                  </a:lnTo>
-                  <a:lnTo>
-                    <a:pt x="1646063" y="2126256"/>
-                  </a:lnTo>
-                  <a:lnTo>
-                    <a:pt x="1723697" y="2187786"/>
-                  </a:lnTo>
-                  <a:lnTo>
-                    <a:pt x="1801331" y="2246836"/>
-                  </a:lnTo>
-                  <a:lnTo>
-                    <a:pt x="1878965" y="2303505"/>
-                  </a:lnTo>
-                  <a:lnTo>
-                    <a:pt x="1956599" y="2357890"/>
-                  </a:lnTo>
-                  <a:lnTo>
-                    <a:pt x="2034233" y="2410082"/>
-                  </a:lnTo>
-                  <a:lnTo>
-                    <a:pt x="2111867" y="2460171"/>
-                  </a:lnTo>
-                  <a:lnTo>
-                    <a:pt x="2189501" y="2508241"/>
-                  </a:lnTo>
-                  <a:lnTo>
-                    <a:pt x="2267135" y="2554373"/>
-                  </a:lnTo>
-                  <a:lnTo>
-                    <a:pt x="2344769" y="2598645"/>
-                  </a:lnTo>
-                  <a:lnTo>
-                    <a:pt x="2422403" y="2641132"/>
-                  </a:lnTo>
-                  <a:lnTo>
-                    <a:pt x="2500037" y="2681907"/>
-                  </a:lnTo>
-                  <a:lnTo>
-                    <a:pt x="2577671" y="2721038"/>
-                  </a:lnTo>
-                  <a:lnTo>
-                    <a:pt x="2655306" y="2758592"/>
-                  </a:lnTo>
-                  <a:lnTo>
-                    <a:pt x="2732940" y="2777808"/>
-                  </a:lnTo>
-                  <a:lnTo>
-                    <a:pt x="2810574" y="2761903"/>
-                  </a:lnTo>
-                  <a:lnTo>
-                    <a:pt x="2888208" y="2745709"/>
-                  </a:lnTo>
-                  <a:lnTo>
-                    <a:pt x="2965842" y="2729221"/>
-                  </a:lnTo>
-                  <a:lnTo>
-                    <a:pt x="3043476" y="2712433"/>
-                  </a:lnTo>
-                  <a:lnTo>
-                    <a:pt x="3121110" y="2695339"/>
-                  </a:lnTo>
-                  <a:lnTo>
-                    <a:pt x="3198744" y="2677935"/>
-                  </a:lnTo>
-                  <a:lnTo>
-                    <a:pt x="3276378" y="2660214"/>
-                  </a:lnTo>
-                  <a:lnTo>
-                    <a:pt x="3354012" y="2642172"/>
-                  </a:lnTo>
-                  <a:lnTo>
-                    <a:pt x="3431646" y="2623801"/>
-                  </a:lnTo>
-                  <a:lnTo>
-                    <a:pt x="3509280" y="2605096"/>
-                  </a:lnTo>
-                  <a:lnTo>
-                    <a:pt x="3586914" y="2586051"/>
-                  </a:lnTo>
-                  <a:lnTo>
-                    <a:pt x="3664548" y="2566660"/>
-                  </a:lnTo>
-                  <a:lnTo>
-                    <a:pt x="3742182" y="2546916"/>
-                  </a:lnTo>
-                  <a:lnTo>
-                    <a:pt x="3819816" y="2526814"/>
-                  </a:lnTo>
-                  <a:lnTo>
-                    <a:pt x="3897450" y="2506346"/>
-                  </a:lnTo>
-                  <a:lnTo>
-                    <a:pt x="3975084" y="2485506"/>
-                  </a:lnTo>
-                  <a:lnTo>
-                    <a:pt x="4052718" y="2464287"/>
-                  </a:lnTo>
-                  <a:lnTo>
-                    <a:pt x="4130352" y="2442682"/>
-                  </a:lnTo>
-                  <a:lnTo>
-                    <a:pt x="4207986" y="2420684"/>
-                  </a:lnTo>
-                  <a:lnTo>
-                    <a:pt x="4285620" y="2398287"/>
-                  </a:lnTo>
-                  <a:lnTo>
-                    <a:pt x="4363255" y="2375482"/>
-                  </a:lnTo>
-                  <a:lnTo>
-                    <a:pt x="4440889" y="2352263"/>
-                  </a:lnTo>
-                  <a:lnTo>
-                    <a:pt x="4518523" y="2328621"/>
-                  </a:lnTo>
-                  <a:lnTo>
-                    <a:pt x="4596157" y="2304550"/>
-                  </a:lnTo>
-                  <a:lnTo>
-                    <a:pt x="4673791" y="2280041"/>
-                  </a:lnTo>
-                  <a:lnTo>
-                    <a:pt x="4751425" y="2255087"/>
-                  </a:lnTo>
-                  <a:lnTo>
-                    <a:pt x="4829059" y="2229679"/>
-                  </a:lnTo>
-                  <a:lnTo>
-                    <a:pt x="4906693" y="2203808"/>
-                  </a:lnTo>
-                  <a:lnTo>
-                    <a:pt x="4984327" y="2177468"/>
-                  </a:lnTo>
-                  <a:lnTo>
-                    <a:pt x="5061961" y="2150649"/>
-                  </a:lnTo>
-                  <a:lnTo>
-                    <a:pt x="5139595" y="2123342"/>
-                  </a:lnTo>
-                  <a:lnTo>
-                    <a:pt x="5217229" y="2095539"/>
-                  </a:lnTo>
-                  <a:lnTo>
-                    <a:pt x="5294863" y="2067230"/>
-                  </a:lnTo>
-                  <a:lnTo>
-                    <a:pt x="5372497" y="2038406"/>
-                  </a:lnTo>
-                  <a:lnTo>
-                    <a:pt x="5450131" y="2009059"/>
-                  </a:lnTo>
-                  <a:lnTo>
-                    <a:pt x="5527765" y="1979178"/>
-                  </a:lnTo>
-                  <a:lnTo>
-                    <a:pt x="5605399" y="1948754"/>
-                  </a:lnTo>
-                  <a:lnTo>
-                    <a:pt x="5683033" y="1917776"/>
-                  </a:lnTo>
-                  <a:lnTo>
-                    <a:pt x="5760667" y="1886236"/>
-                  </a:lnTo>
-                  <a:lnTo>
-                    <a:pt x="5838301" y="1854121"/>
-                  </a:lnTo>
-                  <a:lnTo>
-                    <a:pt x="5915935" y="1821424"/>
-                  </a:lnTo>
-                  <a:lnTo>
-                    <a:pt x="5993569" y="1788131"/>
-                  </a:lnTo>
-                  <a:lnTo>
-                    <a:pt x="6071204" y="1754234"/>
-                  </a:lnTo>
-                  <a:lnTo>
-                    <a:pt x="6148838" y="1719720"/>
-                  </a:lnTo>
-                  <a:lnTo>
-                    <a:pt x="6226472" y="1684579"/>
-                  </a:lnTo>
-                  <a:lnTo>
-                    <a:pt x="6304106" y="1648798"/>
-                  </a:lnTo>
-                  <a:lnTo>
-                    <a:pt x="6381740" y="1612368"/>
-                  </a:lnTo>
-                  <a:lnTo>
-                    <a:pt x="6459374" y="1575275"/>
-                  </a:lnTo>
-                  <a:lnTo>
-                    <a:pt x="6537008" y="1537507"/>
-                  </a:lnTo>
-                  <a:lnTo>
-                    <a:pt x="6614642" y="1499053"/>
-                  </a:lnTo>
-                  <a:lnTo>
-                    <a:pt x="6692276" y="1459900"/>
+                    <a:pt x="15748" y="29433"/>
+                  </a:lnTo>
+                  <a:lnTo>
+                    <a:pt x="93382" y="168679"/>
+                  </a:lnTo>
+                  <a:lnTo>
+                    <a:pt x="171016" y="302312"/>
+                  </a:lnTo>
+                  <a:lnTo>
+                    <a:pt x="248650" y="430559"/>
+                  </a:lnTo>
+                  <a:lnTo>
+                    <a:pt x="326284" y="553635"/>
+                  </a:lnTo>
+                  <a:lnTo>
+                    <a:pt x="403918" y="671751"/>
+                  </a:lnTo>
+                  <a:lnTo>
+                    <a:pt x="481552" y="785105"/>
+                  </a:lnTo>
+                  <a:lnTo>
+                    <a:pt x="559186" y="893889"/>
+                  </a:lnTo>
+                  <a:lnTo>
+                    <a:pt x="636820" y="998288"/>
+                  </a:lnTo>
+                  <a:lnTo>
+                    <a:pt x="714454" y="1098479"/>
+                  </a:lnTo>
+                  <a:lnTo>
+                    <a:pt x="792088" y="1194632"/>
+                  </a:lnTo>
+                  <a:lnTo>
+                    <a:pt x="869722" y="1286908"/>
+                  </a:lnTo>
+                  <a:lnTo>
+                    <a:pt x="947357" y="1375464"/>
+                  </a:lnTo>
+                  <a:lnTo>
+                    <a:pt x="1024991" y="1460451"/>
+                  </a:lnTo>
+                  <a:lnTo>
+                    <a:pt x="1102625" y="1542012"/>
+                  </a:lnTo>
+                  <a:lnTo>
+                    <a:pt x="1180259" y="1620285"/>
+                  </a:lnTo>
+                  <a:lnTo>
+                    <a:pt x="1257893" y="1695402"/>
+                  </a:lnTo>
+                  <a:lnTo>
+                    <a:pt x="1335527" y="1767492"/>
+                  </a:lnTo>
+                  <a:lnTo>
+                    <a:pt x="1413161" y="1836676"/>
+                  </a:lnTo>
+                  <a:lnTo>
+                    <a:pt x="1490795" y="1903070"/>
+                  </a:lnTo>
+                  <a:lnTo>
+                    <a:pt x="1568429" y="1966789"/>
+                  </a:lnTo>
+                  <a:lnTo>
+                    <a:pt x="1646063" y="2027939"/>
+                  </a:lnTo>
+                  <a:lnTo>
+                    <a:pt x="1723697" y="2086624"/>
+                  </a:lnTo>
+                  <a:lnTo>
+                    <a:pt x="1801331" y="2142943"/>
+                  </a:lnTo>
+                  <a:lnTo>
+                    <a:pt x="1878965" y="2196992"/>
+                  </a:lnTo>
+                  <a:lnTo>
+                    <a:pt x="1956599" y="2248862"/>
+                  </a:lnTo>
+                  <a:lnTo>
+                    <a:pt x="2034233" y="2298641"/>
+                  </a:lnTo>
+                  <a:lnTo>
+                    <a:pt x="2111867" y="2346414"/>
+                  </a:lnTo>
+                  <a:lnTo>
+                    <a:pt x="2189501" y="2392261"/>
+                  </a:lnTo>
+                  <a:lnTo>
+                    <a:pt x="2267135" y="2436259"/>
+                  </a:lnTo>
+                  <a:lnTo>
+                    <a:pt x="2344769" y="2478484"/>
+                  </a:lnTo>
+                  <a:lnTo>
+                    <a:pt x="2422403" y="2519007"/>
+                  </a:lnTo>
+                  <a:lnTo>
+                    <a:pt x="2500037" y="2557897"/>
+                  </a:lnTo>
+                  <a:lnTo>
+                    <a:pt x="2577671" y="2595219"/>
+                  </a:lnTo>
+                  <a:lnTo>
+                    <a:pt x="2655306" y="2631036"/>
+                  </a:lnTo>
+                  <a:lnTo>
+                    <a:pt x="2732940" y="2649363"/>
+                  </a:lnTo>
+                  <a:lnTo>
+                    <a:pt x="2810574" y="2634194"/>
+                  </a:lnTo>
+                  <a:lnTo>
+                    <a:pt x="2888208" y="2618749"/>
+                  </a:lnTo>
+                  <a:lnTo>
+                    <a:pt x="2965842" y="2603023"/>
+                  </a:lnTo>
+                  <a:lnTo>
+                    <a:pt x="3043476" y="2587011"/>
+                  </a:lnTo>
+                  <a:lnTo>
+                    <a:pt x="3121110" y="2570708"/>
+                  </a:lnTo>
+                  <a:lnTo>
+                    <a:pt x="3198744" y="2554108"/>
+                  </a:lnTo>
+                  <a:lnTo>
+                    <a:pt x="3276378" y="2537207"/>
+                  </a:lnTo>
+                  <a:lnTo>
+                    <a:pt x="3354012" y="2519999"/>
+                  </a:lnTo>
+                  <a:lnTo>
+                    <a:pt x="3431646" y="2502477"/>
+                  </a:lnTo>
+                  <a:lnTo>
+                    <a:pt x="3509280" y="2484637"/>
+                  </a:lnTo>
+                  <a:lnTo>
+                    <a:pt x="3586914" y="2466473"/>
+                  </a:lnTo>
+                  <a:lnTo>
+                    <a:pt x="3664548" y="2447979"/>
+                  </a:lnTo>
+                  <a:lnTo>
+                    <a:pt x="3742182" y="2429148"/>
+                  </a:lnTo>
+                  <a:lnTo>
+                    <a:pt x="3819816" y="2409975"/>
+                  </a:lnTo>
+                  <a:lnTo>
+                    <a:pt x="3897450" y="2390453"/>
+                  </a:lnTo>
+                  <a:lnTo>
+                    <a:pt x="3975084" y="2370577"/>
+                  </a:lnTo>
+                  <a:lnTo>
+                    <a:pt x="4052718" y="2350339"/>
+                  </a:lnTo>
+                  <a:lnTo>
+                    <a:pt x="4130352" y="2329733"/>
+                  </a:lnTo>
+                  <a:lnTo>
+                    <a:pt x="4207986" y="2308753"/>
+                  </a:lnTo>
+                  <a:lnTo>
+                    <a:pt x="4285620" y="2287391"/>
+                  </a:lnTo>
+                  <a:lnTo>
+                    <a:pt x="4363255" y="2265641"/>
+                  </a:lnTo>
+                  <a:lnTo>
+                    <a:pt x="4440889" y="2243495"/>
+                  </a:lnTo>
+                  <a:lnTo>
+                    <a:pt x="4518523" y="2220947"/>
+                  </a:lnTo>
+                  <a:lnTo>
+                    <a:pt x="4596157" y="2197988"/>
+                  </a:lnTo>
+                  <a:lnTo>
+                    <a:pt x="4673791" y="2174613"/>
+                  </a:lnTo>
+                  <a:lnTo>
+                    <a:pt x="4751425" y="2150812"/>
+                  </a:lnTo>
+                  <a:lnTo>
+                    <a:pt x="4829059" y="2126579"/>
+                  </a:lnTo>
+                  <a:lnTo>
+                    <a:pt x="4906693" y="2101905"/>
+                  </a:lnTo>
+                  <a:lnTo>
+                    <a:pt x="4984327" y="2076783"/>
+                  </a:lnTo>
+                  <a:lnTo>
+                    <a:pt x="5061961" y="2051204"/>
+                  </a:lnTo>
+                  <a:lnTo>
+                    <a:pt x="5139595" y="2025159"/>
+                  </a:lnTo>
+                  <a:lnTo>
+                    <a:pt x="5217229" y="1998642"/>
+                  </a:lnTo>
+                  <a:lnTo>
+                    <a:pt x="5294863" y="1971642"/>
+                  </a:lnTo>
+                  <a:lnTo>
+                    <a:pt x="5372497" y="1944151"/>
+                  </a:lnTo>
+                  <a:lnTo>
+                    <a:pt x="5450131" y="1916161"/>
+                  </a:lnTo>
+                  <a:lnTo>
+                    <a:pt x="5527765" y="1887661"/>
+                  </a:lnTo>
+                  <a:lnTo>
+                    <a:pt x="5605399" y="1858644"/>
+                  </a:lnTo>
+                  <a:lnTo>
+                    <a:pt x="5683033" y="1829099"/>
+                  </a:lnTo>
+                  <a:lnTo>
+                    <a:pt x="5760667" y="1799017"/>
+                  </a:lnTo>
+                  <a:lnTo>
+                    <a:pt x="5838301" y="1768388"/>
+                  </a:lnTo>
+                  <a:lnTo>
+                    <a:pt x="5915935" y="1737202"/>
+                  </a:lnTo>
+                  <a:lnTo>
+                    <a:pt x="5993569" y="1705449"/>
+                  </a:lnTo>
+                  <a:lnTo>
+                    <a:pt x="6071204" y="1673119"/>
+                  </a:lnTo>
+                  <a:lnTo>
+                    <a:pt x="6148838" y="1640201"/>
+                  </a:lnTo>
+                  <a:lnTo>
+                    <a:pt x="6226472" y="1606684"/>
+                  </a:lnTo>
+                  <a:lnTo>
+                    <a:pt x="6304106" y="1572558"/>
+                  </a:lnTo>
+                  <a:lnTo>
+                    <a:pt x="6381740" y="1537812"/>
+                  </a:lnTo>
+                  <a:lnTo>
+                    <a:pt x="6459374" y="1502434"/>
+                  </a:lnTo>
+                  <a:lnTo>
+                    <a:pt x="6537008" y="1466413"/>
+                  </a:lnTo>
+                  <a:lnTo>
+                    <a:pt x="6614642" y="1429737"/>
+                  </a:lnTo>
+                  <a:lnTo>
+                    <a:pt x="6692276" y="1392395"/>
                   </a:lnTo>
                 </a:path>
               </a:pathLst>
@@ -3874,300 +3874,300 @@
           </p:nvSpPr>
           <p:spPr>
             <a:xfrm>
-              <a:off x="817517" y="4689992"/>
-              <a:ext cx="7370972" cy="753981"/>
+              <a:off x="817517" y="4737765"/>
+              <a:ext cx="7370972" cy="719117"/>
             </a:xfrm>
             <a:custGeom>
               <a:avLst/>
               <a:pathLst>
-                <a:path w="7370972" h="753981">
+                <a:path w="7370972" h="719117">
                   <a:moveTo>
-                    <a:pt x="7370972" y="753981"/>
+                    <a:pt x="7370972" y="719117"/>
                   </a:moveTo>
                   <a:lnTo>
-                    <a:pt x="7293338" y="749560"/>
-                  </a:lnTo>
-                  <a:lnTo>
-                    <a:pt x="7215704" y="744955"/>
-                  </a:lnTo>
-                  <a:lnTo>
-                    <a:pt x="7138070" y="740155"/>
-                  </a:lnTo>
-                  <a:lnTo>
-                    <a:pt x="7060436" y="735154"/>
-                  </a:lnTo>
-                  <a:lnTo>
-                    <a:pt x="6982802" y="729943"/>
-                  </a:lnTo>
-                  <a:lnTo>
-                    <a:pt x="6905168" y="724513"/>
-                  </a:lnTo>
-                  <a:lnTo>
-                    <a:pt x="6827534" y="718855"/>
-                  </a:lnTo>
-                  <a:lnTo>
-                    <a:pt x="6749900" y="712960"/>
-                  </a:lnTo>
-                  <a:lnTo>
-                    <a:pt x="6672266" y="706817"/>
-                  </a:lnTo>
-                  <a:lnTo>
-                    <a:pt x="6594632" y="700415"/>
-                  </a:lnTo>
-                  <a:lnTo>
-                    <a:pt x="6516998" y="693745"/>
-                  </a:lnTo>
-                  <a:lnTo>
-                    <a:pt x="6439364" y="686795"/>
-                  </a:lnTo>
-                  <a:lnTo>
-                    <a:pt x="6361730" y="679552"/>
-                  </a:lnTo>
-                  <a:lnTo>
-                    <a:pt x="6284096" y="672006"/>
-                  </a:lnTo>
-                  <a:lnTo>
-                    <a:pt x="6206462" y="664142"/>
-                  </a:lnTo>
-                  <a:lnTo>
-                    <a:pt x="6128827" y="655949"/>
-                  </a:lnTo>
-                  <a:lnTo>
-                    <a:pt x="6051193" y="647411"/>
-                  </a:lnTo>
-                  <a:lnTo>
-                    <a:pt x="5973559" y="638514"/>
-                  </a:lnTo>
-                  <a:lnTo>
-                    <a:pt x="5895925" y="629244"/>
-                  </a:lnTo>
-                  <a:lnTo>
-                    <a:pt x="5818291" y="619584"/>
-                  </a:lnTo>
-                  <a:lnTo>
-                    <a:pt x="5740657" y="609519"/>
-                  </a:lnTo>
-                  <a:lnTo>
-                    <a:pt x="5663023" y="599030"/>
-                  </a:lnTo>
-                  <a:lnTo>
-                    <a:pt x="5585389" y="588102"/>
-                  </a:lnTo>
-                  <a:lnTo>
-                    <a:pt x="5507755" y="576714"/>
-                  </a:lnTo>
-                  <a:lnTo>
-                    <a:pt x="5430121" y="564848"/>
-                  </a:lnTo>
-                  <a:lnTo>
-                    <a:pt x="5352487" y="552483"/>
-                  </a:lnTo>
-                  <a:lnTo>
-                    <a:pt x="5274853" y="539599"/>
-                  </a:lnTo>
-                  <a:lnTo>
-                    <a:pt x="5197219" y="526174"/>
-                  </a:lnTo>
-                  <a:lnTo>
-                    <a:pt x="5119585" y="512185"/>
-                  </a:lnTo>
-                  <a:lnTo>
-                    <a:pt x="5041951" y="497608"/>
-                  </a:lnTo>
-                  <a:lnTo>
-                    <a:pt x="4964317" y="482419"/>
-                  </a:lnTo>
-                  <a:lnTo>
-                    <a:pt x="4886683" y="466592"/>
-                  </a:lnTo>
-                  <a:lnTo>
-                    <a:pt x="4809049" y="450101"/>
-                  </a:lnTo>
-                  <a:lnTo>
-                    <a:pt x="4731415" y="432916"/>
-                  </a:lnTo>
-                  <a:lnTo>
-                    <a:pt x="4653781" y="415010"/>
-                  </a:lnTo>
-                  <a:lnTo>
-                    <a:pt x="4576147" y="396352"/>
-                  </a:lnTo>
-                  <a:lnTo>
-                    <a:pt x="4498513" y="376910"/>
-                  </a:lnTo>
-                  <a:lnTo>
-                    <a:pt x="4420879" y="356651"/>
-                  </a:lnTo>
-                  <a:lnTo>
-                    <a:pt x="4343244" y="335541"/>
-                  </a:lnTo>
-                  <a:lnTo>
-                    <a:pt x="4265610" y="313545"/>
-                  </a:lnTo>
-                  <a:lnTo>
-                    <a:pt x="4187976" y="290624"/>
-                  </a:lnTo>
-                  <a:lnTo>
-                    <a:pt x="4110342" y="266741"/>
-                  </a:lnTo>
-                  <a:lnTo>
-                    <a:pt x="4032708" y="241855"/>
-                  </a:lnTo>
-                  <a:lnTo>
-                    <a:pt x="3955074" y="215924"/>
-                  </a:lnTo>
-                  <a:lnTo>
-                    <a:pt x="3877440" y="188903"/>
-                  </a:lnTo>
-                  <a:lnTo>
-                    <a:pt x="3799806" y="160747"/>
-                  </a:lnTo>
-                  <a:lnTo>
-                    <a:pt x="3722172" y="131409"/>
-                  </a:lnTo>
-                  <a:lnTo>
-                    <a:pt x="3644538" y="100838"/>
-                  </a:lnTo>
-                  <a:lnTo>
-                    <a:pt x="3566904" y="68983"/>
-                  </a:lnTo>
-                  <a:lnTo>
-                    <a:pt x="3489270" y="35790"/>
-                  </a:lnTo>
-                  <a:lnTo>
-                    <a:pt x="3411636" y="1203"/>
+                    <a:pt x="7293338" y="714901"/>
+                  </a:lnTo>
+                  <a:lnTo>
+                    <a:pt x="7215704" y="710508"/>
+                  </a:lnTo>
+                  <a:lnTo>
+                    <a:pt x="7138070" y="705931"/>
+                  </a:lnTo>
+                  <a:lnTo>
+                    <a:pt x="7060436" y="701161"/>
+                  </a:lnTo>
+                  <a:lnTo>
+                    <a:pt x="6982802" y="696191"/>
+                  </a:lnTo>
+                  <a:lnTo>
+                    <a:pt x="6905168" y="691012"/>
+                  </a:lnTo>
+                  <a:lnTo>
+                    <a:pt x="6827534" y="685616"/>
+                  </a:lnTo>
+                  <a:lnTo>
+                    <a:pt x="6749900" y="679993"/>
+                  </a:lnTo>
+                  <a:lnTo>
+                    <a:pt x="6672266" y="674134"/>
+                  </a:lnTo>
+                  <a:lnTo>
+                    <a:pt x="6594632" y="668028"/>
+                  </a:lnTo>
+                  <a:lnTo>
+                    <a:pt x="6516998" y="661666"/>
+                  </a:lnTo>
+                  <a:lnTo>
+                    <a:pt x="6439364" y="655038"/>
+                  </a:lnTo>
+                  <a:lnTo>
+                    <a:pt x="6361730" y="648130"/>
+                  </a:lnTo>
+                  <a:lnTo>
+                    <a:pt x="6284096" y="640933"/>
+                  </a:lnTo>
+                  <a:lnTo>
+                    <a:pt x="6206462" y="633433"/>
+                  </a:lnTo>
+                  <a:lnTo>
+                    <a:pt x="6128827" y="625618"/>
+                  </a:lnTo>
+                  <a:lnTo>
+                    <a:pt x="6051193" y="617475"/>
+                  </a:lnTo>
+                  <a:lnTo>
+                    <a:pt x="5973559" y="608989"/>
+                  </a:lnTo>
+                  <a:lnTo>
+                    <a:pt x="5895925" y="600148"/>
+                  </a:lnTo>
+                  <a:lnTo>
+                    <a:pt x="5818291" y="590935"/>
+                  </a:lnTo>
+                  <a:lnTo>
+                    <a:pt x="5740657" y="581335"/>
+                  </a:lnTo>
+                  <a:lnTo>
+                    <a:pt x="5663023" y="571331"/>
+                  </a:lnTo>
+                  <a:lnTo>
+                    <a:pt x="5585389" y="560908"/>
+                  </a:lnTo>
+                  <a:lnTo>
+                    <a:pt x="5507755" y="550047"/>
+                  </a:lnTo>
+                  <a:lnTo>
+                    <a:pt x="5430121" y="538729"/>
+                  </a:lnTo>
+                  <a:lnTo>
+                    <a:pt x="5352487" y="526936"/>
+                  </a:lnTo>
+                  <a:lnTo>
+                    <a:pt x="5274853" y="514648"/>
+                  </a:lnTo>
+                  <a:lnTo>
+                    <a:pt x="5197219" y="501844"/>
+                  </a:lnTo>
+                  <a:lnTo>
+                    <a:pt x="5119585" y="488502"/>
+                  </a:lnTo>
+                  <a:lnTo>
+                    <a:pt x="5041951" y="474599"/>
+                  </a:lnTo>
+                  <a:lnTo>
+                    <a:pt x="4964317" y="460112"/>
+                  </a:lnTo>
+                  <a:lnTo>
+                    <a:pt x="4886683" y="445017"/>
+                  </a:lnTo>
+                  <a:lnTo>
+                    <a:pt x="4809049" y="429288"/>
+                  </a:lnTo>
+                  <a:lnTo>
+                    <a:pt x="4731415" y="412898"/>
+                  </a:lnTo>
+                  <a:lnTo>
+                    <a:pt x="4653781" y="395820"/>
+                  </a:lnTo>
+                  <a:lnTo>
+                    <a:pt x="4576147" y="378025"/>
+                  </a:lnTo>
+                  <a:lnTo>
+                    <a:pt x="4498513" y="359481"/>
+                  </a:lnTo>
+                  <a:lnTo>
+                    <a:pt x="4420879" y="340159"/>
+                  </a:lnTo>
+                  <a:lnTo>
+                    <a:pt x="4343244" y="320026"/>
+                  </a:lnTo>
+                  <a:lnTo>
+                    <a:pt x="4265610" y="299047"/>
+                  </a:lnTo>
+                  <a:lnTo>
+                    <a:pt x="4187976" y="277186"/>
+                  </a:lnTo>
+                  <a:lnTo>
+                    <a:pt x="4110342" y="254407"/>
+                  </a:lnTo>
+                  <a:lnTo>
+                    <a:pt x="4032708" y="230672"/>
+                  </a:lnTo>
+                  <a:lnTo>
+                    <a:pt x="3955074" y="205939"/>
+                  </a:lnTo>
+                  <a:lnTo>
+                    <a:pt x="3877440" y="180168"/>
+                  </a:lnTo>
+                  <a:lnTo>
+                    <a:pt x="3799806" y="153314"/>
+                  </a:lnTo>
+                  <a:lnTo>
+                    <a:pt x="3722172" y="125332"/>
+                  </a:lnTo>
+                  <a:lnTo>
+                    <a:pt x="3644538" y="96175"/>
+                  </a:lnTo>
+                  <a:lnTo>
+                    <a:pt x="3566904" y="65793"/>
+                  </a:lnTo>
+                  <a:lnTo>
+                    <a:pt x="3489270" y="34135"/>
+                  </a:lnTo>
+                  <a:lnTo>
+                    <a:pt x="3411636" y="1147"/>
                   </a:lnTo>
                   <a:lnTo>
                     <a:pt x="3334002" y="0"/>
                   </a:lnTo>
                   <a:lnTo>
-                    <a:pt x="3256368" y="15341"/>
-                  </a:lnTo>
-                  <a:lnTo>
-                    <a:pt x="3178734" y="30409"/>
-                  </a:lnTo>
-                  <a:lnTo>
-                    <a:pt x="3101100" y="45208"/>
-                  </a:lnTo>
-                  <a:lnTo>
-                    <a:pt x="3023466" y="59743"/>
-                  </a:lnTo>
-                  <a:lnTo>
-                    <a:pt x="2945832" y="74018"/>
-                  </a:lnTo>
-                  <a:lnTo>
-                    <a:pt x="2868198" y="88039"/>
-                  </a:lnTo>
-                  <a:lnTo>
-                    <a:pt x="2790564" y="101808"/>
-                  </a:lnTo>
-                  <a:lnTo>
-                    <a:pt x="2712930" y="115333"/>
-                  </a:lnTo>
-                  <a:lnTo>
-                    <a:pt x="2635295" y="128615"/>
-                  </a:lnTo>
-                  <a:lnTo>
-                    <a:pt x="2557661" y="141661"/>
-                  </a:lnTo>
-                  <a:lnTo>
-                    <a:pt x="2480027" y="154473"/>
-                  </a:lnTo>
-                  <a:lnTo>
-                    <a:pt x="2402393" y="167057"/>
-                  </a:lnTo>
-                  <a:lnTo>
-                    <a:pt x="2324759" y="179416"/>
-                  </a:lnTo>
-                  <a:lnTo>
-                    <a:pt x="2247125" y="191554"/>
-                  </a:lnTo>
-                  <a:lnTo>
-                    <a:pt x="2169491" y="203476"/>
-                  </a:lnTo>
-                  <a:lnTo>
-                    <a:pt x="2091857" y="215184"/>
-                  </a:lnTo>
-                  <a:lnTo>
-                    <a:pt x="2014223" y="226684"/>
-                  </a:lnTo>
-                  <a:lnTo>
-                    <a:pt x="1936589" y="237978"/>
-                  </a:lnTo>
-                  <a:lnTo>
-                    <a:pt x="1858955" y="249071"/>
-                  </a:lnTo>
-                  <a:lnTo>
-                    <a:pt x="1781321" y="259966"/>
-                  </a:lnTo>
-                  <a:lnTo>
-                    <a:pt x="1703687" y="270666"/>
-                  </a:lnTo>
-                  <a:lnTo>
-                    <a:pt x="1626053" y="281175"/>
-                  </a:lnTo>
-                  <a:lnTo>
-                    <a:pt x="1548419" y="291496"/>
-                  </a:lnTo>
-                  <a:lnTo>
-                    <a:pt x="1470785" y="301633"/>
-                  </a:lnTo>
-                  <a:lnTo>
-                    <a:pt x="1393151" y="311589"/>
-                  </a:lnTo>
-                  <a:lnTo>
-                    <a:pt x="1315517" y="321367"/>
-                  </a:lnTo>
-                  <a:lnTo>
-                    <a:pt x="1237883" y="330971"/>
-                  </a:lnTo>
-                  <a:lnTo>
-                    <a:pt x="1160249" y="340403"/>
-                  </a:lnTo>
-                  <a:lnTo>
-                    <a:pt x="1082615" y="349667"/>
-                  </a:lnTo>
-                  <a:lnTo>
-                    <a:pt x="1004981" y="358765"/>
-                  </a:lnTo>
-                  <a:lnTo>
-                    <a:pt x="927346" y="367701"/>
-                  </a:lnTo>
-                  <a:lnTo>
-                    <a:pt x="849712" y="376478"/>
-                  </a:lnTo>
-                  <a:lnTo>
-                    <a:pt x="772078" y="385097"/>
-                  </a:lnTo>
-                  <a:lnTo>
-                    <a:pt x="694444" y="393563"/>
-                  </a:lnTo>
-                  <a:lnTo>
-                    <a:pt x="616810" y="401877"/>
-                  </a:lnTo>
-                  <a:lnTo>
-                    <a:pt x="539176" y="410044"/>
-                  </a:lnTo>
-                  <a:lnTo>
-                    <a:pt x="461542" y="418064"/>
-                  </a:lnTo>
-                  <a:lnTo>
-                    <a:pt x="383908" y="425941"/>
-                  </a:lnTo>
-                  <a:lnTo>
-                    <a:pt x="306274" y="433677"/>
-                  </a:lnTo>
-                  <a:lnTo>
-                    <a:pt x="228640" y="441276"/>
-                  </a:lnTo>
-                  <a:lnTo>
-                    <a:pt x="151006" y="448738"/>
-                  </a:lnTo>
-                  <a:lnTo>
-                    <a:pt x="73372" y="456068"/>
-                  </a:lnTo>
-                  <a:lnTo>
-                    <a:pt x="0" y="462871"/>
+                    <a:pt x="3256368" y="14632"/>
+                  </a:lnTo>
+                  <a:lnTo>
+                    <a:pt x="3178734" y="29003"/>
+                  </a:lnTo>
+                  <a:lnTo>
+                    <a:pt x="3101100" y="43118"/>
+                  </a:lnTo>
+                  <a:lnTo>
+                    <a:pt x="3023466" y="56981"/>
+                  </a:lnTo>
+                  <a:lnTo>
+                    <a:pt x="2945832" y="70596"/>
+                  </a:lnTo>
+                  <a:lnTo>
+                    <a:pt x="2868198" y="83968"/>
+                  </a:lnTo>
+                  <a:lnTo>
+                    <a:pt x="2790564" y="97101"/>
+                  </a:lnTo>
+                  <a:lnTo>
+                    <a:pt x="2712930" y="110000"/>
+                  </a:lnTo>
+                  <a:lnTo>
+                    <a:pt x="2635295" y="122668"/>
+                  </a:lnTo>
+                  <a:lnTo>
+                    <a:pt x="2557661" y="135110"/>
+                  </a:lnTo>
+                  <a:lnTo>
+                    <a:pt x="2480027" y="147330"/>
+                  </a:lnTo>
+                  <a:lnTo>
+                    <a:pt x="2402393" y="159332"/>
+                  </a:lnTo>
+                  <a:lnTo>
+                    <a:pt x="2324759" y="171120"/>
+                  </a:lnTo>
+                  <a:lnTo>
+                    <a:pt x="2247125" y="182697"/>
+                  </a:lnTo>
+                  <a:lnTo>
+                    <a:pt x="2169491" y="194067"/>
+                  </a:lnTo>
+                  <a:lnTo>
+                    <a:pt x="2091857" y="205234"/>
+                  </a:lnTo>
+                  <a:lnTo>
+                    <a:pt x="2014223" y="216202"/>
+                  </a:lnTo>
+                  <a:lnTo>
+                    <a:pt x="1936589" y="226974"/>
+                  </a:lnTo>
+                  <a:lnTo>
+                    <a:pt x="1858955" y="237554"/>
+                  </a:lnTo>
+                  <a:lnTo>
+                    <a:pt x="1781321" y="247945"/>
+                  </a:lnTo>
+                  <a:lnTo>
+                    <a:pt x="1703687" y="258150"/>
+                  </a:lnTo>
+                  <a:lnTo>
+                    <a:pt x="1626053" y="268173"/>
+                  </a:lnTo>
+                  <a:lnTo>
+                    <a:pt x="1548419" y="278017"/>
+                  </a:lnTo>
+                  <a:lnTo>
+                    <a:pt x="1470785" y="287686"/>
+                  </a:lnTo>
+                  <a:lnTo>
+                    <a:pt x="1393151" y="297181"/>
+                  </a:lnTo>
+                  <a:lnTo>
+                    <a:pt x="1315517" y="306507"/>
+                  </a:lnTo>
+                  <a:lnTo>
+                    <a:pt x="1237883" y="315667"/>
+                  </a:lnTo>
+                  <a:lnTo>
+                    <a:pt x="1160249" y="324663"/>
+                  </a:lnTo>
+                  <a:lnTo>
+                    <a:pt x="1082615" y="333498"/>
+                  </a:lnTo>
+                  <a:lnTo>
+                    <a:pt x="1004981" y="342176"/>
+                  </a:lnTo>
+                  <a:lnTo>
+                    <a:pt x="927346" y="350699"/>
+                  </a:lnTo>
+                  <a:lnTo>
+                    <a:pt x="849712" y="359069"/>
+                  </a:lnTo>
+                  <a:lnTo>
+                    <a:pt x="772078" y="367290"/>
+                  </a:lnTo>
+                  <a:lnTo>
+                    <a:pt x="694444" y="375365"/>
+                  </a:lnTo>
+                  <a:lnTo>
+                    <a:pt x="616810" y="383295"/>
+                  </a:lnTo>
+                  <a:lnTo>
+                    <a:pt x="539176" y="391083"/>
+                  </a:lnTo>
+                  <a:lnTo>
+                    <a:pt x="461542" y="398733"/>
+                  </a:lnTo>
+                  <a:lnTo>
+                    <a:pt x="383908" y="406246"/>
+                  </a:lnTo>
+                  <a:lnTo>
+                    <a:pt x="306274" y="413624"/>
+                  </a:lnTo>
+                  <a:lnTo>
+                    <a:pt x="228640" y="420871"/>
+                  </a:lnTo>
+                  <a:lnTo>
+                    <a:pt x="151006" y="427989"/>
+                  </a:lnTo>
+                  <a:lnTo>
+                    <a:pt x="73372" y="434979"/>
+                  </a:lnTo>
+                  <a:lnTo>
+                    <a:pt x="0" y="441468"/>
                   </a:lnTo>
                 </a:path>
               </a:pathLst>
@@ -4187,300 +4187,300 @@
           </p:nvSpPr>
           <p:spPr>
             <a:xfrm>
-              <a:off x="817517" y="4109021"/>
-              <a:ext cx="7370972" cy="959821"/>
+              <a:off x="817517" y="4183658"/>
+              <a:ext cx="7370972" cy="915439"/>
             </a:xfrm>
             <a:custGeom>
               <a:avLst/>
               <a:pathLst>
-                <a:path w="7370972" h="959821">
+                <a:path w="7370972" h="915439">
                   <a:moveTo>
                     <a:pt x="0" y="0"/>
                   </a:moveTo>
                   <a:lnTo>
-                    <a:pt x="73372" y="15659"/>
-                  </a:lnTo>
-                  <a:lnTo>
-                    <a:pt x="151006" y="32038"/>
-                  </a:lnTo>
-                  <a:lnTo>
-                    <a:pt x="228640" y="48229"/>
-                  </a:lnTo>
-                  <a:lnTo>
-                    <a:pt x="306274" y="64233"/>
-                  </a:lnTo>
-                  <a:lnTo>
-                    <a:pt x="383908" y="80053"/>
-                  </a:lnTo>
-                  <a:lnTo>
-                    <a:pt x="461542" y="95692"/>
-                  </a:lnTo>
-                  <a:lnTo>
-                    <a:pt x="539176" y="111151"/>
-                  </a:lnTo>
-                  <a:lnTo>
-                    <a:pt x="616810" y="126431"/>
-                  </a:lnTo>
-                  <a:lnTo>
-                    <a:pt x="694444" y="141537"/>
-                  </a:lnTo>
-                  <a:lnTo>
-                    <a:pt x="772078" y="156468"/>
-                  </a:lnTo>
-                  <a:lnTo>
-                    <a:pt x="849712" y="171228"/>
-                  </a:lnTo>
-                  <a:lnTo>
-                    <a:pt x="927346" y="185818"/>
-                  </a:lnTo>
-                  <a:lnTo>
-                    <a:pt x="1004981" y="200241"/>
-                  </a:lnTo>
-                  <a:lnTo>
-                    <a:pt x="1082615" y="214497"/>
-                  </a:lnTo>
-                  <a:lnTo>
-                    <a:pt x="1160249" y="228590"/>
-                  </a:lnTo>
-                  <a:lnTo>
-                    <a:pt x="1237883" y="242520"/>
-                  </a:lnTo>
-                  <a:lnTo>
-                    <a:pt x="1315517" y="256291"/>
-                  </a:lnTo>
-                  <a:lnTo>
-                    <a:pt x="1393151" y="269903"/>
-                  </a:lnTo>
-                  <a:lnTo>
-                    <a:pt x="1470785" y="283359"/>
-                  </a:lnTo>
-                  <a:lnTo>
-                    <a:pt x="1548419" y="296660"/>
-                  </a:lnTo>
-                  <a:lnTo>
-                    <a:pt x="1626053" y="309808"/>
-                  </a:lnTo>
-                  <a:lnTo>
-                    <a:pt x="1703687" y="322804"/>
-                  </a:lnTo>
-                  <a:lnTo>
-                    <a:pt x="1781321" y="335652"/>
-                  </a:lnTo>
-                  <a:lnTo>
-                    <a:pt x="1858955" y="348351"/>
-                  </a:lnTo>
-                  <a:lnTo>
-                    <a:pt x="1936589" y="360905"/>
-                  </a:lnTo>
-                  <a:lnTo>
-                    <a:pt x="2014223" y="373314"/>
-                  </a:lnTo>
-                  <a:lnTo>
-                    <a:pt x="2091857" y="385581"/>
-                  </a:lnTo>
-                  <a:lnTo>
-                    <a:pt x="2169491" y="397706"/>
-                  </a:lnTo>
-                  <a:lnTo>
-                    <a:pt x="2247125" y="409693"/>
-                  </a:lnTo>
-                  <a:lnTo>
-                    <a:pt x="2324759" y="421541"/>
-                  </a:lnTo>
-                  <a:lnTo>
-                    <a:pt x="2402393" y="433253"/>
-                  </a:lnTo>
-                  <a:lnTo>
-                    <a:pt x="2480027" y="444831"/>
-                  </a:lnTo>
-                  <a:lnTo>
-                    <a:pt x="2557661" y="456275"/>
-                  </a:lnTo>
-                  <a:lnTo>
-                    <a:pt x="2635295" y="467588"/>
-                  </a:lnTo>
-                  <a:lnTo>
-                    <a:pt x="2712930" y="478770"/>
-                  </a:lnTo>
-                  <a:lnTo>
-                    <a:pt x="2790564" y="489824"/>
-                  </a:lnTo>
-                  <a:lnTo>
-                    <a:pt x="2868198" y="500751"/>
-                  </a:lnTo>
-                  <a:lnTo>
-                    <a:pt x="2945832" y="511553"/>
-                  </a:lnTo>
-                  <a:lnTo>
-                    <a:pt x="3023466" y="522230"/>
-                  </a:lnTo>
-                  <a:lnTo>
-                    <a:pt x="3101100" y="532784"/>
-                  </a:lnTo>
-                  <a:lnTo>
-                    <a:pt x="3178734" y="543217"/>
-                  </a:lnTo>
-                  <a:lnTo>
-                    <a:pt x="3256368" y="553531"/>
-                  </a:lnTo>
-                  <a:lnTo>
-                    <a:pt x="3334002" y="563725"/>
-                  </a:lnTo>
-                  <a:lnTo>
-                    <a:pt x="3411636" y="573802"/>
-                  </a:lnTo>
-                  <a:lnTo>
-                    <a:pt x="3489270" y="583764"/>
-                  </a:lnTo>
-                  <a:lnTo>
-                    <a:pt x="3566904" y="593611"/>
-                  </a:lnTo>
-                  <a:lnTo>
-                    <a:pt x="3644538" y="603345"/>
-                  </a:lnTo>
-                  <a:lnTo>
-                    <a:pt x="3722172" y="612966"/>
-                  </a:lnTo>
-                  <a:lnTo>
-                    <a:pt x="3799806" y="622477"/>
-                  </a:lnTo>
-                  <a:lnTo>
-                    <a:pt x="3877440" y="631879"/>
-                  </a:lnTo>
-                  <a:lnTo>
-                    <a:pt x="3955074" y="641173"/>
-                  </a:lnTo>
-                  <a:lnTo>
-                    <a:pt x="4032708" y="650360"/>
-                  </a:lnTo>
-                  <a:lnTo>
-                    <a:pt x="4110342" y="659441"/>
-                  </a:lnTo>
-                  <a:lnTo>
-                    <a:pt x="4187976" y="668418"/>
-                  </a:lnTo>
-                  <a:lnTo>
-                    <a:pt x="4265610" y="677291"/>
-                  </a:lnTo>
-                  <a:lnTo>
-                    <a:pt x="4343244" y="686063"/>
-                  </a:lnTo>
-                  <a:lnTo>
-                    <a:pt x="4420879" y="694734"/>
-                  </a:lnTo>
-                  <a:lnTo>
-                    <a:pt x="4498513" y="703305"/>
-                  </a:lnTo>
-                  <a:lnTo>
-                    <a:pt x="4576147" y="711777"/>
-                  </a:lnTo>
-                  <a:lnTo>
-                    <a:pt x="4653781" y="720152"/>
-                  </a:lnTo>
-                  <a:lnTo>
-                    <a:pt x="4731415" y="728431"/>
-                  </a:lnTo>
-                  <a:lnTo>
-                    <a:pt x="4809049" y="736615"/>
-                  </a:lnTo>
-                  <a:lnTo>
-                    <a:pt x="4886683" y="744704"/>
-                  </a:lnTo>
-                  <a:lnTo>
-                    <a:pt x="4964317" y="752700"/>
-                  </a:lnTo>
-                  <a:lnTo>
-                    <a:pt x="5041951" y="760605"/>
-                  </a:lnTo>
-                  <a:lnTo>
-                    <a:pt x="5119585" y="768419"/>
-                  </a:lnTo>
-                  <a:lnTo>
-                    <a:pt x="5197219" y="776142"/>
-                  </a:lnTo>
-                  <a:lnTo>
-                    <a:pt x="5274853" y="783777"/>
-                  </a:lnTo>
-                  <a:lnTo>
-                    <a:pt x="5352487" y="791325"/>
-                  </a:lnTo>
-                  <a:lnTo>
-                    <a:pt x="5430121" y="798785"/>
-                  </a:lnTo>
-                  <a:lnTo>
-                    <a:pt x="5507755" y="806160"/>
-                  </a:lnTo>
-                  <a:lnTo>
-                    <a:pt x="5585389" y="813450"/>
-                  </a:lnTo>
-                  <a:lnTo>
-                    <a:pt x="5663023" y="820656"/>
-                  </a:lnTo>
-                  <a:lnTo>
-                    <a:pt x="5740657" y="827779"/>
-                  </a:lnTo>
-                  <a:lnTo>
-                    <a:pt x="5818291" y="834820"/>
-                  </a:lnTo>
-                  <a:lnTo>
-                    <a:pt x="5895925" y="841780"/>
-                  </a:lnTo>
-                  <a:lnTo>
-                    <a:pt x="5973559" y="848661"/>
-                  </a:lnTo>
-                  <a:lnTo>
-                    <a:pt x="6051193" y="855462"/>
-                  </a:lnTo>
-                  <a:lnTo>
-                    <a:pt x="6128827" y="862185"/>
-                  </a:lnTo>
-                  <a:lnTo>
-                    <a:pt x="6206462" y="868831"/>
-                  </a:lnTo>
-                  <a:lnTo>
-                    <a:pt x="6284096" y="875400"/>
-                  </a:lnTo>
-                  <a:lnTo>
-                    <a:pt x="6361730" y="881894"/>
-                  </a:lnTo>
-                  <a:lnTo>
-                    <a:pt x="6439364" y="888313"/>
-                  </a:lnTo>
-                  <a:lnTo>
-                    <a:pt x="6516998" y="894658"/>
-                  </a:lnTo>
-                  <a:lnTo>
-                    <a:pt x="6594632" y="900930"/>
-                  </a:lnTo>
-                  <a:lnTo>
-                    <a:pt x="6672266" y="907131"/>
-                  </a:lnTo>
-                  <a:lnTo>
-                    <a:pt x="6749900" y="913260"/>
-                  </a:lnTo>
-                  <a:lnTo>
-                    <a:pt x="6827534" y="919318"/>
-                  </a:lnTo>
-                  <a:lnTo>
-                    <a:pt x="6905168" y="925307"/>
-                  </a:lnTo>
-                  <a:lnTo>
-                    <a:pt x="6982802" y="931227"/>
-                  </a:lnTo>
-                  <a:lnTo>
-                    <a:pt x="7060436" y="937079"/>
-                  </a:lnTo>
-                  <a:lnTo>
-                    <a:pt x="7138070" y="942863"/>
-                  </a:lnTo>
-                  <a:lnTo>
-                    <a:pt x="7215704" y="948581"/>
-                  </a:lnTo>
-                  <a:lnTo>
-                    <a:pt x="7293338" y="954234"/>
-                  </a:lnTo>
-                  <a:lnTo>
-                    <a:pt x="7370972" y="959821"/>
+                    <a:pt x="73372" y="14935"/>
+                  </a:lnTo>
+                  <a:lnTo>
+                    <a:pt x="151006" y="30557"/>
+                  </a:lnTo>
+                  <a:lnTo>
+                    <a:pt x="228640" y="45999"/>
+                  </a:lnTo>
+                  <a:lnTo>
+                    <a:pt x="306274" y="61263"/>
+                  </a:lnTo>
+                  <a:lnTo>
+                    <a:pt x="383908" y="76352"/>
+                  </a:lnTo>
+                  <a:lnTo>
+                    <a:pt x="461542" y="91267"/>
+                  </a:lnTo>
+                  <a:lnTo>
+                    <a:pt x="539176" y="106011"/>
+                  </a:lnTo>
+                  <a:lnTo>
+                    <a:pt x="616810" y="120585"/>
+                  </a:lnTo>
+                  <a:lnTo>
+                    <a:pt x="694444" y="134992"/>
+                  </a:lnTo>
+                  <a:lnTo>
+                    <a:pt x="772078" y="149233"/>
+                  </a:lnTo>
+                  <a:lnTo>
+                    <a:pt x="849712" y="163311"/>
+                  </a:lnTo>
+                  <a:lnTo>
+                    <a:pt x="927346" y="177226"/>
+                  </a:lnTo>
+                  <a:lnTo>
+                    <a:pt x="1004981" y="190982"/>
+                  </a:lnTo>
+                  <a:lnTo>
+                    <a:pt x="1082615" y="204579"/>
+                  </a:lnTo>
+                  <a:lnTo>
+                    <a:pt x="1160249" y="218020"/>
+                  </a:lnTo>
+                  <a:lnTo>
+                    <a:pt x="1237883" y="231306"/>
+                  </a:lnTo>
+                  <a:lnTo>
+                    <a:pt x="1315517" y="244440"/>
+                  </a:lnTo>
+                  <a:lnTo>
+                    <a:pt x="1393151" y="257423"/>
+                  </a:lnTo>
+                  <a:lnTo>
+                    <a:pt x="1470785" y="270256"/>
+                  </a:lnTo>
+                  <a:lnTo>
+                    <a:pt x="1548419" y="282942"/>
+                  </a:lnTo>
+                  <a:lnTo>
+                    <a:pt x="1626053" y="295482"/>
+                  </a:lnTo>
+                  <a:lnTo>
+                    <a:pt x="1703687" y="307878"/>
+                  </a:lnTo>
+                  <a:lnTo>
+                    <a:pt x="1781321" y="320131"/>
+                  </a:lnTo>
+                  <a:lnTo>
+                    <a:pt x="1858955" y="332244"/>
+                  </a:lnTo>
+                  <a:lnTo>
+                    <a:pt x="1936589" y="344217"/>
+                  </a:lnTo>
+                  <a:lnTo>
+                    <a:pt x="2014223" y="356052"/>
+                  </a:lnTo>
+                  <a:lnTo>
+                    <a:pt x="2091857" y="367752"/>
+                  </a:lnTo>
+                  <a:lnTo>
+                    <a:pt x="2169491" y="379317"/>
+                  </a:lnTo>
+                  <a:lnTo>
+                    <a:pt x="2247125" y="390749"/>
+                  </a:lnTo>
+                  <a:lnTo>
+                    <a:pt x="2324759" y="402049"/>
+                  </a:lnTo>
+                  <a:lnTo>
+                    <a:pt x="2402393" y="413220"/>
+                  </a:lnTo>
+                  <a:lnTo>
+                    <a:pt x="2480027" y="424262"/>
+                  </a:lnTo>
+                  <a:lnTo>
+                    <a:pt x="2557661" y="435177"/>
+                  </a:lnTo>
+                  <a:lnTo>
+                    <a:pt x="2635295" y="445967"/>
+                  </a:lnTo>
+                  <a:lnTo>
+                    <a:pt x="2712930" y="456632"/>
+                  </a:lnTo>
+                  <a:lnTo>
+                    <a:pt x="2790564" y="467175"/>
+                  </a:lnTo>
+                  <a:lnTo>
+                    <a:pt x="2868198" y="477597"/>
+                  </a:lnTo>
+                  <a:lnTo>
+                    <a:pt x="2945832" y="487899"/>
+                  </a:lnTo>
+                  <a:lnTo>
+                    <a:pt x="3023466" y="498082"/>
+                  </a:lnTo>
+                  <a:lnTo>
+                    <a:pt x="3101100" y="508149"/>
+                  </a:lnTo>
+                  <a:lnTo>
+                    <a:pt x="3178734" y="518099"/>
+                  </a:lnTo>
+                  <a:lnTo>
+                    <a:pt x="3256368" y="527936"/>
+                  </a:lnTo>
+                  <a:lnTo>
+                    <a:pt x="3334002" y="537659"/>
+                  </a:lnTo>
+                  <a:lnTo>
+                    <a:pt x="3411636" y="547270"/>
+                  </a:lnTo>
+                  <a:lnTo>
+                    <a:pt x="3489270" y="556771"/>
+                  </a:lnTo>
+                  <a:lnTo>
+                    <a:pt x="3566904" y="566162"/>
+                  </a:lnTo>
+                  <a:lnTo>
+                    <a:pt x="3644538" y="575446"/>
+                  </a:lnTo>
+                  <a:lnTo>
+                    <a:pt x="3722172" y="584623"/>
+                  </a:lnTo>
+                  <a:lnTo>
+                    <a:pt x="3799806" y="593694"/>
+                  </a:lnTo>
+                  <a:lnTo>
+                    <a:pt x="3877440" y="602661"/>
+                  </a:lnTo>
+                  <a:lnTo>
+                    <a:pt x="3955074" y="611525"/>
+                  </a:lnTo>
+                  <a:lnTo>
+                    <a:pt x="4032708" y="620287"/>
+                  </a:lnTo>
+                  <a:lnTo>
+                    <a:pt x="4110342" y="628949"/>
+                  </a:lnTo>
+                  <a:lnTo>
+                    <a:pt x="4187976" y="637510"/>
+                  </a:lnTo>
+                  <a:lnTo>
+                    <a:pt x="4265610" y="645974"/>
+                  </a:lnTo>
+                  <a:lnTo>
+                    <a:pt x="4343244" y="654340"/>
+                  </a:lnTo>
+                  <a:lnTo>
+                    <a:pt x="4420879" y="662609"/>
+                  </a:lnTo>
+                  <a:lnTo>
+                    <a:pt x="4498513" y="670784"/>
+                  </a:lnTo>
+                  <a:lnTo>
+                    <a:pt x="4576147" y="678865"/>
+                  </a:lnTo>
+                  <a:lnTo>
+                    <a:pt x="4653781" y="686853"/>
+                  </a:lnTo>
+                  <a:lnTo>
+                    <a:pt x="4731415" y="694749"/>
+                  </a:lnTo>
+                  <a:lnTo>
+                    <a:pt x="4809049" y="702554"/>
+                  </a:lnTo>
+                  <a:lnTo>
+                    <a:pt x="4886683" y="710269"/>
+                  </a:lnTo>
+                  <a:lnTo>
+                    <a:pt x="4964317" y="717896"/>
+                  </a:lnTo>
+                  <a:lnTo>
+                    <a:pt x="5041951" y="725435"/>
+                  </a:lnTo>
+                  <a:lnTo>
+                    <a:pt x="5119585" y="732887"/>
+                  </a:lnTo>
+                  <a:lnTo>
+                    <a:pt x="5197219" y="740254"/>
+                  </a:lnTo>
+                  <a:lnTo>
+                    <a:pt x="5274853" y="747536"/>
+                  </a:lnTo>
+                  <a:lnTo>
+                    <a:pt x="5352487" y="754734"/>
+                  </a:lnTo>
+                  <a:lnTo>
+                    <a:pt x="5430121" y="761850"/>
+                  </a:lnTo>
+                  <a:lnTo>
+                    <a:pt x="5507755" y="768883"/>
+                  </a:lnTo>
+                  <a:lnTo>
+                    <a:pt x="5585389" y="775836"/>
+                  </a:lnTo>
+                  <a:lnTo>
+                    <a:pt x="5663023" y="782709"/>
+                  </a:lnTo>
+                  <a:lnTo>
+                    <a:pt x="5740657" y="789503"/>
+                  </a:lnTo>
+                  <a:lnTo>
+                    <a:pt x="5818291" y="796218"/>
+                  </a:lnTo>
+                  <a:lnTo>
+                    <a:pt x="5895925" y="802857"/>
+                  </a:lnTo>
+                  <a:lnTo>
+                    <a:pt x="5973559" y="809419"/>
+                  </a:lnTo>
+                  <a:lnTo>
+                    <a:pt x="6051193" y="815906"/>
+                  </a:lnTo>
+                  <a:lnTo>
+                    <a:pt x="6128827" y="822318"/>
+                  </a:lnTo>
+                  <a:lnTo>
+                    <a:pt x="6206462" y="828656"/>
+                  </a:lnTo>
+                  <a:lnTo>
+                    <a:pt x="6284096" y="834922"/>
+                  </a:lnTo>
+                  <a:lnTo>
+                    <a:pt x="6361730" y="841115"/>
+                  </a:lnTo>
+                  <a:lnTo>
+                    <a:pt x="6439364" y="847238"/>
+                  </a:lnTo>
+                  <a:lnTo>
+                    <a:pt x="6516998" y="853289"/>
+                  </a:lnTo>
+                  <a:lnTo>
+                    <a:pt x="6594632" y="859272"/>
+                  </a:lnTo>
+                  <a:lnTo>
+                    <a:pt x="6672266" y="865185"/>
+                  </a:lnTo>
+                  <a:lnTo>
+                    <a:pt x="6749900" y="871031"/>
+                  </a:lnTo>
+                  <a:lnTo>
+                    <a:pt x="6827534" y="876809"/>
+                  </a:lnTo>
+                  <a:lnTo>
+                    <a:pt x="6905168" y="882521"/>
+                  </a:lnTo>
+                  <a:lnTo>
+                    <a:pt x="6982802" y="888167"/>
+                  </a:lnTo>
+                  <a:lnTo>
+                    <a:pt x="7060436" y="893748"/>
+                  </a:lnTo>
+                  <a:lnTo>
+                    <a:pt x="7138070" y="899266"/>
+                  </a:lnTo>
+                  <a:lnTo>
+                    <a:pt x="7215704" y="904719"/>
+                  </a:lnTo>
+                  <a:lnTo>
+                    <a:pt x="7293338" y="910110"/>
+                  </a:lnTo>
+                  <a:lnTo>
+                    <a:pt x="7370972" y="915439"/>
                   </a:lnTo>
                 </a:path>
               </a:pathLst>
@@ -4509,7 +4509,7 @@
           </p:nvSpPr>
           <p:spPr>
             <a:xfrm>
-              <a:off x="817517" y="4679530"/>
+              <a:off x="817517" y="4727786"/>
               <a:ext cx="7799693" cy="0"/>
             </a:xfrm>
             <a:custGeom>
@@ -4552,15 +4552,15 @@
           </p:nvSpPr>
           <p:spPr>
             <a:xfrm>
-              <a:off x="4203673" y="1896563"/>
-              <a:ext cx="0" cy="3826579"/>
+              <a:off x="4203673" y="2073503"/>
+              <a:ext cx="0" cy="3649639"/>
             </a:xfrm>
             <a:custGeom>
               <a:avLst/>
               <a:pathLst>
-                <a:path w="0" h="3826579">
+                <a:path w="0" h="3649639">
                   <a:moveTo>
-                    <a:pt x="0" y="3826579"/>
+                    <a:pt x="0" y="3649639"/>
                   </a:moveTo>
                   <a:lnTo>
                     <a:pt x="0" y="0"/>
@@ -4595,7 +4595,7 @@
           </p:nvSpPr>
           <p:spPr>
             <a:xfrm>
-              <a:off x="692708" y="5509156"/>
+              <a:off x="692708" y="5517199"/>
               <a:ext cx="62179" cy="80101"/>
             </a:xfrm>
             <a:prstGeom prst="rect">
@@ -4641,7 +4641,7 @@
           </p:nvSpPr>
           <p:spPr>
             <a:xfrm>
-              <a:off x="692708" y="4639479"/>
+              <a:off x="692708" y="4687735"/>
               <a:ext cx="62179" cy="80101"/>
             </a:xfrm>
             <a:prstGeom prst="rect">
@@ -4687,7 +4687,7 @@
           </p:nvSpPr>
           <p:spPr>
             <a:xfrm>
-              <a:off x="692708" y="3769802"/>
+              <a:off x="692708" y="3858272"/>
               <a:ext cx="62179" cy="80101"/>
             </a:xfrm>
             <a:prstGeom prst="rect">
@@ -4733,7 +4733,7 @@
           </p:nvSpPr>
           <p:spPr>
             <a:xfrm>
-              <a:off x="692708" y="2900125"/>
+              <a:off x="692708" y="3028808"/>
               <a:ext cx="62179" cy="80101"/>
             </a:xfrm>
             <a:prstGeom prst="rect">
@@ -4779,7 +4779,7 @@
           </p:nvSpPr>
           <p:spPr>
             <a:xfrm>
-              <a:off x="692708" y="2030448"/>
+              <a:off x="692708" y="2199345"/>
               <a:ext cx="62179" cy="80101"/>
             </a:xfrm>
             <a:prstGeom prst="rect">
@@ -5055,7 +5055,7 @@
           </p:nvSpPr>
           <p:spPr>
             <a:xfrm rot="-5400000">
-              <a:off x="68446" y="3759743"/>
+              <a:off x="68446" y="3848213"/>
               <a:ext cx="1016904" cy="100218"/>
             </a:xfrm>
             <a:prstGeom prst="rect">
@@ -5096,6 +5096,52 @@
         <p:sp>
           <p:nvSpPr>
             <p:cNvPr id="38" name="tx38"/>
+            <p:cNvSpPr/>
+            <p:nvPr/>
+          </p:nvSpPr>
+          <p:spPr>
+            <a:xfrm>
+              <a:off x="817517" y="1896563"/>
+              <a:ext cx="4166463" cy="82021"/>
+            </a:xfrm>
+            <a:prstGeom prst="rect">
+              <a:avLst/>
+            </a:prstGeom>
+            <a:noFill/>
+          </p:spPr>
+          <p:txBody>
+            <a:bodyPr lIns="0" rIns="0" tIns="0" bIns="0" anchorCtr="1" anchor="ctr" wrap="none"/>
+            <a:lstStyle/>
+            <a:p>
+              <a:pPr algn="l" marL="0" marR="0" indent="0">
+                <a:lnSpc>
+                  <a:spcPts val="900"/>
+                </a:lnSpc>
+                <a:spcBef>
+                  <a:spcPts val="0"/>
+                </a:spcBef>
+                <a:spcAft>
+                  <a:spcPts val="0"/>
+                </a:spcAft>
+              </a:pPr>
+              <a:r>
+                <a:rPr sz="900">
+                  <a:solidFill>
+                    <a:srgbClr val="404040">
+                      <a:alpha val="100000"/>
+                    </a:srgbClr>
+                  </a:solidFill>
+                  <a:latin typeface="Helvetica"/>
+                  <a:cs typeface="Helvetica"/>
+                </a:rPr>
+                <a:t>subHR = 0.88 (95% CI 0.63-1.23), p = 0.444   (per 0.1-unit increase in eGFR ratio)</a:t>
+              </a:r>
+            </a:p>
+          </p:txBody>
+        </p:sp>
+        <p:sp>
+          <p:nvSpPr>
+            <p:cNvPr id="39" name="tx39"/>
             <p:cNvSpPr/>
             <p:nvPr/>
           </p:nvSpPr>

--- a/docs/plots/carbo/jx_carbo_linsubhr_ratio_hosp_immune_other.pptx
+++ b/docs/plots/carbo/jx_carbo_linsubhr_ratio_hosp_immune_other.pptx
@@ -2271,26 +2271,26 @@
           </p:nvSpPr>
           <p:spPr>
             <a:xfrm>
-              <a:off x="817517" y="5142518"/>
-              <a:ext cx="7799693" cy="0"/>
+              <a:off x="915645" y="5071743"/>
+              <a:ext cx="7682587" cy="0"/>
             </a:xfrm>
             <a:custGeom>
               <a:avLst/>
               <a:pathLst>
-                <a:path w="7799693" h="0">
+                <a:path w="7682587" h="0">
                   <a:moveTo>
                     <a:pt x="0" y="0"/>
                   </a:moveTo>
                   <a:lnTo>
-                    <a:pt x="7799693" y="0"/>
-                  </a:lnTo>
-                  <a:lnTo>
-                    <a:pt x="7799693" y="0"/>
+                    <a:pt x="7682587" y="0"/>
+                  </a:lnTo>
+                  <a:lnTo>
+                    <a:pt x="7682587" y="0"/>
                   </a:lnTo>
                 </a:path>
               </a:pathLst>
             </a:custGeom>
-            <a:ln w="6775" cap="flat">
+            <a:ln w="8623" cap="flat">
               <a:solidFill>
                 <a:srgbClr val="EBEBEB">
                   <a:alpha val="100000"/>
@@ -2314,26 +2314,26 @@
           </p:nvSpPr>
           <p:spPr>
             <a:xfrm>
-              <a:off x="817517" y="4313054"/>
-              <a:ext cx="7799693" cy="0"/>
+              <a:off x="915645" y="4298074"/>
+              <a:ext cx="7682587" cy="0"/>
             </a:xfrm>
             <a:custGeom>
               <a:avLst/>
               <a:pathLst>
-                <a:path w="7799693" h="0">
+                <a:path w="7682587" h="0">
                   <a:moveTo>
                     <a:pt x="0" y="0"/>
                   </a:moveTo>
                   <a:lnTo>
-                    <a:pt x="7799693" y="0"/>
-                  </a:lnTo>
-                  <a:lnTo>
-                    <a:pt x="7799693" y="0"/>
+                    <a:pt x="7682587" y="0"/>
+                  </a:lnTo>
+                  <a:lnTo>
+                    <a:pt x="7682587" y="0"/>
                   </a:lnTo>
                 </a:path>
               </a:pathLst>
             </a:custGeom>
-            <a:ln w="6775" cap="flat">
+            <a:ln w="8623" cap="flat">
               <a:solidFill>
                 <a:srgbClr val="EBEBEB">
                   <a:alpha val="100000"/>
@@ -2357,26 +2357,26 @@
           </p:nvSpPr>
           <p:spPr>
             <a:xfrm>
-              <a:off x="817517" y="3483591"/>
-              <a:ext cx="7799693" cy="0"/>
+              <a:off x="915645" y="3524405"/>
+              <a:ext cx="7682587" cy="0"/>
             </a:xfrm>
             <a:custGeom>
               <a:avLst/>
               <a:pathLst>
-                <a:path w="7799693" h="0">
+                <a:path w="7682587" h="0">
                   <a:moveTo>
                     <a:pt x="0" y="0"/>
                   </a:moveTo>
                   <a:lnTo>
-                    <a:pt x="7799693" y="0"/>
-                  </a:lnTo>
-                  <a:lnTo>
-                    <a:pt x="7799693" y="0"/>
+                    <a:pt x="7682587" y="0"/>
+                  </a:lnTo>
+                  <a:lnTo>
+                    <a:pt x="7682587" y="0"/>
                   </a:lnTo>
                 </a:path>
               </a:pathLst>
             </a:custGeom>
-            <a:ln w="6775" cap="flat">
+            <a:ln w="8623" cap="flat">
               <a:solidFill>
                 <a:srgbClr val="EBEBEB">
                   <a:alpha val="100000"/>
@@ -2400,26 +2400,26 @@
           </p:nvSpPr>
           <p:spPr>
             <a:xfrm>
-              <a:off x="817517" y="2654127"/>
-              <a:ext cx="7799693" cy="0"/>
+              <a:off x="915645" y="2750737"/>
+              <a:ext cx="7682587" cy="0"/>
             </a:xfrm>
             <a:custGeom>
               <a:avLst/>
               <a:pathLst>
-                <a:path w="7799693" h="0">
+                <a:path w="7682587" h="0">
                   <a:moveTo>
                     <a:pt x="0" y="0"/>
                   </a:moveTo>
                   <a:lnTo>
-                    <a:pt x="7799693" y="0"/>
-                  </a:lnTo>
-                  <a:lnTo>
-                    <a:pt x="7799693" y="0"/>
+                    <a:pt x="7682587" y="0"/>
+                  </a:lnTo>
+                  <a:lnTo>
+                    <a:pt x="7682587" y="0"/>
                   </a:lnTo>
                 </a:path>
               </a:pathLst>
             </a:custGeom>
-            <a:ln w="6775" cap="flat">
+            <a:ln w="8623" cap="flat">
               <a:solidFill>
                 <a:srgbClr val="EBEBEB">
                   <a:alpha val="100000"/>
@@ -2443,15 +2443,15 @@
           </p:nvSpPr>
           <p:spPr>
             <a:xfrm>
-              <a:off x="1615213" y="2073503"/>
-              <a:ext cx="0" cy="3649639"/>
+              <a:off x="1701364" y="2209169"/>
+              <a:ext cx="0" cy="3404141"/>
             </a:xfrm>
             <a:custGeom>
               <a:avLst/>
               <a:pathLst>
-                <a:path w="0" h="3649639">
+                <a:path w="0" h="3404141">
                   <a:moveTo>
-                    <a:pt x="0" y="3649639"/>
+                    <a:pt x="0" y="3404141"/>
                   </a:moveTo>
                   <a:lnTo>
                     <a:pt x="0" y="0"/>
@@ -2462,7 +2462,7 @@
                 </a:path>
               </a:pathLst>
             </a:custGeom>
-            <a:ln w="6775" cap="flat">
+            <a:ln w="8623" cap="flat">
               <a:solidFill>
                 <a:srgbClr val="EBEBEB">
                   <a:alpha val="100000"/>
@@ -2486,15 +2486,15 @@
           </p:nvSpPr>
           <p:spPr>
             <a:xfrm>
-              <a:off x="3387871" y="2073503"/>
-              <a:ext cx="0" cy="3649639"/>
+              <a:off x="3447406" y="2209169"/>
+              <a:ext cx="0" cy="3404141"/>
             </a:xfrm>
             <a:custGeom>
               <a:avLst/>
               <a:pathLst>
-                <a:path w="0" h="3649639">
+                <a:path w="0" h="3404141">
                   <a:moveTo>
-                    <a:pt x="0" y="3649639"/>
+                    <a:pt x="0" y="3404141"/>
                   </a:moveTo>
                   <a:lnTo>
                     <a:pt x="0" y="0"/>
@@ -2505,7 +2505,7 @@
                 </a:path>
               </a:pathLst>
             </a:custGeom>
-            <a:ln w="6775" cap="flat">
+            <a:ln w="8623" cap="flat">
               <a:solidFill>
                 <a:srgbClr val="EBEBEB">
                   <a:alpha val="100000"/>
@@ -2529,15 +2529,15 @@
           </p:nvSpPr>
           <p:spPr>
             <a:xfrm>
-              <a:off x="5160528" y="2073503"/>
-              <a:ext cx="0" cy="3649639"/>
+              <a:off x="5193449" y="2209169"/>
+              <a:ext cx="0" cy="3404141"/>
             </a:xfrm>
             <a:custGeom>
               <a:avLst/>
               <a:pathLst>
-                <a:path w="0" h="3649639">
+                <a:path w="0" h="3404141">
                   <a:moveTo>
-                    <a:pt x="0" y="3649639"/>
+                    <a:pt x="0" y="3404141"/>
                   </a:moveTo>
                   <a:lnTo>
                     <a:pt x="0" y="0"/>
@@ -2548,7 +2548,7 @@
                 </a:path>
               </a:pathLst>
             </a:custGeom>
-            <a:ln w="6775" cap="flat">
+            <a:ln w="8623" cap="flat">
               <a:solidFill>
                 <a:srgbClr val="EBEBEB">
                   <a:alpha val="100000"/>
@@ -2572,15 +2572,15 @@
           </p:nvSpPr>
           <p:spPr>
             <a:xfrm>
-              <a:off x="6933186" y="2073503"/>
-              <a:ext cx="0" cy="3649639"/>
+              <a:off x="6939491" y="2209169"/>
+              <a:ext cx="0" cy="3404141"/>
             </a:xfrm>
             <a:custGeom>
               <a:avLst/>
               <a:pathLst>
-                <a:path w="0" h="3649639">
+                <a:path w="0" h="3404141">
                   <a:moveTo>
-                    <a:pt x="0" y="3649639"/>
+                    <a:pt x="0" y="3404141"/>
                   </a:moveTo>
                   <a:lnTo>
                     <a:pt x="0" y="0"/>
@@ -2591,7 +2591,7 @@
                 </a:path>
               </a:pathLst>
             </a:custGeom>
-            <a:ln w="6775" cap="flat">
+            <a:ln w="8623" cap="flat">
               <a:solidFill>
                 <a:srgbClr val="EBEBEB">
                   <a:alpha val="100000"/>
@@ -2615,26 +2615,26 @@
           </p:nvSpPr>
           <p:spPr>
             <a:xfrm>
-              <a:off x="817517" y="5557249"/>
-              <a:ext cx="7799693" cy="0"/>
+              <a:off x="915645" y="5458577"/>
+              <a:ext cx="7682587" cy="0"/>
             </a:xfrm>
             <a:custGeom>
               <a:avLst/>
               <a:pathLst>
-                <a:path w="7799693" h="0">
+                <a:path w="7682587" h="0">
                   <a:moveTo>
                     <a:pt x="0" y="0"/>
                   </a:moveTo>
                   <a:lnTo>
-                    <a:pt x="7799693" y="0"/>
-                  </a:lnTo>
-                  <a:lnTo>
-                    <a:pt x="7799693" y="0"/>
+                    <a:pt x="7682587" y="0"/>
+                  </a:lnTo>
+                  <a:lnTo>
+                    <a:pt x="7682587" y="0"/>
                   </a:lnTo>
                 </a:path>
               </a:pathLst>
             </a:custGeom>
-            <a:ln w="13550" cap="flat">
+            <a:ln w="17246" cap="flat">
               <a:solidFill>
                 <a:srgbClr val="EBEBEB">
                   <a:alpha val="100000"/>
@@ -2658,26 +2658,26 @@
           </p:nvSpPr>
           <p:spPr>
             <a:xfrm>
-              <a:off x="817517" y="4727786"/>
-              <a:ext cx="7799693" cy="0"/>
+              <a:off x="915645" y="4684908"/>
+              <a:ext cx="7682587" cy="0"/>
             </a:xfrm>
             <a:custGeom>
               <a:avLst/>
               <a:pathLst>
-                <a:path w="7799693" h="0">
+                <a:path w="7682587" h="0">
                   <a:moveTo>
                     <a:pt x="0" y="0"/>
                   </a:moveTo>
                   <a:lnTo>
-                    <a:pt x="7799693" y="0"/>
-                  </a:lnTo>
-                  <a:lnTo>
-                    <a:pt x="7799693" y="0"/>
+                    <a:pt x="7682587" y="0"/>
+                  </a:lnTo>
+                  <a:lnTo>
+                    <a:pt x="7682587" y="0"/>
                   </a:lnTo>
                 </a:path>
               </a:pathLst>
             </a:custGeom>
-            <a:ln w="13550" cap="flat">
+            <a:ln w="17246" cap="flat">
               <a:solidFill>
                 <a:srgbClr val="EBEBEB">
                   <a:alpha val="100000"/>
@@ -2701,26 +2701,26 @@
           </p:nvSpPr>
           <p:spPr>
             <a:xfrm>
-              <a:off x="817517" y="3898322"/>
-              <a:ext cx="7799693" cy="0"/>
+              <a:off x="915645" y="3911240"/>
+              <a:ext cx="7682587" cy="0"/>
             </a:xfrm>
             <a:custGeom>
               <a:avLst/>
               <a:pathLst>
-                <a:path w="7799693" h="0">
+                <a:path w="7682587" h="0">
                   <a:moveTo>
                     <a:pt x="0" y="0"/>
                   </a:moveTo>
                   <a:lnTo>
-                    <a:pt x="7799693" y="0"/>
-                  </a:lnTo>
-                  <a:lnTo>
-                    <a:pt x="7799693" y="0"/>
+                    <a:pt x="7682587" y="0"/>
+                  </a:lnTo>
+                  <a:lnTo>
+                    <a:pt x="7682587" y="0"/>
                   </a:lnTo>
                 </a:path>
               </a:pathLst>
             </a:custGeom>
-            <a:ln w="13550" cap="flat">
+            <a:ln w="17246" cap="flat">
               <a:solidFill>
                 <a:srgbClr val="EBEBEB">
                   <a:alpha val="100000"/>
@@ -2744,26 +2744,26 @@
           </p:nvSpPr>
           <p:spPr>
             <a:xfrm>
-              <a:off x="817517" y="3068859"/>
-              <a:ext cx="7799693" cy="0"/>
+              <a:off x="915645" y="3137571"/>
+              <a:ext cx="7682587" cy="0"/>
             </a:xfrm>
             <a:custGeom>
               <a:avLst/>
               <a:pathLst>
-                <a:path w="7799693" h="0">
+                <a:path w="7682587" h="0">
                   <a:moveTo>
                     <a:pt x="0" y="0"/>
                   </a:moveTo>
                   <a:lnTo>
-                    <a:pt x="7799693" y="0"/>
-                  </a:lnTo>
-                  <a:lnTo>
-                    <a:pt x="7799693" y="0"/>
+                    <a:pt x="7682587" y="0"/>
+                  </a:lnTo>
+                  <a:lnTo>
+                    <a:pt x="7682587" y="0"/>
                   </a:lnTo>
                 </a:path>
               </a:pathLst>
             </a:custGeom>
-            <a:ln w="13550" cap="flat">
+            <a:ln w="17246" cap="flat">
               <a:solidFill>
                 <a:srgbClr val="EBEBEB">
                   <a:alpha val="100000"/>
@@ -2787,26 +2787,26 @@
           </p:nvSpPr>
           <p:spPr>
             <a:xfrm>
-              <a:off x="817517" y="2239395"/>
-              <a:ext cx="7799693" cy="0"/>
+              <a:off x="915645" y="2363903"/>
+              <a:ext cx="7682587" cy="0"/>
             </a:xfrm>
             <a:custGeom>
               <a:avLst/>
               <a:pathLst>
-                <a:path w="7799693" h="0">
+                <a:path w="7682587" h="0">
                   <a:moveTo>
                     <a:pt x="0" y="0"/>
                   </a:moveTo>
                   <a:lnTo>
-                    <a:pt x="7799693" y="0"/>
-                  </a:lnTo>
-                  <a:lnTo>
-                    <a:pt x="7799693" y="0"/>
+                    <a:pt x="7682587" y="0"/>
+                  </a:lnTo>
+                  <a:lnTo>
+                    <a:pt x="7682587" y="0"/>
                   </a:lnTo>
                 </a:path>
               </a:pathLst>
             </a:custGeom>
-            <a:ln w="13550" cap="flat">
+            <a:ln w="17246" cap="flat">
               <a:solidFill>
                 <a:srgbClr val="EBEBEB">
                   <a:alpha val="100000"/>
@@ -2830,15 +2830,15 @@
           </p:nvSpPr>
           <p:spPr>
             <a:xfrm>
-              <a:off x="2501542" y="2073503"/>
-              <a:ext cx="0" cy="3649639"/>
+              <a:off x="2574385" y="2209169"/>
+              <a:ext cx="0" cy="3404141"/>
             </a:xfrm>
             <a:custGeom>
               <a:avLst/>
               <a:pathLst>
-                <a:path w="0" h="3649639">
+                <a:path w="0" h="3404141">
                   <a:moveTo>
-                    <a:pt x="0" y="3649639"/>
+                    <a:pt x="0" y="3404141"/>
                   </a:moveTo>
                   <a:lnTo>
                     <a:pt x="0" y="0"/>
@@ -2849,7 +2849,7 @@
                 </a:path>
               </a:pathLst>
             </a:custGeom>
-            <a:ln w="13550" cap="flat">
+            <a:ln w="17246" cap="flat">
               <a:solidFill>
                 <a:srgbClr val="EBEBEB">
                   <a:alpha val="100000"/>
@@ -2873,15 +2873,15 @@
           </p:nvSpPr>
           <p:spPr>
             <a:xfrm>
-              <a:off x="4274200" y="2073503"/>
-              <a:ext cx="0" cy="3649639"/>
+              <a:off x="4320427" y="2209169"/>
+              <a:ext cx="0" cy="3404141"/>
             </a:xfrm>
             <a:custGeom>
               <a:avLst/>
               <a:pathLst>
-                <a:path w="0" h="3649639">
+                <a:path w="0" h="3404141">
                   <a:moveTo>
-                    <a:pt x="0" y="3649639"/>
+                    <a:pt x="0" y="3404141"/>
                   </a:moveTo>
                   <a:lnTo>
                     <a:pt x="0" y="0"/>
@@ -2892,7 +2892,7 @@
                 </a:path>
               </a:pathLst>
             </a:custGeom>
-            <a:ln w="13550" cap="flat">
+            <a:ln w="17246" cap="flat">
               <a:solidFill>
                 <a:srgbClr val="EBEBEB">
                   <a:alpha val="100000"/>
@@ -2916,15 +2916,15 @@
           </p:nvSpPr>
           <p:spPr>
             <a:xfrm>
-              <a:off x="6046857" y="2073503"/>
-              <a:ext cx="0" cy="3649639"/>
+              <a:off x="6066470" y="2209169"/>
+              <a:ext cx="0" cy="3404141"/>
             </a:xfrm>
             <a:custGeom>
               <a:avLst/>
               <a:pathLst>
-                <a:path w="0" h="3649639">
+                <a:path w="0" h="3404141">
                   <a:moveTo>
-                    <a:pt x="0" y="3649639"/>
+                    <a:pt x="0" y="3404141"/>
                   </a:moveTo>
                   <a:lnTo>
                     <a:pt x="0" y="0"/>
@@ -2935,7 +2935,7 @@
                 </a:path>
               </a:pathLst>
             </a:custGeom>
-            <a:ln w="13550" cap="flat">
+            <a:ln w="17246" cap="flat">
               <a:solidFill>
                 <a:srgbClr val="EBEBEB">
                   <a:alpha val="100000"/>
@@ -2959,15 +2959,15 @@
           </p:nvSpPr>
           <p:spPr>
             <a:xfrm>
-              <a:off x="7819515" y="2073503"/>
-              <a:ext cx="0" cy="3649639"/>
+              <a:off x="7812512" y="2209169"/>
+              <a:ext cx="0" cy="3404141"/>
             </a:xfrm>
             <a:custGeom>
               <a:avLst/>
               <a:pathLst>
-                <a:path w="0" h="3649639">
+                <a:path w="0" h="3404141">
                   <a:moveTo>
-                    <a:pt x="0" y="3649639"/>
+                    <a:pt x="0" y="3404141"/>
                   </a:moveTo>
                   <a:lnTo>
                     <a:pt x="0" y="0"/>
@@ -2978,7 +2978,7 @@
                 </a:path>
               </a:pathLst>
             </a:custGeom>
-            <a:ln w="13550" cap="flat">
+            <a:ln w="17246" cap="flat">
               <a:solidFill>
                 <a:srgbClr val="EBEBEB">
                   <a:alpha val="100000"/>
@@ -3002,564 +3002,564 @@
           </p:nvSpPr>
           <p:spPr>
             <a:xfrm>
-              <a:off x="817517" y="2073503"/>
-              <a:ext cx="7370972" cy="3383379"/>
+              <a:off x="915645" y="2209169"/>
+              <a:ext cx="7260303" cy="3155792"/>
             </a:xfrm>
             <a:custGeom>
               <a:avLst/>
               <a:pathLst>
-                <a:path w="7370972" h="3383379">
+                <a:path w="7260303" h="3155792">
                   <a:moveTo>
-                    <a:pt x="678696" y="0"/>
+                    <a:pt x="668506" y="0"/>
                   </a:moveTo>
                   <a:lnTo>
-                    <a:pt x="694444" y="29433"/>
-                  </a:lnTo>
-                  <a:lnTo>
-                    <a:pt x="772078" y="168679"/>
-                  </a:lnTo>
-                  <a:lnTo>
-                    <a:pt x="849712" y="302312"/>
-                  </a:lnTo>
-                  <a:lnTo>
-                    <a:pt x="927346" y="430559"/>
-                  </a:lnTo>
-                  <a:lnTo>
-                    <a:pt x="1004981" y="553635"/>
-                  </a:lnTo>
-                  <a:lnTo>
-                    <a:pt x="1082615" y="671751"/>
-                  </a:lnTo>
-                  <a:lnTo>
-                    <a:pt x="1160249" y="785105"/>
-                  </a:lnTo>
-                  <a:lnTo>
-                    <a:pt x="1237883" y="893889"/>
-                  </a:lnTo>
-                  <a:lnTo>
-                    <a:pt x="1315517" y="998288"/>
-                  </a:lnTo>
-                  <a:lnTo>
-                    <a:pt x="1393151" y="1098479"/>
-                  </a:lnTo>
-                  <a:lnTo>
-                    <a:pt x="1470785" y="1194632"/>
-                  </a:lnTo>
-                  <a:lnTo>
-                    <a:pt x="1548419" y="1286908"/>
-                  </a:lnTo>
-                  <a:lnTo>
-                    <a:pt x="1626053" y="1375464"/>
-                  </a:lnTo>
-                  <a:lnTo>
-                    <a:pt x="1703687" y="1460451"/>
-                  </a:lnTo>
-                  <a:lnTo>
-                    <a:pt x="1781321" y="1542012"/>
-                  </a:lnTo>
-                  <a:lnTo>
-                    <a:pt x="1858955" y="1620285"/>
-                  </a:lnTo>
-                  <a:lnTo>
-                    <a:pt x="1936589" y="1695402"/>
-                  </a:lnTo>
-                  <a:lnTo>
-                    <a:pt x="2014223" y="1767492"/>
-                  </a:lnTo>
-                  <a:lnTo>
-                    <a:pt x="2091857" y="1836676"/>
-                  </a:lnTo>
-                  <a:lnTo>
-                    <a:pt x="2169491" y="1903070"/>
-                  </a:lnTo>
-                  <a:lnTo>
-                    <a:pt x="2247125" y="1966789"/>
-                  </a:lnTo>
-                  <a:lnTo>
-                    <a:pt x="2324759" y="2027939"/>
-                  </a:lnTo>
-                  <a:lnTo>
-                    <a:pt x="2402393" y="2086624"/>
-                  </a:lnTo>
-                  <a:lnTo>
-                    <a:pt x="2480027" y="2142943"/>
-                  </a:lnTo>
-                  <a:lnTo>
-                    <a:pt x="2557661" y="2196992"/>
-                  </a:lnTo>
-                  <a:lnTo>
-                    <a:pt x="2635295" y="2248862"/>
-                  </a:lnTo>
-                  <a:lnTo>
-                    <a:pt x="2712930" y="2298641"/>
-                  </a:lnTo>
-                  <a:lnTo>
-                    <a:pt x="2790564" y="2346414"/>
-                  </a:lnTo>
-                  <a:lnTo>
-                    <a:pt x="2868198" y="2392261"/>
-                  </a:lnTo>
-                  <a:lnTo>
-                    <a:pt x="2945832" y="2436259"/>
-                  </a:lnTo>
-                  <a:lnTo>
-                    <a:pt x="3023466" y="2478484"/>
-                  </a:lnTo>
-                  <a:lnTo>
-                    <a:pt x="3101100" y="2519007"/>
-                  </a:lnTo>
-                  <a:lnTo>
-                    <a:pt x="3178734" y="2557897"/>
-                  </a:lnTo>
-                  <a:lnTo>
-                    <a:pt x="3256368" y="2595219"/>
-                  </a:lnTo>
-                  <a:lnTo>
-                    <a:pt x="3334002" y="2631036"/>
-                  </a:lnTo>
-                  <a:lnTo>
-                    <a:pt x="3411636" y="2649363"/>
-                  </a:lnTo>
-                  <a:lnTo>
-                    <a:pt x="3489270" y="2634194"/>
-                  </a:lnTo>
-                  <a:lnTo>
-                    <a:pt x="3566904" y="2618749"/>
-                  </a:lnTo>
-                  <a:lnTo>
-                    <a:pt x="3644538" y="2603023"/>
-                  </a:lnTo>
-                  <a:lnTo>
-                    <a:pt x="3722172" y="2587011"/>
-                  </a:lnTo>
-                  <a:lnTo>
-                    <a:pt x="3799806" y="2570708"/>
-                  </a:lnTo>
-                  <a:lnTo>
-                    <a:pt x="3877440" y="2554108"/>
-                  </a:lnTo>
-                  <a:lnTo>
-                    <a:pt x="3955074" y="2537207"/>
-                  </a:lnTo>
-                  <a:lnTo>
-                    <a:pt x="4032708" y="2519999"/>
-                  </a:lnTo>
-                  <a:lnTo>
-                    <a:pt x="4110342" y="2502477"/>
-                  </a:lnTo>
-                  <a:lnTo>
-                    <a:pt x="4187976" y="2484637"/>
-                  </a:lnTo>
-                  <a:lnTo>
-                    <a:pt x="4265610" y="2466473"/>
-                  </a:lnTo>
-                  <a:lnTo>
-                    <a:pt x="4343244" y="2447979"/>
-                  </a:lnTo>
-                  <a:lnTo>
-                    <a:pt x="4420879" y="2429148"/>
-                  </a:lnTo>
-                  <a:lnTo>
-                    <a:pt x="4498513" y="2409975"/>
-                  </a:lnTo>
-                  <a:lnTo>
-                    <a:pt x="4576147" y="2390453"/>
-                  </a:lnTo>
-                  <a:lnTo>
-                    <a:pt x="4653781" y="2370577"/>
-                  </a:lnTo>
-                  <a:lnTo>
-                    <a:pt x="4731415" y="2350339"/>
-                  </a:lnTo>
-                  <a:lnTo>
-                    <a:pt x="4809049" y="2329733"/>
-                  </a:lnTo>
-                  <a:lnTo>
-                    <a:pt x="4886683" y="2308753"/>
-                  </a:lnTo>
-                  <a:lnTo>
-                    <a:pt x="4964317" y="2287391"/>
-                  </a:lnTo>
-                  <a:lnTo>
-                    <a:pt x="5041951" y="2265641"/>
-                  </a:lnTo>
-                  <a:lnTo>
-                    <a:pt x="5119585" y="2243495"/>
-                  </a:lnTo>
-                  <a:lnTo>
-                    <a:pt x="5197219" y="2220947"/>
-                  </a:lnTo>
-                  <a:lnTo>
-                    <a:pt x="5274853" y="2197988"/>
-                  </a:lnTo>
-                  <a:lnTo>
-                    <a:pt x="5352487" y="2174613"/>
-                  </a:lnTo>
-                  <a:lnTo>
-                    <a:pt x="5430121" y="2150812"/>
-                  </a:lnTo>
-                  <a:lnTo>
-                    <a:pt x="5507755" y="2126579"/>
-                  </a:lnTo>
-                  <a:lnTo>
-                    <a:pt x="5585389" y="2101905"/>
-                  </a:lnTo>
-                  <a:lnTo>
-                    <a:pt x="5663023" y="2076783"/>
-                  </a:lnTo>
-                  <a:lnTo>
-                    <a:pt x="5740657" y="2051204"/>
-                  </a:lnTo>
-                  <a:lnTo>
-                    <a:pt x="5818291" y="2025159"/>
-                  </a:lnTo>
-                  <a:lnTo>
-                    <a:pt x="5895925" y="1998642"/>
-                  </a:lnTo>
-                  <a:lnTo>
-                    <a:pt x="5973559" y="1971642"/>
-                  </a:lnTo>
-                  <a:lnTo>
-                    <a:pt x="6051193" y="1944151"/>
-                  </a:lnTo>
-                  <a:lnTo>
-                    <a:pt x="6128827" y="1916161"/>
-                  </a:lnTo>
-                  <a:lnTo>
-                    <a:pt x="6206462" y="1887661"/>
-                  </a:lnTo>
-                  <a:lnTo>
-                    <a:pt x="6284096" y="1858644"/>
-                  </a:lnTo>
-                  <a:lnTo>
-                    <a:pt x="6361730" y="1829099"/>
-                  </a:lnTo>
-                  <a:lnTo>
-                    <a:pt x="6439364" y="1799017"/>
-                  </a:lnTo>
-                  <a:lnTo>
-                    <a:pt x="6516998" y="1768388"/>
-                  </a:lnTo>
-                  <a:lnTo>
-                    <a:pt x="6594632" y="1737202"/>
-                  </a:lnTo>
-                  <a:lnTo>
-                    <a:pt x="6672266" y="1705449"/>
-                  </a:lnTo>
-                  <a:lnTo>
-                    <a:pt x="6749900" y="1673119"/>
-                  </a:lnTo>
-                  <a:lnTo>
-                    <a:pt x="6827534" y="1640201"/>
-                  </a:lnTo>
-                  <a:lnTo>
-                    <a:pt x="6905168" y="1606684"/>
-                  </a:lnTo>
-                  <a:lnTo>
-                    <a:pt x="6982802" y="1572558"/>
-                  </a:lnTo>
-                  <a:lnTo>
-                    <a:pt x="7060436" y="1537812"/>
-                  </a:lnTo>
-                  <a:lnTo>
-                    <a:pt x="7138070" y="1502434"/>
-                  </a:lnTo>
-                  <a:lnTo>
-                    <a:pt x="7215704" y="1466413"/>
-                  </a:lnTo>
-                  <a:lnTo>
-                    <a:pt x="7293338" y="1429737"/>
-                  </a:lnTo>
-                  <a:lnTo>
-                    <a:pt x="7370972" y="1392395"/>
-                  </a:lnTo>
-                  <a:lnTo>
-                    <a:pt x="7370972" y="3383379"/>
-                  </a:lnTo>
-                  <a:lnTo>
-                    <a:pt x="7293338" y="3379163"/>
-                  </a:lnTo>
-                  <a:lnTo>
-                    <a:pt x="7215704" y="3374770"/>
-                  </a:lnTo>
-                  <a:lnTo>
-                    <a:pt x="7138070" y="3370193"/>
-                  </a:lnTo>
-                  <a:lnTo>
-                    <a:pt x="7060436" y="3365423"/>
-                  </a:lnTo>
-                  <a:lnTo>
-                    <a:pt x="6982802" y="3360453"/>
-                  </a:lnTo>
-                  <a:lnTo>
-                    <a:pt x="6905168" y="3355274"/>
-                  </a:lnTo>
-                  <a:lnTo>
-                    <a:pt x="6827534" y="3349878"/>
-                  </a:lnTo>
-                  <a:lnTo>
-                    <a:pt x="6749900" y="3344255"/>
-                  </a:lnTo>
-                  <a:lnTo>
-                    <a:pt x="6672266" y="3338396"/>
-                  </a:lnTo>
-                  <a:lnTo>
-                    <a:pt x="6594632" y="3332291"/>
-                  </a:lnTo>
-                  <a:lnTo>
-                    <a:pt x="6516998" y="3325929"/>
-                  </a:lnTo>
-                  <a:lnTo>
-                    <a:pt x="6439364" y="3319300"/>
-                  </a:lnTo>
-                  <a:lnTo>
-                    <a:pt x="6361730" y="3312392"/>
-                  </a:lnTo>
-                  <a:lnTo>
-                    <a:pt x="6284096" y="3305195"/>
-                  </a:lnTo>
-                  <a:lnTo>
-                    <a:pt x="6206462" y="3297695"/>
-                  </a:lnTo>
-                  <a:lnTo>
-                    <a:pt x="6128827" y="3289880"/>
-                  </a:lnTo>
-                  <a:lnTo>
-                    <a:pt x="6051193" y="3281737"/>
-                  </a:lnTo>
-                  <a:lnTo>
-                    <a:pt x="5973559" y="3273252"/>
-                  </a:lnTo>
-                  <a:lnTo>
-                    <a:pt x="5895925" y="3264410"/>
-                  </a:lnTo>
-                  <a:lnTo>
-                    <a:pt x="5818291" y="3255197"/>
-                  </a:lnTo>
-                  <a:lnTo>
-                    <a:pt x="5740657" y="3245597"/>
-                  </a:lnTo>
-                  <a:lnTo>
-                    <a:pt x="5663023" y="3235594"/>
-                  </a:lnTo>
-                  <a:lnTo>
-                    <a:pt x="5585389" y="3225170"/>
-                  </a:lnTo>
-                  <a:lnTo>
-                    <a:pt x="5507755" y="3214309"/>
-                  </a:lnTo>
-                  <a:lnTo>
-                    <a:pt x="5430121" y="3202991"/>
-                  </a:lnTo>
-                  <a:lnTo>
-                    <a:pt x="5352487" y="3191199"/>
-                  </a:lnTo>
-                  <a:lnTo>
-                    <a:pt x="5274853" y="3178910"/>
-                  </a:lnTo>
-                  <a:lnTo>
-                    <a:pt x="5197219" y="3166106"/>
-                  </a:lnTo>
-                  <a:lnTo>
-                    <a:pt x="5119585" y="3152764"/>
-                  </a:lnTo>
-                  <a:lnTo>
-                    <a:pt x="5041951" y="3138861"/>
-                  </a:lnTo>
-                  <a:lnTo>
-                    <a:pt x="4964317" y="3124375"/>
-                  </a:lnTo>
-                  <a:lnTo>
-                    <a:pt x="4886683" y="3109280"/>
-                  </a:lnTo>
-                  <a:lnTo>
-                    <a:pt x="4809049" y="3093551"/>
-                  </a:lnTo>
-                  <a:lnTo>
-                    <a:pt x="4731415" y="3077161"/>
-                  </a:lnTo>
-                  <a:lnTo>
-                    <a:pt x="4653781" y="3060082"/>
-                  </a:lnTo>
-                  <a:lnTo>
-                    <a:pt x="4576147" y="3042287"/>
-                  </a:lnTo>
-                  <a:lnTo>
-                    <a:pt x="4498513" y="3023744"/>
-                  </a:lnTo>
-                  <a:lnTo>
-                    <a:pt x="4420879" y="3004422"/>
-                  </a:lnTo>
-                  <a:lnTo>
-                    <a:pt x="4343244" y="2984288"/>
-                  </a:lnTo>
-                  <a:lnTo>
-                    <a:pt x="4265610" y="2963309"/>
-                  </a:lnTo>
-                  <a:lnTo>
-                    <a:pt x="4187976" y="2941448"/>
-                  </a:lnTo>
-                  <a:lnTo>
-                    <a:pt x="4110342" y="2918670"/>
-                  </a:lnTo>
-                  <a:lnTo>
-                    <a:pt x="4032708" y="2894934"/>
-                  </a:lnTo>
-                  <a:lnTo>
-                    <a:pt x="3955074" y="2870202"/>
-                  </a:lnTo>
-                  <a:lnTo>
-                    <a:pt x="3877440" y="2844430"/>
-                  </a:lnTo>
-                  <a:lnTo>
-                    <a:pt x="3799806" y="2817576"/>
-                  </a:lnTo>
-                  <a:lnTo>
-                    <a:pt x="3722172" y="2789594"/>
-                  </a:lnTo>
-                  <a:lnTo>
-                    <a:pt x="3644538" y="2760437"/>
-                  </a:lnTo>
-                  <a:lnTo>
-                    <a:pt x="3566904" y="2730055"/>
-                  </a:lnTo>
-                  <a:lnTo>
-                    <a:pt x="3489270" y="2698397"/>
-                  </a:lnTo>
-                  <a:lnTo>
-                    <a:pt x="3411636" y="2665409"/>
-                  </a:lnTo>
-                  <a:lnTo>
-                    <a:pt x="3334002" y="2664262"/>
-                  </a:lnTo>
-                  <a:lnTo>
-                    <a:pt x="3256368" y="2678894"/>
-                  </a:lnTo>
-                  <a:lnTo>
-                    <a:pt x="3178734" y="2693266"/>
-                  </a:lnTo>
-                  <a:lnTo>
-                    <a:pt x="3101100" y="2707380"/>
-                  </a:lnTo>
-                  <a:lnTo>
-                    <a:pt x="3023466" y="2721243"/>
-                  </a:lnTo>
-                  <a:lnTo>
-                    <a:pt x="2945832" y="2734858"/>
-                  </a:lnTo>
-                  <a:lnTo>
-                    <a:pt x="2868198" y="2748230"/>
-                  </a:lnTo>
-                  <a:lnTo>
-                    <a:pt x="2790564" y="2761363"/>
-                  </a:lnTo>
-                  <a:lnTo>
-                    <a:pt x="2712930" y="2774262"/>
-                  </a:lnTo>
-                  <a:lnTo>
-                    <a:pt x="2635295" y="2786930"/>
-                  </a:lnTo>
-                  <a:lnTo>
-                    <a:pt x="2557661" y="2799372"/>
-                  </a:lnTo>
-                  <a:lnTo>
-                    <a:pt x="2480027" y="2811593"/>
-                  </a:lnTo>
-                  <a:lnTo>
-                    <a:pt x="2402393" y="2823594"/>
-                  </a:lnTo>
-                  <a:lnTo>
-                    <a:pt x="2324759" y="2835382"/>
-                  </a:lnTo>
-                  <a:lnTo>
-                    <a:pt x="2247125" y="2846959"/>
-                  </a:lnTo>
-                  <a:lnTo>
-                    <a:pt x="2169491" y="2858329"/>
-                  </a:lnTo>
-                  <a:lnTo>
-                    <a:pt x="2091857" y="2869497"/>
-                  </a:lnTo>
-                  <a:lnTo>
-                    <a:pt x="2014223" y="2880464"/>
-                  </a:lnTo>
-                  <a:lnTo>
-                    <a:pt x="1936589" y="2891237"/>
-                  </a:lnTo>
-                  <a:lnTo>
-                    <a:pt x="1858955" y="2901816"/>
-                  </a:lnTo>
-                  <a:lnTo>
-                    <a:pt x="1781321" y="2912207"/>
-                  </a:lnTo>
-                  <a:lnTo>
-                    <a:pt x="1703687" y="2922412"/>
-                  </a:lnTo>
-                  <a:lnTo>
-                    <a:pt x="1626053" y="2932435"/>
-                  </a:lnTo>
-                  <a:lnTo>
-                    <a:pt x="1548419" y="2942280"/>
-                  </a:lnTo>
-                  <a:lnTo>
-                    <a:pt x="1470785" y="2951948"/>
-                  </a:lnTo>
-                  <a:lnTo>
-                    <a:pt x="1393151" y="2961444"/>
-                  </a:lnTo>
-                  <a:lnTo>
-                    <a:pt x="1315517" y="2970770"/>
-                  </a:lnTo>
-                  <a:lnTo>
-                    <a:pt x="1237883" y="2979929"/>
-                  </a:lnTo>
-                  <a:lnTo>
-                    <a:pt x="1160249" y="2988925"/>
-                  </a:lnTo>
-                  <a:lnTo>
-                    <a:pt x="1082615" y="2997761"/>
-                  </a:lnTo>
-                  <a:lnTo>
-                    <a:pt x="1004981" y="3006438"/>
-                  </a:lnTo>
-                  <a:lnTo>
-                    <a:pt x="927346" y="3014961"/>
-                  </a:lnTo>
-                  <a:lnTo>
-                    <a:pt x="849712" y="3023332"/>
-                  </a:lnTo>
-                  <a:lnTo>
-                    <a:pt x="772078" y="3031553"/>
-                  </a:lnTo>
-                  <a:lnTo>
-                    <a:pt x="694444" y="3039627"/>
-                  </a:lnTo>
-                  <a:lnTo>
-                    <a:pt x="616810" y="3047557"/>
-                  </a:lnTo>
-                  <a:lnTo>
-                    <a:pt x="539176" y="3055346"/>
-                  </a:lnTo>
-                  <a:lnTo>
-                    <a:pt x="461542" y="3062995"/>
-                  </a:lnTo>
-                  <a:lnTo>
-                    <a:pt x="383908" y="3070508"/>
-                  </a:lnTo>
-                  <a:lnTo>
-                    <a:pt x="306274" y="3077887"/>
-                  </a:lnTo>
-                  <a:lnTo>
-                    <a:pt x="228640" y="3085133"/>
-                  </a:lnTo>
-                  <a:lnTo>
-                    <a:pt x="151006" y="3092251"/>
-                  </a:lnTo>
-                  <a:lnTo>
-                    <a:pt x="73372" y="3099241"/>
-                  </a:lnTo>
-                  <a:lnTo>
-                    <a:pt x="0" y="3105730"/>
+                    <a:pt x="684018" y="27453"/>
+                  </a:lnTo>
+                  <a:lnTo>
+                    <a:pt x="760486" y="157333"/>
+                  </a:lnTo>
+                  <a:lnTo>
+                    <a:pt x="836955" y="281977"/>
+                  </a:lnTo>
+                  <a:lnTo>
+                    <a:pt x="913423" y="401597"/>
+                  </a:lnTo>
+                  <a:lnTo>
+                    <a:pt x="989892" y="516394"/>
+                  </a:lnTo>
+                  <a:lnTo>
+                    <a:pt x="1066360" y="626564"/>
+                  </a:lnTo>
+                  <a:lnTo>
+                    <a:pt x="1142828" y="732293"/>
+                  </a:lnTo>
+                  <a:lnTo>
+                    <a:pt x="1219297" y="833760"/>
+                  </a:lnTo>
+                  <a:lnTo>
+                    <a:pt x="1295765" y="931137"/>
+                  </a:lnTo>
+                  <a:lnTo>
+                    <a:pt x="1372234" y="1024589"/>
+                  </a:lnTo>
+                  <a:lnTo>
+                    <a:pt x="1448702" y="1114273"/>
+                  </a:lnTo>
+                  <a:lnTo>
+                    <a:pt x="1525171" y="1200342"/>
+                  </a:lnTo>
+                  <a:lnTo>
+                    <a:pt x="1601639" y="1282942"/>
+                  </a:lnTo>
+                  <a:lnTo>
+                    <a:pt x="1678107" y="1362212"/>
+                  </a:lnTo>
+                  <a:lnTo>
+                    <a:pt x="1754576" y="1438286"/>
+                  </a:lnTo>
+                  <a:lnTo>
+                    <a:pt x="1831044" y="1511294"/>
+                  </a:lnTo>
+                  <a:lnTo>
+                    <a:pt x="1907513" y="1581359"/>
+                  </a:lnTo>
+                  <a:lnTo>
+                    <a:pt x="1983981" y="1648599"/>
+                  </a:lnTo>
+                  <a:lnTo>
+                    <a:pt x="2060450" y="1713129"/>
+                  </a:lnTo>
+                  <a:lnTo>
+                    <a:pt x="2136918" y="1775058"/>
+                  </a:lnTo>
+                  <a:lnTo>
+                    <a:pt x="2213386" y="1834490"/>
+                  </a:lnTo>
+                  <a:lnTo>
+                    <a:pt x="2289855" y="1891527"/>
+                  </a:lnTo>
+                  <a:lnTo>
+                    <a:pt x="2366323" y="1946264"/>
+                  </a:lnTo>
+                  <a:lnTo>
+                    <a:pt x="2442792" y="1998795"/>
+                  </a:lnTo>
+                  <a:lnTo>
+                    <a:pt x="2519260" y="2049208"/>
+                  </a:lnTo>
+                  <a:lnTo>
+                    <a:pt x="2595729" y="2097589"/>
+                  </a:lnTo>
+                  <a:lnTo>
+                    <a:pt x="2672197" y="2144020"/>
+                  </a:lnTo>
+                  <a:lnTo>
+                    <a:pt x="2748666" y="2188579"/>
+                  </a:lnTo>
+                  <a:lnTo>
+                    <a:pt x="2825134" y="2231342"/>
+                  </a:lnTo>
+                  <a:lnTo>
+                    <a:pt x="2901602" y="2272381"/>
+                  </a:lnTo>
+                  <a:lnTo>
+                    <a:pt x="2978071" y="2311766"/>
+                  </a:lnTo>
+                  <a:lnTo>
+                    <a:pt x="3054539" y="2349563"/>
+                  </a:lnTo>
+                  <a:lnTo>
+                    <a:pt x="3131008" y="2385836"/>
+                  </a:lnTo>
+                  <a:lnTo>
+                    <a:pt x="3207476" y="2420648"/>
+                  </a:lnTo>
+                  <a:lnTo>
+                    <a:pt x="3283945" y="2454056"/>
+                  </a:lnTo>
+                  <a:lnTo>
+                    <a:pt x="3360413" y="2471150"/>
+                  </a:lnTo>
+                  <a:lnTo>
+                    <a:pt x="3436881" y="2457001"/>
+                  </a:lnTo>
+                  <a:lnTo>
+                    <a:pt x="3513350" y="2442595"/>
+                  </a:lnTo>
+                  <a:lnTo>
+                    <a:pt x="3589818" y="2427927"/>
+                  </a:lnTo>
+                  <a:lnTo>
+                    <a:pt x="3666287" y="2412992"/>
+                  </a:lnTo>
+                  <a:lnTo>
+                    <a:pt x="3742755" y="2397786"/>
+                  </a:lnTo>
+                  <a:lnTo>
+                    <a:pt x="3819224" y="2382303"/>
+                  </a:lnTo>
+                  <a:lnTo>
+                    <a:pt x="3895692" y="2366538"/>
+                  </a:lnTo>
+                  <a:lnTo>
+                    <a:pt x="3972160" y="2350487"/>
+                  </a:lnTo>
+                  <a:lnTo>
+                    <a:pt x="4048629" y="2334145"/>
+                  </a:lnTo>
+                  <a:lnTo>
+                    <a:pt x="4125097" y="2317505"/>
+                  </a:lnTo>
+                  <a:lnTo>
+                    <a:pt x="4201566" y="2300563"/>
+                  </a:lnTo>
+                  <a:lnTo>
+                    <a:pt x="4278034" y="2283312"/>
+                  </a:lnTo>
+                  <a:lnTo>
+                    <a:pt x="4354503" y="2265748"/>
+                  </a:lnTo>
+                  <a:lnTo>
+                    <a:pt x="4430971" y="2247865"/>
+                  </a:lnTo>
+                  <a:lnTo>
+                    <a:pt x="4507439" y="2229656"/>
+                  </a:lnTo>
+                  <a:lnTo>
+                    <a:pt x="4583908" y="2211117"/>
+                  </a:lnTo>
+                  <a:lnTo>
+                    <a:pt x="4660376" y="2192240"/>
+                  </a:lnTo>
+                  <a:lnTo>
+                    <a:pt x="4736845" y="2173021"/>
+                  </a:lnTo>
+                  <a:lnTo>
+                    <a:pt x="4813313" y="2153451"/>
+                  </a:lnTo>
+                  <a:lnTo>
+                    <a:pt x="4889782" y="2133526"/>
+                  </a:lnTo>
+                  <a:lnTo>
+                    <a:pt x="4966250" y="2113239"/>
+                  </a:lnTo>
+                  <a:lnTo>
+                    <a:pt x="5042719" y="2092583"/>
+                  </a:lnTo>
+                  <a:lnTo>
+                    <a:pt x="5119187" y="2071552"/>
+                  </a:lnTo>
+                  <a:lnTo>
+                    <a:pt x="5195655" y="2050138"/>
+                  </a:lnTo>
+                  <a:lnTo>
+                    <a:pt x="5272124" y="2028335"/>
+                  </a:lnTo>
+                  <a:lnTo>
+                    <a:pt x="5348592" y="2006135"/>
+                  </a:lnTo>
+                  <a:lnTo>
+                    <a:pt x="5425061" y="1983532"/>
+                  </a:lnTo>
+                  <a:lnTo>
+                    <a:pt x="5501529" y="1960518"/>
+                  </a:lnTo>
+                  <a:lnTo>
+                    <a:pt x="5577998" y="1937085"/>
+                  </a:lnTo>
+                  <a:lnTo>
+                    <a:pt x="5654466" y="1913227"/>
+                  </a:lnTo>
+                  <a:lnTo>
+                    <a:pt x="5730934" y="1888934"/>
+                  </a:lnTo>
+                  <a:lnTo>
+                    <a:pt x="5807403" y="1864200"/>
+                  </a:lnTo>
+                  <a:lnTo>
+                    <a:pt x="5883871" y="1839017"/>
+                  </a:lnTo>
+                  <a:lnTo>
+                    <a:pt x="5960340" y="1813375"/>
+                  </a:lnTo>
+                  <a:lnTo>
+                    <a:pt x="6036808" y="1787268"/>
+                  </a:lnTo>
+                  <a:lnTo>
+                    <a:pt x="6113277" y="1760685"/>
+                  </a:lnTo>
+                  <a:lnTo>
+                    <a:pt x="6189745" y="1733620"/>
+                  </a:lnTo>
+                  <a:lnTo>
+                    <a:pt x="6266213" y="1706062"/>
+                  </a:lnTo>
+                  <a:lnTo>
+                    <a:pt x="6342682" y="1678003"/>
+                  </a:lnTo>
+                  <a:lnTo>
+                    <a:pt x="6419150" y="1649435"/>
+                  </a:lnTo>
+                  <a:lnTo>
+                    <a:pt x="6495619" y="1620346"/>
+                  </a:lnTo>
+                  <a:lnTo>
+                    <a:pt x="6572087" y="1590729"/>
+                  </a:lnTo>
+                  <a:lnTo>
+                    <a:pt x="6648556" y="1560574"/>
+                  </a:lnTo>
+                  <a:lnTo>
+                    <a:pt x="6725024" y="1529870"/>
+                  </a:lnTo>
+                  <a:lnTo>
+                    <a:pt x="6801492" y="1498608"/>
+                  </a:lnTo>
+                  <a:lnTo>
+                    <a:pt x="6877961" y="1466778"/>
+                  </a:lnTo>
+                  <a:lnTo>
+                    <a:pt x="6954429" y="1434369"/>
+                  </a:lnTo>
+                  <a:lnTo>
+                    <a:pt x="7030898" y="1401371"/>
+                  </a:lnTo>
+                  <a:lnTo>
+                    <a:pt x="7107366" y="1367773"/>
+                  </a:lnTo>
+                  <a:lnTo>
+                    <a:pt x="7183835" y="1333564"/>
+                  </a:lnTo>
+                  <a:lnTo>
+                    <a:pt x="7260303" y="1298733"/>
+                  </a:lnTo>
+                  <a:lnTo>
+                    <a:pt x="7260303" y="3155792"/>
+                  </a:lnTo>
+                  <a:lnTo>
+                    <a:pt x="7183835" y="3151859"/>
+                  </a:lnTo>
+                  <a:lnTo>
+                    <a:pt x="7107366" y="3147762"/>
+                  </a:lnTo>
+                  <a:lnTo>
+                    <a:pt x="7030898" y="3143492"/>
+                  </a:lnTo>
+                  <a:lnTo>
+                    <a:pt x="6954429" y="3139044"/>
+                  </a:lnTo>
+                  <a:lnTo>
+                    <a:pt x="6877961" y="3134408"/>
+                  </a:lnTo>
+                  <a:lnTo>
+                    <a:pt x="6801492" y="3129577"/>
+                  </a:lnTo>
+                  <a:lnTo>
+                    <a:pt x="6725024" y="3124544"/>
+                  </a:lnTo>
+                  <a:lnTo>
+                    <a:pt x="6648556" y="3119299"/>
+                  </a:lnTo>
+                  <a:lnTo>
+                    <a:pt x="6572087" y="3113834"/>
+                  </a:lnTo>
+                  <a:lnTo>
+                    <a:pt x="6495619" y="3108140"/>
+                  </a:lnTo>
+                  <a:lnTo>
+                    <a:pt x="6419150" y="3102206"/>
+                  </a:lnTo>
+                  <a:lnTo>
+                    <a:pt x="6342682" y="3096023"/>
+                  </a:lnTo>
+                  <a:lnTo>
+                    <a:pt x="6266213" y="3089580"/>
+                  </a:lnTo>
+                  <a:lnTo>
+                    <a:pt x="6189745" y="3082866"/>
+                  </a:lnTo>
+                  <a:lnTo>
+                    <a:pt x="6113277" y="3075871"/>
+                  </a:lnTo>
+                  <a:lnTo>
+                    <a:pt x="6036808" y="3068582"/>
+                  </a:lnTo>
+                  <a:lnTo>
+                    <a:pt x="5960340" y="3060986"/>
+                  </a:lnTo>
+                  <a:lnTo>
+                    <a:pt x="5883871" y="3053072"/>
+                  </a:lnTo>
+                  <a:lnTo>
+                    <a:pt x="5807403" y="3044825"/>
+                  </a:lnTo>
+                  <a:lnTo>
+                    <a:pt x="5730934" y="3036232"/>
+                  </a:lnTo>
+                  <a:lnTo>
+                    <a:pt x="5654466" y="3027277"/>
+                  </a:lnTo>
+                  <a:lnTo>
+                    <a:pt x="5577998" y="3017947"/>
+                  </a:lnTo>
+                  <a:lnTo>
+                    <a:pt x="5501529" y="3008225"/>
+                  </a:lnTo>
+                  <a:lnTo>
+                    <a:pt x="5425061" y="2998094"/>
+                  </a:lnTo>
+                  <a:lnTo>
+                    <a:pt x="5348592" y="2987538"/>
+                  </a:lnTo>
+                  <a:lnTo>
+                    <a:pt x="5272124" y="2976538"/>
+                  </a:lnTo>
+                  <a:lnTo>
+                    <a:pt x="5195655" y="2965077"/>
+                  </a:lnTo>
+                  <a:lnTo>
+                    <a:pt x="5119187" y="2953134"/>
+                  </a:lnTo>
+                  <a:lnTo>
+                    <a:pt x="5042719" y="2940689"/>
+                  </a:lnTo>
+                  <a:lnTo>
+                    <a:pt x="4966250" y="2927722"/>
+                  </a:lnTo>
+                  <a:lnTo>
+                    <a:pt x="4889782" y="2914209"/>
+                  </a:lnTo>
+                  <a:lnTo>
+                    <a:pt x="4813313" y="2900130"/>
+                  </a:lnTo>
+                  <a:lnTo>
+                    <a:pt x="4736845" y="2885459"/>
+                  </a:lnTo>
+                  <a:lnTo>
+                    <a:pt x="4660376" y="2870171"/>
+                  </a:lnTo>
+                  <a:lnTo>
+                    <a:pt x="4583908" y="2854242"/>
+                  </a:lnTo>
+                  <a:lnTo>
+                    <a:pt x="4507439" y="2837643"/>
+                  </a:lnTo>
+                  <a:lnTo>
+                    <a:pt x="4430971" y="2820348"/>
+                  </a:lnTo>
+                  <a:lnTo>
+                    <a:pt x="4354503" y="2802325"/>
+                  </a:lnTo>
+                  <a:lnTo>
+                    <a:pt x="4278034" y="2783546"/>
+                  </a:lnTo>
+                  <a:lnTo>
+                    <a:pt x="4201566" y="2763978"/>
+                  </a:lnTo>
+                  <a:lnTo>
+                    <a:pt x="4125097" y="2743588"/>
+                  </a:lnTo>
+                  <a:lnTo>
+                    <a:pt x="4048629" y="2722341"/>
+                  </a:lnTo>
+                  <a:lnTo>
+                    <a:pt x="3972160" y="2700203"/>
+                  </a:lnTo>
+                  <a:lnTo>
+                    <a:pt x="3895692" y="2677134"/>
+                  </a:lnTo>
+                  <a:lnTo>
+                    <a:pt x="3819224" y="2653096"/>
+                  </a:lnTo>
+                  <a:lnTo>
+                    <a:pt x="3742755" y="2628048"/>
+                  </a:lnTo>
+                  <a:lnTo>
+                    <a:pt x="3666287" y="2601949"/>
+                  </a:lnTo>
+                  <a:lnTo>
+                    <a:pt x="3589818" y="2574753"/>
+                  </a:lnTo>
+                  <a:lnTo>
+                    <a:pt x="3513350" y="2546415"/>
+                  </a:lnTo>
+                  <a:lnTo>
+                    <a:pt x="3436881" y="2516886"/>
+                  </a:lnTo>
+                  <a:lnTo>
+                    <a:pt x="3360413" y="2486117"/>
+                  </a:lnTo>
+                  <a:lnTo>
+                    <a:pt x="3283945" y="2485047"/>
+                  </a:lnTo>
+                  <a:lnTo>
+                    <a:pt x="3207476" y="2498695"/>
+                  </a:lnTo>
+                  <a:lnTo>
+                    <a:pt x="3131008" y="2512099"/>
+                  </a:lnTo>
+                  <a:lnTo>
+                    <a:pt x="3054539" y="2525265"/>
+                  </a:lnTo>
+                  <a:lnTo>
+                    <a:pt x="2978071" y="2538195"/>
+                  </a:lnTo>
+                  <a:lnTo>
+                    <a:pt x="2901602" y="2550894"/>
+                  </a:lnTo>
+                  <a:lnTo>
+                    <a:pt x="2825134" y="2563367"/>
+                  </a:lnTo>
+                  <a:lnTo>
+                    <a:pt x="2748666" y="2575616"/>
+                  </a:lnTo>
+                  <a:lnTo>
+                    <a:pt x="2672197" y="2587647"/>
+                  </a:lnTo>
+                  <a:lnTo>
+                    <a:pt x="2595729" y="2599464"/>
+                  </a:lnTo>
+                  <a:lnTo>
+                    <a:pt x="2519260" y="2611069"/>
+                  </a:lnTo>
+                  <a:lnTo>
+                    <a:pt x="2442792" y="2622467"/>
+                  </a:lnTo>
+                  <a:lnTo>
+                    <a:pt x="2366323" y="2633662"/>
+                  </a:lnTo>
+                  <a:lnTo>
+                    <a:pt x="2289855" y="2644656"/>
+                  </a:lnTo>
+                  <a:lnTo>
+                    <a:pt x="2213386" y="2655454"/>
+                  </a:lnTo>
+                  <a:lnTo>
+                    <a:pt x="2136918" y="2666060"/>
+                  </a:lnTo>
+                  <a:lnTo>
+                    <a:pt x="2060450" y="2676476"/>
+                  </a:lnTo>
+                  <a:lnTo>
+                    <a:pt x="1983981" y="2686706"/>
+                  </a:lnTo>
+                  <a:lnTo>
+                    <a:pt x="1907513" y="2696754"/>
+                  </a:lnTo>
+                  <a:lnTo>
+                    <a:pt x="1831044" y="2706622"/>
+                  </a:lnTo>
+                  <a:lnTo>
+                    <a:pt x="1754576" y="2716314"/>
+                  </a:lnTo>
+                  <a:lnTo>
+                    <a:pt x="1678107" y="2725832"/>
+                  </a:lnTo>
+                  <a:lnTo>
+                    <a:pt x="1601639" y="2735181"/>
+                  </a:lnTo>
+                  <a:lnTo>
+                    <a:pt x="1525171" y="2744363"/>
+                  </a:lnTo>
+                  <a:lnTo>
+                    <a:pt x="1448702" y="2753381"/>
+                  </a:lnTo>
+                  <a:lnTo>
+                    <a:pt x="1372234" y="2762238"/>
+                  </a:lnTo>
+                  <a:lnTo>
+                    <a:pt x="1295765" y="2770937"/>
+                  </a:lnTo>
+                  <a:lnTo>
+                    <a:pt x="1219297" y="2779480"/>
+                  </a:lnTo>
+                  <a:lnTo>
+                    <a:pt x="1142828" y="2787871"/>
+                  </a:lnTo>
+                  <a:lnTo>
+                    <a:pt x="1066360" y="2796112"/>
+                  </a:lnTo>
+                  <a:lnTo>
+                    <a:pt x="989892" y="2804206"/>
+                  </a:lnTo>
+                  <a:lnTo>
+                    <a:pt x="913423" y="2812156"/>
+                  </a:lnTo>
+                  <a:lnTo>
+                    <a:pt x="836955" y="2819963"/>
+                  </a:lnTo>
+                  <a:lnTo>
+                    <a:pt x="760486" y="2827631"/>
+                  </a:lnTo>
+                  <a:lnTo>
+                    <a:pt x="684018" y="2835162"/>
+                  </a:lnTo>
+                  <a:lnTo>
+                    <a:pt x="607549" y="2842559"/>
+                  </a:lnTo>
+                  <a:lnTo>
+                    <a:pt x="531081" y="2849824"/>
+                  </a:lnTo>
+                  <a:lnTo>
+                    <a:pt x="454613" y="2856959"/>
+                  </a:lnTo>
+                  <a:lnTo>
+                    <a:pt x="378144" y="2863966"/>
+                  </a:lnTo>
+                  <a:lnTo>
+                    <a:pt x="301676" y="2870848"/>
+                  </a:lnTo>
+                  <a:lnTo>
+                    <a:pt x="225207" y="2877608"/>
+                  </a:lnTo>
+                  <a:lnTo>
+                    <a:pt x="148739" y="2884247"/>
+                  </a:lnTo>
+                  <a:lnTo>
+                    <a:pt x="72270" y="2890767"/>
+                  </a:lnTo>
+                  <a:lnTo>
+                    <a:pt x="0" y="2896819"/>
                   </a:lnTo>
                   <a:close/>
                 </a:path>
@@ -3585,276 +3585,276 @@
           </p:nvSpPr>
           <p:spPr>
             <a:xfrm>
-              <a:off x="1496214" y="2073503"/>
-              <a:ext cx="6692276" cy="2649363"/>
+              <a:off x="1584151" y="2209169"/>
+              <a:ext cx="6591797" cy="2471150"/>
             </a:xfrm>
             <a:custGeom>
               <a:avLst/>
               <a:pathLst>
-                <a:path w="6692276" h="2649363">
+                <a:path w="6591797" h="2471150">
                   <a:moveTo>
                     <a:pt x="0" y="0"/>
                   </a:moveTo>
                   <a:lnTo>
-                    <a:pt x="15748" y="29433"/>
-                  </a:lnTo>
-                  <a:lnTo>
-                    <a:pt x="93382" y="168679"/>
-                  </a:lnTo>
-                  <a:lnTo>
-                    <a:pt x="171016" y="302312"/>
-                  </a:lnTo>
-                  <a:lnTo>
-                    <a:pt x="248650" y="430559"/>
-                  </a:lnTo>
-                  <a:lnTo>
-                    <a:pt x="326284" y="553635"/>
-                  </a:lnTo>
-                  <a:lnTo>
-                    <a:pt x="403918" y="671751"/>
-                  </a:lnTo>
-                  <a:lnTo>
-                    <a:pt x="481552" y="785105"/>
-                  </a:lnTo>
-                  <a:lnTo>
-                    <a:pt x="559186" y="893889"/>
-                  </a:lnTo>
-                  <a:lnTo>
-                    <a:pt x="636820" y="998288"/>
-                  </a:lnTo>
-                  <a:lnTo>
-                    <a:pt x="714454" y="1098479"/>
-                  </a:lnTo>
-                  <a:lnTo>
-                    <a:pt x="792088" y="1194632"/>
-                  </a:lnTo>
-                  <a:lnTo>
-                    <a:pt x="869722" y="1286908"/>
-                  </a:lnTo>
-                  <a:lnTo>
-                    <a:pt x="947357" y="1375464"/>
-                  </a:lnTo>
-                  <a:lnTo>
-                    <a:pt x="1024991" y="1460451"/>
-                  </a:lnTo>
-                  <a:lnTo>
-                    <a:pt x="1102625" y="1542012"/>
-                  </a:lnTo>
-                  <a:lnTo>
-                    <a:pt x="1180259" y="1620285"/>
-                  </a:lnTo>
-                  <a:lnTo>
-                    <a:pt x="1257893" y="1695402"/>
-                  </a:lnTo>
-                  <a:lnTo>
-                    <a:pt x="1335527" y="1767492"/>
-                  </a:lnTo>
-                  <a:lnTo>
-                    <a:pt x="1413161" y="1836676"/>
-                  </a:lnTo>
-                  <a:lnTo>
-                    <a:pt x="1490795" y="1903070"/>
-                  </a:lnTo>
-                  <a:lnTo>
-                    <a:pt x="1568429" y="1966789"/>
-                  </a:lnTo>
-                  <a:lnTo>
-                    <a:pt x="1646063" y="2027939"/>
-                  </a:lnTo>
-                  <a:lnTo>
-                    <a:pt x="1723697" y="2086624"/>
-                  </a:lnTo>
-                  <a:lnTo>
-                    <a:pt x="1801331" y="2142943"/>
-                  </a:lnTo>
-                  <a:lnTo>
-                    <a:pt x="1878965" y="2196992"/>
-                  </a:lnTo>
-                  <a:lnTo>
-                    <a:pt x="1956599" y="2248862"/>
-                  </a:lnTo>
-                  <a:lnTo>
-                    <a:pt x="2034233" y="2298641"/>
-                  </a:lnTo>
-                  <a:lnTo>
-                    <a:pt x="2111867" y="2346414"/>
-                  </a:lnTo>
-                  <a:lnTo>
-                    <a:pt x="2189501" y="2392261"/>
-                  </a:lnTo>
-                  <a:lnTo>
-                    <a:pt x="2267135" y="2436259"/>
-                  </a:lnTo>
-                  <a:lnTo>
-                    <a:pt x="2344769" y="2478484"/>
-                  </a:lnTo>
-                  <a:lnTo>
-                    <a:pt x="2422403" y="2519007"/>
-                  </a:lnTo>
-                  <a:lnTo>
-                    <a:pt x="2500037" y="2557897"/>
-                  </a:lnTo>
-                  <a:lnTo>
-                    <a:pt x="2577671" y="2595219"/>
-                  </a:lnTo>
-                  <a:lnTo>
-                    <a:pt x="2655306" y="2631036"/>
-                  </a:lnTo>
-                  <a:lnTo>
-                    <a:pt x="2732940" y="2649363"/>
-                  </a:lnTo>
-                  <a:lnTo>
-                    <a:pt x="2810574" y="2634194"/>
-                  </a:lnTo>
-                  <a:lnTo>
-                    <a:pt x="2888208" y="2618749"/>
-                  </a:lnTo>
-                  <a:lnTo>
-                    <a:pt x="2965842" y="2603023"/>
-                  </a:lnTo>
-                  <a:lnTo>
-                    <a:pt x="3043476" y="2587011"/>
-                  </a:lnTo>
-                  <a:lnTo>
-                    <a:pt x="3121110" y="2570708"/>
-                  </a:lnTo>
-                  <a:lnTo>
-                    <a:pt x="3198744" y="2554108"/>
-                  </a:lnTo>
-                  <a:lnTo>
-                    <a:pt x="3276378" y="2537207"/>
-                  </a:lnTo>
-                  <a:lnTo>
-                    <a:pt x="3354012" y="2519999"/>
-                  </a:lnTo>
-                  <a:lnTo>
-                    <a:pt x="3431646" y="2502477"/>
-                  </a:lnTo>
-                  <a:lnTo>
-                    <a:pt x="3509280" y="2484637"/>
-                  </a:lnTo>
-                  <a:lnTo>
-                    <a:pt x="3586914" y="2466473"/>
-                  </a:lnTo>
-                  <a:lnTo>
-                    <a:pt x="3664548" y="2447979"/>
-                  </a:lnTo>
-                  <a:lnTo>
-                    <a:pt x="3742182" y="2429148"/>
-                  </a:lnTo>
-                  <a:lnTo>
-                    <a:pt x="3819816" y="2409975"/>
-                  </a:lnTo>
-                  <a:lnTo>
-                    <a:pt x="3897450" y="2390453"/>
-                  </a:lnTo>
-                  <a:lnTo>
-                    <a:pt x="3975084" y="2370577"/>
-                  </a:lnTo>
-                  <a:lnTo>
-                    <a:pt x="4052718" y="2350339"/>
-                  </a:lnTo>
-                  <a:lnTo>
-                    <a:pt x="4130352" y="2329733"/>
-                  </a:lnTo>
-                  <a:lnTo>
-                    <a:pt x="4207986" y="2308753"/>
-                  </a:lnTo>
-                  <a:lnTo>
-                    <a:pt x="4285620" y="2287391"/>
-                  </a:lnTo>
-                  <a:lnTo>
-                    <a:pt x="4363255" y="2265641"/>
-                  </a:lnTo>
-                  <a:lnTo>
-                    <a:pt x="4440889" y="2243495"/>
-                  </a:lnTo>
-                  <a:lnTo>
-                    <a:pt x="4518523" y="2220947"/>
-                  </a:lnTo>
-                  <a:lnTo>
-                    <a:pt x="4596157" y="2197988"/>
-                  </a:lnTo>
-                  <a:lnTo>
-                    <a:pt x="4673791" y="2174613"/>
-                  </a:lnTo>
-                  <a:lnTo>
-                    <a:pt x="4751425" y="2150812"/>
-                  </a:lnTo>
-                  <a:lnTo>
-                    <a:pt x="4829059" y="2126579"/>
-                  </a:lnTo>
-                  <a:lnTo>
-                    <a:pt x="4906693" y="2101905"/>
-                  </a:lnTo>
-                  <a:lnTo>
-                    <a:pt x="4984327" y="2076783"/>
-                  </a:lnTo>
-                  <a:lnTo>
-                    <a:pt x="5061961" y="2051204"/>
-                  </a:lnTo>
-                  <a:lnTo>
-                    <a:pt x="5139595" y="2025159"/>
-                  </a:lnTo>
-                  <a:lnTo>
-                    <a:pt x="5217229" y="1998642"/>
-                  </a:lnTo>
-                  <a:lnTo>
-                    <a:pt x="5294863" y="1971642"/>
-                  </a:lnTo>
-                  <a:lnTo>
-                    <a:pt x="5372497" y="1944151"/>
-                  </a:lnTo>
-                  <a:lnTo>
-                    <a:pt x="5450131" y="1916161"/>
-                  </a:lnTo>
-                  <a:lnTo>
-                    <a:pt x="5527765" y="1887661"/>
-                  </a:lnTo>
-                  <a:lnTo>
-                    <a:pt x="5605399" y="1858644"/>
-                  </a:lnTo>
-                  <a:lnTo>
-                    <a:pt x="5683033" y="1829099"/>
-                  </a:lnTo>
-                  <a:lnTo>
-                    <a:pt x="5760667" y="1799017"/>
-                  </a:lnTo>
-                  <a:lnTo>
-                    <a:pt x="5838301" y="1768388"/>
-                  </a:lnTo>
-                  <a:lnTo>
-                    <a:pt x="5915935" y="1737202"/>
-                  </a:lnTo>
-                  <a:lnTo>
-                    <a:pt x="5993569" y="1705449"/>
-                  </a:lnTo>
-                  <a:lnTo>
-                    <a:pt x="6071204" y="1673119"/>
-                  </a:lnTo>
-                  <a:lnTo>
-                    <a:pt x="6148838" y="1640201"/>
-                  </a:lnTo>
-                  <a:lnTo>
-                    <a:pt x="6226472" y="1606684"/>
-                  </a:lnTo>
-                  <a:lnTo>
-                    <a:pt x="6304106" y="1572558"/>
-                  </a:lnTo>
-                  <a:lnTo>
-                    <a:pt x="6381740" y="1537812"/>
-                  </a:lnTo>
-                  <a:lnTo>
-                    <a:pt x="6459374" y="1502434"/>
-                  </a:lnTo>
-                  <a:lnTo>
-                    <a:pt x="6537008" y="1466413"/>
-                  </a:lnTo>
-                  <a:lnTo>
-                    <a:pt x="6614642" y="1429737"/>
-                  </a:lnTo>
-                  <a:lnTo>
-                    <a:pt x="6692276" y="1392395"/>
+                    <a:pt x="15512" y="27453"/>
+                  </a:lnTo>
+                  <a:lnTo>
+                    <a:pt x="91980" y="157333"/>
+                  </a:lnTo>
+                  <a:lnTo>
+                    <a:pt x="168448" y="281977"/>
+                  </a:lnTo>
+                  <a:lnTo>
+                    <a:pt x="244917" y="401597"/>
+                  </a:lnTo>
+                  <a:lnTo>
+                    <a:pt x="321385" y="516394"/>
+                  </a:lnTo>
+                  <a:lnTo>
+                    <a:pt x="397854" y="626564"/>
+                  </a:lnTo>
+                  <a:lnTo>
+                    <a:pt x="474322" y="732293"/>
+                  </a:lnTo>
+                  <a:lnTo>
+                    <a:pt x="550791" y="833760"/>
+                  </a:lnTo>
+                  <a:lnTo>
+                    <a:pt x="627259" y="931137"/>
+                  </a:lnTo>
+                  <a:lnTo>
+                    <a:pt x="703727" y="1024589"/>
+                  </a:lnTo>
+                  <a:lnTo>
+                    <a:pt x="780196" y="1114273"/>
+                  </a:lnTo>
+                  <a:lnTo>
+                    <a:pt x="856664" y="1200342"/>
+                  </a:lnTo>
+                  <a:lnTo>
+                    <a:pt x="933133" y="1282942"/>
+                  </a:lnTo>
+                  <a:lnTo>
+                    <a:pt x="1009601" y="1362212"/>
+                  </a:lnTo>
+                  <a:lnTo>
+                    <a:pt x="1086070" y="1438286"/>
+                  </a:lnTo>
+                  <a:lnTo>
+                    <a:pt x="1162538" y="1511294"/>
+                  </a:lnTo>
+                  <a:lnTo>
+                    <a:pt x="1239006" y="1581359"/>
+                  </a:lnTo>
+                  <a:lnTo>
+                    <a:pt x="1315475" y="1648599"/>
+                  </a:lnTo>
+                  <a:lnTo>
+                    <a:pt x="1391943" y="1713129"/>
+                  </a:lnTo>
+                  <a:lnTo>
+                    <a:pt x="1468412" y="1775058"/>
+                  </a:lnTo>
+                  <a:lnTo>
+                    <a:pt x="1544880" y="1834490"/>
+                  </a:lnTo>
+                  <a:lnTo>
+                    <a:pt x="1621349" y="1891527"/>
+                  </a:lnTo>
+                  <a:lnTo>
+                    <a:pt x="1697817" y="1946264"/>
+                  </a:lnTo>
+                  <a:lnTo>
+                    <a:pt x="1774286" y="1998795"/>
+                  </a:lnTo>
+                  <a:lnTo>
+                    <a:pt x="1850754" y="2049208"/>
+                  </a:lnTo>
+                  <a:lnTo>
+                    <a:pt x="1927222" y="2097589"/>
+                  </a:lnTo>
+                  <a:lnTo>
+                    <a:pt x="2003691" y="2144020"/>
+                  </a:lnTo>
+                  <a:lnTo>
+                    <a:pt x="2080159" y="2188579"/>
+                  </a:lnTo>
+                  <a:lnTo>
+                    <a:pt x="2156628" y="2231342"/>
+                  </a:lnTo>
+                  <a:lnTo>
+                    <a:pt x="2233096" y="2272381"/>
+                  </a:lnTo>
+                  <a:lnTo>
+                    <a:pt x="2309565" y="2311766"/>
+                  </a:lnTo>
+                  <a:lnTo>
+                    <a:pt x="2386033" y="2349563"/>
+                  </a:lnTo>
+                  <a:lnTo>
+                    <a:pt x="2462501" y="2385836"/>
+                  </a:lnTo>
+                  <a:lnTo>
+                    <a:pt x="2538970" y="2420648"/>
+                  </a:lnTo>
+                  <a:lnTo>
+                    <a:pt x="2615438" y="2454056"/>
+                  </a:lnTo>
+                  <a:lnTo>
+                    <a:pt x="2691907" y="2471150"/>
+                  </a:lnTo>
+                  <a:lnTo>
+                    <a:pt x="2768375" y="2457001"/>
+                  </a:lnTo>
+                  <a:lnTo>
+                    <a:pt x="2844844" y="2442595"/>
+                  </a:lnTo>
+                  <a:lnTo>
+                    <a:pt x="2921312" y="2427927"/>
+                  </a:lnTo>
+                  <a:lnTo>
+                    <a:pt x="2997780" y="2412992"/>
+                  </a:lnTo>
+                  <a:lnTo>
+                    <a:pt x="3074249" y="2397786"/>
+                  </a:lnTo>
+                  <a:lnTo>
+                    <a:pt x="3150717" y="2382303"/>
+                  </a:lnTo>
+                  <a:lnTo>
+                    <a:pt x="3227186" y="2366538"/>
+                  </a:lnTo>
+                  <a:lnTo>
+                    <a:pt x="3303654" y="2350487"/>
+                  </a:lnTo>
+                  <a:lnTo>
+                    <a:pt x="3380123" y="2334145"/>
+                  </a:lnTo>
+                  <a:lnTo>
+                    <a:pt x="3456591" y="2317505"/>
+                  </a:lnTo>
+                  <a:lnTo>
+                    <a:pt x="3533059" y="2300563"/>
+                  </a:lnTo>
+                  <a:lnTo>
+                    <a:pt x="3609528" y="2283312"/>
+                  </a:lnTo>
+                  <a:lnTo>
+                    <a:pt x="3685996" y="2265748"/>
+                  </a:lnTo>
+                  <a:lnTo>
+                    <a:pt x="3762465" y="2247865"/>
+                  </a:lnTo>
+                  <a:lnTo>
+                    <a:pt x="3838933" y="2229656"/>
+                  </a:lnTo>
+                  <a:lnTo>
+                    <a:pt x="3915402" y="2211117"/>
+                  </a:lnTo>
+                  <a:lnTo>
+                    <a:pt x="3991870" y="2192240"/>
+                  </a:lnTo>
+                  <a:lnTo>
+                    <a:pt x="4068339" y="2173021"/>
+                  </a:lnTo>
+                  <a:lnTo>
+                    <a:pt x="4144807" y="2153451"/>
+                  </a:lnTo>
+                  <a:lnTo>
+                    <a:pt x="4221275" y="2133526"/>
+                  </a:lnTo>
+                  <a:lnTo>
+                    <a:pt x="4297744" y="2113239"/>
+                  </a:lnTo>
+                  <a:lnTo>
+                    <a:pt x="4374212" y="2092583"/>
+                  </a:lnTo>
+                  <a:lnTo>
+                    <a:pt x="4450681" y="2071552"/>
+                  </a:lnTo>
+                  <a:lnTo>
+                    <a:pt x="4527149" y="2050138"/>
+                  </a:lnTo>
+                  <a:lnTo>
+                    <a:pt x="4603618" y="2028335"/>
+                  </a:lnTo>
+                  <a:lnTo>
+                    <a:pt x="4680086" y="2006135"/>
+                  </a:lnTo>
+                  <a:lnTo>
+                    <a:pt x="4756554" y="1983532"/>
+                  </a:lnTo>
+                  <a:lnTo>
+                    <a:pt x="4833023" y="1960518"/>
+                  </a:lnTo>
+                  <a:lnTo>
+                    <a:pt x="4909491" y="1937085"/>
+                  </a:lnTo>
+                  <a:lnTo>
+                    <a:pt x="4985960" y="1913227"/>
+                  </a:lnTo>
+                  <a:lnTo>
+                    <a:pt x="5062428" y="1888934"/>
+                  </a:lnTo>
+                  <a:lnTo>
+                    <a:pt x="5138897" y="1864200"/>
+                  </a:lnTo>
+                  <a:lnTo>
+                    <a:pt x="5215365" y="1839017"/>
+                  </a:lnTo>
+                  <a:lnTo>
+                    <a:pt x="5291833" y="1813375"/>
+                  </a:lnTo>
+                  <a:lnTo>
+                    <a:pt x="5368302" y="1787268"/>
+                  </a:lnTo>
+                  <a:lnTo>
+                    <a:pt x="5444770" y="1760685"/>
+                  </a:lnTo>
+                  <a:lnTo>
+                    <a:pt x="5521239" y="1733620"/>
+                  </a:lnTo>
+                  <a:lnTo>
+                    <a:pt x="5597707" y="1706062"/>
+                  </a:lnTo>
+                  <a:lnTo>
+                    <a:pt x="5674176" y="1678003"/>
+                  </a:lnTo>
+                  <a:lnTo>
+                    <a:pt x="5750644" y="1649435"/>
+                  </a:lnTo>
+                  <a:lnTo>
+                    <a:pt x="5827112" y="1620346"/>
+                  </a:lnTo>
+                  <a:lnTo>
+                    <a:pt x="5903581" y="1590729"/>
+                  </a:lnTo>
+                  <a:lnTo>
+                    <a:pt x="5980049" y="1560574"/>
+                  </a:lnTo>
+                  <a:lnTo>
+                    <a:pt x="6056518" y="1529870"/>
+                  </a:lnTo>
+                  <a:lnTo>
+                    <a:pt x="6132986" y="1498608"/>
+                  </a:lnTo>
+                  <a:lnTo>
+                    <a:pt x="6209455" y="1466778"/>
+                  </a:lnTo>
+                  <a:lnTo>
+                    <a:pt x="6285923" y="1434369"/>
+                  </a:lnTo>
+                  <a:lnTo>
+                    <a:pt x="6362392" y="1401371"/>
+                  </a:lnTo>
+                  <a:lnTo>
+                    <a:pt x="6438860" y="1367773"/>
+                  </a:lnTo>
+                  <a:lnTo>
+                    <a:pt x="6515328" y="1333564"/>
+                  </a:lnTo>
+                  <a:lnTo>
+                    <a:pt x="6591797" y="1298733"/>
                   </a:lnTo>
                 </a:path>
               </a:pathLst>
@@ -3874,300 +3874,300 @@
           </p:nvSpPr>
           <p:spPr>
             <a:xfrm>
-              <a:off x="817517" y="4737765"/>
-              <a:ext cx="7370972" cy="719117"/>
+              <a:off x="915645" y="4694216"/>
+              <a:ext cx="7260303" cy="670745"/>
             </a:xfrm>
             <a:custGeom>
               <a:avLst/>
               <a:pathLst>
-                <a:path w="7370972" h="719117">
+                <a:path w="7260303" h="670745">
                   <a:moveTo>
-                    <a:pt x="7370972" y="719117"/>
+                    <a:pt x="7260303" y="670745"/>
                   </a:moveTo>
                   <a:lnTo>
-                    <a:pt x="7293338" y="714901"/>
-                  </a:lnTo>
-                  <a:lnTo>
-                    <a:pt x="7215704" y="710508"/>
-                  </a:lnTo>
-                  <a:lnTo>
-                    <a:pt x="7138070" y="705931"/>
-                  </a:lnTo>
-                  <a:lnTo>
-                    <a:pt x="7060436" y="701161"/>
-                  </a:lnTo>
-                  <a:lnTo>
-                    <a:pt x="6982802" y="696191"/>
-                  </a:lnTo>
-                  <a:lnTo>
-                    <a:pt x="6905168" y="691012"/>
-                  </a:lnTo>
-                  <a:lnTo>
-                    <a:pt x="6827534" y="685616"/>
-                  </a:lnTo>
-                  <a:lnTo>
-                    <a:pt x="6749900" y="679993"/>
-                  </a:lnTo>
-                  <a:lnTo>
-                    <a:pt x="6672266" y="674134"/>
-                  </a:lnTo>
-                  <a:lnTo>
-                    <a:pt x="6594632" y="668028"/>
-                  </a:lnTo>
-                  <a:lnTo>
-                    <a:pt x="6516998" y="661666"/>
-                  </a:lnTo>
-                  <a:lnTo>
-                    <a:pt x="6439364" y="655038"/>
-                  </a:lnTo>
-                  <a:lnTo>
-                    <a:pt x="6361730" y="648130"/>
-                  </a:lnTo>
-                  <a:lnTo>
-                    <a:pt x="6284096" y="640933"/>
-                  </a:lnTo>
-                  <a:lnTo>
-                    <a:pt x="6206462" y="633433"/>
-                  </a:lnTo>
-                  <a:lnTo>
-                    <a:pt x="6128827" y="625618"/>
-                  </a:lnTo>
-                  <a:lnTo>
-                    <a:pt x="6051193" y="617475"/>
-                  </a:lnTo>
-                  <a:lnTo>
-                    <a:pt x="5973559" y="608989"/>
-                  </a:lnTo>
-                  <a:lnTo>
-                    <a:pt x="5895925" y="600148"/>
-                  </a:lnTo>
-                  <a:lnTo>
-                    <a:pt x="5818291" y="590935"/>
-                  </a:lnTo>
-                  <a:lnTo>
-                    <a:pt x="5740657" y="581335"/>
-                  </a:lnTo>
-                  <a:lnTo>
-                    <a:pt x="5663023" y="571331"/>
-                  </a:lnTo>
-                  <a:lnTo>
-                    <a:pt x="5585389" y="560908"/>
-                  </a:lnTo>
-                  <a:lnTo>
-                    <a:pt x="5507755" y="550047"/>
-                  </a:lnTo>
-                  <a:lnTo>
-                    <a:pt x="5430121" y="538729"/>
-                  </a:lnTo>
-                  <a:lnTo>
-                    <a:pt x="5352487" y="526936"/>
-                  </a:lnTo>
-                  <a:lnTo>
-                    <a:pt x="5274853" y="514648"/>
-                  </a:lnTo>
-                  <a:lnTo>
-                    <a:pt x="5197219" y="501844"/>
-                  </a:lnTo>
-                  <a:lnTo>
-                    <a:pt x="5119585" y="488502"/>
-                  </a:lnTo>
-                  <a:lnTo>
-                    <a:pt x="5041951" y="474599"/>
-                  </a:lnTo>
-                  <a:lnTo>
-                    <a:pt x="4964317" y="460112"/>
-                  </a:lnTo>
-                  <a:lnTo>
-                    <a:pt x="4886683" y="445017"/>
-                  </a:lnTo>
-                  <a:lnTo>
-                    <a:pt x="4809049" y="429288"/>
-                  </a:lnTo>
-                  <a:lnTo>
-                    <a:pt x="4731415" y="412898"/>
-                  </a:lnTo>
-                  <a:lnTo>
-                    <a:pt x="4653781" y="395820"/>
-                  </a:lnTo>
-                  <a:lnTo>
-                    <a:pt x="4576147" y="378025"/>
-                  </a:lnTo>
-                  <a:lnTo>
-                    <a:pt x="4498513" y="359481"/>
-                  </a:lnTo>
-                  <a:lnTo>
-                    <a:pt x="4420879" y="340159"/>
-                  </a:lnTo>
-                  <a:lnTo>
-                    <a:pt x="4343244" y="320026"/>
-                  </a:lnTo>
-                  <a:lnTo>
-                    <a:pt x="4265610" y="299047"/>
-                  </a:lnTo>
-                  <a:lnTo>
-                    <a:pt x="4187976" y="277186"/>
-                  </a:lnTo>
-                  <a:lnTo>
-                    <a:pt x="4110342" y="254407"/>
-                  </a:lnTo>
-                  <a:lnTo>
-                    <a:pt x="4032708" y="230672"/>
-                  </a:lnTo>
-                  <a:lnTo>
-                    <a:pt x="3955074" y="205939"/>
-                  </a:lnTo>
-                  <a:lnTo>
-                    <a:pt x="3877440" y="180168"/>
-                  </a:lnTo>
-                  <a:lnTo>
-                    <a:pt x="3799806" y="153314"/>
-                  </a:lnTo>
-                  <a:lnTo>
-                    <a:pt x="3722172" y="125332"/>
-                  </a:lnTo>
-                  <a:lnTo>
-                    <a:pt x="3644538" y="96175"/>
-                  </a:lnTo>
-                  <a:lnTo>
-                    <a:pt x="3566904" y="65793"/>
-                  </a:lnTo>
-                  <a:lnTo>
-                    <a:pt x="3489270" y="34135"/>
-                  </a:lnTo>
-                  <a:lnTo>
-                    <a:pt x="3411636" y="1147"/>
-                  </a:lnTo>
-                  <a:lnTo>
-                    <a:pt x="3334002" y="0"/>
-                  </a:lnTo>
-                  <a:lnTo>
-                    <a:pt x="3256368" y="14632"/>
-                  </a:lnTo>
-                  <a:lnTo>
-                    <a:pt x="3178734" y="29003"/>
-                  </a:lnTo>
-                  <a:lnTo>
-                    <a:pt x="3101100" y="43118"/>
-                  </a:lnTo>
-                  <a:lnTo>
-                    <a:pt x="3023466" y="56981"/>
-                  </a:lnTo>
-                  <a:lnTo>
-                    <a:pt x="2945832" y="70596"/>
-                  </a:lnTo>
-                  <a:lnTo>
-                    <a:pt x="2868198" y="83968"/>
-                  </a:lnTo>
-                  <a:lnTo>
-                    <a:pt x="2790564" y="97101"/>
-                  </a:lnTo>
-                  <a:lnTo>
-                    <a:pt x="2712930" y="110000"/>
-                  </a:lnTo>
-                  <a:lnTo>
-                    <a:pt x="2635295" y="122668"/>
-                  </a:lnTo>
-                  <a:lnTo>
-                    <a:pt x="2557661" y="135110"/>
-                  </a:lnTo>
-                  <a:lnTo>
-                    <a:pt x="2480027" y="147330"/>
-                  </a:lnTo>
-                  <a:lnTo>
-                    <a:pt x="2402393" y="159332"/>
-                  </a:lnTo>
-                  <a:lnTo>
-                    <a:pt x="2324759" y="171120"/>
-                  </a:lnTo>
-                  <a:lnTo>
-                    <a:pt x="2247125" y="182697"/>
-                  </a:lnTo>
-                  <a:lnTo>
-                    <a:pt x="2169491" y="194067"/>
-                  </a:lnTo>
-                  <a:lnTo>
-                    <a:pt x="2091857" y="205234"/>
-                  </a:lnTo>
-                  <a:lnTo>
-                    <a:pt x="2014223" y="216202"/>
-                  </a:lnTo>
-                  <a:lnTo>
-                    <a:pt x="1936589" y="226974"/>
-                  </a:lnTo>
-                  <a:lnTo>
-                    <a:pt x="1858955" y="237554"/>
-                  </a:lnTo>
-                  <a:lnTo>
-                    <a:pt x="1781321" y="247945"/>
-                  </a:lnTo>
-                  <a:lnTo>
-                    <a:pt x="1703687" y="258150"/>
-                  </a:lnTo>
-                  <a:lnTo>
-                    <a:pt x="1626053" y="268173"/>
-                  </a:lnTo>
-                  <a:lnTo>
-                    <a:pt x="1548419" y="278017"/>
-                  </a:lnTo>
-                  <a:lnTo>
-                    <a:pt x="1470785" y="287686"/>
-                  </a:lnTo>
-                  <a:lnTo>
-                    <a:pt x="1393151" y="297181"/>
-                  </a:lnTo>
-                  <a:lnTo>
-                    <a:pt x="1315517" y="306507"/>
-                  </a:lnTo>
-                  <a:lnTo>
-                    <a:pt x="1237883" y="315667"/>
-                  </a:lnTo>
-                  <a:lnTo>
-                    <a:pt x="1160249" y="324663"/>
-                  </a:lnTo>
-                  <a:lnTo>
-                    <a:pt x="1082615" y="333498"/>
-                  </a:lnTo>
-                  <a:lnTo>
-                    <a:pt x="1004981" y="342176"/>
-                  </a:lnTo>
-                  <a:lnTo>
-                    <a:pt x="927346" y="350699"/>
-                  </a:lnTo>
-                  <a:lnTo>
-                    <a:pt x="849712" y="359069"/>
-                  </a:lnTo>
-                  <a:lnTo>
-                    <a:pt x="772078" y="367290"/>
-                  </a:lnTo>
-                  <a:lnTo>
-                    <a:pt x="694444" y="375365"/>
-                  </a:lnTo>
-                  <a:lnTo>
-                    <a:pt x="616810" y="383295"/>
-                  </a:lnTo>
-                  <a:lnTo>
-                    <a:pt x="539176" y="391083"/>
-                  </a:lnTo>
-                  <a:lnTo>
-                    <a:pt x="461542" y="398733"/>
-                  </a:lnTo>
-                  <a:lnTo>
-                    <a:pt x="383908" y="406246"/>
-                  </a:lnTo>
-                  <a:lnTo>
-                    <a:pt x="306274" y="413624"/>
-                  </a:lnTo>
-                  <a:lnTo>
-                    <a:pt x="228640" y="420871"/>
-                  </a:lnTo>
-                  <a:lnTo>
-                    <a:pt x="151006" y="427989"/>
-                  </a:lnTo>
-                  <a:lnTo>
-                    <a:pt x="73372" y="434979"/>
-                  </a:lnTo>
-                  <a:lnTo>
-                    <a:pt x="0" y="441468"/>
+                    <a:pt x="7183835" y="666812"/>
+                  </a:lnTo>
+                  <a:lnTo>
+                    <a:pt x="7107366" y="662715"/>
+                  </a:lnTo>
+                  <a:lnTo>
+                    <a:pt x="7030898" y="658445"/>
+                  </a:lnTo>
+                  <a:lnTo>
+                    <a:pt x="6954429" y="653996"/>
+                  </a:lnTo>
+                  <a:lnTo>
+                    <a:pt x="6877961" y="649361"/>
+                  </a:lnTo>
+                  <a:lnTo>
+                    <a:pt x="6801492" y="644530"/>
+                  </a:lnTo>
+                  <a:lnTo>
+                    <a:pt x="6725024" y="639497"/>
+                  </a:lnTo>
+                  <a:lnTo>
+                    <a:pt x="6648556" y="634252"/>
+                  </a:lnTo>
+                  <a:lnTo>
+                    <a:pt x="6572087" y="628787"/>
+                  </a:lnTo>
+                  <a:lnTo>
+                    <a:pt x="6495619" y="623092"/>
+                  </a:lnTo>
+                  <a:lnTo>
+                    <a:pt x="6419150" y="617159"/>
+                  </a:lnTo>
+                  <a:lnTo>
+                    <a:pt x="6342682" y="610976"/>
+                  </a:lnTo>
+                  <a:lnTo>
+                    <a:pt x="6266213" y="604533"/>
+                  </a:lnTo>
+                  <a:lnTo>
+                    <a:pt x="6189745" y="597819"/>
+                  </a:lnTo>
+                  <a:lnTo>
+                    <a:pt x="6113277" y="590824"/>
+                  </a:lnTo>
+                  <a:lnTo>
+                    <a:pt x="6036808" y="583535"/>
+                  </a:lnTo>
+                  <a:lnTo>
+                    <a:pt x="5960340" y="575939"/>
+                  </a:lnTo>
+                  <a:lnTo>
+                    <a:pt x="5883871" y="568025"/>
+                  </a:lnTo>
+                  <a:lnTo>
+                    <a:pt x="5807403" y="559778"/>
+                  </a:lnTo>
+                  <a:lnTo>
+                    <a:pt x="5730934" y="551185"/>
+                  </a:lnTo>
+                  <a:lnTo>
+                    <a:pt x="5654466" y="542230"/>
+                  </a:lnTo>
+                  <a:lnTo>
+                    <a:pt x="5577998" y="532900"/>
+                  </a:lnTo>
+                  <a:lnTo>
+                    <a:pt x="5501529" y="523178"/>
+                  </a:lnTo>
+                  <a:lnTo>
+                    <a:pt x="5425061" y="513047"/>
+                  </a:lnTo>
+                  <a:lnTo>
+                    <a:pt x="5348592" y="502491"/>
+                  </a:lnTo>
+                  <a:lnTo>
+                    <a:pt x="5272124" y="491491"/>
+                  </a:lnTo>
+                  <a:lnTo>
+                    <a:pt x="5195655" y="480030"/>
+                  </a:lnTo>
+                  <a:lnTo>
+                    <a:pt x="5119187" y="468087"/>
+                  </a:lnTo>
+                  <a:lnTo>
+                    <a:pt x="5042719" y="455642"/>
+                  </a:lnTo>
+                  <a:lnTo>
+                    <a:pt x="4966250" y="442674"/>
+                  </a:lnTo>
+                  <a:lnTo>
+                    <a:pt x="4889782" y="429162"/>
+                  </a:lnTo>
+                  <a:lnTo>
+                    <a:pt x="4813313" y="415083"/>
+                  </a:lnTo>
+                  <a:lnTo>
+                    <a:pt x="4736845" y="400412"/>
+                  </a:lnTo>
+                  <a:lnTo>
+                    <a:pt x="4660376" y="385124"/>
+                  </a:lnTo>
+                  <a:lnTo>
+                    <a:pt x="4583908" y="369195"/>
+                  </a:lnTo>
+                  <a:lnTo>
+                    <a:pt x="4507439" y="352596"/>
+                  </a:lnTo>
+                  <a:lnTo>
+                    <a:pt x="4430971" y="335300"/>
+                  </a:lnTo>
+                  <a:lnTo>
+                    <a:pt x="4354503" y="317278"/>
+                  </a:lnTo>
+                  <a:lnTo>
+                    <a:pt x="4278034" y="298499"/>
+                  </a:lnTo>
+                  <a:lnTo>
+                    <a:pt x="4201566" y="278931"/>
+                  </a:lnTo>
+                  <a:lnTo>
+                    <a:pt x="4125097" y="258541"/>
+                  </a:lnTo>
+                  <a:lnTo>
+                    <a:pt x="4048629" y="237294"/>
+                  </a:lnTo>
+                  <a:lnTo>
+                    <a:pt x="3972160" y="215155"/>
+                  </a:lnTo>
+                  <a:lnTo>
+                    <a:pt x="3895692" y="192087"/>
+                  </a:lnTo>
+                  <a:lnTo>
+                    <a:pt x="3819224" y="168049"/>
+                  </a:lnTo>
+                  <a:lnTo>
+                    <a:pt x="3742755" y="143001"/>
+                  </a:lnTo>
+                  <a:lnTo>
+                    <a:pt x="3666287" y="116902"/>
+                  </a:lnTo>
+                  <a:lnTo>
+                    <a:pt x="3589818" y="89706"/>
+                  </a:lnTo>
+                  <a:lnTo>
+                    <a:pt x="3513350" y="61367"/>
+                  </a:lnTo>
+                  <a:lnTo>
+                    <a:pt x="3436881" y="31839"/>
+                  </a:lnTo>
+                  <a:lnTo>
+                    <a:pt x="3360413" y="1070"/>
+                  </a:lnTo>
+                  <a:lnTo>
+                    <a:pt x="3283945" y="0"/>
+                  </a:lnTo>
+                  <a:lnTo>
+                    <a:pt x="3207476" y="13648"/>
+                  </a:lnTo>
+                  <a:lnTo>
+                    <a:pt x="3131008" y="27052"/>
+                  </a:lnTo>
+                  <a:lnTo>
+                    <a:pt x="3054539" y="40218"/>
+                  </a:lnTo>
+                  <a:lnTo>
+                    <a:pt x="2978071" y="53148"/>
+                  </a:lnTo>
+                  <a:lnTo>
+                    <a:pt x="2901602" y="65847"/>
+                  </a:lnTo>
+                  <a:lnTo>
+                    <a:pt x="2825134" y="78319"/>
+                  </a:lnTo>
+                  <a:lnTo>
+                    <a:pt x="2748666" y="90569"/>
+                  </a:lnTo>
+                  <a:lnTo>
+                    <a:pt x="2672197" y="102600"/>
+                  </a:lnTo>
+                  <a:lnTo>
+                    <a:pt x="2595729" y="114417"/>
+                  </a:lnTo>
+                  <a:lnTo>
+                    <a:pt x="2519260" y="126022"/>
+                  </a:lnTo>
+                  <a:lnTo>
+                    <a:pt x="2442792" y="137420"/>
+                  </a:lnTo>
+                  <a:lnTo>
+                    <a:pt x="2366323" y="148614"/>
+                  </a:lnTo>
+                  <a:lnTo>
+                    <a:pt x="2289855" y="159609"/>
+                  </a:lnTo>
+                  <a:lnTo>
+                    <a:pt x="2213386" y="170407"/>
+                  </a:lnTo>
+                  <a:lnTo>
+                    <a:pt x="2136918" y="181013"/>
+                  </a:lnTo>
+                  <a:lnTo>
+                    <a:pt x="2060450" y="191429"/>
+                  </a:lnTo>
+                  <a:lnTo>
+                    <a:pt x="1983981" y="201659"/>
+                  </a:lnTo>
+                  <a:lnTo>
+                    <a:pt x="1907513" y="211707"/>
+                  </a:lnTo>
+                  <a:lnTo>
+                    <a:pt x="1831044" y="221575"/>
+                  </a:lnTo>
+                  <a:lnTo>
+                    <a:pt x="1754576" y="231266"/>
+                  </a:lnTo>
+                  <a:lnTo>
+                    <a:pt x="1678107" y="240785"/>
+                  </a:lnTo>
+                  <a:lnTo>
+                    <a:pt x="1601639" y="250134"/>
+                  </a:lnTo>
+                  <a:lnTo>
+                    <a:pt x="1525171" y="259316"/>
+                  </a:lnTo>
+                  <a:lnTo>
+                    <a:pt x="1448702" y="268334"/>
+                  </a:lnTo>
+                  <a:lnTo>
+                    <a:pt x="1372234" y="277191"/>
+                  </a:lnTo>
+                  <a:lnTo>
+                    <a:pt x="1295765" y="285890"/>
+                  </a:lnTo>
+                  <a:lnTo>
+                    <a:pt x="1219297" y="294433"/>
+                  </a:lnTo>
+                  <a:lnTo>
+                    <a:pt x="1142828" y="302824"/>
+                  </a:lnTo>
+                  <a:lnTo>
+                    <a:pt x="1066360" y="311065"/>
+                  </a:lnTo>
+                  <a:lnTo>
+                    <a:pt x="989892" y="319159"/>
+                  </a:lnTo>
+                  <a:lnTo>
+                    <a:pt x="913423" y="327109"/>
+                  </a:lnTo>
+                  <a:lnTo>
+                    <a:pt x="836955" y="334916"/>
+                  </a:lnTo>
+                  <a:lnTo>
+                    <a:pt x="760486" y="342584"/>
+                  </a:lnTo>
+                  <a:lnTo>
+                    <a:pt x="684018" y="350115"/>
+                  </a:lnTo>
+                  <a:lnTo>
+                    <a:pt x="607549" y="357512"/>
+                  </a:lnTo>
+                  <a:lnTo>
+                    <a:pt x="531081" y="364777"/>
+                  </a:lnTo>
+                  <a:lnTo>
+                    <a:pt x="454613" y="371911"/>
+                  </a:lnTo>
+                  <a:lnTo>
+                    <a:pt x="378144" y="378919"/>
+                  </a:lnTo>
+                  <a:lnTo>
+                    <a:pt x="301676" y="385801"/>
+                  </a:lnTo>
+                  <a:lnTo>
+                    <a:pt x="225207" y="392561"/>
+                  </a:lnTo>
+                  <a:lnTo>
+                    <a:pt x="148739" y="399199"/>
+                  </a:lnTo>
+                  <a:lnTo>
+                    <a:pt x="72270" y="405720"/>
+                  </a:lnTo>
+                  <a:lnTo>
+                    <a:pt x="0" y="411772"/>
                   </a:lnTo>
                 </a:path>
               </a:pathLst>
@@ -4187,300 +4187,300 @@
           </p:nvSpPr>
           <p:spPr>
             <a:xfrm>
-              <a:off x="817517" y="4183658"/>
-              <a:ext cx="7370972" cy="915439"/>
+              <a:off x="915645" y="4177382"/>
+              <a:ext cx="7260303" cy="853861"/>
             </a:xfrm>
             <a:custGeom>
               <a:avLst/>
               <a:pathLst>
-                <a:path w="7370972" h="915439">
+                <a:path w="7260303" h="853861">
                   <a:moveTo>
                     <a:pt x="0" y="0"/>
                   </a:moveTo>
                   <a:lnTo>
-                    <a:pt x="73372" y="14935"/>
-                  </a:lnTo>
-                  <a:lnTo>
-                    <a:pt x="151006" y="30557"/>
-                  </a:lnTo>
-                  <a:lnTo>
-                    <a:pt x="228640" y="45999"/>
-                  </a:lnTo>
-                  <a:lnTo>
-                    <a:pt x="306274" y="61263"/>
-                  </a:lnTo>
-                  <a:lnTo>
-                    <a:pt x="383908" y="76352"/>
-                  </a:lnTo>
-                  <a:lnTo>
-                    <a:pt x="461542" y="91267"/>
-                  </a:lnTo>
-                  <a:lnTo>
-                    <a:pt x="539176" y="106011"/>
-                  </a:lnTo>
-                  <a:lnTo>
-                    <a:pt x="616810" y="120585"/>
-                  </a:lnTo>
-                  <a:lnTo>
-                    <a:pt x="694444" y="134992"/>
-                  </a:lnTo>
-                  <a:lnTo>
-                    <a:pt x="772078" y="149233"/>
-                  </a:lnTo>
-                  <a:lnTo>
-                    <a:pt x="849712" y="163311"/>
-                  </a:lnTo>
-                  <a:lnTo>
-                    <a:pt x="927346" y="177226"/>
-                  </a:lnTo>
-                  <a:lnTo>
-                    <a:pt x="1004981" y="190982"/>
-                  </a:lnTo>
-                  <a:lnTo>
-                    <a:pt x="1082615" y="204579"/>
-                  </a:lnTo>
-                  <a:lnTo>
-                    <a:pt x="1160249" y="218020"/>
-                  </a:lnTo>
-                  <a:lnTo>
-                    <a:pt x="1237883" y="231306"/>
-                  </a:lnTo>
-                  <a:lnTo>
-                    <a:pt x="1315517" y="244440"/>
-                  </a:lnTo>
-                  <a:lnTo>
-                    <a:pt x="1393151" y="257423"/>
-                  </a:lnTo>
-                  <a:lnTo>
-                    <a:pt x="1470785" y="270256"/>
-                  </a:lnTo>
-                  <a:lnTo>
-                    <a:pt x="1548419" y="282942"/>
-                  </a:lnTo>
-                  <a:lnTo>
-                    <a:pt x="1626053" y="295482"/>
-                  </a:lnTo>
-                  <a:lnTo>
-                    <a:pt x="1703687" y="307878"/>
-                  </a:lnTo>
-                  <a:lnTo>
-                    <a:pt x="1781321" y="320131"/>
-                  </a:lnTo>
-                  <a:lnTo>
-                    <a:pt x="1858955" y="332244"/>
-                  </a:lnTo>
-                  <a:lnTo>
-                    <a:pt x="1936589" y="344217"/>
-                  </a:lnTo>
-                  <a:lnTo>
-                    <a:pt x="2014223" y="356052"/>
-                  </a:lnTo>
-                  <a:lnTo>
-                    <a:pt x="2091857" y="367752"/>
-                  </a:lnTo>
-                  <a:lnTo>
-                    <a:pt x="2169491" y="379317"/>
-                  </a:lnTo>
-                  <a:lnTo>
-                    <a:pt x="2247125" y="390749"/>
-                  </a:lnTo>
-                  <a:lnTo>
-                    <a:pt x="2324759" y="402049"/>
-                  </a:lnTo>
-                  <a:lnTo>
-                    <a:pt x="2402393" y="413220"/>
-                  </a:lnTo>
-                  <a:lnTo>
-                    <a:pt x="2480027" y="424262"/>
-                  </a:lnTo>
-                  <a:lnTo>
-                    <a:pt x="2557661" y="435177"/>
-                  </a:lnTo>
-                  <a:lnTo>
-                    <a:pt x="2635295" y="445967"/>
-                  </a:lnTo>
-                  <a:lnTo>
-                    <a:pt x="2712930" y="456632"/>
-                  </a:lnTo>
-                  <a:lnTo>
-                    <a:pt x="2790564" y="467175"/>
-                  </a:lnTo>
-                  <a:lnTo>
-                    <a:pt x="2868198" y="477597"/>
-                  </a:lnTo>
-                  <a:lnTo>
-                    <a:pt x="2945832" y="487899"/>
-                  </a:lnTo>
-                  <a:lnTo>
-                    <a:pt x="3023466" y="498082"/>
-                  </a:lnTo>
-                  <a:lnTo>
-                    <a:pt x="3101100" y="508149"/>
-                  </a:lnTo>
-                  <a:lnTo>
-                    <a:pt x="3178734" y="518099"/>
-                  </a:lnTo>
-                  <a:lnTo>
-                    <a:pt x="3256368" y="527936"/>
-                  </a:lnTo>
-                  <a:lnTo>
-                    <a:pt x="3334002" y="537659"/>
-                  </a:lnTo>
-                  <a:lnTo>
-                    <a:pt x="3411636" y="547270"/>
-                  </a:lnTo>
-                  <a:lnTo>
-                    <a:pt x="3489270" y="556771"/>
-                  </a:lnTo>
-                  <a:lnTo>
-                    <a:pt x="3566904" y="566162"/>
-                  </a:lnTo>
-                  <a:lnTo>
-                    <a:pt x="3644538" y="575446"/>
-                  </a:lnTo>
-                  <a:lnTo>
-                    <a:pt x="3722172" y="584623"/>
-                  </a:lnTo>
-                  <a:lnTo>
-                    <a:pt x="3799806" y="593694"/>
-                  </a:lnTo>
-                  <a:lnTo>
-                    <a:pt x="3877440" y="602661"/>
-                  </a:lnTo>
-                  <a:lnTo>
-                    <a:pt x="3955074" y="611525"/>
-                  </a:lnTo>
-                  <a:lnTo>
-                    <a:pt x="4032708" y="620287"/>
-                  </a:lnTo>
-                  <a:lnTo>
-                    <a:pt x="4110342" y="628949"/>
-                  </a:lnTo>
-                  <a:lnTo>
-                    <a:pt x="4187976" y="637510"/>
-                  </a:lnTo>
-                  <a:lnTo>
-                    <a:pt x="4265610" y="645974"/>
-                  </a:lnTo>
-                  <a:lnTo>
-                    <a:pt x="4343244" y="654340"/>
-                  </a:lnTo>
-                  <a:lnTo>
-                    <a:pt x="4420879" y="662609"/>
-                  </a:lnTo>
-                  <a:lnTo>
-                    <a:pt x="4498513" y="670784"/>
-                  </a:lnTo>
-                  <a:lnTo>
-                    <a:pt x="4576147" y="678865"/>
-                  </a:lnTo>
-                  <a:lnTo>
-                    <a:pt x="4653781" y="686853"/>
-                  </a:lnTo>
-                  <a:lnTo>
-                    <a:pt x="4731415" y="694749"/>
-                  </a:lnTo>
-                  <a:lnTo>
-                    <a:pt x="4809049" y="702554"/>
-                  </a:lnTo>
-                  <a:lnTo>
-                    <a:pt x="4886683" y="710269"/>
-                  </a:lnTo>
-                  <a:lnTo>
-                    <a:pt x="4964317" y="717896"/>
-                  </a:lnTo>
-                  <a:lnTo>
-                    <a:pt x="5041951" y="725435"/>
-                  </a:lnTo>
-                  <a:lnTo>
-                    <a:pt x="5119585" y="732887"/>
-                  </a:lnTo>
-                  <a:lnTo>
-                    <a:pt x="5197219" y="740254"/>
-                  </a:lnTo>
-                  <a:lnTo>
-                    <a:pt x="5274853" y="747536"/>
-                  </a:lnTo>
-                  <a:lnTo>
-                    <a:pt x="5352487" y="754734"/>
-                  </a:lnTo>
-                  <a:lnTo>
-                    <a:pt x="5430121" y="761850"/>
-                  </a:lnTo>
-                  <a:lnTo>
-                    <a:pt x="5507755" y="768883"/>
-                  </a:lnTo>
-                  <a:lnTo>
-                    <a:pt x="5585389" y="775836"/>
-                  </a:lnTo>
-                  <a:lnTo>
-                    <a:pt x="5663023" y="782709"/>
-                  </a:lnTo>
-                  <a:lnTo>
-                    <a:pt x="5740657" y="789503"/>
-                  </a:lnTo>
-                  <a:lnTo>
-                    <a:pt x="5818291" y="796218"/>
-                  </a:lnTo>
-                  <a:lnTo>
-                    <a:pt x="5895925" y="802857"/>
-                  </a:lnTo>
-                  <a:lnTo>
-                    <a:pt x="5973559" y="809419"/>
-                  </a:lnTo>
-                  <a:lnTo>
-                    <a:pt x="6051193" y="815906"/>
-                  </a:lnTo>
-                  <a:lnTo>
-                    <a:pt x="6128827" y="822318"/>
-                  </a:lnTo>
-                  <a:lnTo>
-                    <a:pt x="6206462" y="828656"/>
-                  </a:lnTo>
-                  <a:lnTo>
-                    <a:pt x="6284096" y="834922"/>
-                  </a:lnTo>
-                  <a:lnTo>
-                    <a:pt x="6361730" y="841115"/>
-                  </a:lnTo>
-                  <a:lnTo>
-                    <a:pt x="6439364" y="847238"/>
-                  </a:lnTo>
-                  <a:lnTo>
-                    <a:pt x="6516998" y="853289"/>
-                  </a:lnTo>
-                  <a:lnTo>
-                    <a:pt x="6594632" y="859272"/>
-                  </a:lnTo>
-                  <a:lnTo>
-                    <a:pt x="6672266" y="865185"/>
-                  </a:lnTo>
-                  <a:lnTo>
-                    <a:pt x="6749900" y="871031"/>
-                  </a:lnTo>
-                  <a:lnTo>
-                    <a:pt x="6827534" y="876809"/>
-                  </a:lnTo>
-                  <a:lnTo>
-                    <a:pt x="6905168" y="882521"/>
-                  </a:lnTo>
-                  <a:lnTo>
-                    <a:pt x="6982802" y="888167"/>
-                  </a:lnTo>
-                  <a:lnTo>
-                    <a:pt x="7060436" y="893748"/>
-                  </a:lnTo>
-                  <a:lnTo>
-                    <a:pt x="7138070" y="899266"/>
-                  </a:lnTo>
-                  <a:lnTo>
-                    <a:pt x="7215704" y="904719"/>
-                  </a:lnTo>
-                  <a:lnTo>
-                    <a:pt x="7293338" y="910110"/>
-                  </a:lnTo>
-                  <a:lnTo>
-                    <a:pt x="7370972" y="915439"/>
+                    <a:pt x="72270" y="13931"/>
+                  </a:lnTo>
+                  <a:lnTo>
+                    <a:pt x="148739" y="28501"/>
+                  </a:lnTo>
+                  <a:lnTo>
+                    <a:pt x="225207" y="42904"/>
+                  </a:lnTo>
+                  <a:lnTo>
+                    <a:pt x="301676" y="57142"/>
+                  </a:lnTo>
+                  <a:lnTo>
+                    <a:pt x="378144" y="71216"/>
+                  </a:lnTo>
+                  <a:lnTo>
+                    <a:pt x="454613" y="85128"/>
+                  </a:lnTo>
+                  <a:lnTo>
+                    <a:pt x="531081" y="98880"/>
+                  </a:lnTo>
+                  <a:lnTo>
+                    <a:pt x="607549" y="112474"/>
+                  </a:lnTo>
+                  <a:lnTo>
+                    <a:pt x="684018" y="125912"/>
+                  </a:lnTo>
+                  <a:lnTo>
+                    <a:pt x="760486" y="139195"/>
+                  </a:lnTo>
+                  <a:lnTo>
+                    <a:pt x="836955" y="152325"/>
+                  </a:lnTo>
+                  <a:lnTo>
+                    <a:pt x="913423" y="165305"/>
+                  </a:lnTo>
+                  <a:lnTo>
+                    <a:pt x="989892" y="178135"/>
+                  </a:lnTo>
+                  <a:lnTo>
+                    <a:pt x="1066360" y="190818"/>
+                  </a:lnTo>
+                  <a:lnTo>
+                    <a:pt x="1142828" y="203354"/>
+                  </a:lnTo>
+                  <a:lnTo>
+                    <a:pt x="1219297" y="215747"/>
+                  </a:lnTo>
+                  <a:lnTo>
+                    <a:pt x="1295765" y="227997"/>
+                  </a:lnTo>
+                  <a:lnTo>
+                    <a:pt x="1372234" y="240107"/>
+                  </a:lnTo>
+                  <a:lnTo>
+                    <a:pt x="1448702" y="252077"/>
+                  </a:lnTo>
+                  <a:lnTo>
+                    <a:pt x="1525171" y="263910"/>
+                  </a:lnTo>
+                  <a:lnTo>
+                    <a:pt x="1601639" y="275606"/>
+                  </a:lnTo>
+                  <a:lnTo>
+                    <a:pt x="1678107" y="287168"/>
+                  </a:lnTo>
+                  <a:lnTo>
+                    <a:pt x="1754576" y="298597"/>
+                  </a:lnTo>
+                  <a:lnTo>
+                    <a:pt x="1831044" y="309895"/>
+                  </a:lnTo>
+                  <a:lnTo>
+                    <a:pt x="1907513" y="321063"/>
+                  </a:lnTo>
+                  <a:lnTo>
+                    <a:pt x="1983981" y="332102"/>
+                  </a:lnTo>
+                  <a:lnTo>
+                    <a:pt x="2060450" y="343014"/>
+                  </a:lnTo>
+                  <a:lnTo>
+                    <a:pt x="2136918" y="353801"/>
+                  </a:lnTo>
+                  <a:lnTo>
+                    <a:pt x="2213386" y="364464"/>
+                  </a:lnTo>
+                  <a:lnTo>
+                    <a:pt x="2289855" y="375005"/>
+                  </a:lnTo>
+                  <a:lnTo>
+                    <a:pt x="2366323" y="385424"/>
+                  </a:lnTo>
+                  <a:lnTo>
+                    <a:pt x="2442792" y="395723"/>
+                  </a:lnTo>
+                  <a:lnTo>
+                    <a:pt x="2519260" y="405904"/>
+                  </a:lnTo>
+                  <a:lnTo>
+                    <a:pt x="2595729" y="415968"/>
+                  </a:lnTo>
+                  <a:lnTo>
+                    <a:pt x="2672197" y="425916"/>
+                  </a:lnTo>
+                  <a:lnTo>
+                    <a:pt x="2748666" y="435750"/>
+                  </a:lnTo>
+                  <a:lnTo>
+                    <a:pt x="2825134" y="445471"/>
+                  </a:lnTo>
+                  <a:lnTo>
+                    <a:pt x="2901602" y="455080"/>
+                  </a:lnTo>
+                  <a:lnTo>
+                    <a:pt x="2978071" y="464578"/>
+                  </a:lnTo>
+                  <a:lnTo>
+                    <a:pt x="3054539" y="473967"/>
+                  </a:lnTo>
+                  <a:lnTo>
+                    <a:pt x="3131008" y="483249"/>
+                  </a:lnTo>
+                  <a:lnTo>
+                    <a:pt x="3207476" y="492423"/>
+                  </a:lnTo>
+                  <a:lnTo>
+                    <a:pt x="3283945" y="501492"/>
+                  </a:lnTo>
+                  <a:lnTo>
+                    <a:pt x="3360413" y="510457"/>
+                  </a:lnTo>
+                  <a:lnTo>
+                    <a:pt x="3436881" y="519319"/>
+                  </a:lnTo>
+                  <a:lnTo>
+                    <a:pt x="3513350" y="528079"/>
+                  </a:lnTo>
+                  <a:lnTo>
+                    <a:pt x="3589818" y="536738"/>
+                  </a:lnTo>
+                  <a:lnTo>
+                    <a:pt x="3666287" y="545297"/>
+                  </a:lnTo>
+                  <a:lnTo>
+                    <a:pt x="3742755" y="553759"/>
+                  </a:lnTo>
+                  <a:lnTo>
+                    <a:pt x="3819224" y="562123"/>
+                  </a:lnTo>
+                  <a:lnTo>
+                    <a:pt x="3895692" y="570390"/>
+                  </a:lnTo>
+                  <a:lnTo>
+                    <a:pt x="3972160" y="578563"/>
+                  </a:lnTo>
+                  <a:lnTo>
+                    <a:pt x="4048629" y="586642"/>
+                  </a:lnTo>
+                  <a:lnTo>
+                    <a:pt x="4125097" y="594627"/>
+                  </a:lnTo>
+                  <a:lnTo>
+                    <a:pt x="4201566" y="602521"/>
+                  </a:lnTo>
+                  <a:lnTo>
+                    <a:pt x="4278034" y="610325"/>
+                  </a:lnTo>
+                  <a:lnTo>
+                    <a:pt x="4354503" y="618038"/>
+                  </a:lnTo>
+                  <a:lnTo>
+                    <a:pt x="4430971" y="625663"/>
+                  </a:lnTo>
+                  <a:lnTo>
+                    <a:pt x="4507439" y="633200"/>
+                  </a:lnTo>
+                  <a:lnTo>
+                    <a:pt x="4583908" y="640651"/>
+                  </a:lnTo>
+                  <a:lnTo>
+                    <a:pt x="4660376" y="648015"/>
+                  </a:lnTo>
+                  <a:lnTo>
+                    <a:pt x="4736845" y="655295"/>
+                  </a:lnTo>
+                  <a:lnTo>
+                    <a:pt x="4813313" y="662492"/>
+                  </a:lnTo>
+                  <a:lnTo>
+                    <a:pt x="4889782" y="669606"/>
+                  </a:lnTo>
+                  <a:lnTo>
+                    <a:pt x="4966250" y="676638"/>
+                  </a:lnTo>
+                  <a:lnTo>
+                    <a:pt x="5042719" y="683589"/>
+                  </a:lnTo>
+                  <a:lnTo>
+                    <a:pt x="5119187" y="690460"/>
+                  </a:lnTo>
+                  <a:lnTo>
+                    <a:pt x="5195655" y="697252"/>
+                  </a:lnTo>
+                  <a:lnTo>
+                    <a:pt x="5272124" y="703966"/>
+                  </a:lnTo>
+                  <a:lnTo>
+                    <a:pt x="5348592" y="710603"/>
+                  </a:lnTo>
+                  <a:lnTo>
+                    <a:pt x="5425061" y="717163"/>
+                  </a:lnTo>
+                  <a:lnTo>
+                    <a:pt x="5501529" y="723648"/>
+                  </a:lnTo>
+                  <a:lnTo>
+                    <a:pt x="5577998" y="730059"/>
+                  </a:lnTo>
+                  <a:lnTo>
+                    <a:pt x="5654466" y="736396"/>
+                  </a:lnTo>
+                  <a:lnTo>
+                    <a:pt x="5730934" y="742660"/>
+                  </a:lnTo>
+                  <a:lnTo>
+                    <a:pt x="5807403" y="748852"/>
+                  </a:lnTo>
+                  <a:lnTo>
+                    <a:pt x="5883871" y="754972"/>
+                  </a:lnTo>
+                  <a:lnTo>
+                    <a:pt x="5960340" y="761023"/>
+                  </a:lnTo>
+                  <a:lnTo>
+                    <a:pt x="6036808" y="767004"/>
+                  </a:lnTo>
+                  <a:lnTo>
+                    <a:pt x="6113277" y="772916"/>
+                  </a:lnTo>
+                  <a:lnTo>
+                    <a:pt x="6189745" y="778760"/>
+                  </a:lnTo>
+                  <a:lnTo>
+                    <a:pt x="6266213" y="784537"/>
+                  </a:lnTo>
+                  <a:lnTo>
+                    <a:pt x="6342682" y="790247"/>
+                  </a:lnTo>
+                  <a:lnTo>
+                    <a:pt x="6419150" y="795892"/>
+                  </a:lnTo>
+                  <a:lnTo>
+                    <a:pt x="6495619" y="801472"/>
+                  </a:lnTo>
+                  <a:lnTo>
+                    <a:pt x="6572087" y="806987"/>
+                  </a:lnTo>
+                  <a:lnTo>
+                    <a:pt x="6648556" y="812440"/>
+                  </a:lnTo>
+                  <a:lnTo>
+                    <a:pt x="6725024" y="817829"/>
+                  </a:lnTo>
+                  <a:lnTo>
+                    <a:pt x="6801492" y="823157"/>
+                  </a:lnTo>
+                  <a:lnTo>
+                    <a:pt x="6877961" y="828423"/>
+                  </a:lnTo>
+                  <a:lnTo>
+                    <a:pt x="6954429" y="833629"/>
+                  </a:lnTo>
+                  <a:lnTo>
+                    <a:pt x="7030898" y="838775"/>
+                  </a:lnTo>
+                  <a:lnTo>
+                    <a:pt x="7107366" y="843862"/>
+                  </a:lnTo>
+                  <a:lnTo>
+                    <a:pt x="7183835" y="848890"/>
+                  </a:lnTo>
+                  <a:lnTo>
+                    <a:pt x="7260303" y="853861"/>
                   </a:lnTo>
                 </a:path>
               </a:pathLst>
@@ -4509,21 +4509,21 @@
           </p:nvSpPr>
           <p:spPr>
             <a:xfrm>
-              <a:off x="817517" y="4727786"/>
-              <a:ext cx="7799693" cy="0"/>
+              <a:off x="915645" y="4684908"/>
+              <a:ext cx="7682587" cy="0"/>
             </a:xfrm>
             <a:custGeom>
               <a:avLst/>
               <a:pathLst>
-                <a:path w="7799693" h="0">
+                <a:path w="7682587" h="0">
                   <a:moveTo>
                     <a:pt x="0" y="0"/>
                   </a:moveTo>
                   <a:lnTo>
-                    <a:pt x="7799693" y="0"/>
-                  </a:lnTo>
-                  <a:lnTo>
-                    <a:pt x="7799693" y="0"/>
+                    <a:pt x="7682587" y="0"/>
+                  </a:lnTo>
+                  <a:lnTo>
+                    <a:pt x="7682587" y="0"/>
                   </a:lnTo>
                 </a:path>
               </a:pathLst>
@@ -4552,15 +4552,15 @@
           </p:nvSpPr>
           <p:spPr>
             <a:xfrm>
-              <a:off x="4203673" y="2073503"/>
-              <a:ext cx="0" cy="3649639"/>
+              <a:off x="4250960" y="2209169"/>
+              <a:ext cx="0" cy="3404141"/>
             </a:xfrm>
             <a:custGeom>
               <a:avLst/>
               <a:pathLst>
-                <a:path w="0" h="3649639">
+                <a:path w="0" h="3404141">
                   <a:moveTo>
-                    <a:pt x="0" y="3649639"/>
+                    <a:pt x="0" y="3404141"/>
                   </a:moveTo>
                   <a:lnTo>
                     <a:pt x="0" y="0"/>
@@ -4595,8 +4595,8 @@
           </p:nvSpPr>
           <p:spPr>
             <a:xfrm>
-              <a:off x="692708" y="5517199"/>
-              <a:ext cx="62179" cy="80101"/>
+              <a:off x="756929" y="5407599"/>
+              <a:ext cx="79004" cy="101955"/>
             </a:xfrm>
             <a:prstGeom prst="rect">
               <a:avLst/>
@@ -4609,7 +4609,7 @@
             <a:p>
               <a:pPr algn="l" marL="0" marR="0" indent="0">
                 <a:lnSpc>
-                  <a:spcPts val="880"/>
+                  <a:spcPts val="1120"/>
                 </a:lnSpc>
                 <a:spcBef>
                   <a:spcPts val="0"/>
@@ -4619,7 +4619,7 @@
                 </a:spcAft>
               </a:pPr>
               <a:r>
-                <a:rPr sz="880">
+                <a:rPr sz="1120">
                   <a:solidFill>
                     <a:srgbClr val="4D4D4D">
                       <a:alpha val="100000"/>
@@ -4641,8 +4641,8 @@
           </p:nvSpPr>
           <p:spPr>
             <a:xfrm>
-              <a:off x="692708" y="4687735"/>
-              <a:ext cx="62179" cy="80101"/>
+              <a:off x="756929" y="4633931"/>
+              <a:ext cx="79004" cy="101955"/>
             </a:xfrm>
             <a:prstGeom prst="rect">
               <a:avLst/>
@@ -4655,7 +4655,7 @@
             <a:p>
               <a:pPr algn="l" marL="0" marR="0" indent="0">
                 <a:lnSpc>
-                  <a:spcPts val="880"/>
+                  <a:spcPts val="1120"/>
                 </a:lnSpc>
                 <a:spcBef>
                   <a:spcPts val="0"/>
@@ -4665,7 +4665,7 @@
                 </a:spcAft>
               </a:pPr>
               <a:r>
-                <a:rPr sz="880">
+                <a:rPr sz="1120">
                   <a:solidFill>
                     <a:srgbClr val="4D4D4D">
                       <a:alpha val="100000"/>
@@ -4687,8 +4687,8 @@
           </p:nvSpPr>
           <p:spPr>
             <a:xfrm>
-              <a:off x="692708" y="3858272"/>
-              <a:ext cx="62179" cy="80101"/>
+              <a:off x="756929" y="3860262"/>
+              <a:ext cx="79004" cy="101955"/>
             </a:xfrm>
             <a:prstGeom prst="rect">
               <a:avLst/>
@@ -4701,7 +4701,7 @@
             <a:p>
               <a:pPr algn="l" marL="0" marR="0" indent="0">
                 <a:lnSpc>
-                  <a:spcPts val="880"/>
+                  <a:spcPts val="1120"/>
                 </a:lnSpc>
                 <a:spcBef>
                   <a:spcPts val="0"/>
@@ -4711,7 +4711,7 @@
                 </a:spcAft>
               </a:pPr>
               <a:r>
-                <a:rPr sz="880">
+                <a:rPr sz="1120">
                   <a:solidFill>
                     <a:srgbClr val="4D4D4D">
                       <a:alpha val="100000"/>
@@ -4733,8 +4733,8 @@
           </p:nvSpPr>
           <p:spPr>
             <a:xfrm>
-              <a:off x="692708" y="3028808"/>
-              <a:ext cx="62179" cy="80101"/>
+              <a:off x="756929" y="3086593"/>
+              <a:ext cx="79004" cy="101955"/>
             </a:xfrm>
             <a:prstGeom prst="rect">
               <a:avLst/>
@@ -4747,7 +4747,7 @@
             <a:p>
               <a:pPr algn="l" marL="0" marR="0" indent="0">
                 <a:lnSpc>
-                  <a:spcPts val="880"/>
+                  <a:spcPts val="1120"/>
                 </a:lnSpc>
                 <a:spcBef>
                   <a:spcPts val="0"/>
@@ -4757,7 +4757,7 @@
                 </a:spcAft>
               </a:pPr>
               <a:r>
-                <a:rPr sz="880">
+                <a:rPr sz="1120">
                   <a:solidFill>
                     <a:srgbClr val="4D4D4D">
                       <a:alpha val="100000"/>
@@ -4779,8 +4779,8 @@
           </p:nvSpPr>
           <p:spPr>
             <a:xfrm>
-              <a:off x="692708" y="2199345"/>
-              <a:ext cx="62179" cy="80101"/>
+              <a:off x="756929" y="2312925"/>
+              <a:ext cx="79004" cy="101955"/>
             </a:xfrm>
             <a:prstGeom prst="rect">
               <a:avLst/>
@@ -4793,7 +4793,7 @@
             <a:p>
               <a:pPr algn="l" marL="0" marR="0" indent="0">
                 <a:lnSpc>
-                  <a:spcPts val="880"/>
+                  <a:spcPts val="1120"/>
                 </a:lnSpc>
                 <a:spcBef>
                   <a:spcPts val="0"/>
@@ -4803,7 +4803,7 @@
                 </a:spcAft>
               </a:pPr>
               <a:r>
-                <a:rPr sz="880">
+                <a:rPr sz="1120">
                   <a:solidFill>
                     <a:srgbClr val="4D4D4D">
                       <a:alpha val="100000"/>
@@ -4825,8 +4825,8 @@
           </p:nvSpPr>
           <p:spPr>
             <a:xfrm>
-              <a:off x="2423864" y="5785772"/>
-              <a:ext cx="155356" cy="80101"/>
+              <a:off x="2475630" y="5693022"/>
+              <a:ext cx="197510" cy="101955"/>
             </a:xfrm>
             <a:prstGeom prst="rect">
               <a:avLst/>
@@ -4839,7 +4839,7 @@
             <a:p>
               <a:pPr algn="l" marL="0" marR="0" indent="0">
                 <a:lnSpc>
-                  <a:spcPts val="880"/>
+                  <a:spcPts val="1120"/>
                 </a:lnSpc>
                 <a:spcBef>
                   <a:spcPts val="0"/>
@@ -4849,7 +4849,7 @@
                 </a:spcAft>
               </a:pPr>
               <a:r>
-                <a:rPr sz="880">
+                <a:rPr sz="1120">
                   <a:solidFill>
                     <a:srgbClr val="4D4D4D">
                       <a:alpha val="100000"/>
@@ -4871,8 +4871,8 @@
           </p:nvSpPr>
           <p:spPr>
             <a:xfrm>
-              <a:off x="4196521" y="5785772"/>
-              <a:ext cx="155356" cy="80101"/>
+              <a:off x="4221672" y="5693022"/>
+              <a:ext cx="197510" cy="101955"/>
             </a:xfrm>
             <a:prstGeom prst="rect">
               <a:avLst/>
@@ -4885,7 +4885,7 @@
             <a:p>
               <a:pPr algn="l" marL="0" marR="0" indent="0">
                 <a:lnSpc>
-                  <a:spcPts val="880"/>
+                  <a:spcPts val="1120"/>
                 </a:lnSpc>
                 <a:spcBef>
                   <a:spcPts val="0"/>
@@ -4895,7 +4895,7 @@
                 </a:spcAft>
               </a:pPr>
               <a:r>
-                <a:rPr sz="880">
+                <a:rPr sz="1120">
                   <a:solidFill>
                     <a:srgbClr val="4D4D4D">
                       <a:alpha val="100000"/>
@@ -4917,8 +4917,8 @@
           </p:nvSpPr>
           <p:spPr>
             <a:xfrm>
-              <a:off x="5969179" y="5785772"/>
-              <a:ext cx="155356" cy="80101"/>
+              <a:off x="5967715" y="5693022"/>
+              <a:ext cx="197510" cy="101955"/>
             </a:xfrm>
             <a:prstGeom prst="rect">
               <a:avLst/>
@@ -4931,7 +4931,7 @@
             <a:p>
               <a:pPr algn="l" marL="0" marR="0" indent="0">
                 <a:lnSpc>
-                  <a:spcPts val="880"/>
+                  <a:spcPts val="1120"/>
                 </a:lnSpc>
                 <a:spcBef>
                   <a:spcPts val="0"/>
@@ -4941,7 +4941,7 @@
                 </a:spcAft>
               </a:pPr>
               <a:r>
-                <a:rPr sz="880">
+                <a:rPr sz="1120">
                   <a:solidFill>
                     <a:srgbClr val="4D4D4D">
                       <a:alpha val="100000"/>
@@ -4963,8 +4963,8 @@
           </p:nvSpPr>
           <p:spPr>
             <a:xfrm>
-              <a:off x="7741836" y="5785772"/>
-              <a:ext cx="155356" cy="80101"/>
+              <a:off x="7713757" y="5693022"/>
+              <a:ext cx="197510" cy="101955"/>
             </a:xfrm>
             <a:prstGeom prst="rect">
               <a:avLst/>
@@ -4977,7 +4977,7 @@
             <a:p>
               <a:pPr algn="l" marL="0" marR="0" indent="0">
                 <a:lnSpc>
-                  <a:spcPts val="880"/>
+                  <a:spcPts val="1120"/>
                 </a:lnSpc>
                 <a:spcBef>
                   <a:spcPts val="0"/>
@@ -4987,7 +4987,7 @@
                 </a:spcAft>
               </a:pPr>
               <a:r>
-                <a:rPr sz="880">
+                <a:rPr sz="1120">
                   <a:solidFill>
                     <a:srgbClr val="4D4D4D">
                       <a:alpha val="100000"/>
@@ -5009,8 +5009,8 @@
           </p:nvSpPr>
           <p:spPr>
             <a:xfrm>
-              <a:off x="3879271" y="5925448"/>
-              <a:ext cx="1676186" cy="100218"/>
+              <a:off x="3690153" y="5870717"/>
+              <a:ext cx="2133569" cy="127558"/>
             </a:xfrm>
             <a:prstGeom prst="rect">
               <a:avLst/>
@@ -5023,7 +5023,7 @@
             <a:p>
               <a:pPr algn="l" marL="0" marR="0" indent="0">
                 <a:lnSpc>
-                  <a:spcPts val="1100"/>
+                  <a:spcPts val="1400"/>
                 </a:lnSpc>
                 <a:spcBef>
                   <a:spcPts val="0"/>
@@ -5033,7 +5033,7 @@
                 </a:spcAft>
               </a:pPr>
               <a:r>
-                <a:rPr sz="1100">
+                <a:rPr sz="1400">
                   <a:solidFill>
                     <a:srgbClr val="000000">
                       <a:alpha val="100000"/>
@@ -5055,8 +5055,8 @@
           </p:nvSpPr>
           <p:spPr>
             <a:xfrm rot="-5400000">
-              <a:off x="68446" y="3848213"/>
-              <a:ext cx="1016904" cy="100218"/>
+              <a:off x="-37527" y="3847460"/>
+              <a:ext cx="1294150" cy="127558"/>
             </a:xfrm>
             <a:prstGeom prst="rect">
               <a:avLst/>
@@ -5069,7 +5069,7 @@
             <a:p>
               <a:pPr algn="l" marL="0" marR="0" indent="0">
                 <a:lnSpc>
-                  <a:spcPts val="1100"/>
+                  <a:spcPts val="1400"/>
                 </a:lnSpc>
                 <a:spcBef>
                   <a:spcPts val="0"/>
@@ -5079,7 +5079,7 @@
                 </a:spcAft>
               </a:pPr>
               <a:r>
-                <a:rPr sz="1100">
+                <a:rPr sz="1400">
                   <a:solidFill>
                     <a:srgbClr val="000000">
                       <a:alpha val="100000"/>
@@ -5101,8 +5101,8 @@
           </p:nvSpPr>
           <p:spPr>
             <a:xfrm>
-              <a:off x="817517" y="1896563"/>
-              <a:ext cx="4166463" cy="82021"/>
+              <a:off x="915645" y="1977589"/>
+              <a:ext cx="5556900" cy="109362"/>
             </a:xfrm>
             <a:prstGeom prst="rect">
               <a:avLst/>
@@ -5115,7 +5115,7 @@
             <a:p>
               <a:pPr algn="l" marL="0" marR="0" indent="0">
                 <a:lnSpc>
-                  <a:spcPts val="900"/>
+                  <a:spcPts val="1200"/>
                 </a:lnSpc>
                 <a:spcBef>
                   <a:spcPts val="0"/>
@@ -5125,7 +5125,7 @@
                 </a:spcAft>
               </a:pPr>
               <a:r>
-                <a:rPr sz="900">
+                <a:rPr sz="1200">
                   <a:solidFill>
                     <a:srgbClr val="404040">
                       <a:alpha val="100000"/>
@@ -5147,8 +5147,8 @@
           </p:nvSpPr>
           <p:spPr>
             <a:xfrm>
-              <a:off x="817517" y="1669789"/>
-              <a:ext cx="3081893" cy="120152"/>
+              <a:off x="915645" y="1688767"/>
+              <a:ext cx="3923598" cy="153070"/>
             </a:xfrm>
             <a:prstGeom prst="rect">
               <a:avLst/>
@@ -5161,7 +5161,7 @@
             <a:p>
               <a:pPr algn="l" marL="0" marR="0" indent="0">
                 <a:lnSpc>
-                  <a:spcPts val="1320"/>
+                  <a:spcPts val="1680"/>
                 </a:lnSpc>
                 <a:spcBef>
                   <a:spcPts val="0"/>
@@ -5171,7 +5171,7 @@
                 </a:spcAft>
               </a:pPr>
               <a:r>
-                <a:rPr sz="1320">
+                <a:rPr sz="1680">
                   <a:solidFill>
                     <a:srgbClr val="000000">
                       <a:alpha val="100000"/>
